--- a/Документы/ШутоваТЕ_ВКР_Презентация.pptx
+++ b/Документы/ШутоваТЕ_ВКР_Презентация.pptx
@@ -7207,10 +7207,15 @@
           </p:nvPr>
         </p:nvPicPr>
         <p:blipFill>
-          <a:blip r:embed="rId2"/>
-          <a:stretch>
-            <a:fillRect/>
-          </a:stretch>
+          <a:blip r:embed="rId2">
+            <a:extLst>
+              <a:ext uri="{28A0092B-C50C-407E-A947-70E740481C1C}">
+                <a14:useLocalDpi xmlns:a14="http://schemas.microsoft.com/office/drawing/2010/main" val="0"/>
+              </a:ext>
+            </a:extLst>
+          </a:blip>
+          <a:srcRect/>
+          <a:stretch/>
         </p:blipFill>
         <p:spPr>
           <a:xfrm>

--- a/Документы/ШутоваТЕ_ВКР_Презентация.pptx
+++ b/Документы/ШутоваТЕ_ВКР_Презентация.pptx
@@ -131,6 +131,7152 @@
 </p:presentation>
 </file>
 
+<file path=ppt/diagrams/colors1.xml><?xml version="1.0" encoding="utf-8"?>
+<dgm:colorsDef xmlns:dgm="http://schemas.openxmlformats.org/drawingml/2006/diagram" xmlns:a="http://schemas.openxmlformats.org/drawingml/2006/main" uniqueId="urn:microsoft.com/office/officeart/2005/8/colors/accent1_2">
+  <dgm:title val=""/>
+  <dgm:desc val=""/>
+  <dgm:catLst>
+    <dgm:cat type="accent1" pri="11200"/>
+  </dgm:catLst>
+  <dgm:styleLbl name="node0">
+    <dgm:fillClrLst meth="repeat">
+      <a:schemeClr val="accent1"/>
+    </dgm:fillClrLst>
+    <dgm:linClrLst meth="repeat">
+      <a:schemeClr val="lt1"/>
+    </dgm:linClrLst>
+    <dgm:effectClrLst/>
+    <dgm:txLinClrLst/>
+    <dgm:txFillClrLst/>
+    <dgm:txEffectClrLst/>
+  </dgm:styleLbl>
+  <dgm:styleLbl name="alignNode1">
+    <dgm:fillClrLst meth="repeat">
+      <a:schemeClr val="accent1"/>
+    </dgm:fillClrLst>
+    <dgm:linClrLst meth="repeat">
+      <a:schemeClr val="accent1"/>
+    </dgm:linClrLst>
+    <dgm:effectClrLst/>
+    <dgm:txLinClrLst/>
+    <dgm:txFillClrLst/>
+    <dgm:txEffectClrLst/>
+  </dgm:styleLbl>
+  <dgm:styleLbl name="node1">
+    <dgm:fillClrLst meth="repeat">
+      <a:schemeClr val="accent1"/>
+    </dgm:fillClrLst>
+    <dgm:linClrLst meth="repeat">
+      <a:schemeClr val="lt1"/>
+    </dgm:linClrLst>
+    <dgm:effectClrLst/>
+    <dgm:txLinClrLst/>
+    <dgm:txFillClrLst/>
+    <dgm:txEffectClrLst/>
+  </dgm:styleLbl>
+  <dgm:styleLbl name="lnNode1">
+    <dgm:fillClrLst meth="repeat">
+      <a:schemeClr val="accent1"/>
+    </dgm:fillClrLst>
+    <dgm:linClrLst meth="repeat">
+      <a:schemeClr val="lt1"/>
+    </dgm:linClrLst>
+    <dgm:effectClrLst/>
+    <dgm:txLinClrLst/>
+    <dgm:txFillClrLst/>
+    <dgm:txEffectClrLst/>
+  </dgm:styleLbl>
+  <dgm:styleLbl name="vennNode1">
+    <dgm:fillClrLst meth="repeat">
+      <a:schemeClr val="accent1">
+        <a:alpha val="50000"/>
+      </a:schemeClr>
+    </dgm:fillClrLst>
+    <dgm:linClrLst meth="repeat">
+      <a:schemeClr val="lt1"/>
+    </dgm:linClrLst>
+    <dgm:effectClrLst/>
+    <dgm:txLinClrLst/>
+    <dgm:txFillClrLst/>
+    <dgm:txEffectClrLst/>
+  </dgm:styleLbl>
+  <dgm:styleLbl name="node2">
+    <dgm:fillClrLst meth="repeat">
+      <a:schemeClr val="accent1"/>
+    </dgm:fillClrLst>
+    <dgm:linClrLst meth="repeat">
+      <a:schemeClr val="lt1"/>
+    </dgm:linClrLst>
+    <dgm:effectClrLst/>
+    <dgm:txLinClrLst/>
+    <dgm:txFillClrLst/>
+    <dgm:txEffectClrLst/>
+  </dgm:styleLbl>
+  <dgm:styleLbl name="node3">
+    <dgm:fillClrLst meth="repeat">
+      <a:schemeClr val="accent1"/>
+    </dgm:fillClrLst>
+    <dgm:linClrLst meth="repeat">
+      <a:schemeClr val="lt1"/>
+    </dgm:linClrLst>
+    <dgm:effectClrLst/>
+    <dgm:txLinClrLst/>
+    <dgm:txFillClrLst/>
+    <dgm:txEffectClrLst/>
+  </dgm:styleLbl>
+  <dgm:styleLbl name="node4">
+    <dgm:fillClrLst meth="repeat">
+      <a:schemeClr val="accent1"/>
+    </dgm:fillClrLst>
+    <dgm:linClrLst meth="repeat">
+      <a:schemeClr val="lt1"/>
+    </dgm:linClrLst>
+    <dgm:effectClrLst/>
+    <dgm:txLinClrLst/>
+    <dgm:txFillClrLst/>
+    <dgm:txEffectClrLst/>
+  </dgm:styleLbl>
+  <dgm:styleLbl name="fgImgPlace1">
+    <dgm:fillClrLst meth="repeat">
+      <a:schemeClr val="accent1">
+        <a:tint val="50000"/>
+      </a:schemeClr>
+    </dgm:fillClrLst>
+    <dgm:linClrLst meth="repeat">
+      <a:schemeClr val="lt1"/>
+    </dgm:linClrLst>
+    <dgm:effectClrLst/>
+    <dgm:txLinClrLst/>
+    <dgm:txFillClrLst meth="repeat">
+      <a:schemeClr val="lt1"/>
+    </dgm:txFillClrLst>
+    <dgm:txEffectClrLst/>
+  </dgm:styleLbl>
+  <dgm:styleLbl name="alignImgPlace1">
+    <dgm:fillClrLst meth="repeat">
+      <a:schemeClr val="accent1">
+        <a:tint val="50000"/>
+      </a:schemeClr>
+    </dgm:fillClrLst>
+    <dgm:linClrLst meth="repeat">
+      <a:schemeClr val="lt1"/>
+    </dgm:linClrLst>
+    <dgm:effectClrLst/>
+    <dgm:txLinClrLst/>
+    <dgm:txFillClrLst meth="repeat">
+      <a:schemeClr val="lt1"/>
+    </dgm:txFillClrLst>
+    <dgm:txEffectClrLst/>
+  </dgm:styleLbl>
+  <dgm:styleLbl name="bgImgPlace1">
+    <dgm:fillClrLst meth="repeat">
+      <a:schemeClr val="accent1">
+        <a:tint val="50000"/>
+      </a:schemeClr>
+    </dgm:fillClrLst>
+    <dgm:linClrLst meth="repeat">
+      <a:schemeClr val="lt1"/>
+    </dgm:linClrLst>
+    <dgm:effectClrLst/>
+    <dgm:txLinClrLst/>
+    <dgm:txFillClrLst meth="repeat">
+      <a:schemeClr val="lt1"/>
+    </dgm:txFillClrLst>
+    <dgm:txEffectClrLst/>
+  </dgm:styleLbl>
+  <dgm:styleLbl name="sibTrans2D1">
+    <dgm:fillClrLst meth="repeat">
+      <a:schemeClr val="accent1">
+        <a:tint val="60000"/>
+      </a:schemeClr>
+    </dgm:fillClrLst>
+    <dgm:linClrLst meth="repeat">
+      <a:schemeClr val="accent1">
+        <a:tint val="60000"/>
+      </a:schemeClr>
+    </dgm:linClrLst>
+    <dgm:effectClrLst/>
+    <dgm:txLinClrLst/>
+    <dgm:txFillClrLst/>
+    <dgm:txEffectClrLst/>
+  </dgm:styleLbl>
+  <dgm:styleLbl name="fgSibTrans2D1">
+    <dgm:fillClrLst meth="repeat">
+      <a:schemeClr val="accent1">
+        <a:tint val="60000"/>
+      </a:schemeClr>
+    </dgm:fillClrLst>
+    <dgm:linClrLst meth="repeat">
+      <a:schemeClr val="accent1">
+        <a:tint val="60000"/>
+      </a:schemeClr>
+    </dgm:linClrLst>
+    <dgm:effectClrLst/>
+    <dgm:txLinClrLst/>
+    <dgm:txFillClrLst/>
+    <dgm:txEffectClrLst/>
+  </dgm:styleLbl>
+  <dgm:styleLbl name="bgSibTrans2D1">
+    <dgm:fillClrLst meth="repeat">
+      <a:schemeClr val="accent1">
+        <a:tint val="60000"/>
+      </a:schemeClr>
+    </dgm:fillClrLst>
+    <dgm:linClrLst meth="repeat">
+      <a:schemeClr val="accent1">
+        <a:tint val="60000"/>
+      </a:schemeClr>
+    </dgm:linClrLst>
+    <dgm:effectClrLst/>
+    <dgm:txLinClrLst/>
+    <dgm:txFillClrLst/>
+    <dgm:txEffectClrLst/>
+  </dgm:styleLbl>
+  <dgm:styleLbl name="sibTrans1D1">
+    <dgm:fillClrLst meth="repeat">
+      <a:schemeClr val="accent1"/>
+    </dgm:fillClrLst>
+    <dgm:linClrLst meth="repeat">
+      <a:schemeClr val="accent1"/>
+    </dgm:linClrLst>
+    <dgm:effectClrLst/>
+    <dgm:txLinClrLst/>
+    <dgm:txFillClrLst meth="repeat">
+      <a:schemeClr val="tx1"/>
+    </dgm:txFillClrLst>
+    <dgm:txEffectClrLst/>
+  </dgm:styleLbl>
+  <dgm:styleLbl name="callout">
+    <dgm:fillClrLst meth="repeat">
+      <a:schemeClr val="accent1"/>
+    </dgm:fillClrLst>
+    <dgm:linClrLst meth="repeat">
+      <a:schemeClr val="accent1">
+        <a:tint val="50000"/>
+      </a:schemeClr>
+    </dgm:linClrLst>
+    <dgm:effectClrLst/>
+    <dgm:txLinClrLst/>
+    <dgm:txFillClrLst meth="repeat">
+      <a:schemeClr val="tx1"/>
+    </dgm:txFillClrLst>
+    <dgm:txEffectClrLst/>
+  </dgm:styleLbl>
+  <dgm:styleLbl name="asst0">
+    <dgm:fillClrLst meth="repeat">
+      <a:schemeClr val="accent1"/>
+    </dgm:fillClrLst>
+    <dgm:linClrLst meth="repeat">
+      <a:schemeClr val="lt1"/>
+    </dgm:linClrLst>
+    <dgm:effectClrLst/>
+    <dgm:txLinClrLst/>
+    <dgm:txFillClrLst/>
+    <dgm:txEffectClrLst/>
+  </dgm:styleLbl>
+  <dgm:styleLbl name="asst1">
+    <dgm:fillClrLst meth="repeat">
+      <a:schemeClr val="accent1"/>
+    </dgm:fillClrLst>
+    <dgm:linClrLst meth="repeat">
+      <a:schemeClr val="lt1"/>
+    </dgm:linClrLst>
+    <dgm:effectClrLst/>
+    <dgm:txLinClrLst/>
+    <dgm:txFillClrLst/>
+    <dgm:txEffectClrLst/>
+  </dgm:styleLbl>
+  <dgm:styleLbl name="asst2">
+    <dgm:fillClrLst meth="repeat">
+      <a:schemeClr val="accent1"/>
+    </dgm:fillClrLst>
+    <dgm:linClrLst meth="repeat">
+      <a:schemeClr val="lt1"/>
+    </dgm:linClrLst>
+    <dgm:effectClrLst/>
+    <dgm:txLinClrLst/>
+    <dgm:txFillClrLst/>
+    <dgm:txEffectClrLst/>
+  </dgm:styleLbl>
+  <dgm:styleLbl name="asst3">
+    <dgm:fillClrLst meth="repeat">
+      <a:schemeClr val="accent1"/>
+    </dgm:fillClrLst>
+    <dgm:linClrLst meth="repeat">
+      <a:schemeClr val="lt1"/>
+    </dgm:linClrLst>
+    <dgm:effectClrLst/>
+    <dgm:txLinClrLst/>
+    <dgm:txFillClrLst/>
+    <dgm:txEffectClrLst/>
+  </dgm:styleLbl>
+  <dgm:styleLbl name="asst4">
+    <dgm:fillClrLst meth="repeat">
+      <a:schemeClr val="accent1"/>
+    </dgm:fillClrLst>
+    <dgm:linClrLst meth="repeat">
+      <a:schemeClr val="lt1"/>
+    </dgm:linClrLst>
+    <dgm:effectClrLst/>
+    <dgm:txLinClrLst/>
+    <dgm:txFillClrLst/>
+    <dgm:txEffectClrLst/>
+  </dgm:styleLbl>
+  <dgm:styleLbl name="parChTrans2D1">
+    <dgm:fillClrLst meth="repeat">
+      <a:schemeClr val="accent1">
+        <a:tint val="60000"/>
+      </a:schemeClr>
+    </dgm:fillClrLst>
+    <dgm:linClrLst meth="repeat">
+      <a:schemeClr val="accent1">
+        <a:tint val="60000"/>
+      </a:schemeClr>
+    </dgm:linClrLst>
+    <dgm:effectClrLst/>
+    <dgm:txLinClrLst/>
+    <dgm:txFillClrLst meth="repeat">
+      <a:schemeClr val="lt1"/>
+    </dgm:txFillClrLst>
+    <dgm:txEffectClrLst/>
+  </dgm:styleLbl>
+  <dgm:styleLbl name="parChTrans2D2">
+    <dgm:fillClrLst meth="repeat">
+      <a:schemeClr val="accent1"/>
+    </dgm:fillClrLst>
+    <dgm:linClrLst meth="repeat">
+      <a:schemeClr val="accent1"/>
+    </dgm:linClrLst>
+    <dgm:effectClrLst/>
+    <dgm:txLinClrLst/>
+    <dgm:txFillClrLst meth="repeat">
+      <a:schemeClr val="lt1"/>
+    </dgm:txFillClrLst>
+    <dgm:txEffectClrLst/>
+  </dgm:styleLbl>
+  <dgm:styleLbl name="parChTrans2D3">
+    <dgm:fillClrLst meth="repeat">
+      <a:schemeClr val="accent1"/>
+    </dgm:fillClrLst>
+    <dgm:linClrLst meth="repeat">
+      <a:schemeClr val="accent1"/>
+    </dgm:linClrLst>
+    <dgm:effectClrLst/>
+    <dgm:txLinClrLst/>
+    <dgm:txFillClrLst meth="repeat">
+      <a:schemeClr val="lt1"/>
+    </dgm:txFillClrLst>
+    <dgm:txEffectClrLst/>
+  </dgm:styleLbl>
+  <dgm:styleLbl name="parChTrans2D4">
+    <dgm:fillClrLst meth="repeat">
+      <a:schemeClr val="accent1"/>
+    </dgm:fillClrLst>
+    <dgm:linClrLst meth="repeat">
+      <a:schemeClr val="accent1"/>
+    </dgm:linClrLst>
+    <dgm:effectClrLst/>
+    <dgm:txLinClrLst/>
+    <dgm:txFillClrLst meth="repeat">
+      <a:schemeClr val="lt1"/>
+    </dgm:txFillClrLst>
+    <dgm:txEffectClrLst/>
+  </dgm:styleLbl>
+  <dgm:styleLbl name="parChTrans1D1">
+    <dgm:fillClrLst meth="repeat">
+      <a:schemeClr val="accent1"/>
+    </dgm:fillClrLst>
+    <dgm:linClrLst meth="repeat">
+      <a:schemeClr val="accent1">
+        <a:shade val="60000"/>
+      </a:schemeClr>
+    </dgm:linClrLst>
+    <dgm:effectClrLst/>
+    <dgm:txLinClrLst/>
+    <dgm:txFillClrLst meth="repeat">
+      <a:schemeClr val="tx1"/>
+    </dgm:txFillClrLst>
+    <dgm:txEffectClrLst/>
+  </dgm:styleLbl>
+  <dgm:styleLbl name="parChTrans1D2">
+    <dgm:fillClrLst meth="repeat">
+      <a:schemeClr val="accent1"/>
+    </dgm:fillClrLst>
+    <dgm:linClrLst meth="repeat">
+      <a:schemeClr val="accent1">
+        <a:shade val="60000"/>
+      </a:schemeClr>
+    </dgm:linClrLst>
+    <dgm:effectClrLst/>
+    <dgm:txLinClrLst/>
+    <dgm:txFillClrLst meth="repeat">
+      <a:schemeClr val="tx1"/>
+    </dgm:txFillClrLst>
+    <dgm:txEffectClrLst/>
+  </dgm:styleLbl>
+  <dgm:styleLbl name="parChTrans1D3">
+    <dgm:fillClrLst meth="repeat">
+      <a:schemeClr val="accent1"/>
+    </dgm:fillClrLst>
+    <dgm:linClrLst meth="repeat">
+      <a:schemeClr val="accent1">
+        <a:shade val="80000"/>
+      </a:schemeClr>
+    </dgm:linClrLst>
+    <dgm:effectClrLst/>
+    <dgm:txLinClrLst/>
+    <dgm:txFillClrLst meth="repeat">
+      <a:schemeClr val="tx1"/>
+    </dgm:txFillClrLst>
+    <dgm:txEffectClrLst/>
+  </dgm:styleLbl>
+  <dgm:styleLbl name="parChTrans1D4">
+    <dgm:fillClrLst meth="repeat">
+      <a:schemeClr val="accent1"/>
+    </dgm:fillClrLst>
+    <dgm:linClrLst meth="repeat">
+      <a:schemeClr val="accent1">
+        <a:shade val="80000"/>
+      </a:schemeClr>
+    </dgm:linClrLst>
+    <dgm:effectClrLst/>
+    <dgm:txLinClrLst/>
+    <dgm:txFillClrLst meth="repeat">
+      <a:schemeClr val="tx1"/>
+    </dgm:txFillClrLst>
+    <dgm:txEffectClrLst/>
+  </dgm:styleLbl>
+  <dgm:styleLbl name="fgAcc1">
+    <dgm:fillClrLst meth="repeat">
+      <a:schemeClr val="lt1">
+        <a:alpha val="90000"/>
+      </a:schemeClr>
+    </dgm:fillClrLst>
+    <dgm:linClrLst meth="repeat">
+      <a:schemeClr val="accent1"/>
+    </dgm:linClrLst>
+    <dgm:effectClrLst/>
+    <dgm:txLinClrLst/>
+    <dgm:txFillClrLst meth="repeat">
+      <a:schemeClr val="dk1"/>
+    </dgm:txFillClrLst>
+    <dgm:txEffectClrLst/>
+  </dgm:styleLbl>
+  <dgm:styleLbl name="conFgAcc1">
+    <dgm:fillClrLst meth="repeat">
+      <a:schemeClr val="lt1">
+        <a:alpha val="90000"/>
+      </a:schemeClr>
+    </dgm:fillClrLst>
+    <dgm:linClrLst meth="repeat">
+      <a:schemeClr val="accent1"/>
+    </dgm:linClrLst>
+    <dgm:effectClrLst/>
+    <dgm:txLinClrLst/>
+    <dgm:txFillClrLst meth="repeat">
+      <a:schemeClr val="dk1"/>
+    </dgm:txFillClrLst>
+    <dgm:txEffectClrLst/>
+  </dgm:styleLbl>
+  <dgm:styleLbl name="alignAcc1">
+    <dgm:fillClrLst meth="repeat">
+      <a:schemeClr val="lt1">
+        <a:alpha val="90000"/>
+      </a:schemeClr>
+    </dgm:fillClrLst>
+    <dgm:linClrLst meth="repeat">
+      <a:schemeClr val="accent1"/>
+    </dgm:linClrLst>
+    <dgm:effectClrLst/>
+    <dgm:txLinClrLst/>
+    <dgm:txFillClrLst meth="repeat">
+      <a:schemeClr val="dk1"/>
+    </dgm:txFillClrLst>
+    <dgm:txEffectClrLst/>
+  </dgm:styleLbl>
+  <dgm:styleLbl name="trAlignAcc1">
+    <dgm:fillClrLst meth="repeat">
+      <a:schemeClr val="lt1">
+        <a:alpha val="40000"/>
+      </a:schemeClr>
+    </dgm:fillClrLst>
+    <dgm:linClrLst meth="repeat">
+      <a:schemeClr val="accent1"/>
+    </dgm:linClrLst>
+    <dgm:effectClrLst/>
+    <dgm:txLinClrLst/>
+    <dgm:txFillClrLst meth="repeat">
+      <a:schemeClr val="dk1"/>
+    </dgm:txFillClrLst>
+    <dgm:txEffectClrLst/>
+  </dgm:styleLbl>
+  <dgm:styleLbl name="bgAcc1">
+    <dgm:fillClrLst meth="repeat">
+      <a:schemeClr val="lt1">
+        <a:alpha val="90000"/>
+      </a:schemeClr>
+    </dgm:fillClrLst>
+    <dgm:linClrLst meth="repeat">
+      <a:schemeClr val="accent1"/>
+    </dgm:linClrLst>
+    <dgm:effectClrLst/>
+    <dgm:txLinClrLst/>
+    <dgm:txFillClrLst meth="repeat">
+      <a:schemeClr val="dk1"/>
+    </dgm:txFillClrLst>
+    <dgm:txEffectClrLst/>
+  </dgm:styleLbl>
+  <dgm:styleLbl name="solidFgAcc1">
+    <dgm:fillClrLst meth="repeat">
+      <a:schemeClr val="lt1"/>
+    </dgm:fillClrLst>
+    <dgm:linClrLst meth="repeat">
+      <a:schemeClr val="accent1"/>
+    </dgm:linClrLst>
+    <dgm:effectClrLst/>
+    <dgm:txLinClrLst/>
+    <dgm:txFillClrLst meth="repeat">
+      <a:schemeClr val="dk1"/>
+    </dgm:txFillClrLst>
+    <dgm:txEffectClrLst/>
+  </dgm:styleLbl>
+  <dgm:styleLbl name="solidAlignAcc1">
+    <dgm:fillClrLst meth="repeat">
+      <a:schemeClr val="lt1"/>
+    </dgm:fillClrLst>
+    <dgm:linClrLst meth="repeat">
+      <a:schemeClr val="accent1"/>
+    </dgm:linClrLst>
+    <dgm:effectClrLst/>
+    <dgm:txLinClrLst/>
+    <dgm:txFillClrLst meth="repeat">
+      <a:schemeClr val="dk1"/>
+    </dgm:txFillClrLst>
+    <dgm:txEffectClrLst/>
+  </dgm:styleLbl>
+  <dgm:styleLbl name="solidBgAcc1">
+    <dgm:fillClrLst meth="repeat">
+      <a:schemeClr val="lt1"/>
+    </dgm:fillClrLst>
+    <dgm:linClrLst meth="repeat">
+      <a:schemeClr val="accent1"/>
+    </dgm:linClrLst>
+    <dgm:effectClrLst/>
+    <dgm:txLinClrLst/>
+    <dgm:txFillClrLst meth="repeat">
+      <a:schemeClr val="dk1"/>
+    </dgm:txFillClrLst>
+    <dgm:txEffectClrLst/>
+  </dgm:styleLbl>
+  <dgm:styleLbl name="fgAccFollowNode1">
+    <dgm:fillClrLst meth="repeat">
+      <a:schemeClr val="accent1">
+        <a:alpha val="90000"/>
+        <a:tint val="40000"/>
+      </a:schemeClr>
+    </dgm:fillClrLst>
+    <dgm:linClrLst meth="repeat">
+      <a:schemeClr val="accent1">
+        <a:alpha val="90000"/>
+        <a:tint val="40000"/>
+      </a:schemeClr>
+    </dgm:linClrLst>
+    <dgm:effectClrLst/>
+    <dgm:txLinClrLst/>
+    <dgm:txFillClrLst meth="repeat">
+      <a:schemeClr val="dk1"/>
+    </dgm:txFillClrLst>
+    <dgm:txEffectClrLst/>
+  </dgm:styleLbl>
+  <dgm:styleLbl name="alignAccFollowNode1">
+    <dgm:fillClrLst meth="repeat">
+      <a:schemeClr val="accent1">
+        <a:alpha val="90000"/>
+        <a:tint val="40000"/>
+      </a:schemeClr>
+    </dgm:fillClrLst>
+    <dgm:linClrLst meth="repeat">
+      <a:schemeClr val="accent1">
+        <a:alpha val="90000"/>
+        <a:tint val="40000"/>
+      </a:schemeClr>
+    </dgm:linClrLst>
+    <dgm:effectClrLst/>
+    <dgm:txLinClrLst/>
+    <dgm:txFillClrLst meth="repeat">
+      <a:schemeClr val="dk1"/>
+    </dgm:txFillClrLst>
+    <dgm:txEffectClrLst/>
+  </dgm:styleLbl>
+  <dgm:styleLbl name="bgAccFollowNode1">
+    <dgm:fillClrLst meth="repeat">
+      <a:schemeClr val="accent1">
+        <a:alpha val="90000"/>
+        <a:tint val="40000"/>
+      </a:schemeClr>
+    </dgm:fillClrLst>
+    <dgm:linClrLst meth="repeat">
+      <a:schemeClr val="accent1">
+        <a:alpha val="90000"/>
+        <a:tint val="40000"/>
+      </a:schemeClr>
+    </dgm:linClrLst>
+    <dgm:effectClrLst/>
+    <dgm:txLinClrLst/>
+    <dgm:txFillClrLst meth="repeat">
+      <a:schemeClr val="dk1"/>
+    </dgm:txFillClrLst>
+    <dgm:txEffectClrLst/>
+  </dgm:styleLbl>
+  <dgm:styleLbl name="fgAcc0">
+    <dgm:fillClrLst meth="repeat">
+      <a:schemeClr val="lt1">
+        <a:alpha val="90000"/>
+      </a:schemeClr>
+    </dgm:fillClrLst>
+    <dgm:linClrLst meth="repeat">
+      <a:schemeClr val="accent1"/>
+    </dgm:linClrLst>
+    <dgm:effectClrLst/>
+    <dgm:txLinClrLst/>
+    <dgm:txFillClrLst meth="repeat">
+      <a:schemeClr val="dk1"/>
+    </dgm:txFillClrLst>
+    <dgm:txEffectClrLst/>
+  </dgm:styleLbl>
+  <dgm:styleLbl name="fgAcc2">
+    <dgm:fillClrLst meth="repeat">
+      <a:schemeClr val="lt1">
+        <a:alpha val="90000"/>
+      </a:schemeClr>
+    </dgm:fillClrLst>
+    <dgm:linClrLst meth="repeat">
+      <a:schemeClr val="accent1"/>
+    </dgm:linClrLst>
+    <dgm:effectClrLst/>
+    <dgm:txLinClrLst/>
+    <dgm:txFillClrLst meth="repeat">
+      <a:schemeClr val="dk1"/>
+    </dgm:txFillClrLst>
+    <dgm:txEffectClrLst/>
+  </dgm:styleLbl>
+  <dgm:styleLbl name="fgAcc3">
+    <dgm:fillClrLst meth="repeat">
+      <a:schemeClr val="lt1">
+        <a:alpha val="90000"/>
+      </a:schemeClr>
+    </dgm:fillClrLst>
+    <dgm:linClrLst meth="repeat">
+      <a:schemeClr val="accent1"/>
+    </dgm:linClrLst>
+    <dgm:effectClrLst/>
+    <dgm:txLinClrLst/>
+    <dgm:txFillClrLst meth="repeat">
+      <a:schemeClr val="dk1"/>
+    </dgm:txFillClrLst>
+    <dgm:txEffectClrLst/>
+  </dgm:styleLbl>
+  <dgm:styleLbl name="fgAcc4">
+    <dgm:fillClrLst meth="repeat">
+      <a:schemeClr val="lt1">
+        <a:alpha val="90000"/>
+      </a:schemeClr>
+    </dgm:fillClrLst>
+    <dgm:linClrLst meth="repeat">
+      <a:schemeClr val="accent1"/>
+    </dgm:linClrLst>
+    <dgm:effectClrLst/>
+    <dgm:txLinClrLst/>
+    <dgm:txFillClrLst meth="repeat">
+      <a:schemeClr val="dk1"/>
+    </dgm:txFillClrLst>
+    <dgm:txEffectClrLst/>
+  </dgm:styleLbl>
+  <dgm:styleLbl name="bgShp">
+    <dgm:fillClrLst meth="repeat">
+      <a:schemeClr val="accent1">
+        <a:tint val="40000"/>
+      </a:schemeClr>
+    </dgm:fillClrLst>
+    <dgm:linClrLst meth="repeat">
+      <a:schemeClr val="accent1"/>
+    </dgm:linClrLst>
+    <dgm:effectClrLst/>
+    <dgm:txLinClrLst/>
+    <dgm:txFillClrLst meth="repeat">
+      <a:schemeClr val="dk1"/>
+    </dgm:txFillClrLst>
+    <dgm:txEffectClrLst/>
+  </dgm:styleLbl>
+  <dgm:styleLbl name="dkBgShp">
+    <dgm:fillClrLst meth="repeat">
+      <a:schemeClr val="accent1">
+        <a:shade val="80000"/>
+      </a:schemeClr>
+    </dgm:fillClrLst>
+    <dgm:linClrLst meth="repeat">
+      <a:schemeClr val="accent1"/>
+    </dgm:linClrLst>
+    <dgm:effectClrLst/>
+    <dgm:txLinClrLst/>
+    <dgm:txFillClrLst meth="repeat">
+      <a:schemeClr val="lt1"/>
+    </dgm:txFillClrLst>
+    <dgm:txEffectClrLst/>
+  </dgm:styleLbl>
+  <dgm:styleLbl name="trBgShp">
+    <dgm:fillClrLst meth="repeat">
+      <a:schemeClr val="accent1">
+        <a:tint val="50000"/>
+        <a:alpha val="40000"/>
+      </a:schemeClr>
+    </dgm:fillClrLst>
+    <dgm:linClrLst meth="repeat">
+      <a:schemeClr val="accent1"/>
+    </dgm:linClrLst>
+    <dgm:effectClrLst/>
+    <dgm:txLinClrLst/>
+    <dgm:txFillClrLst meth="repeat">
+      <a:schemeClr val="lt1"/>
+    </dgm:txFillClrLst>
+    <dgm:txEffectClrLst/>
+  </dgm:styleLbl>
+  <dgm:styleLbl name="fgShp">
+    <dgm:fillClrLst meth="repeat">
+      <a:schemeClr val="accent1">
+        <a:tint val="60000"/>
+      </a:schemeClr>
+    </dgm:fillClrLst>
+    <dgm:linClrLst meth="repeat">
+      <a:schemeClr val="lt1"/>
+    </dgm:linClrLst>
+    <dgm:effectClrLst/>
+    <dgm:txLinClrLst/>
+    <dgm:txFillClrLst meth="repeat">
+      <a:schemeClr val="dk1"/>
+    </dgm:txFillClrLst>
+    <dgm:txEffectClrLst/>
+  </dgm:styleLbl>
+  <dgm:styleLbl name="revTx">
+    <dgm:fillClrLst meth="repeat">
+      <a:schemeClr val="lt1">
+        <a:alpha val="0"/>
+      </a:schemeClr>
+    </dgm:fillClrLst>
+    <dgm:linClrLst meth="repeat">
+      <a:schemeClr val="dk1">
+        <a:alpha val="0"/>
+      </a:schemeClr>
+    </dgm:linClrLst>
+    <dgm:effectClrLst/>
+    <dgm:txLinClrLst/>
+    <dgm:txFillClrLst meth="repeat">
+      <a:schemeClr val="tx1"/>
+    </dgm:txFillClrLst>
+    <dgm:txEffectClrLst/>
+  </dgm:styleLbl>
+</dgm:colorsDef>
+</file>
+
+<file path=ppt/diagrams/colors2.xml><?xml version="1.0" encoding="utf-8"?>
+<dgm:colorsDef xmlns:dgm="http://schemas.openxmlformats.org/drawingml/2006/diagram" xmlns:a="http://schemas.openxmlformats.org/drawingml/2006/main" uniqueId="urn:microsoft.com/office/officeart/2005/8/colors/accent1_2">
+  <dgm:title val=""/>
+  <dgm:desc val=""/>
+  <dgm:catLst>
+    <dgm:cat type="accent1" pri="11200"/>
+  </dgm:catLst>
+  <dgm:styleLbl name="node0">
+    <dgm:fillClrLst meth="repeat">
+      <a:schemeClr val="accent1"/>
+    </dgm:fillClrLst>
+    <dgm:linClrLst meth="repeat">
+      <a:schemeClr val="lt1"/>
+    </dgm:linClrLst>
+    <dgm:effectClrLst/>
+    <dgm:txLinClrLst/>
+    <dgm:txFillClrLst/>
+    <dgm:txEffectClrLst/>
+  </dgm:styleLbl>
+  <dgm:styleLbl name="alignNode1">
+    <dgm:fillClrLst meth="repeat">
+      <a:schemeClr val="accent1"/>
+    </dgm:fillClrLst>
+    <dgm:linClrLst meth="repeat">
+      <a:schemeClr val="accent1"/>
+    </dgm:linClrLst>
+    <dgm:effectClrLst/>
+    <dgm:txLinClrLst/>
+    <dgm:txFillClrLst/>
+    <dgm:txEffectClrLst/>
+  </dgm:styleLbl>
+  <dgm:styleLbl name="node1">
+    <dgm:fillClrLst meth="repeat">
+      <a:schemeClr val="accent1"/>
+    </dgm:fillClrLst>
+    <dgm:linClrLst meth="repeat">
+      <a:schemeClr val="lt1"/>
+    </dgm:linClrLst>
+    <dgm:effectClrLst/>
+    <dgm:txLinClrLst/>
+    <dgm:txFillClrLst/>
+    <dgm:txEffectClrLst/>
+  </dgm:styleLbl>
+  <dgm:styleLbl name="lnNode1">
+    <dgm:fillClrLst meth="repeat">
+      <a:schemeClr val="accent1"/>
+    </dgm:fillClrLst>
+    <dgm:linClrLst meth="repeat">
+      <a:schemeClr val="lt1"/>
+    </dgm:linClrLst>
+    <dgm:effectClrLst/>
+    <dgm:txLinClrLst/>
+    <dgm:txFillClrLst/>
+    <dgm:txEffectClrLst/>
+  </dgm:styleLbl>
+  <dgm:styleLbl name="vennNode1">
+    <dgm:fillClrLst meth="repeat">
+      <a:schemeClr val="accent1">
+        <a:alpha val="50000"/>
+      </a:schemeClr>
+    </dgm:fillClrLst>
+    <dgm:linClrLst meth="repeat">
+      <a:schemeClr val="lt1"/>
+    </dgm:linClrLst>
+    <dgm:effectClrLst/>
+    <dgm:txLinClrLst/>
+    <dgm:txFillClrLst/>
+    <dgm:txEffectClrLst/>
+  </dgm:styleLbl>
+  <dgm:styleLbl name="node2">
+    <dgm:fillClrLst meth="repeat">
+      <a:schemeClr val="accent1"/>
+    </dgm:fillClrLst>
+    <dgm:linClrLst meth="repeat">
+      <a:schemeClr val="lt1"/>
+    </dgm:linClrLst>
+    <dgm:effectClrLst/>
+    <dgm:txLinClrLst/>
+    <dgm:txFillClrLst/>
+    <dgm:txEffectClrLst/>
+  </dgm:styleLbl>
+  <dgm:styleLbl name="node3">
+    <dgm:fillClrLst meth="repeat">
+      <a:schemeClr val="accent1"/>
+    </dgm:fillClrLst>
+    <dgm:linClrLst meth="repeat">
+      <a:schemeClr val="lt1"/>
+    </dgm:linClrLst>
+    <dgm:effectClrLst/>
+    <dgm:txLinClrLst/>
+    <dgm:txFillClrLst/>
+    <dgm:txEffectClrLst/>
+  </dgm:styleLbl>
+  <dgm:styleLbl name="node4">
+    <dgm:fillClrLst meth="repeat">
+      <a:schemeClr val="accent1"/>
+    </dgm:fillClrLst>
+    <dgm:linClrLst meth="repeat">
+      <a:schemeClr val="lt1"/>
+    </dgm:linClrLst>
+    <dgm:effectClrLst/>
+    <dgm:txLinClrLst/>
+    <dgm:txFillClrLst/>
+    <dgm:txEffectClrLst/>
+  </dgm:styleLbl>
+  <dgm:styleLbl name="fgImgPlace1">
+    <dgm:fillClrLst meth="repeat">
+      <a:schemeClr val="accent1">
+        <a:tint val="50000"/>
+      </a:schemeClr>
+    </dgm:fillClrLst>
+    <dgm:linClrLst meth="repeat">
+      <a:schemeClr val="lt1"/>
+    </dgm:linClrLst>
+    <dgm:effectClrLst/>
+    <dgm:txLinClrLst/>
+    <dgm:txFillClrLst meth="repeat">
+      <a:schemeClr val="lt1"/>
+    </dgm:txFillClrLst>
+    <dgm:txEffectClrLst/>
+  </dgm:styleLbl>
+  <dgm:styleLbl name="alignImgPlace1">
+    <dgm:fillClrLst meth="repeat">
+      <a:schemeClr val="accent1">
+        <a:tint val="50000"/>
+      </a:schemeClr>
+    </dgm:fillClrLst>
+    <dgm:linClrLst meth="repeat">
+      <a:schemeClr val="lt1"/>
+    </dgm:linClrLst>
+    <dgm:effectClrLst/>
+    <dgm:txLinClrLst/>
+    <dgm:txFillClrLst meth="repeat">
+      <a:schemeClr val="lt1"/>
+    </dgm:txFillClrLst>
+    <dgm:txEffectClrLst/>
+  </dgm:styleLbl>
+  <dgm:styleLbl name="bgImgPlace1">
+    <dgm:fillClrLst meth="repeat">
+      <a:schemeClr val="accent1">
+        <a:tint val="50000"/>
+      </a:schemeClr>
+    </dgm:fillClrLst>
+    <dgm:linClrLst meth="repeat">
+      <a:schemeClr val="lt1"/>
+    </dgm:linClrLst>
+    <dgm:effectClrLst/>
+    <dgm:txLinClrLst/>
+    <dgm:txFillClrLst meth="repeat">
+      <a:schemeClr val="lt1"/>
+    </dgm:txFillClrLst>
+    <dgm:txEffectClrLst/>
+  </dgm:styleLbl>
+  <dgm:styleLbl name="sibTrans2D1">
+    <dgm:fillClrLst meth="repeat">
+      <a:schemeClr val="accent1">
+        <a:tint val="60000"/>
+      </a:schemeClr>
+    </dgm:fillClrLst>
+    <dgm:linClrLst meth="repeat">
+      <a:schemeClr val="accent1">
+        <a:tint val="60000"/>
+      </a:schemeClr>
+    </dgm:linClrLst>
+    <dgm:effectClrLst/>
+    <dgm:txLinClrLst/>
+    <dgm:txFillClrLst/>
+    <dgm:txEffectClrLst/>
+  </dgm:styleLbl>
+  <dgm:styleLbl name="fgSibTrans2D1">
+    <dgm:fillClrLst meth="repeat">
+      <a:schemeClr val="accent1">
+        <a:tint val="60000"/>
+      </a:schemeClr>
+    </dgm:fillClrLst>
+    <dgm:linClrLst meth="repeat">
+      <a:schemeClr val="accent1">
+        <a:tint val="60000"/>
+      </a:schemeClr>
+    </dgm:linClrLst>
+    <dgm:effectClrLst/>
+    <dgm:txLinClrLst/>
+    <dgm:txFillClrLst/>
+    <dgm:txEffectClrLst/>
+  </dgm:styleLbl>
+  <dgm:styleLbl name="bgSibTrans2D1">
+    <dgm:fillClrLst meth="repeat">
+      <a:schemeClr val="accent1">
+        <a:tint val="60000"/>
+      </a:schemeClr>
+    </dgm:fillClrLst>
+    <dgm:linClrLst meth="repeat">
+      <a:schemeClr val="accent1">
+        <a:tint val="60000"/>
+      </a:schemeClr>
+    </dgm:linClrLst>
+    <dgm:effectClrLst/>
+    <dgm:txLinClrLst/>
+    <dgm:txFillClrLst/>
+    <dgm:txEffectClrLst/>
+  </dgm:styleLbl>
+  <dgm:styleLbl name="sibTrans1D1">
+    <dgm:fillClrLst meth="repeat">
+      <a:schemeClr val="accent1"/>
+    </dgm:fillClrLst>
+    <dgm:linClrLst meth="repeat">
+      <a:schemeClr val="accent1"/>
+    </dgm:linClrLst>
+    <dgm:effectClrLst/>
+    <dgm:txLinClrLst/>
+    <dgm:txFillClrLst meth="repeat">
+      <a:schemeClr val="tx1"/>
+    </dgm:txFillClrLst>
+    <dgm:txEffectClrLst/>
+  </dgm:styleLbl>
+  <dgm:styleLbl name="callout">
+    <dgm:fillClrLst meth="repeat">
+      <a:schemeClr val="accent1"/>
+    </dgm:fillClrLst>
+    <dgm:linClrLst meth="repeat">
+      <a:schemeClr val="accent1">
+        <a:tint val="50000"/>
+      </a:schemeClr>
+    </dgm:linClrLst>
+    <dgm:effectClrLst/>
+    <dgm:txLinClrLst/>
+    <dgm:txFillClrLst meth="repeat">
+      <a:schemeClr val="tx1"/>
+    </dgm:txFillClrLst>
+    <dgm:txEffectClrLst/>
+  </dgm:styleLbl>
+  <dgm:styleLbl name="asst0">
+    <dgm:fillClrLst meth="repeat">
+      <a:schemeClr val="accent1"/>
+    </dgm:fillClrLst>
+    <dgm:linClrLst meth="repeat">
+      <a:schemeClr val="lt1"/>
+    </dgm:linClrLst>
+    <dgm:effectClrLst/>
+    <dgm:txLinClrLst/>
+    <dgm:txFillClrLst/>
+    <dgm:txEffectClrLst/>
+  </dgm:styleLbl>
+  <dgm:styleLbl name="asst1">
+    <dgm:fillClrLst meth="repeat">
+      <a:schemeClr val="accent1"/>
+    </dgm:fillClrLst>
+    <dgm:linClrLst meth="repeat">
+      <a:schemeClr val="lt1"/>
+    </dgm:linClrLst>
+    <dgm:effectClrLst/>
+    <dgm:txLinClrLst/>
+    <dgm:txFillClrLst/>
+    <dgm:txEffectClrLst/>
+  </dgm:styleLbl>
+  <dgm:styleLbl name="asst2">
+    <dgm:fillClrLst meth="repeat">
+      <a:schemeClr val="accent1"/>
+    </dgm:fillClrLst>
+    <dgm:linClrLst meth="repeat">
+      <a:schemeClr val="lt1"/>
+    </dgm:linClrLst>
+    <dgm:effectClrLst/>
+    <dgm:txLinClrLst/>
+    <dgm:txFillClrLst/>
+    <dgm:txEffectClrLst/>
+  </dgm:styleLbl>
+  <dgm:styleLbl name="asst3">
+    <dgm:fillClrLst meth="repeat">
+      <a:schemeClr val="accent1"/>
+    </dgm:fillClrLst>
+    <dgm:linClrLst meth="repeat">
+      <a:schemeClr val="lt1"/>
+    </dgm:linClrLst>
+    <dgm:effectClrLst/>
+    <dgm:txLinClrLst/>
+    <dgm:txFillClrLst/>
+    <dgm:txEffectClrLst/>
+  </dgm:styleLbl>
+  <dgm:styleLbl name="asst4">
+    <dgm:fillClrLst meth="repeat">
+      <a:schemeClr val="accent1"/>
+    </dgm:fillClrLst>
+    <dgm:linClrLst meth="repeat">
+      <a:schemeClr val="lt1"/>
+    </dgm:linClrLst>
+    <dgm:effectClrLst/>
+    <dgm:txLinClrLst/>
+    <dgm:txFillClrLst/>
+    <dgm:txEffectClrLst/>
+  </dgm:styleLbl>
+  <dgm:styleLbl name="parChTrans2D1">
+    <dgm:fillClrLst meth="repeat">
+      <a:schemeClr val="accent1">
+        <a:tint val="60000"/>
+      </a:schemeClr>
+    </dgm:fillClrLst>
+    <dgm:linClrLst meth="repeat">
+      <a:schemeClr val="accent1">
+        <a:tint val="60000"/>
+      </a:schemeClr>
+    </dgm:linClrLst>
+    <dgm:effectClrLst/>
+    <dgm:txLinClrLst/>
+    <dgm:txFillClrLst meth="repeat">
+      <a:schemeClr val="lt1"/>
+    </dgm:txFillClrLst>
+    <dgm:txEffectClrLst/>
+  </dgm:styleLbl>
+  <dgm:styleLbl name="parChTrans2D2">
+    <dgm:fillClrLst meth="repeat">
+      <a:schemeClr val="accent1"/>
+    </dgm:fillClrLst>
+    <dgm:linClrLst meth="repeat">
+      <a:schemeClr val="accent1"/>
+    </dgm:linClrLst>
+    <dgm:effectClrLst/>
+    <dgm:txLinClrLst/>
+    <dgm:txFillClrLst meth="repeat">
+      <a:schemeClr val="lt1"/>
+    </dgm:txFillClrLst>
+    <dgm:txEffectClrLst/>
+  </dgm:styleLbl>
+  <dgm:styleLbl name="parChTrans2D3">
+    <dgm:fillClrLst meth="repeat">
+      <a:schemeClr val="accent1"/>
+    </dgm:fillClrLst>
+    <dgm:linClrLst meth="repeat">
+      <a:schemeClr val="accent1"/>
+    </dgm:linClrLst>
+    <dgm:effectClrLst/>
+    <dgm:txLinClrLst/>
+    <dgm:txFillClrLst meth="repeat">
+      <a:schemeClr val="lt1"/>
+    </dgm:txFillClrLst>
+    <dgm:txEffectClrLst/>
+  </dgm:styleLbl>
+  <dgm:styleLbl name="parChTrans2D4">
+    <dgm:fillClrLst meth="repeat">
+      <a:schemeClr val="accent1"/>
+    </dgm:fillClrLst>
+    <dgm:linClrLst meth="repeat">
+      <a:schemeClr val="accent1"/>
+    </dgm:linClrLst>
+    <dgm:effectClrLst/>
+    <dgm:txLinClrLst/>
+    <dgm:txFillClrLst meth="repeat">
+      <a:schemeClr val="lt1"/>
+    </dgm:txFillClrLst>
+    <dgm:txEffectClrLst/>
+  </dgm:styleLbl>
+  <dgm:styleLbl name="parChTrans1D1">
+    <dgm:fillClrLst meth="repeat">
+      <a:schemeClr val="accent1"/>
+    </dgm:fillClrLst>
+    <dgm:linClrLst meth="repeat">
+      <a:schemeClr val="accent1">
+        <a:shade val="60000"/>
+      </a:schemeClr>
+    </dgm:linClrLst>
+    <dgm:effectClrLst/>
+    <dgm:txLinClrLst/>
+    <dgm:txFillClrLst meth="repeat">
+      <a:schemeClr val="tx1"/>
+    </dgm:txFillClrLst>
+    <dgm:txEffectClrLst/>
+  </dgm:styleLbl>
+  <dgm:styleLbl name="parChTrans1D2">
+    <dgm:fillClrLst meth="repeat">
+      <a:schemeClr val="accent1"/>
+    </dgm:fillClrLst>
+    <dgm:linClrLst meth="repeat">
+      <a:schemeClr val="accent1">
+        <a:shade val="60000"/>
+      </a:schemeClr>
+    </dgm:linClrLst>
+    <dgm:effectClrLst/>
+    <dgm:txLinClrLst/>
+    <dgm:txFillClrLst meth="repeat">
+      <a:schemeClr val="tx1"/>
+    </dgm:txFillClrLst>
+    <dgm:txEffectClrLst/>
+  </dgm:styleLbl>
+  <dgm:styleLbl name="parChTrans1D3">
+    <dgm:fillClrLst meth="repeat">
+      <a:schemeClr val="accent1"/>
+    </dgm:fillClrLst>
+    <dgm:linClrLst meth="repeat">
+      <a:schemeClr val="accent1">
+        <a:shade val="80000"/>
+      </a:schemeClr>
+    </dgm:linClrLst>
+    <dgm:effectClrLst/>
+    <dgm:txLinClrLst/>
+    <dgm:txFillClrLst meth="repeat">
+      <a:schemeClr val="tx1"/>
+    </dgm:txFillClrLst>
+    <dgm:txEffectClrLst/>
+  </dgm:styleLbl>
+  <dgm:styleLbl name="parChTrans1D4">
+    <dgm:fillClrLst meth="repeat">
+      <a:schemeClr val="accent1"/>
+    </dgm:fillClrLst>
+    <dgm:linClrLst meth="repeat">
+      <a:schemeClr val="accent1">
+        <a:shade val="80000"/>
+      </a:schemeClr>
+    </dgm:linClrLst>
+    <dgm:effectClrLst/>
+    <dgm:txLinClrLst/>
+    <dgm:txFillClrLst meth="repeat">
+      <a:schemeClr val="tx1"/>
+    </dgm:txFillClrLst>
+    <dgm:txEffectClrLst/>
+  </dgm:styleLbl>
+  <dgm:styleLbl name="fgAcc1">
+    <dgm:fillClrLst meth="repeat">
+      <a:schemeClr val="lt1">
+        <a:alpha val="90000"/>
+      </a:schemeClr>
+    </dgm:fillClrLst>
+    <dgm:linClrLst meth="repeat">
+      <a:schemeClr val="accent1"/>
+    </dgm:linClrLst>
+    <dgm:effectClrLst/>
+    <dgm:txLinClrLst/>
+    <dgm:txFillClrLst meth="repeat">
+      <a:schemeClr val="dk1"/>
+    </dgm:txFillClrLst>
+    <dgm:txEffectClrLst/>
+  </dgm:styleLbl>
+  <dgm:styleLbl name="conFgAcc1">
+    <dgm:fillClrLst meth="repeat">
+      <a:schemeClr val="lt1">
+        <a:alpha val="90000"/>
+      </a:schemeClr>
+    </dgm:fillClrLst>
+    <dgm:linClrLst meth="repeat">
+      <a:schemeClr val="accent1"/>
+    </dgm:linClrLst>
+    <dgm:effectClrLst/>
+    <dgm:txLinClrLst/>
+    <dgm:txFillClrLst meth="repeat">
+      <a:schemeClr val="dk1"/>
+    </dgm:txFillClrLst>
+    <dgm:txEffectClrLst/>
+  </dgm:styleLbl>
+  <dgm:styleLbl name="alignAcc1">
+    <dgm:fillClrLst meth="repeat">
+      <a:schemeClr val="lt1">
+        <a:alpha val="90000"/>
+      </a:schemeClr>
+    </dgm:fillClrLst>
+    <dgm:linClrLst meth="repeat">
+      <a:schemeClr val="accent1"/>
+    </dgm:linClrLst>
+    <dgm:effectClrLst/>
+    <dgm:txLinClrLst/>
+    <dgm:txFillClrLst meth="repeat">
+      <a:schemeClr val="dk1"/>
+    </dgm:txFillClrLst>
+    <dgm:txEffectClrLst/>
+  </dgm:styleLbl>
+  <dgm:styleLbl name="trAlignAcc1">
+    <dgm:fillClrLst meth="repeat">
+      <a:schemeClr val="lt1">
+        <a:alpha val="40000"/>
+      </a:schemeClr>
+    </dgm:fillClrLst>
+    <dgm:linClrLst meth="repeat">
+      <a:schemeClr val="accent1"/>
+    </dgm:linClrLst>
+    <dgm:effectClrLst/>
+    <dgm:txLinClrLst/>
+    <dgm:txFillClrLst meth="repeat">
+      <a:schemeClr val="dk1"/>
+    </dgm:txFillClrLst>
+    <dgm:txEffectClrLst/>
+  </dgm:styleLbl>
+  <dgm:styleLbl name="bgAcc1">
+    <dgm:fillClrLst meth="repeat">
+      <a:schemeClr val="lt1">
+        <a:alpha val="90000"/>
+      </a:schemeClr>
+    </dgm:fillClrLst>
+    <dgm:linClrLst meth="repeat">
+      <a:schemeClr val="accent1"/>
+    </dgm:linClrLst>
+    <dgm:effectClrLst/>
+    <dgm:txLinClrLst/>
+    <dgm:txFillClrLst meth="repeat">
+      <a:schemeClr val="dk1"/>
+    </dgm:txFillClrLst>
+    <dgm:txEffectClrLst/>
+  </dgm:styleLbl>
+  <dgm:styleLbl name="solidFgAcc1">
+    <dgm:fillClrLst meth="repeat">
+      <a:schemeClr val="lt1"/>
+    </dgm:fillClrLst>
+    <dgm:linClrLst meth="repeat">
+      <a:schemeClr val="accent1"/>
+    </dgm:linClrLst>
+    <dgm:effectClrLst/>
+    <dgm:txLinClrLst/>
+    <dgm:txFillClrLst meth="repeat">
+      <a:schemeClr val="dk1"/>
+    </dgm:txFillClrLst>
+    <dgm:txEffectClrLst/>
+  </dgm:styleLbl>
+  <dgm:styleLbl name="solidAlignAcc1">
+    <dgm:fillClrLst meth="repeat">
+      <a:schemeClr val="lt1"/>
+    </dgm:fillClrLst>
+    <dgm:linClrLst meth="repeat">
+      <a:schemeClr val="accent1"/>
+    </dgm:linClrLst>
+    <dgm:effectClrLst/>
+    <dgm:txLinClrLst/>
+    <dgm:txFillClrLst meth="repeat">
+      <a:schemeClr val="dk1"/>
+    </dgm:txFillClrLst>
+    <dgm:txEffectClrLst/>
+  </dgm:styleLbl>
+  <dgm:styleLbl name="solidBgAcc1">
+    <dgm:fillClrLst meth="repeat">
+      <a:schemeClr val="lt1"/>
+    </dgm:fillClrLst>
+    <dgm:linClrLst meth="repeat">
+      <a:schemeClr val="accent1"/>
+    </dgm:linClrLst>
+    <dgm:effectClrLst/>
+    <dgm:txLinClrLst/>
+    <dgm:txFillClrLst meth="repeat">
+      <a:schemeClr val="dk1"/>
+    </dgm:txFillClrLst>
+    <dgm:txEffectClrLst/>
+  </dgm:styleLbl>
+  <dgm:styleLbl name="fgAccFollowNode1">
+    <dgm:fillClrLst meth="repeat">
+      <a:schemeClr val="accent1">
+        <a:alpha val="90000"/>
+        <a:tint val="40000"/>
+      </a:schemeClr>
+    </dgm:fillClrLst>
+    <dgm:linClrLst meth="repeat">
+      <a:schemeClr val="accent1">
+        <a:alpha val="90000"/>
+        <a:tint val="40000"/>
+      </a:schemeClr>
+    </dgm:linClrLst>
+    <dgm:effectClrLst/>
+    <dgm:txLinClrLst/>
+    <dgm:txFillClrLst meth="repeat">
+      <a:schemeClr val="dk1"/>
+    </dgm:txFillClrLst>
+    <dgm:txEffectClrLst/>
+  </dgm:styleLbl>
+  <dgm:styleLbl name="alignAccFollowNode1">
+    <dgm:fillClrLst meth="repeat">
+      <a:schemeClr val="accent1">
+        <a:alpha val="90000"/>
+        <a:tint val="40000"/>
+      </a:schemeClr>
+    </dgm:fillClrLst>
+    <dgm:linClrLst meth="repeat">
+      <a:schemeClr val="accent1">
+        <a:alpha val="90000"/>
+        <a:tint val="40000"/>
+      </a:schemeClr>
+    </dgm:linClrLst>
+    <dgm:effectClrLst/>
+    <dgm:txLinClrLst/>
+    <dgm:txFillClrLst meth="repeat">
+      <a:schemeClr val="dk1"/>
+    </dgm:txFillClrLst>
+    <dgm:txEffectClrLst/>
+  </dgm:styleLbl>
+  <dgm:styleLbl name="bgAccFollowNode1">
+    <dgm:fillClrLst meth="repeat">
+      <a:schemeClr val="accent1">
+        <a:alpha val="90000"/>
+        <a:tint val="40000"/>
+      </a:schemeClr>
+    </dgm:fillClrLst>
+    <dgm:linClrLst meth="repeat">
+      <a:schemeClr val="accent1">
+        <a:alpha val="90000"/>
+        <a:tint val="40000"/>
+      </a:schemeClr>
+    </dgm:linClrLst>
+    <dgm:effectClrLst/>
+    <dgm:txLinClrLst/>
+    <dgm:txFillClrLst meth="repeat">
+      <a:schemeClr val="dk1"/>
+    </dgm:txFillClrLst>
+    <dgm:txEffectClrLst/>
+  </dgm:styleLbl>
+  <dgm:styleLbl name="fgAcc0">
+    <dgm:fillClrLst meth="repeat">
+      <a:schemeClr val="lt1">
+        <a:alpha val="90000"/>
+      </a:schemeClr>
+    </dgm:fillClrLst>
+    <dgm:linClrLst meth="repeat">
+      <a:schemeClr val="accent1"/>
+    </dgm:linClrLst>
+    <dgm:effectClrLst/>
+    <dgm:txLinClrLst/>
+    <dgm:txFillClrLst meth="repeat">
+      <a:schemeClr val="dk1"/>
+    </dgm:txFillClrLst>
+    <dgm:txEffectClrLst/>
+  </dgm:styleLbl>
+  <dgm:styleLbl name="fgAcc2">
+    <dgm:fillClrLst meth="repeat">
+      <a:schemeClr val="lt1">
+        <a:alpha val="90000"/>
+      </a:schemeClr>
+    </dgm:fillClrLst>
+    <dgm:linClrLst meth="repeat">
+      <a:schemeClr val="accent1"/>
+    </dgm:linClrLst>
+    <dgm:effectClrLst/>
+    <dgm:txLinClrLst/>
+    <dgm:txFillClrLst meth="repeat">
+      <a:schemeClr val="dk1"/>
+    </dgm:txFillClrLst>
+    <dgm:txEffectClrLst/>
+  </dgm:styleLbl>
+  <dgm:styleLbl name="fgAcc3">
+    <dgm:fillClrLst meth="repeat">
+      <a:schemeClr val="lt1">
+        <a:alpha val="90000"/>
+      </a:schemeClr>
+    </dgm:fillClrLst>
+    <dgm:linClrLst meth="repeat">
+      <a:schemeClr val="accent1"/>
+    </dgm:linClrLst>
+    <dgm:effectClrLst/>
+    <dgm:txLinClrLst/>
+    <dgm:txFillClrLst meth="repeat">
+      <a:schemeClr val="dk1"/>
+    </dgm:txFillClrLst>
+    <dgm:txEffectClrLst/>
+  </dgm:styleLbl>
+  <dgm:styleLbl name="fgAcc4">
+    <dgm:fillClrLst meth="repeat">
+      <a:schemeClr val="lt1">
+        <a:alpha val="90000"/>
+      </a:schemeClr>
+    </dgm:fillClrLst>
+    <dgm:linClrLst meth="repeat">
+      <a:schemeClr val="accent1"/>
+    </dgm:linClrLst>
+    <dgm:effectClrLst/>
+    <dgm:txLinClrLst/>
+    <dgm:txFillClrLst meth="repeat">
+      <a:schemeClr val="dk1"/>
+    </dgm:txFillClrLst>
+    <dgm:txEffectClrLst/>
+  </dgm:styleLbl>
+  <dgm:styleLbl name="bgShp">
+    <dgm:fillClrLst meth="repeat">
+      <a:schemeClr val="accent1">
+        <a:tint val="40000"/>
+      </a:schemeClr>
+    </dgm:fillClrLst>
+    <dgm:linClrLst meth="repeat">
+      <a:schemeClr val="accent1"/>
+    </dgm:linClrLst>
+    <dgm:effectClrLst/>
+    <dgm:txLinClrLst/>
+    <dgm:txFillClrLst meth="repeat">
+      <a:schemeClr val="dk1"/>
+    </dgm:txFillClrLst>
+    <dgm:txEffectClrLst/>
+  </dgm:styleLbl>
+  <dgm:styleLbl name="dkBgShp">
+    <dgm:fillClrLst meth="repeat">
+      <a:schemeClr val="accent1">
+        <a:shade val="80000"/>
+      </a:schemeClr>
+    </dgm:fillClrLst>
+    <dgm:linClrLst meth="repeat">
+      <a:schemeClr val="accent1"/>
+    </dgm:linClrLst>
+    <dgm:effectClrLst/>
+    <dgm:txLinClrLst/>
+    <dgm:txFillClrLst meth="repeat">
+      <a:schemeClr val="lt1"/>
+    </dgm:txFillClrLst>
+    <dgm:txEffectClrLst/>
+  </dgm:styleLbl>
+  <dgm:styleLbl name="trBgShp">
+    <dgm:fillClrLst meth="repeat">
+      <a:schemeClr val="accent1">
+        <a:tint val="50000"/>
+        <a:alpha val="40000"/>
+      </a:schemeClr>
+    </dgm:fillClrLst>
+    <dgm:linClrLst meth="repeat">
+      <a:schemeClr val="accent1"/>
+    </dgm:linClrLst>
+    <dgm:effectClrLst/>
+    <dgm:txLinClrLst/>
+    <dgm:txFillClrLst meth="repeat">
+      <a:schemeClr val="lt1"/>
+    </dgm:txFillClrLst>
+    <dgm:txEffectClrLst/>
+  </dgm:styleLbl>
+  <dgm:styleLbl name="fgShp">
+    <dgm:fillClrLst meth="repeat">
+      <a:schemeClr val="accent1">
+        <a:tint val="60000"/>
+      </a:schemeClr>
+    </dgm:fillClrLst>
+    <dgm:linClrLst meth="repeat">
+      <a:schemeClr val="lt1"/>
+    </dgm:linClrLst>
+    <dgm:effectClrLst/>
+    <dgm:txLinClrLst/>
+    <dgm:txFillClrLst meth="repeat">
+      <a:schemeClr val="dk1"/>
+    </dgm:txFillClrLst>
+    <dgm:txEffectClrLst/>
+  </dgm:styleLbl>
+  <dgm:styleLbl name="revTx">
+    <dgm:fillClrLst meth="repeat">
+      <a:schemeClr val="lt1">
+        <a:alpha val="0"/>
+      </a:schemeClr>
+    </dgm:fillClrLst>
+    <dgm:linClrLst meth="repeat">
+      <a:schemeClr val="dk1">
+        <a:alpha val="0"/>
+      </a:schemeClr>
+    </dgm:linClrLst>
+    <dgm:effectClrLst/>
+    <dgm:txLinClrLst/>
+    <dgm:txFillClrLst meth="repeat">
+      <a:schemeClr val="tx1"/>
+    </dgm:txFillClrLst>
+    <dgm:txEffectClrLst/>
+  </dgm:styleLbl>
+</dgm:colorsDef>
+</file>
+
+<file path=ppt/diagrams/colors3.xml><?xml version="1.0" encoding="utf-8"?>
+<dgm:colorsDef xmlns:dgm="http://schemas.openxmlformats.org/drawingml/2006/diagram" xmlns:a="http://schemas.openxmlformats.org/drawingml/2006/main" uniqueId="urn:microsoft.com/office/officeart/2005/8/colors/accent1_2">
+  <dgm:title val=""/>
+  <dgm:desc val=""/>
+  <dgm:catLst>
+    <dgm:cat type="accent1" pri="11200"/>
+  </dgm:catLst>
+  <dgm:styleLbl name="node0">
+    <dgm:fillClrLst meth="repeat">
+      <a:schemeClr val="accent1"/>
+    </dgm:fillClrLst>
+    <dgm:linClrLst meth="repeat">
+      <a:schemeClr val="lt1"/>
+    </dgm:linClrLst>
+    <dgm:effectClrLst/>
+    <dgm:txLinClrLst/>
+    <dgm:txFillClrLst/>
+    <dgm:txEffectClrLst/>
+  </dgm:styleLbl>
+  <dgm:styleLbl name="alignNode1">
+    <dgm:fillClrLst meth="repeat">
+      <a:schemeClr val="accent1"/>
+    </dgm:fillClrLst>
+    <dgm:linClrLst meth="repeat">
+      <a:schemeClr val="accent1"/>
+    </dgm:linClrLst>
+    <dgm:effectClrLst/>
+    <dgm:txLinClrLst/>
+    <dgm:txFillClrLst/>
+    <dgm:txEffectClrLst/>
+  </dgm:styleLbl>
+  <dgm:styleLbl name="node1">
+    <dgm:fillClrLst meth="repeat">
+      <a:schemeClr val="accent1"/>
+    </dgm:fillClrLst>
+    <dgm:linClrLst meth="repeat">
+      <a:schemeClr val="lt1"/>
+    </dgm:linClrLst>
+    <dgm:effectClrLst/>
+    <dgm:txLinClrLst/>
+    <dgm:txFillClrLst/>
+    <dgm:txEffectClrLst/>
+  </dgm:styleLbl>
+  <dgm:styleLbl name="lnNode1">
+    <dgm:fillClrLst meth="repeat">
+      <a:schemeClr val="accent1"/>
+    </dgm:fillClrLst>
+    <dgm:linClrLst meth="repeat">
+      <a:schemeClr val="lt1"/>
+    </dgm:linClrLst>
+    <dgm:effectClrLst/>
+    <dgm:txLinClrLst/>
+    <dgm:txFillClrLst/>
+    <dgm:txEffectClrLst/>
+  </dgm:styleLbl>
+  <dgm:styleLbl name="vennNode1">
+    <dgm:fillClrLst meth="repeat">
+      <a:schemeClr val="accent1">
+        <a:alpha val="50000"/>
+      </a:schemeClr>
+    </dgm:fillClrLst>
+    <dgm:linClrLst meth="repeat">
+      <a:schemeClr val="lt1"/>
+    </dgm:linClrLst>
+    <dgm:effectClrLst/>
+    <dgm:txLinClrLst/>
+    <dgm:txFillClrLst/>
+    <dgm:txEffectClrLst/>
+  </dgm:styleLbl>
+  <dgm:styleLbl name="node2">
+    <dgm:fillClrLst meth="repeat">
+      <a:schemeClr val="accent1"/>
+    </dgm:fillClrLst>
+    <dgm:linClrLst meth="repeat">
+      <a:schemeClr val="lt1"/>
+    </dgm:linClrLst>
+    <dgm:effectClrLst/>
+    <dgm:txLinClrLst/>
+    <dgm:txFillClrLst/>
+    <dgm:txEffectClrLst/>
+  </dgm:styleLbl>
+  <dgm:styleLbl name="node3">
+    <dgm:fillClrLst meth="repeat">
+      <a:schemeClr val="accent1"/>
+    </dgm:fillClrLst>
+    <dgm:linClrLst meth="repeat">
+      <a:schemeClr val="lt1"/>
+    </dgm:linClrLst>
+    <dgm:effectClrLst/>
+    <dgm:txLinClrLst/>
+    <dgm:txFillClrLst/>
+    <dgm:txEffectClrLst/>
+  </dgm:styleLbl>
+  <dgm:styleLbl name="node4">
+    <dgm:fillClrLst meth="repeat">
+      <a:schemeClr val="accent1"/>
+    </dgm:fillClrLst>
+    <dgm:linClrLst meth="repeat">
+      <a:schemeClr val="lt1"/>
+    </dgm:linClrLst>
+    <dgm:effectClrLst/>
+    <dgm:txLinClrLst/>
+    <dgm:txFillClrLst/>
+    <dgm:txEffectClrLst/>
+  </dgm:styleLbl>
+  <dgm:styleLbl name="fgImgPlace1">
+    <dgm:fillClrLst meth="repeat">
+      <a:schemeClr val="accent1">
+        <a:tint val="50000"/>
+      </a:schemeClr>
+    </dgm:fillClrLst>
+    <dgm:linClrLst meth="repeat">
+      <a:schemeClr val="lt1"/>
+    </dgm:linClrLst>
+    <dgm:effectClrLst/>
+    <dgm:txLinClrLst/>
+    <dgm:txFillClrLst meth="repeat">
+      <a:schemeClr val="lt1"/>
+    </dgm:txFillClrLst>
+    <dgm:txEffectClrLst/>
+  </dgm:styleLbl>
+  <dgm:styleLbl name="alignImgPlace1">
+    <dgm:fillClrLst meth="repeat">
+      <a:schemeClr val="accent1">
+        <a:tint val="50000"/>
+      </a:schemeClr>
+    </dgm:fillClrLst>
+    <dgm:linClrLst meth="repeat">
+      <a:schemeClr val="lt1"/>
+    </dgm:linClrLst>
+    <dgm:effectClrLst/>
+    <dgm:txLinClrLst/>
+    <dgm:txFillClrLst meth="repeat">
+      <a:schemeClr val="lt1"/>
+    </dgm:txFillClrLst>
+    <dgm:txEffectClrLst/>
+  </dgm:styleLbl>
+  <dgm:styleLbl name="bgImgPlace1">
+    <dgm:fillClrLst meth="repeat">
+      <a:schemeClr val="accent1">
+        <a:tint val="50000"/>
+      </a:schemeClr>
+    </dgm:fillClrLst>
+    <dgm:linClrLst meth="repeat">
+      <a:schemeClr val="lt1"/>
+    </dgm:linClrLst>
+    <dgm:effectClrLst/>
+    <dgm:txLinClrLst/>
+    <dgm:txFillClrLst meth="repeat">
+      <a:schemeClr val="lt1"/>
+    </dgm:txFillClrLst>
+    <dgm:txEffectClrLst/>
+  </dgm:styleLbl>
+  <dgm:styleLbl name="sibTrans2D1">
+    <dgm:fillClrLst meth="repeat">
+      <a:schemeClr val="accent1">
+        <a:tint val="60000"/>
+      </a:schemeClr>
+    </dgm:fillClrLst>
+    <dgm:linClrLst meth="repeat">
+      <a:schemeClr val="accent1">
+        <a:tint val="60000"/>
+      </a:schemeClr>
+    </dgm:linClrLst>
+    <dgm:effectClrLst/>
+    <dgm:txLinClrLst/>
+    <dgm:txFillClrLst/>
+    <dgm:txEffectClrLst/>
+  </dgm:styleLbl>
+  <dgm:styleLbl name="fgSibTrans2D1">
+    <dgm:fillClrLst meth="repeat">
+      <a:schemeClr val="accent1">
+        <a:tint val="60000"/>
+      </a:schemeClr>
+    </dgm:fillClrLst>
+    <dgm:linClrLst meth="repeat">
+      <a:schemeClr val="accent1">
+        <a:tint val="60000"/>
+      </a:schemeClr>
+    </dgm:linClrLst>
+    <dgm:effectClrLst/>
+    <dgm:txLinClrLst/>
+    <dgm:txFillClrLst/>
+    <dgm:txEffectClrLst/>
+  </dgm:styleLbl>
+  <dgm:styleLbl name="bgSibTrans2D1">
+    <dgm:fillClrLst meth="repeat">
+      <a:schemeClr val="accent1">
+        <a:tint val="60000"/>
+      </a:schemeClr>
+    </dgm:fillClrLst>
+    <dgm:linClrLst meth="repeat">
+      <a:schemeClr val="accent1">
+        <a:tint val="60000"/>
+      </a:schemeClr>
+    </dgm:linClrLst>
+    <dgm:effectClrLst/>
+    <dgm:txLinClrLst/>
+    <dgm:txFillClrLst/>
+    <dgm:txEffectClrLst/>
+  </dgm:styleLbl>
+  <dgm:styleLbl name="sibTrans1D1">
+    <dgm:fillClrLst meth="repeat">
+      <a:schemeClr val="accent1"/>
+    </dgm:fillClrLst>
+    <dgm:linClrLst meth="repeat">
+      <a:schemeClr val="accent1"/>
+    </dgm:linClrLst>
+    <dgm:effectClrLst/>
+    <dgm:txLinClrLst/>
+    <dgm:txFillClrLst meth="repeat">
+      <a:schemeClr val="tx1"/>
+    </dgm:txFillClrLst>
+    <dgm:txEffectClrLst/>
+  </dgm:styleLbl>
+  <dgm:styleLbl name="callout">
+    <dgm:fillClrLst meth="repeat">
+      <a:schemeClr val="accent1"/>
+    </dgm:fillClrLst>
+    <dgm:linClrLst meth="repeat">
+      <a:schemeClr val="accent1">
+        <a:tint val="50000"/>
+      </a:schemeClr>
+    </dgm:linClrLst>
+    <dgm:effectClrLst/>
+    <dgm:txLinClrLst/>
+    <dgm:txFillClrLst meth="repeat">
+      <a:schemeClr val="tx1"/>
+    </dgm:txFillClrLst>
+    <dgm:txEffectClrLst/>
+  </dgm:styleLbl>
+  <dgm:styleLbl name="asst0">
+    <dgm:fillClrLst meth="repeat">
+      <a:schemeClr val="accent1"/>
+    </dgm:fillClrLst>
+    <dgm:linClrLst meth="repeat">
+      <a:schemeClr val="lt1"/>
+    </dgm:linClrLst>
+    <dgm:effectClrLst/>
+    <dgm:txLinClrLst/>
+    <dgm:txFillClrLst/>
+    <dgm:txEffectClrLst/>
+  </dgm:styleLbl>
+  <dgm:styleLbl name="asst1">
+    <dgm:fillClrLst meth="repeat">
+      <a:schemeClr val="accent1"/>
+    </dgm:fillClrLst>
+    <dgm:linClrLst meth="repeat">
+      <a:schemeClr val="lt1"/>
+    </dgm:linClrLst>
+    <dgm:effectClrLst/>
+    <dgm:txLinClrLst/>
+    <dgm:txFillClrLst/>
+    <dgm:txEffectClrLst/>
+  </dgm:styleLbl>
+  <dgm:styleLbl name="asst2">
+    <dgm:fillClrLst meth="repeat">
+      <a:schemeClr val="accent1"/>
+    </dgm:fillClrLst>
+    <dgm:linClrLst meth="repeat">
+      <a:schemeClr val="lt1"/>
+    </dgm:linClrLst>
+    <dgm:effectClrLst/>
+    <dgm:txLinClrLst/>
+    <dgm:txFillClrLst/>
+    <dgm:txEffectClrLst/>
+  </dgm:styleLbl>
+  <dgm:styleLbl name="asst3">
+    <dgm:fillClrLst meth="repeat">
+      <a:schemeClr val="accent1"/>
+    </dgm:fillClrLst>
+    <dgm:linClrLst meth="repeat">
+      <a:schemeClr val="lt1"/>
+    </dgm:linClrLst>
+    <dgm:effectClrLst/>
+    <dgm:txLinClrLst/>
+    <dgm:txFillClrLst/>
+    <dgm:txEffectClrLst/>
+  </dgm:styleLbl>
+  <dgm:styleLbl name="asst4">
+    <dgm:fillClrLst meth="repeat">
+      <a:schemeClr val="accent1"/>
+    </dgm:fillClrLst>
+    <dgm:linClrLst meth="repeat">
+      <a:schemeClr val="lt1"/>
+    </dgm:linClrLst>
+    <dgm:effectClrLst/>
+    <dgm:txLinClrLst/>
+    <dgm:txFillClrLst/>
+    <dgm:txEffectClrLst/>
+  </dgm:styleLbl>
+  <dgm:styleLbl name="parChTrans2D1">
+    <dgm:fillClrLst meth="repeat">
+      <a:schemeClr val="accent1">
+        <a:tint val="60000"/>
+      </a:schemeClr>
+    </dgm:fillClrLst>
+    <dgm:linClrLst meth="repeat">
+      <a:schemeClr val="accent1">
+        <a:tint val="60000"/>
+      </a:schemeClr>
+    </dgm:linClrLst>
+    <dgm:effectClrLst/>
+    <dgm:txLinClrLst/>
+    <dgm:txFillClrLst meth="repeat">
+      <a:schemeClr val="lt1"/>
+    </dgm:txFillClrLst>
+    <dgm:txEffectClrLst/>
+  </dgm:styleLbl>
+  <dgm:styleLbl name="parChTrans2D2">
+    <dgm:fillClrLst meth="repeat">
+      <a:schemeClr val="accent1"/>
+    </dgm:fillClrLst>
+    <dgm:linClrLst meth="repeat">
+      <a:schemeClr val="accent1"/>
+    </dgm:linClrLst>
+    <dgm:effectClrLst/>
+    <dgm:txLinClrLst/>
+    <dgm:txFillClrLst meth="repeat">
+      <a:schemeClr val="lt1"/>
+    </dgm:txFillClrLst>
+    <dgm:txEffectClrLst/>
+  </dgm:styleLbl>
+  <dgm:styleLbl name="parChTrans2D3">
+    <dgm:fillClrLst meth="repeat">
+      <a:schemeClr val="accent1"/>
+    </dgm:fillClrLst>
+    <dgm:linClrLst meth="repeat">
+      <a:schemeClr val="accent1"/>
+    </dgm:linClrLst>
+    <dgm:effectClrLst/>
+    <dgm:txLinClrLst/>
+    <dgm:txFillClrLst meth="repeat">
+      <a:schemeClr val="lt1"/>
+    </dgm:txFillClrLst>
+    <dgm:txEffectClrLst/>
+  </dgm:styleLbl>
+  <dgm:styleLbl name="parChTrans2D4">
+    <dgm:fillClrLst meth="repeat">
+      <a:schemeClr val="accent1"/>
+    </dgm:fillClrLst>
+    <dgm:linClrLst meth="repeat">
+      <a:schemeClr val="accent1"/>
+    </dgm:linClrLst>
+    <dgm:effectClrLst/>
+    <dgm:txLinClrLst/>
+    <dgm:txFillClrLst meth="repeat">
+      <a:schemeClr val="lt1"/>
+    </dgm:txFillClrLst>
+    <dgm:txEffectClrLst/>
+  </dgm:styleLbl>
+  <dgm:styleLbl name="parChTrans1D1">
+    <dgm:fillClrLst meth="repeat">
+      <a:schemeClr val="accent1"/>
+    </dgm:fillClrLst>
+    <dgm:linClrLst meth="repeat">
+      <a:schemeClr val="accent1">
+        <a:shade val="60000"/>
+      </a:schemeClr>
+    </dgm:linClrLst>
+    <dgm:effectClrLst/>
+    <dgm:txLinClrLst/>
+    <dgm:txFillClrLst meth="repeat">
+      <a:schemeClr val="tx1"/>
+    </dgm:txFillClrLst>
+    <dgm:txEffectClrLst/>
+  </dgm:styleLbl>
+  <dgm:styleLbl name="parChTrans1D2">
+    <dgm:fillClrLst meth="repeat">
+      <a:schemeClr val="accent1"/>
+    </dgm:fillClrLst>
+    <dgm:linClrLst meth="repeat">
+      <a:schemeClr val="accent1">
+        <a:shade val="60000"/>
+      </a:schemeClr>
+    </dgm:linClrLst>
+    <dgm:effectClrLst/>
+    <dgm:txLinClrLst/>
+    <dgm:txFillClrLst meth="repeat">
+      <a:schemeClr val="tx1"/>
+    </dgm:txFillClrLst>
+    <dgm:txEffectClrLst/>
+  </dgm:styleLbl>
+  <dgm:styleLbl name="parChTrans1D3">
+    <dgm:fillClrLst meth="repeat">
+      <a:schemeClr val="accent1"/>
+    </dgm:fillClrLst>
+    <dgm:linClrLst meth="repeat">
+      <a:schemeClr val="accent1">
+        <a:shade val="80000"/>
+      </a:schemeClr>
+    </dgm:linClrLst>
+    <dgm:effectClrLst/>
+    <dgm:txLinClrLst/>
+    <dgm:txFillClrLst meth="repeat">
+      <a:schemeClr val="tx1"/>
+    </dgm:txFillClrLst>
+    <dgm:txEffectClrLst/>
+  </dgm:styleLbl>
+  <dgm:styleLbl name="parChTrans1D4">
+    <dgm:fillClrLst meth="repeat">
+      <a:schemeClr val="accent1"/>
+    </dgm:fillClrLst>
+    <dgm:linClrLst meth="repeat">
+      <a:schemeClr val="accent1">
+        <a:shade val="80000"/>
+      </a:schemeClr>
+    </dgm:linClrLst>
+    <dgm:effectClrLst/>
+    <dgm:txLinClrLst/>
+    <dgm:txFillClrLst meth="repeat">
+      <a:schemeClr val="tx1"/>
+    </dgm:txFillClrLst>
+    <dgm:txEffectClrLst/>
+  </dgm:styleLbl>
+  <dgm:styleLbl name="fgAcc1">
+    <dgm:fillClrLst meth="repeat">
+      <a:schemeClr val="lt1">
+        <a:alpha val="90000"/>
+      </a:schemeClr>
+    </dgm:fillClrLst>
+    <dgm:linClrLst meth="repeat">
+      <a:schemeClr val="accent1"/>
+    </dgm:linClrLst>
+    <dgm:effectClrLst/>
+    <dgm:txLinClrLst/>
+    <dgm:txFillClrLst meth="repeat">
+      <a:schemeClr val="dk1"/>
+    </dgm:txFillClrLst>
+    <dgm:txEffectClrLst/>
+  </dgm:styleLbl>
+  <dgm:styleLbl name="conFgAcc1">
+    <dgm:fillClrLst meth="repeat">
+      <a:schemeClr val="lt1">
+        <a:alpha val="90000"/>
+      </a:schemeClr>
+    </dgm:fillClrLst>
+    <dgm:linClrLst meth="repeat">
+      <a:schemeClr val="accent1"/>
+    </dgm:linClrLst>
+    <dgm:effectClrLst/>
+    <dgm:txLinClrLst/>
+    <dgm:txFillClrLst meth="repeat">
+      <a:schemeClr val="dk1"/>
+    </dgm:txFillClrLst>
+    <dgm:txEffectClrLst/>
+  </dgm:styleLbl>
+  <dgm:styleLbl name="alignAcc1">
+    <dgm:fillClrLst meth="repeat">
+      <a:schemeClr val="lt1">
+        <a:alpha val="90000"/>
+      </a:schemeClr>
+    </dgm:fillClrLst>
+    <dgm:linClrLst meth="repeat">
+      <a:schemeClr val="accent1"/>
+    </dgm:linClrLst>
+    <dgm:effectClrLst/>
+    <dgm:txLinClrLst/>
+    <dgm:txFillClrLst meth="repeat">
+      <a:schemeClr val="dk1"/>
+    </dgm:txFillClrLst>
+    <dgm:txEffectClrLst/>
+  </dgm:styleLbl>
+  <dgm:styleLbl name="trAlignAcc1">
+    <dgm:fillClrLst meth="repeat">
+      <a:schemeClr val="lt1">
+        <a:alpha val="40000"/>
+      </a:schemeClr>
+    </dgm:fillClrLst>
+    <dgm:linClrLst meth="repeat">
+      <a:schemeClr val="accent1"/>
+    </dgm:linClrLst>
+    <dgm:effectClrLst/>
+    <dgm:txLinClrLst/>
+    <dgm:txFillClrLst meth="repeat">
+      <a:schemeClr val="dk1"/>
+    </dgm:txFillClrLst>
+    <dgm:txEffectClrLst/>
+  </dgm:styleLbl>
+  <dgm:styleLbl name="bgAcc1">
+    <dgm:fillClrLst meth="repeat">
+      <a:schemeClr val="lt1">
+        <a:alpha val="90000"/>
+      </a:schemeClr>
+    </dgm:fillClrLst>
+    <dgm:linClrLst meth="repeat">
+      <a:schemeClr val="accent1"/>
+    </dgm:linClrLst>
+    <dgm:effectClrLst/>
+    <dgm:txLinClrLst/>
+    <dgm:txFillClrLst meth="repeat">
+      <a:schemeClr val="dk1"/>
+    </dgm:txFillClrLst>
+    <dgm:txEffectClrLst/>
+  </dgm:styleLbl>
+  <dgm:styleLbl name="solidFgAcc1">
+    <dgm:fillClrLst meth="repeat">
+      <a:schemeClr val="lt1"/>
+    </dgm:fillClrLst>
+    <dgm:linClrLst meth="repeat">
+      <a:schemeClr val="accent1"/>
+    </dgm:linClrLst>
+    <dgm:effectClrLst/>
+    <dgm:txLinClrLst/>
+    <dgm:txFillClrLst meth="repeat">
+      <a:schemeClr val="dk1"/>
+    </dgm:txFillClrLst>
+    <dgm:txEffectClrLst/>
+  </dgm:styleLbl>
+  <dgm:styleLbl name="solidAlignAcc1">
+    <dgm:fillClrLst meth="repeat">
+      <a:schemeClr val="lt1"/>
+    </dgm:fillClrLst>
+    <dgm:linClrLst meth="repeat">
+      <a:schemeClr val="accent1"/>
+    </dgm:linClrLst>
+    <dgm:effectClrLst/>
+    <dgm:txLinClrLst/>
+    <dgm:txFillClrLst meth="repeat">
+      <a:schemeClr val="dk1"/>
+    </dgm:txFillClrLst>
+    <dgm:txEffectClrLst/>
+  </dgm:styleLbl>
+  <dgm:styleLbl name="solidBgAcc1">
+    <dgm:fillClrLst meth="repeat">
+      <a:schemeClr val="lt1"/>
+    </dgm:fillClrLst>
+    <dgm:linClrLst meth="repeat">
+      <a:schemeClr val="accent1"/>
+    </dgm:linClrLst>
+    <dgm:effectClrLst/>
+    <dgm:txLinClrLst/>
+    <dgm:txFillClrLst meth="repeat">
+      <a:schemeClr val="dk1"/>
+    </dgm:txFillClrLst>
+    <dgm:txEffectClrLst/>
+  </dgm:styleLbl>
+  <dgm:styleLbl name="fgAccFollowNode1">
+    <dgm:fillClrLst meth="repeat">
+      <a:schemeClr val="accent1">
+        <a:alpha val="90000"/>
+        <a:tint val="40000"/>
+      </a:schemeClr>
+    </dgm:fillClrLst>
+    <dgm:linClrLst meth="repeat">
+      <a:schemeClr val="accent1">
+        <a:alpha val="90000"/>
+        <a:tint val="40000"/>
+      </a:schemeClr>
+    </dgm:linClrLst>
+    <dgm:effectClrLst/>
+    <dgm:txLinClrLst/>
+    <dgm:txFillClrLst meth="repeat">
+      <a:schemeClr val="dk1"/>
+    </dgm:txFillClrLst>
+    <dgm:txEffectClrLst/>
+  </dgm:styleLbl>
+  <dgm:styleLbl name="alignAccFollowNode1">
+    <dgm:fillClrLst meth="repeat">
+      <a:schemeClr val="accent1">
+        <a:alpha val="90000"/>
+        <a:tint val="40000"/>
+      </a:schemeClr>
+    </dgm:fillClrLst>
+    <dgm:linClrLst meth="repeat">
+      <a:schemeClr val="accent1">
+        <a:alpha val="90000"/>
+        <a:tint val="40000"/>
+      </a:schemeClr>
+    </dgm:linClrLst>
+    <dgm:effectClrLst/>
+    <dgm:txLinClrLst/>
+    <dgm:txFillClrLst meth="repeat">
+      <a:schemeClr val="dk1"/>
+    </dgm:txFillClrLst>
+    <dgm:txEffectClrLst/>
+  </dgm:styleLbl>
+  <dgm:styleLbl name="bgAccFollowNode1">
+    <dgm:fillClrLst meth="repeat">
+      <a:schemeClr val="accent1">
+        <a:alpha val="90000"/>
+        <a:tint val="40000"/>
+      </a:schemeClr>
+    </dgm:fillClrLst>
+    <dgm:linClrLst meth="repeat">
+      <a:schemeClr val="accent1">
+        <a:alpha val="90000"/>
+        <a:tint val="40000"/>
+      </a:schemeClr>
+    </dgm:linClrLst>
+    <dgm:effectClrLst/>
+    <dgm:txLinClrLst/>
+    <dgm:txFillClrLst meth="repeat">
+      <a:schemeClr val="dk1"/>
+    </dgm:txFillClrLst>
+    <dgm:txEffectClrLst/>
+  </dgm:styleLbl>
+  <dgm:styleLbl name="fgAcc0">
+    <dgm:fillClrLst meth="repeat">
+      <a:schemeClr val="lt1">
+        <a:alpha val="90000"/>
+      </a:schemeClr>
+    </dgm:fillClrLst>
+    <dgm:linClrLst meth="repeat">
+      <a:schemeClr val="accent1"/>
+    </dgm:linClrLst>
+    <dgm:effectClrLst/>
+    <dgm:txLinClrLst/>
+    <dgm:txFillClrLst meth="repeat">
+      <a:schemeClr val="dk1"/>
+    </dgm:txFillClrLst>
+    <dgm:txEffectClrLst/>
+  </dgm:styleLbl>
+  <dgm:styleLbl name="fgAcc2">
+    <dgm:fillClrLst meth="repeat">
+      <a:schemeClr val="lt1">
+        <a:alpha val="90000"/>
+      </a:schemeClr>
+    </dgm:fillClrLst>
+    <dgm:linClrLst meth="repeat">
+      <a:schemeClr val="accent1"/>
+    </dgm:linClrLst>
+    <dgm:effectClrLst/>
+    <dgm:txLinClrLst/>
+    <dgm:txFillClrLst meth="repeat">
+      <a:schemeClr val="dk1"/>
+    </dgm:txFillClrLst>
+    <dgm:txEffectClrLst/>
+  </dgm:styleLbl>
+  <dgm:styleLbl name="fgAcc3">
+    <dgm:fillClrLst meth="repeat">
+      <a:schemeClr val="lt1">
+        <a:alpha val="90000"/>
+      </a:schemeClr>
+    </dgm:fillClrLst>
+    <dgm:linClrLst meth="repeat">
+      <a:schemeClr val="accent1"/>
+    </dgm:linClrLst>
+    <dgm:effectClrLst/>
+    <dgm:txLinClrLst/>
+    <dgm:txFillClrLst meth="repeat">
+      <a:schemeClr val="dk1"/>
+    </dgm:txFillClrLst>
+    <dgm:txEffectClrLst/>
+  </dgm:styleLbl>
+  <dgm:styleLbl name="fgAcc4">
+    <dgm:fillClrLst meth="repeat">
+      <a:schemeClr val="lt1">
+        <a:alpha val="90000"/>
+      </a:schemeClr>
+    </dgm:fillClrLst>
+    <dgm:linClrLst meth="repeat">
+      <a:schemeClr val="accent1"/>
+    </dgm:linClrLst>
+    <dgm:effectClrLst/>
+    <dgm:txLinClrLst/>
+    <dgm:txFillClrLst meth="repeat">
+      <a:schemeClr val="dk1"/>
+    </dgm:txFillClrLst>
+    <dgm:txEffectClrLst/>
+  </dgm:styleLbl>
+  <dgm:styleLbl name="bgShp">
+    <dgm:fillClrLst meth="repeat">
+      <a:schemeClr val="accent1">
+        <a:tint val="40000"/>
+      </a:schemeClr>
+    </dgm:fillClrLst>
+    <dgm:linClrLst meth="repeat">
+      <a:schemeClr val="accent1"/>
+    </dgm:linClrLst>
+    <dgm:effectClrLst/>
+    <dgm:txLinClrLst/>
+    <dgm:txFillClrLst meth="repeat">
+      <a:schemeClr val="dk1"/>
+    </dgm:txFillClrLst>
+    <dgm:txEffectClrLst/>
+  </dgm:styleLbl>
+  <dgm:styleLbl name="dkBgShp">
+    <dgm:fillClrLst meth="repeat">
+      <a:schemeClr val="accent1">
+        <a:shade val="80000"/>
+      </a:schemeClr>
+    </dgm:fillClrLst>
+    <dgm:linClrLst meth="repeat">
+      <a:schemeClr val="accent1"/>
+    </dgm:linClrLst>
+    <dgm:effectClrLst/>
+    <dgm:txLinClrLst/>
+    <dgm:txFillClrLst meth="repeat">
+      <a:schemeClr val="lt1"/>
+    </dgm:txFillClrLst>
+    <dgm:txEffectClrLst/>
+  </dgm:styleLbl>
+  <dgm:styleLbl name="trBgShp">
+    <dgm:fillClrLst meth="repeat">
+      <a:schemeClr val="accent1">
+        <a:tint val="50000"/>
+        <a:alpha val="40000"/>
+      </a:schemeClr>
+    </dgm:fillClrLst>
+    <dgm:linClrLst meth="repeat">
+      <a:schemeClr val="accent1"/>
+    </dgm:linClrLst>
+    <dgm:effectClrLst/>
+    <dgm:txLinClrLst/>
+    <dgm:txFillClrLst meth="repeat">
+      <a:schemeClr val="lt1"/>
+    </dgm:txFillClrLst>
+    <dgm:txEffectClrLst/>
+  </dgm:styleLbl>
+  <dgm:styleLbl name="fgShp">
+    <dgm:fillClrLst meth="repeat">
+      <a:schemeClr val="accent1">
+        <a:tint val="60000"/>
+      </a:schemeClr>
+    </dgm:fillClrLst>
+    <dgm:linClrLst meth="repeat">
+      <a:schemeClr val="lt1"/>
+    </dgm:linClrLst>
+    <dgm:effectClrLst/>
+    <dgm:txLinClrLst/>
+    <dgm:txFillClrLst meth="repeat">
+      <a:schemeClr val="dk1"/>
+    </dgm:txFillClrLst>
+    <dgm:txEffectClrLst/>
+  </dgm:styleLbl>
+  <dgm:styleLbl name="revTx">
+    <dgm:fillClrLst meth="repeat">
+      <a:schemeClr val="lt1">
+        <a:alpha val="0"/>
+      </a:schemeClr>
+    </dgm:fillClrLst>
+    <dgm:linClrLst meth="repeat">
+      <a:schemeClr val="dk1">
+        <a:alpha val="0"/>
+      </a:schemeClr>
+    </dgm:linClrLst>
+    <dgm:effectClrLst/>
+    <dgm:txLinClrLst/>
+    <dgm:txFillClrLst meth="repeat">
+      <a:schemeClr val="tx1"/>
+    </dgm:txFillClrLst>
+    <dgm:txEffectClrLst/>
+  </dgm:styleLbl>
+</dgm:colorsDef>
+</file>
+
+<file path=ppt/diagrams/data1.xml><?xml version="1.0" encoding="utf-8"?>
+<dgm:dataModel xmlns:dgm="http://schemas.openxmlformats.org/drawingml/2006/diagram" xmlns:a="http://schemas.openxmlformats.org/drawingml/2006/main">
+  <dgm:ptLst>
+    <dgm:pt modelId="{7EBBE6E8-6E7E-4D65-BF9A-CBE826D3E8F7}" type="doc">
+      <dgm:prSet loTypeId="urn:microsoft.com/office/officeart/2005/8/layout/process1" loCatId="process" qsTypeId="urn:microsoft.com/office/officeart/2005/8/quickstyle/simple1" qsCatId="simple" csTypeId="urn:microsoft.com/office/officeart/2005/8/colors/accent1_2" csCatId="accent1" phldr="1"/>
+      <dgm:spPr/>
+      <dgm:t>
+        <a:bodyPr/>
+        <a:lstStyle/>
+        <a:p>
+          <a:endParaRPr lang="ru-RU"/>
+        </a:p>
+      </dgm:t>
+    </dgm:pt>
+    <dgm:pt modelId="{2D97ED5A-1339-4C9C-B5F8-FE34BDF5298F}">
+      <dgm:prSet phldrT="[Текст]"/>
+      <dgm:spPr/>
+      <dgm:t>
+        <a:bodyPr/>
+        <a:lstStyle/>
+        <a:p>
+          <a:pPr>
+            <a:buNone/>
+          </a:pPr>
+          <a:r>
+            <a:rPr lang="ru-RU" b="0" i="0" dirty="0"/>
+            <a:t>Мало данных для обучения модели</a:t>
+          </a:r>
+          <a:endParaRPr lang="ru-RU" dirty="0"/>
+        </a:p>
+      </dgm:t>
+    </dgm:pt>
+    <dgm:pt modelId="{9E48A871-5ADD-4363-94C8-DB830A190120}" type="parTrans" cxnId="{43123ED0-740F-490C-A50F-AEA13F7287BA}">
+      <dgm:prSet/>
+      <dgm:spPr/>
+      <dgm:t>
+        <a:bodyPr/>
+        <a:lstStyle/>
+        <a:p>
+          <a:endParaRPr lang="ru-RU"/>
+        </a:p>
+      </dgm:t>
+    </dgm:pt>
+    <dgm:pt modelId="{04848607-BE24-4B54-81B7-A5F309859D7E}" type="sibTrans" cxnId="{43123ED0-740F-490C-A50F-AEA13F7287BA}">
+      <dgm:prSet/>
+      <dgm:spPr>
+        <a:gradFill flip="none" rotWithShape="0">
+          <a:gsLst>
+            <a:gs pos="0">
+              <a:schemeClr val="accent1">
+                <a:lumMod val="60000"/>
+                <a:lumOff val="40000"/>
+                <a:shade val="30000"/>
+                <a:satMod val="115000"/>
+              </a:schemeClr>
+            </a:gs>
+            <a:gs pos="50000">
+              <a:schemeClr val="accent1">
+                <a:lumMod val="60000"/>
+                <a:lumOff val="40000"/>
+                <a:shade val="67500"/>
+                <a:satMod val="115000"/>
+              </a:schemeClr>
+            </a:gs>
+            <a:gs pos="100000">
+              <a:schemeClr val="accent1">
+                <a:lumMod val="60000"/>
+                <a:lumOff val="40000"/>
+                <a:shade val="100000"/>
+                <a:satMod val="115000"/>
+              </a:schemeClr>
+            </a:gs>
+          </a:gsLst>
+          <a:path path="circle">
+            <a:fillToRect t="100000" r="100000"/>
+          </a:path>
+          <a:tileRect l="-100000" b="-100000"/>
+        </a:gradFill>
+      </dgm:spPr>
+      <dgm:t>
+        <a:bodyPr/>
+        <a:lstStyle/>
+        <a:p>
+          <a:endParaRPr lang="ru-RU"/>
+        </a:p>
+      </dgm:t>
+    </dgm:pt>
+    <dgm:pt modelId="{A3DE5596-FCF6-4419-851C-C46A4BE9DEE1}">
+      <dgm:prSet phldrT="[Текст]"/>
+      <dgm:spPr>
+        <a:solidFill>
+          <a:schemeClr val="accent1">
+            <a:lumMod val="60000"/>
+            <a:lumOff val="40000"/>
+          </a:schemeClr>
+        </a:solidFill>
+      </dgm:spPr>
+      <dgm:t>
+        <a:bodyPr/>
+        <a:lstStyle/>
+        <a:p>
+          <a:pPr>
+            <a:buNone/>
+          </a:pPr>
+          <a:r>
+            <a:rPr lang="ru-RU" b="0" i="0" dirty="0"/>
+            <a:t>Синтетические данные, ручное оценивание</a:t>
+          </a:r>
+          <a:endParaRPr lang="ru-RU" dirty="0"/>
+        </a:p>
+      </dgm:t>
+    </dgm:pt>
+    <dgm:pt modelId="{1885E0DB-4BBF-48FA-BD02-E3ABD0C7CE32}" type="parTrans" cxnId="{C46A7489-B2E4-4644-A2ED-12FC004C2795}">
+      <dgm:prSet/>
+      <dgm:spPr/>
+      <dgm:t>
+        <a:bodyPr/>
+        <a:lstStyle/>
+        <a:p>
+          <a:endParaRPr lang="ru-RU"/>
+        </a:p>
+      </dgm:t>
+    </dgm:pt>
+    <dgm:pt modelId="{ED3E3BDB-F17D-43FA-A309-F6D44123545C}" type="sibTrans" cxnId="{C46A7489-B2E4-4644-A2ED-12FC004C2795}">
+      <dgm:prSet/>
+      <dgm:spPr/>
+      <dgm:t>
+        <a:bodyPr/>
+        <a:lstStyle/>
+        <a:p>
+          <a:endParaRPr lang="ru-RU"/>
+        </a:p>
+      </dgm:t>
+    </dgm:pt>
+    <dgm:pt modelId="{70E55983-5224-4F6B-AA1C-AA6BD0B29B75}" type="pres">
+      <dgm:prSet presAssocID="{7EBBE6E8-6E7E-4D65-BF9A-CBE826D3E8F7}" presName="Name0" presStyleCnt="0">
+        <dgm:presLayoutVars>
+          <dgm:dir/>
+          <dgm:resizeHandles val="exact"/>
+        </dgm:presLayoutVars>
+      </dgm:prSet>
+      <dgm:spPr/>
+    </dgm:pt>
+    <dgm:pt modelId="{6500D5A7-59F4-41BA-9665-D68A8DD51CF3}" type="pres">
+      <dgm:prSet presAssocID="{2D97ED5A-1339-4C9C-B5F8-FE34BDF5298F}" presName="node" presStyleLbl="node1" presStyleIdx="0" presStyleCnt="2">
+        <dgm:presLayoutVars>
+          <dgm:bulletEnabled val="1"/>
+        </dgm:presLayoutVars>
+      </dgm:prSet>
+      <dgm:spPr/>
+    </dgm:pt>
+    <dgm:pt modelId="{9B23216D-6693-4BFC-9CF6-AD539BF88CA5}" type="pres">
+      <dgm:prSet presAssocID="{04848607-BE24-4B54-81B7-A5F309859D7E}" presName="sibTrans" presStyleLbl="sibTrans2D1" presStyleIdx="0" presStyleCnt="1" custScaleX="153721"/>
+      <dgm:spPr>
+        <a:prstGeom prst="rightArrow">
+          <a:avLst/>
+        </a:prstGeom>
+      </dgm:spPr>
+    </dgm:pt>
+    <dgm:pt modelId="{B43A671B-7E61-48F4-8A97-5FB07AF36519}" type="pres">
+      <dgm:prSet presAssocID="{04848607-BE24-4B54-81B7-A5F309859D7E}" presName="connectorText" presStyleLbl="sibTrans2D1" presStyleIdx="0" presStyleCnt="1"/>
+      <dgm:spPr/>
+    </dgm:pt>
+    <dgm:pt modelId="{831935E8-20A3-4341-B34F-EBEC45D2FF16}" type="pres">
+      <dgm:prSet presAssocID="{A3DE5596-FCF6-4419-851C-C46A4BE9DEE1}" presName="node" presStyleLbl="node1" presStyleIdx="1" presStyleCnt="2">
+        <dgm:presLayoutVars>
+          <dgm:bulletEnabled val="1"/>
+        </dgm:presLayoutVars>
+      </dgm:prSet>
+      <dgm:spPr/>
+    </dgm:pt>
+  </dgm:ptLst>
+  <dgm:cxnLst>
+    <dgm:cxn modelId="{A9AA1277-1B87-4A58-BE90-101DAA9AFB7F}" type="presOf" srcId="{04848607-BE24-4B54-81B7-A5F309859D7E}" destId="{9B23216D-6693-4BFC-9CF6-AD539BF88CA5}" srcOrd="0" destOrd="0" presId="urn:microsoft.com/office/officeart/2005/8/layout/process1"/>
+    <dgm:cxn modelId="{058DB77E-EFE4-4212-A5EF-52E01519C1FF}" type="presOf" srcId="{7EBBE6E8-6E7E-4D65-BF9A-CBE826D3E8F7}" destId="{70E55983-5224-4F6B-AA1C-AA6BD0B29B75}" srcOrd="0" destOrd="0" presId="urn:microsoft.com/office/officeart/2005/8/layout/process1"/>
+    <dgm:cxn modelId="{D4952787-C28A-465F-9A11-997F104F7CC9}" type="presOf" srcId="{2D97ED5A-1339-4C9C-B5F8-FE34BDF5298F}" destId="{6500D5A7-59F4-41BA-9665-D68A8DD51CF3}" srcOrd="0" destOrd="0" presId="urn:microsoft.com/office/officeart/2005/8/layout/process1"/>
+    <dgm:cxn modelId="{C46A7489-B2E4-4644-A2ED-12FC004C2795}" srcId="{7EBBE6E8-6E7E-4D65-BF9A-CBE826D3E8F7}" destId="{A3DE5596-FCF6-4419-851C-C46A4BE9DEE1}" srcOrd="1" destOrd="0" parTransId="{1885E0DB-4BBF-48FA-BD02-E3ABD0C7CE32}" sibTransId="{ED3E3BDB-F17D-43FA-A309-F6D44123545C}"/>
+    <dgm:cxn modelId="{E17E479A-463D-46D3-9DE3-E9BA71AA31F1}" type="presOf" srcId="{A3DE5596-FCF6-4419-851C-C46A4BE9DEE1}" destId="{831935E8-20A3-4341-B34F-EBEC45D2FF16}" srcOrd="0" destOrd="0" presId="urn:microsoft.com/office/officeart/2005/8/layout/process1"/>
+    <dgm:cxn modelId="{43123ED0-740F-490C-A50F-AEA13F7287BA}" srcId="{7EBBE6E8-6E7E-4D65-BF9A-CBE826D3E8F7}" destId="{2D97ED5A-1339-4C9C-B5F8-FE34BDF5298F}" srcOrd="0" destOrd="0" parTransId="{9E48A871-5ADD-4363-94C8-DB830A190120}" sibTransId="{04848607-BE24-4B54-81B7-A5F309859D7E}"/>
+    <dgm:cxn modelId="{F0FDE2F3-619F-468F-9B81-55ABCA676C0C}" type="presOf" srcId="{04848607-BE24-4B54-81B7-A5F309859D7E}" destId="{B43A671B-7E61-48F4-8A97-5FB07AF36519}" srcOrd="1" destOrd="0" presId="urn:microsoft.com/office/officeart/2005/8/layout/process1"/>
+    <dgm:cxn modelId="{580A4218-D3F8-4EFB-A4E3-B124C99179C1}" type="presParOf" srcId="{70E55983-5224-4F6B-AA1C-AA6BD0B29B75}" destId="{6500D5A7-59F4-41BA-9665-D68A8DD51CF3}" srcOrd="0" destOrd="0" presId="urn:microsoft.com/office/officeart/2005/8/layout/process1"/>
+    <dgm:cxn modelId="{5A8A3BF5-786E-4124-959B-BA84DDEB66A2}" type="presParOf" srcId="{70E55983-5224-4F6B-AA1C-AA6BD0B29B75}" destId="{9B23216D-6693-4BFC-9CF6-AD539BF88CA5}" srcOrd="1" destOrd="0" presId="urn:microsoft.com/office/officeart/2005/8/layout/process1"/>
+    <dgm:cxn modelId="{E44B28F8-A13E-4916-A909-1A39E505EF78}" type="presParOf" srcId="{9B23216D-6693-4BFC-9CF6-AD539BF88CA5}" destId="{B43A671B-7E61-48F4-8A97-5FB07AF36519}" srcOrd="0" destOrd="0" presId="urn:microsoft.com/office/officeart/2005/8/layout/process1"/>
+    <dgm:cxn modelId="{A78F81A6-DF88-451F-AE7B-FA6B738B08DB}" type="presParOf" srcId="{70E55983-5224-4F6B-AA1C-AA6BD0B29B75}" destId="{831935E8-20A3-4341-B34F-EBEC45D2FF16}" srcOrd="2" destOrd="0" presId="urn:microsoft.com/office/officeart/2005/8/layout/process1"/>
+  </dgm:cxnLst>
+  <dgm:bg/>
+  <dgm:whole/>
+  <dgm:extLst>
+    <a:ext uri="http://schemas.microsoft.com/office/drawing/2008/diagram">
+      <dsp:dataModelExt xmlns:dsp="http://schemas.microsoft.com/office/drawing/2008/diagram" relId="rId6" minVer="http://schemas.openxmlformats.org/drawingml/2006/diagram"/>
+    </a:ext>
+  </dgm:extLst>
+</dgm:dataModel>
+</file>
+
+<file path=ppt/diagrams/data2.xml><?xml version="1.0" encoding="utf-8"?>
+<dgm:dataModel xmlns:dgm="http://schemas.openxmlformats.org/drawingml/2006/diagram" xmlns:a="http://schemas.openxmlformats.org/drawingml/2006/main">
+  <dgm:ptLst>
+    <dgm:pt modelId="{7EBBE6E8-6E7E-4D65-BF9A-CBE826D3E8F7}" type="doc">
+      <dgm:prSet loTypeId="urn:microsoft.com/office/officeart/2005/8/layout/process1" loCatId="process" qsTypeId="urn:microsoft.com/office/officeart/2005/8/quickstyle/simple1" qsCatId="simple" csTypeId="urn:microsoft.com/office/officeart/2005/8/colors/accent1_2" csCatId="accent1" phldr="1"/>
+      <dgm:spPr/>
+      <dgm:t>
+        <a:bodyPr/>
+        <a:lstStyle/>
+        <a:p>
+          <a:endParaRPr lang="ru-RU"/>
+        </a:p>
+      </dgm:t>
+    </dgm:pt>
+    <dgm:pt modelId="{2D97ED5A-1339-4C9C-B5F8-FE34BDF5298F}">
+      <dgm:prSet phldrT="[Текст]"/>
+      <dgm:spPr/>
+      <dgm:t>
+        <a:bodyPr/>
+        <a:lstStyle/>
+        <a:p>
+          <a:pPr>
+            <a:buNone/>
+          </a:pPr>
+          <a:r>
+            <a:rPr lang="ru-RU" b="0" i="0" dirty="0"/>
+            <a:t>Низкая точность модели</a:t>
+          </a:r>
+          <a:endParaRPr lang="ru-RU" dirty="0"/>
+        </a:p>
+      </dgm:t>
+    </dgm:pt>
+    <dgm:pt modelId="{9E48A871-5ADD-4363-94C8-DB830A190120}" type="parTrans" cxnId="{43123ED0-740F-490C-A50F-AEA13F7287BA}">
+      <dgm:prSet/>
+      <dgm:spPr/>
+      <dgm:t>
+        <a:bodyPr/>
+        <a:lstStyle/>
+        <a:p>
+          <a:endParaRPr lang="ru-RU"/>
+        </a:p>
+      </dgm:t>
+    </dgm:pt>
+    <dgm:pt modelId="{04848607-BE24-4B54-81B7-A5F309859D7E}" type="sibTrans" cxnId="{43123ED0-740F-490C-A50F-AEA13F7287BA}">
+      <dgm:prSet/>
+      <dgm:spPr>
+        <a:gradFill flip="none" rotWithShape="0">
+          <a:gsLst>
+            <a:gs pos="0">
+              <a:schemeClr val="accent1">
+                <a:lumMod val="60000"/>
+                <a:lumOff val="40000"/>
+                <a:shade val="30000"/>
+                <a:satMod val="115000"/>
+              </a:schemeClr>
+            </a:gs>
+            <a:gs pos="50000">
+              <a:schemeClr val="accent1">
+                <a:lumMod val="60000"/>
+                <a:lumOff val="40000"/>
+                <a:shade val="67500"/>
+                <a:satMod val="115000"/>
+              </a:schemeClr>
+            </a:gs>
+            <a:gs pos="100000">
+              <a:schemeClr val="accent1">
+                <a:lumMod val="60000"/>
+                <a:lumOff val="40000"/>
+                <a:shade val="100000"/>
+                <a:satMod val="115000"/>
+              </a:schemeClr>
+            </a:gs>
+          </a:gsLst>
+          <a:path path="circle">
+            <a:fillToRect t="100000" r="100000"/>
+          </a:path>
+          <a:tileRect l="-100000" b="-100000"/>
+        </a:gradFill>
+      </dgm:spPr>
+      <dgm:t>
+        <a:bodyPr/>
+        <a:lstStyle/>
+        <a:p>
+          <a:endParaRPr lang="ru-RU"/>
+        </a:p>
+      </dgm:t>
+    </dgm:pt>
+    <dgm:pt modelId="{A3DE5596-FCF6-4419-851C-C46A4BE9DEE1}">
+      <dgm:prSet phldrT="[Текст]"/>
+      <dgm:spPr>
+        <a:solidFill>
+          <a:schemeClr val="accent1">
+            <a:lumMod val="60000"/>
+            <a:lumOff val="40000"/>
+          </a:schemeClr>
+        </a:solidFill>
+      </dgm:spPr>
+      <dgm:t>
+        <a:bodyPr/>
+        <a:lstStyle/>
+        <a:p>
+          <a:pPr>
+            <a:buNone/>
+          </a:pPr>
+          <a:r>
+            <a:rPr lang="ru-RU" b="0" i="0" dirty="0"/>
+            <a:t>Анализ ошибок, добавление признаков, иной вариант (популярное + коллаборативная фильтрация)</a:t>
+          </a:r>
+          <a:endParaRPr lang="ru-RU" dirty="0"/>
+        </a:p>
+      </dgm:t>
+    </dgm:pt>
+    <dgm:pt modelId="{1885E0DB-4BBF-48FA-BD02-E3ABD0C7CE32}" type="parTrans" cxnId="{C46A7489-B2E4-4644-A2ED-12FC004C2795}">
+      <dgm:prSet/>
+      <dgm:spPr/>
+      <dgm:t>
+        <a:bodyPr/>
+        <a:lstStyle/>
+        <a:p>
+          <a:endParaRPr lang="ru-RU"/>
+        </a:p>
+      </dgm:t>
+    </dgm:pt>
+    <dgm:pt modelId="{ED3E3BDB-F17D-43FA-A309-F6D44123545C}" type="sibTrans" cxnId="{C46A7489-B2E4-4644-A2ED-12FC004C2795}">
+      <dgm:prSet/>
+      <dgm:spPr/>
+      <dgm:t>
+        <a:bodyPr/>
+        <a:lstStyle/>
+        <a:p>
+          <a:endParaRPr lang="ru-RU"/>
+        </a:p>
+      </dgm:t>
+    </dgm:pt>
+    <dgm:pt modelId="{70E55983-5224-4F6B-AA1C-AA6BD0B29B75}" type="pres">
+      <dgm:prSet presAssocID="{7EBBE6E8-6E7E-4D65-BF9A-CBE826D3E8F7}" presName="Name0" presStyleCnt="0">
+        <dgm:presLayoutVars>
+          <dgm:dir/>
+          <dgm:resizeHandles val="exact"/>
+        </dgm:presLayoutVars>
+      </dgm:prSet>
+      <dgm:spPr/>
+    </dgm:pt>
+    <dgm:pt modelId="{6500D5A7-59F4-41BA-9665-D68A8DD51CF3}" type="pres">
+      <dgm:prSet presAssocID="{2D97ED5A-1339-4C9C-B5F8-FE34BDF5298F}" presName="node" presStyleLbl="node1" presStyleIdx="0" presStyleCnt="2">
+        <dgm:presLayoutVars>
+          <dgm:bulletEnabled val="1"/>
+        </dgm:presLayoutVars>
+      </dgm:prSet>
+      <dgm:spPr/>
+    </dgm:pt>
+    <dgm:pt modelId="{9B23216D-6693-4BFC-9CF6-AD539BF88CA5}" type="pres">
+      <dgm:prSet presAssocID="{04848607-BE24-4B54-81B7-A5F309859D7E}" presName="sibTrans" presStyleLbl="sibTrans2D1" presStyleIdx="0" presStyleCnt="1" custScaleX="153721"/>
+      <dgm:spPr>
+        <a:prstGeom prst="rightArrow">
+          <a:avLst/>
+        </a:prstGeom>
+      </dgm:spPr>
+    </dgm:pt>
+    <dgm:pt modelId="{B43A671B-7E61-48F4-8A97-5FB07AF36519}" type="pres">
+      <dgm:prSet presAssocID="{04848607-BE24-4B54-81B7-A5F309859D7E}" presName="connectorText" presStyleLbl="sibTrans2D1" presStyleIdx="0" presStyleCnt="1"/>
+      <dgm:spPr/>
+    </dgm:pt>
+    <dgm:pt modelId="{831935E8-20A3-4341-B34F-EBEC45D2FF16}" type="pres">
+      <dgm:prSet presAssocID="{A3DE5596-FCF6-4419-851C-C46A4BE9DEE1}" presName="node" presStyleLbl="node1" presStyleIdx="1" presStyleCnt="2" custScaleX="206446">
+        <dgm:presLayoutVars>
+          <dgm:bulletEnabled val="1"/>
+        </dgm:presLayoutVars>
+      </dgm:prSet>
+      <dgm:spPr/>
+    </dgm:pt>
+  </dgm:ptLst>
+  <dgm:cxnLst>
+    <dgm:cxn modelId="{A9AA1277-1B87-4A58-BE90-101DAA9AFB7F}" type="presOf" srcId="{04848607-BE24-4B54-81B7-A5F309859D7E}" destId="{9B23216D-6693-4BFC-9CF6-AD539BF88CA5}" srcOrd="0" destOrd="0" presId="urn:microsoft.com/office/officeart/2005/8/layout/process1"/>
+    <dgm:cxn modelId="{058DB77E-EFE4-4212-A5EF-52E01519C1FF}" type="presOf" srcId="{7EBBE6E8-6E7E-4D65-BF9A-CBE826D3E8F7}" destId="{70E55983-5224-4F6B-AA1C-AA6BD0B29B75}" srcOrd="0" destOrd="0" presId="urn:microsoft.com/office/officeart/2005/8/layout/process1"/>
+    <dgm:cxn modelId="{D4952787-C28A-465F-9A11-997F104F7CC9}" type="presOf" srcId="{2D97ED5A-1339-4C9C-B5F8-FE34BDF5298F}" destId="{6500D5A7-59F4-41BA-9665-D68A8DD51CF3}" srcOrd="0" destOrd="0" presId="urn:microsoft.com/office/officeart/2005/8/layout/process1"/>
+    <dgm:cxn modelId="{C46A7489-B2E4-4644-A2ED-12FC004C2795}" srcId="{7EBBE6E8-6E7E-4D65-BF9A-CBE826D3E8F7}" destId="{A3DE5596-FCF6-4419-851C-C46A4BE9DEE1}" srcOrd="1" destOrd="0" parTransId="{1885E0DB-4BBF-48FA-BD02-E3ABD0C7CE32}" sibTransId="{ED3E3BDB-F17D-43FA-A309-F6D44123545C}"/>
+    <dgm:cxn modelId="{E17E479A-463D-46D3-9DE3-E9BA71AA31F1}" type="presOf" srcId="{A3DE5596-FCF6-4419-851C-C46A4BE9DEE1}" destId="{831935E8-20A3-4341-B34F-EBEC45D2FF16}" srcOrd="0" destOrd="0" presId="urn:microsoft.com/office/officeart/2005/8/layout/process1"/>
+    <dgm:cxn modelId="{43123ED0-740F-490C-A50F-AEA13F7287BA}" srcId="{7EBBE6E8-6E7E-4D65-BF9A-CBE826D3E8F7}" destId="{2D97ED5A-1339-4C9C-B5F8-FE34BDF5298F}" srcOrd="0" destOrd="0" parTransId="{9E48A871-5ADD-4363-94C8-DB830A190120}" sibTransId="{04848607-BE24-4B54-81B7-A5F309859D7E}"/>
+    <dgm:cxn modelId="{F0FDE2F3-619F-468F-9B81-55ABCA676C0C}" type="presOf" srcId="{04848607-BE24-4B54-81B7-A5F309859D7E}" destId="{B43A671B-7E61-48F4-8A97-5FB07AF36519}" srcOrd="1" destOrd="0" presId="urn:microsoft.com/office/officeart/2005/8/layout/process1"/>
+    <dgm:cxn modelId="{580A4218-D3F8-4EFB-A4E3-B124C99179C1}" type="presParOf" srcId="{70E55983-5224-4F6B-AA1C-AA6BD0B29B75}" destId="{6500D5A7-59F4-41BA-9665-D68A8DD51CF3}" srcOrd="0" destOrd="0" presId="urn:microsoft.com/office/officeart/2005/8/layout/process1"/>
+    <dgm:cxn modelId="{5A8A3BF5-786E-4124-959B-BA84DDEB66A2}" type="presParOf" srcId="{70E55983-5224-4F6B-AA1C-AA6BD0B29B75}" destId="{9B23216D-6693-4BFC-9CF6-AD539BF88CA5}" srcOrd="1" destOrd="0" presId="urn:microsoft.com/office/officeart/2005/8/layout/process1"/>
+    <dgm:cxn modelId="{E44B28F8-A13E-4916-A909-1A39E505EF78}" type="presParOf" srcId="{9B23216D-6693-4BFC-9CF6-AD539BF88CA5}" destId="{B43A671B-7E61-48F4-8A97-5FB07AF36519}" srcOrd="0" destOrd="0" presId="urn:microsoft.com/office/officeart/2005/8/layout/process1"/>
+    <dgm:cxn modelId="{A78F81A6-DF88-451F-AE7B-FA6B738B08DB}" type="presParOf" srcId="{70E55983-5224-4F6B-AA1C-AA6BD0B29B75}" destId="{831935E8-20A3-4341-B34F-EBEC45D2FF16}" srcOrd="2" destOrd="0" presId="urn:microsoft.com/office/officeart/2005/8/layout/process1"/>
+  </dgm:cxnLst>
+  <dgm:bg/>
+  <dgm:whole/>
+  <dgm:extLst>
+    <a:ext uri="http://schemas.microsoft.com/office/drawing/2008/diagram">
+      <dsp:dataModelExt xmlns:dsp="http://schemas.microsoft.com/office/drawing/2008/diagram" relId="rId11" minVer="http://schemas.openxmlformats.org/drawingml/2006/diagram"/>
+    </a:ext>
+  </dgm:extLst>
+</dgm:dataModel>
+</file>
+
+<file path=ppt/diagrams/data3.xml><?xml version="1.0" encoding="utf-8"?>
+<dgm:dataModel xmlns:dgm="http://schemas.openxmlformats.org/drawingml/2006/diagram" xmlns:a="http://schemas.openxmlformats.org/drawingml/2006/main">
+  <dgm:ptLst>
+    <dgm:pt modelId="{7EBBE6E8-6E7E-4D65-BF9A-CBE826D3E8F7}" type="doc">
+      <dgm:prSet loTypeId="urn:microsoft.com/office/officeart/2005/8/layout/process1" loCatId="process" qsTypeId="urn:microsoft.com/office/officeart/2005/8/quickstyle/simple1" qsCatId="simple" csTypeId="urn:microsoft.com/office/officeart/2005/8/colors/accent1_2" csCatId="accent1" phldr="1"/>
+      <dgm:spPr/>
+      <dgm:t>
+        <a:bodyPr/>
+        <a:lstStyle/>
+        <a:p>
+          <a:endParaRPr lang="ru-RU"/>
+        </a:p>
+      </dgm:t>
+    </dgm:pt>
+    <dgm:pt modelId="{2D97ED5A-1339-4C9C-B5F8-FE34BDF5298F}">
+      <dgm:prSet phldrT="[Текст]"/>
+      <dgm:spPr/>
+      <dgm:t>
+        <a:bodyPr/>
+        <a:lstStyle/>
+        <a:p>
+          <a:pPr>
+            <a:buNone/>
+          </a:pPr>
+          <a:r>
+            <a:rPr lang="ru-RU" b="0" i="0" dirty="0"/>
+            <a:t>Высокая нагрузка на сервер</a:t>
+          </a:r>
+          <a:endParaRPr lang="ru-RU" dirty="0"/>
+        </a:p>
+      </dgm:t>
+    </dgm:pt>
+    <dgm:pt modelId="{9E48A871-5ADD-4363-94C8-DB830A190120}" type="parTrans" cxnId="{43123ED0-740F-490C-A50F-AEA13F7287BA}">
+      <dgm:prSet/>
+      <dgm:spPr/>
+      <dgm:t>
+        <a:bodyPr/>
+        <a:lstStyle/>
+        <a:p>
+          <a:endParaRPr lang="ru-RU"/>
+        </a:p>
+      </dgm:t>
+    </dgm:pt>
+    <dgm:pt modelId="{04848607-BE24-4B54-81B7-A5F309859D7E}" type="sibTrans" cxnId="{43123ED0-740F-490C-A50F-AEA13F7287BA}">
+      <dgm:prSet/>
+      <dgm:spPr>
+        <a:gradFill flip="none" rotWithShape="0">
+          <a:gsLst>
+            <a:gs pos="0">
+              <a:schemeClr val="accent1">
+                <a:lumMod val="60000"/>
+                <a:lumOff val="40000"/>
+                <a:shade val="30000"/>
+                <a:satMod val="115000"/>
+              </a:schemeClr>
+            </a:gs>
+            <a:gs pos="50000">
+              <a:schemeClr val="accent1">
+                <a:lumMod val="60000"/>
+                <a:lumOff val="40000"/>
+                <a:shade val="67500"/>
+                <a:satMod val="115000"/>
+              </a:schemeClr>
+            </a:gs>
+            <a:gs pos="100000">
+              <a:schemeClr val="accent1">
+                <a:lumMod val="60000"/>
+                <a:lumOff val="40000"/>
+                <a:shade val="100000"/>
+                <a:satMod val="115000"/>
+              </a:schemeClr>
+            </a:gs>
+          </a:gsLst>
+          <a:path path="circle">
+            <a:fillToRect t="100000" r="100000"/>
+          </a:path>
+          <a:tileRect l="-100000" b="-100000"/>
+        </a:gradFill>
+      </dgm:spPr>
+      <dgm:t>
+        <a:bodyPr/>
+        <a:lstStyle/>
+        <a:p>
+          <a:endParaRPr lang="ru-RU"/>
+        </a:p>
+      </dgm:t>
+    </dgm:pt>
+    <dgm:pt modelId="{A3DE5596-FCF6-4419-851C-C46A4BE9DEE1}">
+      <dgm:prSet phldrT="[Текст]"/>
+      <dgm:spPr>
+        <a:solidFill>
+          <a:schemeClr val="accent1">
+            <a:lumMod val="60000"/>
+            <a:lumOff val="40000"/>
+          </a:schemeClr>
+        </a:solidFill>
+      </dgm:spPr>
+      <dgm:t>
+        <a:bodyPr/>
+        <a:lstStyle/>
+        <a:p>
+          <a:pPr>
+            <a:buNone/>
+          </a:pPr>
+          <a:r>
+            <a:rPr lang="ru-RU" b="0" i="0" dirty="0"/>
+            <a:t>Кэширование, асинхронность, при необходимости – более мощный сервер</a:t>
+          </a:r>
+          <a:endParaRPr lang="ru-RU" dirty="0"/>
+        </a:p>
+      </dgm:t>
+    </dgm:pt>
+    <dgm:pt modelId="{1885E0DB-4BBF-48FA-BD02-E3ABD0C7CE32}" type="parTrans" cxnId="{C46A7489-B2E4-4644-A2ED-12FC004C2795}">
+      <dgm:prSet/>
+      <dgm:spPr/>
+      <dgm:t>
+        <a:bodyPr/>
+        <a:lstStyle/>
+        <a:p>
+          <a:endParaRPr lang="ru-RU"/>
+        </a:p>
+      </dgm:t>
+    </dgm:pt>
+    <dgm:pt modelId="{ED3E3BDB-F17D-43FA-A309-F6D44123545C}" type="sibTrans" cxnId="{C46A7489-B2E4-4644-A2ED-12FC004C2795}">
+      <dgm:prSet/>
+      <dgm:spPr/>
+      <dgm:t>
+        <a:bodyPr/>
+        <a:lstStyle/>
+        <a:p>
+          <a:endParaRPr lang="ru-RU"/>
+        </a:p>
+      </dgm:t>
+    </dgm:pt>
+    <dgm:pt modelId="{70E55983-5224-4F6B-AA1C-AA6BD0B29B75}" type="pres">
+      <dgm:prSet presAssocID="{7EBBE6E8-6E7E-4D65-BF9A-CBE826D3E8F7}" presName="Name0" presStyleCnt="0">
+        <dgm:presLayoutVars>
+          <dgm:dir/>
+          <dgm:resizeHandles val="exact"/>
+        </dgm:presLayoutVars>
+      </dgm:prSet>
+      <dgm:spPr/>
+    </dgm:pt>
+    <dgm:pt modelId="{6500D5A7-59F4-41BA-9665-D68A8DD51CF3}" type="pres">
+      <dgm:prSet presAssocID="{2D97ED5A-1339-4C9C-B5F8-FE34BDF5298F}" presName="node" presStyleLbl="node1" presStyleIdx="0" presStyleCnt="2">
+        <dgm:presLayoutVars>
+          <dgm:bulletEnabled val="1"/>
+        </dgm:presLayoutVars>
+      </dgm:prSet>
+      <dgm:spPr/>
+    </dgm:pt>
+    <dgm:pt modelId="{9B23216D-6693-4BFC-9CF6-AD539BF88CA5}" type="pres">
+      <dgm:prSet presAssocID="{04848607-BE24-4B54-81B7-A5F309859D7E}" presName="sibTrans" presStyleLbl="sibTrans2D1" presStyleIdx="0" presStyleCnt="1" custScaleX="153721"/>
+      <dgm:spPr>
+        <a:prstGeom prst="rightArrow">
+          <a:avLst/>
+        </a:prstGeom>
+      </dgm:spPr>
+    </dgm:pt>
+    <dgm:pt modelId="{B43A671B-7E61-48F4-8A97-5FB07AF36519}" type="pres">
+      <dgm:prSet presAssocID="{04848607-BE24-4B54-81B7-A5F309859D7E}" presName="connectorText" presStyleLbl="sibTrans2D1" presStyleIdx="0" presStyleCnt="1"/>
+      <dgm:spPr/>
+    </dgm:pt>
+    <dgm:pt modelId="{831935E8-20A3-4341-B34F-EBEC45D2FF16}" type="pres">
+      <dgm:prSet presAssocID="{A3DE5596-FCF6-4419-851C-C46A4BE9DEE1}" presName="node" presStyleLbl="node1" presStyleIdx="1" presStyleCnt="2" custScaleX="149928">
+        <dgm:presLayoutVars>
+          <dgm:bulletEnabled val="1"/>
+        </dgm:presLayoutVars>
+      </dgm:prSet>
+      <dgm:spPr/>
+    </dgm:pt>
+  </dgm:ptLst>
+  <dgm:cxnLst>
+    <dgm:cxn modelId="{A9AA1277-1B87-4A58-BE90-101DAA9AFB7F}" type="presOf" srcId="{04848607-BE24-4B54-81B7-A5F309859D7E}" destId="{9B23216D-6693-4BFC-9CF6-AD539BF88CA5}" srcOrd="0" destOrd="0" presId="urn:microsoft.com/office/officeart/2005/8/layout/process1"/>
+    <dgm:cxn modelId="{058DB77E-EFE4-4212-A5EF-52E01519C1FF}" type="presOf" srcId="{7EBBE6E8-6E7E-4D65-BF9A-CBE826D3E8F7}" destId="{70E55983-5224-4F6B-AA1C-AA6BD0B29B75}" srcOrd="0" destOrd="0" presId="urn:microsoft.com/office/officeart/2005/8/layout/process1"/>
+    <dgm:cxn modelId="{D4952787-C28A-465F-9A11-997F104F7CC9}" type="presOf" srcId="{2D97ED5A-1339-4C9C-B5F8-FE34BDF5298F}" destId="{6500D5A7-59F4-41BA-9665-D68A8DD51CF3}" srcOrd="0" destOrd="0" presId="urn:microsoft.com/office/officeart/2005/8/layout/process1"/>
+    <dgm:cxn modelId="{C46A7489-B2E4-4644-A2ED-12FC004C2795}" srcId="{7EBBE6E8-6E7E-4D65-BF9A-CBE826D3E8F7}" destId="{A3DE5596-FCF6-4419-851C-C46A4BE9DEE1}" srcOrd="1" destOrd="0" parTransId="{1885E0DB-4BBF-48FA-BD02-E3ABD0C7CE32}" sibTransId="{ED3E3BDB-F17D-43FA-A309-F6D44123545C}"/>
+    <dgm:cxn modelId="{E17E479A-463D-46D3-9DE3-E9BA71AA31F1}" type="presOf" srcId="{A3DE5596-FCF6-4419-851C-C46A4BE9DEE1}" destId="{831935E8-20A3-4341-B34F-EBEC45D2FF16}" srcOrd="0" destOrd="0" presId="urn:microsoft.com/office/officeart/2005/8/layout/process1"/>
+    <dgm:cxn modelId="{43123ED0-740F-490C-A50F-AEA13F7287BA}" srcId="{7EBBE6E8-6E7E-4D65-BF9A-CBE826D3E8F7}" destId="{2D97ED5A-1339-4C9C-B5F8-FE34BDF5298F}" srcOrd="0" destOrd="0" parTransId="{9E48A871-5ADD-4363-94C8-DB830A190120}" sibTransId="{04848607-BE24-4B54-81B7-A5F309859D7E}"/>
+    <dgm:cxn modelId="{F0FDE2F3-619F-468F-9B81-55ABCA676C0C}" type="presOf" srcId="{04848607-BE24-4B54-81B7-A5F309859D7E}" destId="{B43A671B-7E61-48F4-8A97-5FB07AF36519}" srcOrd="1" destOrd="0" presId="urn:microsoft.com/office/officeart/2005/8/layout/process1"/>
+    <dgm:cxn modelId="{580A4218-D3F8-4EFB-A4E3-B124C99179C1}" type="presParOf" srcId="{70E55983-5224-4F6B-AA1C-AA6BD0B29B75}" destId="{6500D5A7-59F4-41BA-9665-D68A8DD51CF3}" srcOrd="0" destOrd="0" presId="urn:microsoft.com/office/officeart/2005/8/layout/process1"/>
+    <dgm:cxn modelId="{5A8A3BF5-786E-4124-959B-BA84DDEB66A2}" type="presParOf" srcId="{70E55983-5224-4F6B-AA1C-AA6BD0B29B75}" destId="{9B23216D-6693-4BFC-9CF6-AD539BF88CA5}" srcOrd="1" destOrd="0" presId="urn:microsoft.com/office/officeart/2005/8/layout/process1"/>
+    <dgm:cxn modelId="{E44B28F8-A13E-4916-A909-1A39E505EF78}" type="presParOf" srcId="{9B23216D-6693-4BFC-9CF6-AD539BF88CA5}" destId="{B43A671B-7E61-48F4-8A97-5FB07AF36519}" srcOrd="0" destOrd="0" presId="urn:microsoft.com/office/officeart/2005/8/layout/process1"/>
+    <dgm:cxn modelId="{A78F81A6-DF88-451F-AE7B-FA6B738B08DB}" type="presParOf" srcId="{70E55983-5224-4F6B-AA1C-AA6BD0B29B75}" destId="{831935E8-20A3-4341-B34F-EBEC45D2FF16}" srcOrd="2" destOrd="0" presId="urn:microsoft.com/office/officeart/2005/8/layout/process1"/>
+  </dgm:cxnLst>
+  <dgm:bg/>
+  <dgm:whole/>
+  <dgm:extLst>
+    <a:ext uri="http://schemas.microsoft.com/office/drawing/2008/diagram">
+      <dsp:dataModelExt xmlns:dsp="http://schemas.microsoft.com/office/drawing/2008/diagram" relId="rId16" minVer="http://schemas.openxmlformats.org/drawingml/2006/diagram"/>
+    </a:ext>
+  </dgm:extLst>
+</dgm:dataModel>
+</file>
+
+<file path=ppt/diagrams/drawing1.xml><?xml version="1.0" encoding="utf-8"?>
+<dsp:drawing xmlns:dgm="http://schemas.openxmlformats.org/drawingml/2006/diagram" xmlns:dsp="http://schemas.microsoft.com/office/drawing/2008/diagram" xmlns:a="http://schemas.openxmlformats.org/drawingml/2006/main">
+  <dsp:spTree>
+    <dsp:nvGrpSpPr>
+      <dsp:cNvPr id="0" name=""/>
+      <dsp:cNvGrpSpPr/>
+    </dsp:nvGrpSpPr>
+    <dsp:grpSpPr/>
+    <dsp:sp modelId="{6500D5A7-59F4-41BA-9665-D68A8DD51CF3}">
+      <dsp:nvSpPr>
+        <dsp:cNvPr id="0" name=""/>
+        <dsp:cNvSpPr/>
+      </dsp:nvSpPr>
+      <dsp:spPr>
+        <a:xfrm>
+          <a:off x="834" y="93831"/>
+          <a:ext cx="1778667" cy="1067200"/>
+        </a:xfrm>
+        <a:prstGeom prst="roundRect">
+          <a:avLst>
+            <a:gd name="adj" fmla="val 10000"/>
+          </a:avLst>
+        </a:prstGeom>
+        <a:solidFill>
+          <a:schemeClr val="accent1">
+            <a:hueOff val="0"/>
+            <a:satOff val="0"/>
+            <a:lumOff val="0"/>
+            <a:alphaOff val="0"/>
+          </a:schemeClr>
+        </a:solidFill>
+        <a:ln w="15875" cap="flat" cmpd="sng" algn="ctr">
+          <a:solidFill>
+            <a:schemeClr val="lt1">
+              <a:hueOff val="0"/>
+              <a:satOff val="0"/>
+              <a:lumOff val="0"/>
+              <a:alphaOff val="0"/>
+            </a:schemeClr>
+          </a:solidFill>
+          <a:prstDash val="solid"/>
+        </a:ln>
+        <a:effectLst/>
+      </dsp:spPr>
+      <dsp:style>
+        <a:lnRef idx="2">
+          <a:scrgbClr r="0" g="0" b="0"/>
+        </a:lnRef>
+        <a:fillRef idx="1">
+          <a:scrgbClr r="0" g="0" b="0"/>
+        </a:fillRef>
+        <a:effectRef idx="0">
+          <a:scrgbClr r="0" g="0" b="0"/>
+        </a:effectRef>
+        <a:fontRef idx="minor">
+          <a:schemeClr val="lt1"/>
+        </a:fontRef>
+      </dsp:style>
+      <dsp:txBody>
+        <a:bodyPr spcFirstLastPara="0" vert="horz" wrap="square" lIns="68580" tIns="68580" rIns="68580" bIns="68580" numCol="1" spcCol="1270" anchor="ctr" anchorCtr="0">
+          <a:noAutofit/>
+        </a:bodyPr>
+        <a:lstStyle/>
+        <a:p>
+          <a:pPr marL="0" lvl="0" indent="0" algn="ctr" defTabSz="800100">
+            <a:lnSpc>
+              <a:spcPct val="90000"/>
+            </a:lnSpc>
+            <a:spcBef>
+              <a:spcPct val="0"/>
+            </a:spcBef>
+            <a:spcAft>
+              <a:spcPct val="35000"/>
+            </a:spcAft>
+            <a:buNone/>
+          </a:pPr>
+          <a:r>
+            <a:rPr lang="ru-RU" sz="1800" b="0" i="0" kern="1200" dirty="0"/>
+            <a:t>Мало данных для обучения модели</a:t>
+          </a:r>
+          <a:endParaRPr lang="ru-RU" sz="1800" kern="1200" dirty="0"/>
+        </a:p>
+      </dsp:txBody>
+      <dsp:txXfrm>
+        <a:off x="32091" y="125088"/>
+        <a:ext cx="1716153" cy="1004686"/>
+      </dsp:txXfrm>
+    </dsp:sp>
+    <dsp:sp modelId="{9B23216D-6693-4BFC-9CF6-AD539BF88CA5}">
+      <dsp:nvSpPr>
+        <dsp:cNvPr id="0" name=""/>
+        <dsp:cNvSpPr/>
+      </dsp:nvSpPr>
+      <dsp:spPr>
+        <a:xfrm>
+          <a:off x="1856082" y="406876"/>
+          <a:ext cx="579647" cy="441109"/>
+        </a:xfrm>
+        <a:prstGeom prst="rightArrow">
+          <a:avLst/>
+        </a:prstGeom>
+        <a:gradFill flip="none" rotWithShape="0">
+          <a:gsLst>
+            <a:gs pos="0">
+              <a:schemeClr val="accent1">
+                <a:lumMod val="60000"/>
+                <a:lumOff val="40000"/>
+                <a:shade val="30000"/>
+                <a:satMod val="115000"/>
+              </a:schemeClr>
+            </a:gs>
+            <a:gs pos="50000">
+              <a:schemeClr val="accent1">
+                <a:lumMod val="60000"/>
+                <a:lumOff val="40000"/>
+                <a:shade val="67500"/>
+                <a:satMod val="115000"/>
+              </a:schemeClr>
+            </a:gs>
+            <a:gs pos="100000">
+              <a:schemeClr val="accent1">
+                <a:lumMod val="60000"/>
+                <a:lumOff val="40000"/>
+                <a:shade val="100000"/>
+                <a:satMod val="115000"/>
+              </a:schemeClr>
+            </a:gs>
+          </a:gsLst>
+          <a:path path="circle">
+            <a:fillToRect t="100000" r="100000"/>
+          </a:path>
+          <a:tileRect l="-100000" b="-100000"/>
+        </a:gradFill>
+        <a:ln>
+          <a:noFill/>
+        </a:ln>
+        <a:effectLst/>
+      </dsp:spPr>
+      <dsp:style>
+        <a:lnRef idx="0">
+          <a:scrgbClr r="0" g="0" b="0"/>
+        </a:lnRef>
+        <a:fillRef idx="1">
+          <a:scrgbClr r="0" g="0" b="0"/>
+        </a:fillRef>
+        <a:effectRef idx="0">
+          <a:scrgbClr r="0" g="0" b="0"/>
+        </a:effectRef>
+        <a:fontRef idx="minor">
+          <a:schemeClr val="lt1"/>
+        </a:fontRef>
+      </dsp:style>
+      <dsp:txBody>
+        <a:bodyPr spcFirstLastPara="0" vert="horz" wrap="square" lIns="0" tIns="0" rIns="0" bIns="0" numCol="1" spcCol="1270" anchor="ctr" anchorCtr="0">
+          <a:noAutofit/>
+        </a:bodyPr>
+        <a:lstStyle/>
+        <a:p>
+          <a:pPr marL="0" lvl="0" indent="0" algn="ctr" defTabSz="622300">
+            <a:lnSpc>
+              <a:spcPct val="90000"/>
+            </a:lnSpc>
+            <a:spcBef>
+              <a:spcPct val="0"/>
+            </a:spcBef>
+            <a:spcAft>
+              <a:spcPct val="35000"/>
+            </a:spcAft>
+            <a:buNone/>
+          </a:pPr>
+          <a:endParaRPr lang="ru-RU" sz="1400" kern="1200"/>
+        </a:p>
+      </dsp:txBody>
+      <dsp:txXfrm>
+        <a:off x="1856082" y="495098"/>
+        <a:ext cx="447314" cy="264665"/>
+      </dsp:txXfrm>
+    </dsp:sp>
+    <dsp:sp modelId="{831935E8-20A3-4341-B34F-EBEC45D2FF16}">
+      <dsp:nvSpPr>
+        <dsp:cNvPr id="0" name=""/>
+        <dsp:cNvSpPr/>
+      </dsp:nvSpPr>
+      <dsp:spPr>
+        <a:xfrm>
+          <a:off x="2490967" y="93831"/>
+          <a:ext cx="1778667" cy="1067200"/>
+        </a:xfrm>
+        <a:prstGeom prst="roundRect">
+          <a:avLst>
+            <a:gd name="adj" fmla="val 10000"/>
+          </a:avLst>
+        </a:prstGeom>
+        <a:solidFill>
+          <a:schemeClr val="accent1">
+            <a:lumMod val="60000"/>
+            <a:lumOff val="40000"/>
+          </a:schemeClr>
+        </a:solidFill>
+        <a:ln w="15875" cap="flat" cmpd="sng" algn="ctr">
+          <a:solidFill>
+            <a:schemeClr val="lt1">
+              <a:hueOff val="0"/>
+              <a:satOff val="0"/>
+              <a:lumOff val="0"/>
+              <a:alphaOff val="0"/>
+            </a:schemeClr>
+          </a:solidFill>
+          <a:prstDash val="solid"/>
+        </a:ln>
+        <a:effectLst/>
+      </dsp:spPr>
+      <dsp:style>
+        <a:lnRef idx="2">
+          <a:scrgbClr r="0" g="0" b="0"/>
+        </a:lnRef>
+        <a:fillRef idx="1">
+          <a:scrgbClr r="0" g="0" b="0"/>
+        </a:fillRef>
+        <a:effectRef idx="0">
+          <a:scrgbClr r="0" g="0" b="0"/>
+        </a:effectRef>
+        <a:fontRef idx="minor">
+          <a:schemeClr val="lt1"/>
+        </a:fontRef>
+      </dsp:style>
+      <dsp:txBody>
+        <a:bodyPr spcFirstLastPara="0" vert="horz" wrap="square" lIns="68580" tIns="68580" rIns="68580" bIns="68580" numCol="1" spcCol="1270" anchor="ctr" anchorCtr="0">
+          <a:noAutofit/>
+        </a:bodyPr>
+        <a:lstStyle/>
+        <a:p>
+          <a:pPr marL="0" lvl="0" indent="0" algn="ctr" defTabSz="800100">
+            <a:lnSpc>
+              <a:spcPct val="90000"/>
+            </a:lnSpc>
+            <a:spcBef>
+              <a:spcPct val="0"/>
+            </a:spcBef>
+            <a:spcAft>
+              <a:spcPct val="35000"/>
+            </a:spcAft>
+            <a:buNone/>
+          </a:pPr>
+          <a:r>
+            <a:rPr lang="ru-RU" sz="1800" b="0" i="0" kern="1200" dirty="0"/>
+            <a:t>Синтетические данные, ручное оценивание</a:t>
+          </a:r>
+          <a:endParaRPr lang="ru-RU" sz="1800" kern="1200" dirty="0"/>
+        </a:p>
+      </dsp:txBody>
+      <dsp:txXfrm>
+        <a:off x="2522224" y="125088"/>
+        <a:ext cx="1716153" cy="1004686"/>
+      </dsp:txXfrm>
+    </dsp:sp>
+  </dsp:spTree>
+</dsp:drawing>
+</file>
+
+<file path=ppt/diagrams/drawing2.xml><?xml version="1.0" encoding="utf-8"?>
+<dsp:drawing xmlns:dgm="http://schemas.openxmlformats.org/drawingml/2006/diagram" xmlns:dsp="http://schemas.microsoft.com/office/drawing/2008/diagram" xmlns:a="http://schemas.openxmlformats.org/drawingml/2006/main">
+  <dsp:spTree>
+    <dsp:nvGrpSpPr>
+      <dsp:cNvPr id="0" name=""/>
+      <dsp:cNvGrpSpPr/>
+    </dsp:nvGrpSpPr>
+    <dsp:grpSpPr/>
+    <dsp:sp modelId="{6500D5A7-59F4-41BA-9665-D68A8DD51CF3}">
+      <dsp:nvSpPr>
+        <dsp:cNvPr id="0" name=""/>
+        <dsp:cNvSpPr/>
+      </dsp:nvSpPr>
+      <dsp:spPr>
+        <a:xfrm>
+          <a:off x="525" y="0"/>
+          <a:ext cx="1232347" cy="1254863"/>
+        </a:xfrm>
+        <a:prstGeom prst="roundRect">
+          <a:avLst>
+            <a:gd name="adj" fmla="val 10000"/>
+          </a:avLst>
+        </a:prstGeom>
+        <a:solidFill>
+          <a:schemeClr val="accent1">
+            <a:hueOff val="0"/>
+            <a:satOff val="0"/>
+            <a:lumOff val="0"/>
+            <a:alphaOff val="0"/>
+          </a:schemeClr>
+        </a:solidFill>
+        <a:ln w="15875" cap="flat" cmpd="sng" algn="ctr">
+          <a:solidFill>
+            <a:schemeClr val="lt1">
+              <a:hueOff val="0"/>
+              <a:satOff val="0"/>
+              <a:lumOff val="0"/>
+              <a:alphaOff val="0"/>
+            </a:schemeClr>
+          </a:solidFill>
+          <a:prstDash val="solid"/>
+        </a:ln>
+        <a:effectLst/>
+      </dsp:spPr>
+      <dsp:style>
+        <a:lnRef idx="2">
+          <a:scrgbClr r="0" g="0" b="0"/>
+        </a:lnRef>
+        <a:fillRef idx="1">
+          <a:scrgbClr r="0" g="0" b="0"/>
+        </a:fillRef>
+        <a:effectRef idx="0">
+          <a:scrgbClr r="0" g="0" b="0"/>
+        </a:effectRef>
+        <a:fontRef idx="minor">
+          <a:schemeClr val="lt1"/>
+        </a:fontRef>
+      </dsp:style>
+      <dsp:txBody>
+        <a:bodyPr spcFirstLastPara="0" vert="horz" wrap="square" lIns="53340" tIns="53340" rIns="53340" bIns="53340" numCol="1" spcCol="1270" anchor="ctr" anchorCtr="0">
+          <a:noAutofit/>
+        </a:bodyPr>
+        <a:lstStyle/>
+        <a:p>
+          <a:pPr marL="0" lvl="0" indent="0" algn="ctr" defTabSz="622300">
+            <a:lnSpc>
+              <a:spcPct val="90000"/>
+            </a:lnSpc>
+            <a:spcBef>
+              <a:spcPct val="0"/>
+            </a:spcBef>
+            <a:spcAft>
+              <a:spcPct val="35000"/>
+            </a:spcAft>
+            <a:buNone/>
+          </a:pPr>
+          <a:r>
+            <a:rPr lang="ru-RU" sz="1400" b="0" i="0" kern="1200" dirty="0"/>
+            <a:t>Низкая точность модели</a:t>
+          </a:r>
+          <a:endParaRPr lang="ru-RU" sz="1400" kern="1200" dirty="0"/>
+        </a:p>
+      </dsp:txBody>
+      <dsp:txXfrm>
+        <a:off x="36619" y="36094"/>
+        <a:ext cx="1160159" cy="1182675"/>
+      </dsp:txXfrm>
+    </dsp:sp>
+    <dsp:sp modelId="{9B23216D-6693-4BFC-9CF6-AD539BF88CA5}">
+      <dsp:nvSpPr>
+        <dsp:cNvPr id="0" name=""/>
+        <dsp:cNvSpPr/>
+      </dsp:nvSpPr>
+      <dsp:spPr>
+        <a:xfrm>
+          <a:off x="1285932" y="474620"/>
+          <a:ext cx="401607" cy="305622"/>
+        </a:xfrm>
+        <a:prstGeom prst="rightArrow">
+          <a:avLst/>
+        </a:prstGeom>
+        <a:gradFill flip="none" rotWithShape="0">
+          <a:gsLst>
+            <a:gs pos="0">
+              <a:schemeClr val="accent1">
+                <a:lumMod val="60000"/>
+                <a:lumOff val="40000"/>
+                <a:shade val="30000"/>
+                <a:satMod val="115000"/>
+              </a:schemeClr>
+            </a:gs>
+            <a:gs pos="50000">
+              <a:schemeClr val="accent1">
+                <a:lumMod val="60000"/>
+                <a:lumOff val="40000"/>
+                <a:shade val="67500"/>
+                <a:satMod val="115000"/>
+              </a:schemeClr>
+            </a:gs>
+            <a:gs pos="100000">
+              <a:schemeClr val="accent1">
+                <a:lumMod val="60000"/>
+                <a:lumOff val="40000"/>
+                <a:shade val="100000"/>
+                <a:satMod val="115000"/>
+              </a:schemeClr>
+            </a:gs>
+          </a:gsLst>
+          <a:path path="circle">
+            <a:fillToRect t="100000" r="100000"/>
+          </a:path>
+          <a:tileRect l="-100000" b="-100000"/>
+        </a:gradFill>
+        <a:ln>
+          <a:noFill/>
+        </a:ln>
+        <a:effectLst/>
+      </dsp:spPr>
+      <dsp:style>
+        <a:lnRef idx="0">
+          <a:scrgbClr r="0" g="0" b="0"/>
+        </a:lnRef>
+        <a:fillRef idx="1">
+          <a:scrgbClr r="0" g="0" b="0"/>
+        </a:fillRef>
+        <a:effectRef idx="0">
+          <a:scrgbClr r="0" g="0" b="0"/>
+        </a:effectRef>
+        <a:fontRef idx="minor">
+          <a:schemeClr val="lt1"/>
+        </a:fontRef>
+      </dsp:style>
+      <dsp:txBody>
+        <a:bodyPr spcFirstLastPara="0" vert="horz" wrap="square" lIns="0" tIns="0" rIns="0" bIns="0" numCol="1" spcCol="1270" anchor="ctr" anchorCtr="0">
+          <a:noAutofit/>
+        </a:bodyPr>
+        <a:lstStyle/>
+        <a:p>
+          <a:pPr marL="0" lvl="0" indent="0" algn="ctr" defTabSz="533400">
+            <a:lnSpc>
+              <a:spcPct val="90000"/>
+            </a:lnSpc>
+            <a:spcBef>
+              <a:spcPct val="0"/>
+            </a:spcBef>
+            <a:spcAft>
+              <a:spcPct val="35000"/>
+            </a:spcAft>
+            <a:buNone/>
+          </a:pPr>
+          <a:endParaRPr lang="ru-RU" sz="1200" kern="1200"/>
+        </a:p>
+      </dsp:txBody>
+      <dsp:txXfrm>
+        <a:off x="1285932" y="535744"/>
+        <a:ext cx="309920" cy="183374"/>
+      </dsp:txXfrm>
+    </dsp:sp>
+    <dsp:sp modelId="{831935E8-20A3-4341-B34F-EBEC45D2FF16}">
+      <dsp:nvSpPr>
+        <dsp:cNvPr id="0" name=""/>
+        <dsp:cNvSpPr/>
+      </dsp:nvSpPr>
+      <dsp:spPr>
+        <a:xfrm>
+          <a:off x="1725811" y="0"/>
+          <a:ext cx="2544131" cy="1254863"/>
+        </a:xfrm>
+        <a:prstGeom prst="roundRect">
+          <a:avLst>
+            <a:gd name="adj" fmla="val 10000"/>
+          </a:avLst>
+        </a:prstGeom>
+        <a:solidFill>
+          <a:schemeClr val="accent1">
+            <a:lumMod val="60000"/>
+            <a:lumOff val="40000"/>
+          </a:schemeClr>
+        </a:solidFill>
+        <a:ln w="15875" cap="flat" cmpd="sng" algn="ctr">
+          <a:solidFill>
+            <a:schemeClr val="lt1">
+              <a:hueOff val="0"/>
+              <a:satOff val="0"/>
+              <a:lumOff val="0"/>
+              <a:alphaOff val="0"/>
+            </a:schemeClr>
+          </a:solidFill>
+          <a:prstDash val="solid"/>
+        </a:ln>
+        <a:effectLst/>
+      </dsp:spPr>
+      <dsp:style>
+        <a:lnRef idx="2">
+          <a:scrgbClr r="0" g="0" b="0"/>
+        </a:lnRef>
+        <a:fillRef idx="1">
+          <a:scrgbClr r="0" g="0" b="0"/>
+        </a:fillRef>
+        <a:effectRef idx="0">
+          <a:scrgbClr r="0" g="0" b="0"/>
+        </a:effectRef>
+        <a:fontRef idx="minor">
+          <a:schemeClr val="lt1"/>
+        </a:fontRef>
+      </dsp:style>
+      <dsp:txBody>
+        <a:bodyPr spcFirstLastPara="0" vert="horz" wrap="square" lIns="53340" tIns="53340" rIns="53340" bIns="53340" numCol="1" spcCol="1270" anchor="ctr" anchorCtr="0">
+          <a:noAutofit/>
+        </a:bodyPr>
+        <a:lstStyle/>
+        <a:p>
+          <a:pPr marL="0" lvl="0" indent="0" algn="ctr" defTabSz="622300">
+            <a:lnSpc>
+              <a:spcPct val="90000"/>
+            </a:lnSpc>
+            <a:spcBef>
+              <a:spcPct val="0"/>
+            </a:spcBef>
+            <a:spcAft>
+              <a:spcPct val="35000"/>
+            </a:spcAft>
+            <a:buNone/>
+          </a:pPr>
+          <a:r>
+            <a:rPr lang="ru-RU" sz="1400" b="0" i="0" kern="1200" dirty="0"/>
+            <a:t>Анализ ошибок, добавление признаков, иной вариант (популярное + коллаборативная фильтрация)</a:t>
+          </a:r>
+          <a:endParaRPr lang="ru-RU" sz="1400" kern="1200" dirty="0"/>
+        </a:p>
+      </dsp:txBody>
+      <dsp:txXfrm>
+        <a:off x="1762565" y="36754"/>
+        <a:ext cx="2470623" cy="1181355"/>
+      </dsp:txXfrm>
+    </dsp:sp>
+  </dsp:spTree>
+</dsp:drawing>
+</file>
+
+<file path=ppt/diagrams/drawing3.xml><?xml version="1.0" encoding="utf-8"?>
+<dsp:drawing xmlns:dgm="http://schemas.openxmlformats.org/drawingml/2006/diagram" xmlns:dsp="http://schemas.microsoft.com/office/drawing/2008/diagram" xmlns:a="http://schemas.openxmlformats.org/drawingml/2006/main">
+  <dsp:spTree>
+    <dsp:nvGrpSpPr>
+      <dsp:cNvPr id="0" name=""/>
+      <dsp:cNvGrpSpPr/>
+    </dsp:nvGrpSpPr>
+    <dsp:grpSpPr/>
+    <dsp:sp modelId="{6500D5A7-59F4-41BA-9665-D68A8DD51CF3}">
+      <dsp:nvSpPr>
+        <dsp:cNvPr id="0" name=""/>
+        <dsp:cNvSpPr/>
+      </dsp:nvSpPr>
+      <dsp:spPr>
+        <a:xfrm>
+          <a:off x="1155" y="0"/>
+          <a:ext cx="1472144" cy="1254863"/>
+        </a:xfrm>
+        <a:prstGeom prst="roundRect">
+          <a:avLst>
+            <a:gd name="adj" fmla="val 10000"/>
+          </a:avLst>
+        </a:prstGeom>
+        <a:solidFill>
+          <a:schemeClr val="accent1">
+            <a:hueOff val="0"/>
+            <a:satOff val="0"/>
+            <a:lumOff val="0"/>
+            <a:alphaOff val="0"/>
+          </a:schemeClr>
+        </a:solidFill>
+        <a:ln w="15875" cap="flat" cmpd="sng" algn="ctr">
+          <a:solidFill>
+            <a:schemeClr val="lt1">
+              <a:hueOff val="0"/>
+              <a:satOff val="0"/>
+              <a:lumOff val="0"/>
+              <a:alphaOff val="0"/>
+            </a:schemeClr>
+          </a:solidFill>
+          <a:prstDash val="solid"/>
+        </a:ln>
+        <a:effectLst/>
+      </dsp:spPr>
+      <dsp:style>
+        <a:lnRef idx="2">
+          <a:scrgbClr r="0" g="0" b="0"/>
+        </a:lnRef>
+        <a:fillRef idx="1">
+          <a:scrgbClr r="0" g="0" b="0"/>
+        </a:fillRef>
+        <a:effectRef idx="0">
+          <a:scrgbClr r="0" g="0" b="0"/>
+        </a:effectRef>
+        <a:fontRef idx="minor">
+          <a:schemeClr val="lt1"/>
+        </a:fontRef>
+      </dsp:style>
+      <dsp:txBody>
+        <a:bodyPr spcFirstLastPara="0" vert="horz" wrap="square" lIns="57150" tIns="57150" rIns="57150" bIns="57150" numCol="1" spcCol="1270" anchor="ctr" anchorCtr="0">
+          <a:noAutofit/>
+        </a:bodyPr>
+        <a:lstStyle/>
+        <a:p>
+          <a:pPr marL="0" lvl="0" indent="0" algn="ctr" defTabSz="666750">
+            <a:lnSpc>
+              <a:spcPct val="90000"/>
+            </a:lnSpc>
+            <a:spcBef>
+              <a:spcPct val="0"/>
+            </a:spcBef>
+            <a:spcAft>
+              <a:spcPct val="35000"/>
+            </a:spcAft>
+            <a:buNone/>
+          </a:pPr>
+          <a:r>
+            <a:rPr lang="ru-RU" sz="1500" b="0" i="0" kern="1200" dirty="0"/>
+            <a:t>Высокая нагрузка на сервер</a:t>
+          </a:r>
+          <a:endParaRPr lang="ru-RU" sz="1500" kern="1200" dirty="0"/>
+        </a:p>
+      </dsp:txBody>
+      <dsp:txXfrm>
+        <a:off x="37909" y="36754"/>
+        <a:ext cx="1398636" cy="1181355"/>
+      </dsp:txXfrm>
+    </dsp:sp>
+    <dsp:sp modelId="{9B23216D-6693-4BFC-9CF6-AD539BF88CA5}">
+      <dsp:nvSpPr>
+        <dsp:cNvPr id="0" name=""/>
+        <dsp:cNvSpPr/>
+      </dsp:nvSpPr>
+      <dsp:spPr>
+        <a:xfrm>
+          <a:off x="1536683" y="444885"/>
+          <a:ext cx="479754" cy="365091"/>
+        </a:xfrm>
+        <a:prstGeom prst="rightArrow">
+          <a:avLst/>
+        </a:prstGeom>
+        <a:gradFill flip="none" rotWithShape="0">
+          <a:gsLst>
+            <a:gs pos="0">
+              <a:schemeClr val="accent1">
+                <a:lumMod val="60000"/>
+                <a:lumOff val="40000"/>
+                <a:shade val="30000"/>
+                <a:satMod val="115000"/>
+              </a:schemeClr>
+            </a:gs>
+            <a:gs pos="50000">
+              <a:schemeClr val="accent1">
+                <a:lumMod val="60000"/>
+                <a:lumOff val="40000"/>
+                <a:shade val="67500"/>
+                <a:satMod val="115000"/>
+              </a:schemeClr>
+            </a:gs>
+            <a:gs pos="100000">
+              <a:schemeClr val="accent1">
+                <a:lumMod val="60000"/>
+                <a:lumOff val="40000"/>
+                <a:shade val="100000"/>
+                <a:satMod val="115000"/>
+              </a:schemeClr>
+            </a:gs>
+          </a:gsLst>
+          <a:path path="circle">
+            <a:fillToRect t="100000" r="100000"/>
+          </a:path>
+          <a:tileRect l="-100000" b="-100000"/>
+        </a:gradFill>
+        <a:ln>
+          <a:noFill/>
+        </a:ln>
+        <a:effectLst/>
+      </dsp:spPr>
+      <dsp:style>
+        <a:lnRef idx="0">
+          <a:scrgbClr r="0" g="0" b="0"/>
+        </a:lnRef>
+        <a:fillRef idx="1">
+          <a:scrgbClr r="0" g="0" b="0"/>
+        </a:fillRef>
+        <a:effectRef idx="0">
+          <a:scrgbClr r="0" g="0" b="0"/>
+        </a:effectRef>
+        <a:fontRef idx="minor">
+          <a:schemeClr val="lt1"/>
+        </a:fontRef>
+      </dsp:style>
+      <dsp:txBody>
+        <a:bodyPr spcFirstLastPara="0" vert="horz" wrap="square" lIns="0" tIns="0" rIns="0" bIns="0" numCol="1" spcCol="1270" anchor="ctr" anchorCtr="0">
+          <a:noAutofit/>
+        </a:bodyPr>
+        <a:lstStyle/>
+        <a:p>
+          <a:pPr marL="0" lvl="0" indent="0" algn="ctr" defTabSz="533400">
+            <a:lnSpc>
+              <a:spcPct val="90000"/>
+            </a:lnSpc>
+            <a:spcBef>
+              <a:spcPct val="0"/>
+            </a:spcBef>
+            <a:spcAft>
+              <a:spcPct val="35000"/>
+            </a:spcAft>
+            <a:buNone/>
+          </a:pPr>
+          <a:endParaRPr lang="ru-RU" sz="1200" kern="1200"/>
+        </a:p>
+      </dsp:txBody>
+      <dsp:txXfrm>
+        <a:off x="1536683" y="517903"/>
+        <a:ext cx="370227" cy="219055"/>
+      </dsp:txXfrm>
+    </dsp:sp>
+    <dsp:sp modelId="{831935E8-20A3-4341-B34F-EBEC45D2FF16}">
+      <dsp:nvSpPr>
+        <dsp:cNvPr id="0" name=""/>
+        <dsp:cNvSpPr/>
+      </dsp:nvSpPr>
+      <dsp:spPr>
+        <a:xfrm>
+          <a:off x="2062157" y="0"/>
+          <a:ext cx="2207156" cy="1254863"/>
+        </a:xfrm>
+        <a:prstGeom prst="roundRect">
+          <a:avLst>
+            <a:gd name="adj" fmla="val 10000"/>
+          </a:avLst>
+        </a:prstGeom>
+        <a:solidFill>
+          <a:schemeClr val="accent1">
+            <a:lumMod val="60000"/>
+            <a:lumOff val="40000"/>
+          </a:schemeClr>
+        </a:solidFill>
+        <a:ln w="15875" cap="flat" cmpd="sng" algn="ctr">
+          <a:solidFill>
+            <a:schemeClr val="lt1">
+              <a:hueOff val="0"/>
+              <a:satOff val="0"/>
+              <a:lumOff val="0"/>
+              <a:alphaOff val="0"/>
+            </a:schemeClr>
+          </a:solidFill>
+          <a:prstDash val="solid"/>
+        </a:ln>
+        <a:effectLst/>
+      </dsp:spPr>
+      <dsp:style>
+        <a:lnRef idx="2">
+          <a:scrgbClr r="0" g="0" b="0"/>
+        </a:lnRef>
+        <a:fillRef idx="1">
+          <a:scrgbClr r="0" g="0" b="0"/>
+        </a:fillRef>
+        <a:effectRef idx="0">
+          <a:scrgbClr r="0" g="0" b="0"/>
+        </a:effectRef>
+        <a:fontRef idx="minor">
+          <a:schemeClr val="lt1"/>
+        </a:fontRef>
+      </dsp:style>
+      <dsp:txBody>
+        <a:bodyPr spcFirstLastPara="0" vert="horz" wrap="square" lIns="57150" tIns="57150" rIns="57150" bIns="57150" numCol="1" spcCol="1270" anchor="ctr" anchorCtr="0">
+          <a:noAutofit/>
+        </a:bodyPr>
+        <a:lstStyle/>
+        <a:p>
+          <a:pPr marL="0" lvl="0" indent="0" algn="ctr" defTabSz="666750">
+            <a:lnSpc>
+              <a:spcPct val="90000"/>
+            </a:lnSpc>
+            <a:spcBef>
+              <a:spcPct val="0"/>
+            </a:spcBef>
+            <a:spcAft>
+              <a:spcPct val="35000"/>
+            </a:spcAft>
+            <a:buNone/>
+          </a:pPr>
+          <a:r>
+            <a:rPr lang="ru-RU" sz="1500" b="0" i="0" kern="1200" dirty="0"/>
+            <a:t>Кэширование, асинхронность, при необходимости – более мощный сервер</a:t>
+          </a:r>
+          <a:endParaRPr lang="ru-RU" sz="1500" kern="1200" dirty="0"/>
+        </a:p>
+      </dsp:txBody>
+      <dsp:txXfrm>
+        <a:off x="2098911" y="36754"/>
+        <a:ext cx="2133648" cy="1181355"/>
+      </dsp:txXfrm>
+    </dsp:sp>
+  </dsp:spTree>
+</dsp:drawing>
+</file>
+
+<file path=ppt/diagrams/layout1.xml><?xml version="1.0" encoding="utf-8"?>
+<dgm:layoutDef xmlns:dgm="http://schemas.openxmlformats.org/drawingml/2006/diagram" xmlns:a="http://schemas.openxmlformats.org/drawingml/2006/main" uniqueId="urn:microsoft.com/office/officeart/2005/8/layout/process1">
+  <dgm:title val=""/>
+  <dgm:desc val=""/>
+  <dgm:catLst>
+    <dgm:cat type="process" pri="1000"/>
+    <dgm:cat type="convert" pri="15000"/>
+  </dgm:catLst>
+  <dgm:sampData useDef="1">
+    <dgm:dataModel>
+      <dgm:ptLst/>
+      <dgm:bg/>
+      <dgm:whole/>
+    </dgm:dataModel>
+  </dgm:sampData>
+  <dgm:styleData>
+    <dgm:dataModel>
+      <dgm:ptLst>
+        <dgm:pt modelId="0" type="doc"/>
+        <dgm:pt modelId="1"/>
+        <dgm:pt modelId="2"/>
+      </dgm:ptLst>
+      <dgm:cxnLst>
+        <dgm:cxn modelId="3" srcId="0" destId="1" srcOrd="0" destOrd="0"/>
+        <dgm:cxn modelId="4" srcId="0" destId="2" srcOrd="1" destOrd="0"/>
+      </dgm:cxnLst>
+      <dgm:bg/>
+      <dgm:whole/>
+    </dgm:dataModel>
+  </dgm:styleData>
+  <dgm:clrData>
+    <dgm:dataModel>
+      <dgm:ptLst>
+        <dgm:pt modelId="0" type="doc"/>
+        <dgm:pt modelId="1"/>
+        <dgm:pt modelId="2"/>
+        <dgm:pt modelId="3"/>
+        <dgm:pt modelId="4"/>
+      </dgm:ptLst>
+      <dgm:cxnLst>
+        <dgm:cxn modelId="5" srcId="0" destId="1" srcOrd="0" destOrd="0"/>
+        <dgm:cxn modelId="6" srcId="0" destId="2" srcOrd="1" destOrd="0"/>
+        <dgm:cxn modelId="7" srcId="0" destId="3" srcOrd="2" destOrd="0"/>
+        <dgm:cxn modelId="8" srcId="0" destId="4" srcOrd="3" destOrd="0"/>
+      </dgm:cxnLst>
+      <dgm:bg/>
+      <dgm:whole/>
+    </dgm:dataModel>
+  </dgm:clrData>
+  <dgm:layoutNode name="Name0">
+    <dgm:varLst>
+      <dgm:dir/>
+      <dgm:resizeHandles val="exact"/>
+    </dgm:varLst>
+    <dgm:choose name="Name1">
+      <dgm:if name="Name2" func="var" arg="dir" op="equ" val="norm">
+        <dgm:alg type="lin"/>
+      </dgm:if>
+      <dgm:else name="Name3">
+        <dgm:alg type="lin">
+          <dgm:param type="linDir" val="fromR"/>
+        </dgm:alg>
+      </dgm:else>
+    </dgm:choose>
+    <dgm:shape xmlns:r="http://schemas.openxmlformats.org/officeDocument/2006/relationships" r:blip="">
+      <dgm:adjLst/>
+    </dgm:shape>
+    <dgm:presOf/>
+    <dgm:constrLst>
+      <dgm:constr type="w" for="ch" ptType="node" refType="w"/>
+      <dgm:constr type="h" for="ch" ptType="node" op="equ"/>
+      <dgm:constr type="primFontSz" for="ch" ptType="node" op="equ" val="65"/>
+      <dgm:constr type="w" for="ch" ptType="sibTrans" refType="w" refFor="ch" refPtType="node" op="equ" fact="0.4"/>
+      <dgm:constr type="h" for="ch" ptType="sibTrans" op="equ"/>
+      <dgm:constr type="primFontSz" for="des" forName="connectorText" op="equ" val="55"/>
+      <dgm:constr type="primFontSz" for="des" forName="connectorText" refType="primFontSz" refFor="ch" refPtType="node" op="lte" fact="0.8"/>
+    </dgm:constrLst>
+    <dgm:ruleLst/>
+    <dgm:forEach name="nodesForEach" axis="ch" ptType="node">
+      <dgm:layoutNode name="node">
+        <dgm:varLst>
+          <dgm:bulletEnabled val="1"/>
+        </dgm:varLst>
+        <dgm:alg type="tx"/>
+        <dgm:shape xmlns:r="http://schemas.openxmlformats.org/officeDocument/2006/relationships" type="roundRect" r:blip="">
+          <dgm:adjLst>
+            <dgm:adj idx="1" val="0.1"/>
+          </dgm:adjLst>
+        </dgm:shape>
+        <dgm:presOf axis="desOrSelf" ptType="node"/>
+        <dgm:constrLst>
+          <dgm:constr type="h" refType="w" fact="0.6"/>
+          <dgm:constr type="tMarg" refType="primFontSz" fact="0.3"/>
+          <dgm:constr type="bMarg" refType="primFontSz" fact="0.3"/>
+          <dgm:constr type="lMarg" refType="primFontSz" fact="0.3"/>
+          <dgm:constr type="rMarg" refType="primFontSz" fact="0.3"/>
+        </dgm:constrLst>
+        <dgm:ruleLst>
+          <dgm:rule type="primFontSz" val="18" fact="NaN" max="NaN"/>
+          <dgm:rule type="h" val="NaN" fact="1.5" max="NaN"/>
+          <dgm:rule type="primFontSz" val="5" fact="NaN" max="NaN"/>
+          <dgm:rule type="h" val="INF" fact="NaN" max="NaN"/>
+        </dgm:ruleLst>
+      </dgm:layoutNode>
+      <dgm:forEach name="sibTransForEach" axis="followSib" ptType="sibTrans" cnt="1">
+        <dgm:layoutNode name="sibTrans">
+          <dgm:alg type="conn">
+            <dgm:param type="begPts" val="auto"/>
+            <dgm:param type="endPts" val="auto"/>
+          </dgm:alg>
+          <dgm:shape xmlns:r="http://schemas.openxmlformats.org/officeDocument/2006/relationships" type="conn" r:blip="">
+            <dgm:adjLst/>
+          </dgm:shape>
+          <dgm:presOf axis="self"/>
+          <dgm:constrLst>
+            <dgm:constr type="h" refType="w" fact="0.62"/>
+            <dgm:constr type="connDist"/>
+            <dgm:constr type="begPad" refType="connDist" fact="0.25"/>
+            <dgm:constr type="endPad" refType="connDist" fact="0.22"/>
+          </dgm:constrLst>
+          <dgm:ruleLst/>
+          <dgm:layoutNode name="connectorText">
+            <dgm:alg type="tx">
+              <dgm:param type="autoTxRot" val="grav"/>
+            </dgm:alg>
+            <dgm:shape xmlns:r="http://schemas.openxmlformats.org/officeDocument/2006/relationships" type="conn" r:blip="" hideGeom="1">
+              <dgm:adjLst/>
+            </dgm:shape>
+            <dgm:presOf axis="self"/>
+            <dgm:constrLst>
+              <dgm:constr type="lMarg"/>
+              <dgm:constr type="rMarg"/>
+              <dgm:constr type="tMarg"/>
+              <dgm:constr type="bMarg"/>
+            </dgm:constrLst>
+            <dgm:ruleLst>
+              <dgm:rule type="primFontSz" val="5" fact="NaN" max="NaN"/>
+            </dgm:ruleLst>
+          </dgm:layoutNode>
+        </dgm:layoutNode>
+      </dgm:forEach>
+    </dgm:forEach>
+  </dgm:layoutNode>
+</dgm:layoutDef>
+</file>
+
+<file path=ppt/diagrams/layout2.xml><?xml version="1.0" encoding="utf-8"?>
+<dgm:layoutDef xmlns:dgm="http://schemas.openxmlformats.org/drawingml/2006/diagram" xmlns:a="http://schemas.openxmlformats.org/drawingml/2006/main" uniqueId="urn:microsoft.com/office/officeart/2005/8/layout/process1">
+  <dgm:title val=""/>
+  <dgm:desc val=""/>
+  <dgm:catLst>
+    <dgm:cat type="process" pri="1000"/>
+    <dgm:cat type="convert" pri="15000"/>
+  </dgm:catLst>
+  <dgm:sampData useDef="1">
+    <dgm:dataModel>
+      <dgm:ptLst/>
+      <dgm:bg/>
+      <dgm:whole/>
+    </dgm:dataModel>
+  </dgm:sampData>
+  <dgm:styleData>
+    <dgm:dataModel>
+      <dgm:ptLst>
+        <dgm:pt modelId="0" type="doc"/>
+        <dgm:pt modelId="1"/>
+        <dgm:pt modelId="2"/>
+      </dgm:ptLst>
+      <dgm:cxnLst>
+        <dgm:cxn modelId="3" srcId="0" destId="1" srcOrd="0" destOrd="0"/>
+        <dgm:cxn modelId="4" srcId="0" destId="2" srcOrd="1" destOrd="0"/>
+      </dgm:cxnLst>
+      <dgm:bg/>
+      <dgm:whole/>
+    </dgm:dataModel>
+  </dgm:styleData>
+  <dgm:clrData>
+    <dgm:dataModel>
+      <dgm:ptLst>
+        <dgm:pt modelId="0" type="doc"/>
+        <dgm:pt modelId="1"/>
+        <dgm:pt modelId="2"/>
+        <dgm:pt modelId="3"/>
+        <dgm:pt modelId="4"/>
+      </dgm:ptLst>
+      <dgm:cxnLst>
+        <dgm:cxn modelId="5" srcId="0" destId="1" srcOrd="0" destOrd="0"/>
+        <dgm:cxn modelId="6" srcId="0" destId="2" srcOrd="1" destOrd="0"/>
+        <dgm:cxn modelId="7" srcId="0" destId="3" srcOrd="2" destOrd="0"/>
+        <dgm:cxn modelId="8" srcId="0" destId="4" srcOrd="3" destOrd="0"/>
+      </dgm:cxnLst>
+      <dgm:bg/>
+      <dgm:whole/>
+    </dgm:dataModel>
+  </dgm:clrData>
+  <dgm:layoutNode name="Name0">
+    <dgm:varLst>
+      <dgm:dir/>
+      <dgm:resizeHandles val="exact"/>
+    </dgm:varLst>
+    <dgm:choose name="Name1">
+      <dgm:if name="Name2" func="var" arg="dir" op="equ" val="norm">
+        <dgm:alg type="lin"/>
+      </dgm:if>
+      <dgm:else name="Name3">
+        <dgm:alg type="lin">
+          <dgm:param type="linDir" val="fromR"/>
+        </dgm:alg>
+      </dgm:else>
+    </dgm:choose>
+    <dgm:shape xmlns:r="http://schemas.openxmlformats.org/officeDocument/2006/relationships" r:blip="">
+      <dgm:adjLst/>
+    </dgm:shape>
+    <dgm:presOf/>
+    <dgm:constrLst>
+      <dgm:constr type="w" for="ch" ptType="node" refType="w"/>
+      <dgm:constr type="h" for="ch" ptType="node" op="equ"/>
+      <dgm:constr type="primFontSz" for="ch" ptType="node" op="equ" val="65"/>
+      <dgm:constr type="w" for="ch" ptType="sibTrans" refType="w" refFor="ch" refPtType="node" op="equ" fact="0.4"/>
+      <dgm:constr type="h" for="ch" ptType="sibTrans" op="equ"/>
+      <dgm:constr type="primFontSz" for="des" forName="connectorText" op="equ" val="55"/>
+      <dgm:constr type="primFontSz" for="des" forName="connectorText" refType="primFontSz" refFor="ch" refPtType="node" op="lte" fact="0.8"/>
+    </dgm:constrLst>
+    <dgm:ruleLst/>
+    <dgm:forEach name="nodesForEach" axis="ch" ptType="node">
+      <dgm:layoutNode name="node">
+        <dgm:varLst>
+          <dgm:bulletEnabled val="1"/>
+        </dgm:varLst>
+        <dgm:alg type="tx"/>
+        <dgm:shape xmlns:r="http://schemas.openxmlformats.org/officeDocument/2006/relationships" type="roundRect" r:blip="">
+          <dgm:adjLst>
+            <dgm:adj idx="1" val="0.1"/>
+          </dgm:adjLst>
+        </dgm:shape>
+        <dgm:presOf axis="desOrSelf" ptType="node"/>
+        <dgm:constrLst>
+          <dgm:constr type="h" refType="w" fact="0.6"/>
+          <dgm:constr type="tMarg" refType="primFontSz" fact="0.3"/>
+          <dgm:constr type="bMarg" refType="primFontSz" fact="0.3"/>
+          <dgm:constr type="lMarg" refType="primFontSz" fact="0.3"/>
+          <dgm:constr type="rMarg" refType="primFontSz" fact="0.3"/>
+        </dgm:constrLst>
+        <dgm:ruleLst>
+          <dgm:rule type="primFontSz" val="18" fact="NaN" max="NaN"/>
+          <dgm:rule type="h" val="NaN" fact="1.5" max="NaN"/>
+          <dgm:rule type="primFontSz" val="5" fact="NaN" max="NaN"/>
+          <dgm:rule type="h" val="INF" fact="NaN" max="NaN"/>
+        </dgm:ruleLst>
+      </dgm:layoutNode>
+      <dgm:forEach name="sibTransForEach" axis="followSib" ptType="sibTrans" cnt="1">
+        <dgm:layoutNode name="sibTrans">
+          <dgm:alg type="conn">
+            <dgm:param type="begPts" val="auto"/>
+            <dgm:param type="endPts" val="auto"/>
+          </dgm:alg>
+          <dgm:shape xmlns:r="http://schemas.openxmlformats.org/officeDocument/2006/relationships" type="conn" r:blip="">
+            <dgm:adjLst/>
+          </dgm:shape>
+          <dgm:presOf axis="self"/>
+          <dgm:constrLst>
+            <dgm:constr type="h" refType="w" fact="0.62"/>
+            <dgm:constr type="connDist"/>
+            <dgm:constr type="begPad" refType="connDist" fact="0.25"/>
+            <dgm:constr type="endPad" refType="connDist" fact="0.22"/>
+          </dgm:constrLst>
+          <dgm:ruleLst/>
+          <dgm:layoutNode name="connectorText">
+            <dgm:alg type="tx">
+              <dgm:param type="autoTxRot" val="grav"/>
+            </dgm:alg>
+            <dgm:shape xmlns:r="http://schemas.openxmlformats.org/officeDocument/2006/relationships" type="conn" r:blip="" hideGeom="1">
+              <dgm:adjLst/>
+            </dgm:shape>
+            <dgm:presOf axis="self"/>
+            <dgm:constrLst>
+              <dgm:constr type="lMarg"/>
+              <dgm:constr type="rMarg"/>
+              <dgm:constr type="tMarg"/>
+              <dgm:constr type="bMarg"/>
+            </dgm:constrLst>
+            <dgm:ruleLst>
+              <dgm:rule type="primFontSz" val="5" fact="NaN" max="NaN"/>
+            </dgm:ruleLst>
+          </dgm:layoutNode>
+        </dgm:layoutNode>
+      </dgm:forEach>
+    </dgm:forEach>
+  </dgm:layoutNode>
+</dgm:layoutDef>
+</file>
+
+<file path=ppt/diagrams/layout3.xml><?xml version="1.0" encoding="utf-8"?>
+<dgm:layoutDef xmlns:dgm="http://schemas.openxmlformats.org/drawingml/2006/diagram" xmlns:a="http://schemas.openxmlformats.org/drawingml/2006/main" uniqueId="urn:microsoft.com/office/officeart/2005/8/layout/process1">
+  <dgm:title val=""/>
+  <dgm:desc val=""/>
+  <dgm:catLst>
+    <dgm:cat type="process" pri="1000"/>
+    <dgm:cat type="convert" pri="15000"/>
+  </dgm:catLst>
+  <dgm:sampData useDef="1">
+    <dgm:dataModel>
+      <dgm:ptLst/>
+      <dgm:bg/>
+      <dgm:whole/>
+    </dgm:dataModel>
+  </dgm:sampData>
+  <dgm:styleData>
+    <dgm:dataModel>
+      <dgm:ptLst>
+        <dgm:pt modelId="0" type="doc"/>
+        <dgm:pt modelId="1"/>
+        <dgm:pt modelId="2"/>
+      </dgm:ptLst>
+      <dgm:cxnLst>
+        <dgm:cxn modelId="3" srcId="0" destId="1" srcOrd="0" destOrd="0"/>
+        <dgm:cxn modelId="4" srcId="0" destId="2" srcOrd="1" destOrd="0"/>
+      </dgm:cxnLst>
+      <dgm:bg/>
+      <dgm:whole/>
+    </dgm:dataModel>
+  </dgm:styleData>
+  <dgm:clrData>
+    <dgm:dataModel>
+      <dgm:ptLst>
+        <dgm:pt modelId="0" type="doc"/>
+        <dgm:pt modelId="1"/>
+        <dgm:pt modelId="2"/>
+        <dgm:pt modelId="3"/>
+        <dgm:pt modelId="4"/>
+      </dgm:ptLst>
+      <dgm:cxnLst>
+        <dgm:cxn modelId="5" srcId="0" destId="1" srcOrd="0" destOrd="0"/>
+        <dgm:cxn modelId="6" srcId="0" destId="2" srcOrd="1" destOrd="0"/>
+        <dgm:cxn modelId="7" srcId="0" destId="3" srcOrd="2" destOrd="0"/>
+        <dgm:cxn modelId="8" srcId="0" destId="4" srcOrd="3" destOrd="0"/>
+      </dgm:cxnLst>
+      <dgm:bg/>
+      <dgm:whole/>
+    </dgm:dataModel>
+  </dgm:clrData>
+  <dgm:layoutNode name="Name0">
+    <dgm:varLst>
+      <dgm:dir/>
+      <dgm:resizeHandles val="exact"/>
+    </dgm:varLst>
+    <dgm:choose name="Name1">
+      <dgm:if name="Name2" func="var" arg="dir" op="equ" val="norm">
+        <dgm:alg type="lin"/>
+      </dgm:if>
+      <dgm:else name="Name3">
+        <dgm:alg type="lin">
+          <dgm:param type="linDir" val="fromR"/>
+        </dgm:alg>
+      </dgm:else>
+    </dgm:choose>
+    <dgm:shape xmlns:r="http://schemas.openxmlformats.org/officeDocument/2006/relationships" r:blip="">
+      <dgm:adjLst/>
+    </dgm:shape>
+    <dgm:presOf/>
+    <dgm:constrLst>
+      <dgm:constr type="w" for="ch" ptType="node" refType="w"/>
+      <dgm:constr type="h" for="ch" ptType="node" op="equ"/>
+      <dgm:constr type="primFontSz" for="ch" ptType="node" op="equ" val="65"/>
+      <dgm:constr type="w" for="ch" ptType="sibTrans" refType="w" refFor="ch" refPtType="node" op="equ" fact="0.4"/>
+      <dgm:constr type="h" for="ch" ptType="sibTrans" op="equ"/>
+      <dgm:constr type="primFontSz" for="des" forName="connectorText" op="equ" val="55"/>
+      <dgm:constr type="primFontSz" for="des" forName="connectorText" refType="primFontSz" refFor="ch" refPtType="node" op="lte" fact="0.8"/>
+    </dgm:constrLst>
+    <dgm:ruleLst/>
+    <dgm:forEach name="nodesForEach" axis="ch" ptType="node">
+      <dgm:layoutNode name="node">
+        <dgm:varLst>
+          <dgm:bulletEnabled val="1"/>
+        </dgm:varLst>
+        <dgm:alg type="tx"/>
+        <dgm:shape xmlns:r="http://schemas.openxmlformats.org/officeDocument/2006/relationships" type="roundRect" r:blip="">
+          <dgm:adjLst>
+            <dgm:adj idx="1" val="0.1"/>
+          </dgm:adjLst>
+        </dgm:shape>
+        <dgm:presOf axis="desOrSelf" ptType="node"/>
+        <dgm:constrLst>
+          <dgm:constr type="h" refType="w" fact="0.6"/>
+          <dgm:constr type="tMarg" refType="primFontSz" fact="0.3"/>
+          <dgm:constr type="bMarg" refType="primFontSz" fact="0.3"/>
+          <dgm:constr type="lMarg" refType="primFontSz" fact="0.3"/>
+          <dgm:constr type="rMarg" refType="primFontSz" fact="0.3"/>
+        </dgm:constrLst>
+        <dgm:ruleLst>
+          <dgm:rule type="primFontSz" val="18" fact="NaN" max="NaN"/>
+          <dgm:rule type="h" val="NaN" fact="1.5" max="NaN"/>
+          <dgm:rule type="primFontSz" val="5" fact="NaN" max="NaN"/>
+          <dgm:rule type="h" val="INF" fact="NaN" max="NaN"/>
+        </dgm:ruleLst>
+      </dgm:layoutNode>
+      <dgm:forEach name="sibTransForEach" axis="followSib" ptType="sibTrans" cnt="1">
+        <dgm:layoutNode name="sibTrans">
+          <dgm:alg type="conn">
+            <dgm:param type="begPts" val="auto"/>
+            <dgm:param type="endPts" val="auto"/>
+          </dgm:alg>
+          <dgm:shape xmlns:r="http://schemas.openxmlformats.org/officeDocument/2006/relationships" type="conn" r:blip="">
+            <dgm:adjLst/>
+          </dgm:shape>
+          <dgm:presOf axis="self"/>
+          <dgm:constrLst>
+            <dgm:constr type="h" refType="w" fact="0.62"/>
+            <dgm:constr type="connDist"/>
+            <dgm:constr type="begPad" refType="connDist" fact="0.25"/>
+            <dgm:constr type="endPad" refType="connDist" fact="0.22"/>
+          </dgm:constrLst>
+          <dgm:ruleLst/>
+          <dgm:layoutNode name="connectorText">
+            <dgm:alg type="tx">
+              <dgm:param type="autoTxRot" val="grav"/>
+            </dgm:alg>
+            <dgm:shape xmlns:r="http://schemas.openxmlformats.org/officeDocument/2006/relationships" type="conn" r:blip="" hideGeom="1">
+              <dgm:adjLst/>
+            </dgm:shape>
+            <dgm:presOf axis="self"/>
+            <dgm:constrLst>
+              <dgm:constr type="lMarg"/>
+              <dgm:constr type="rMarg"/>
+              <dgm:constr type="tMarg"/>
+              <dgm:constr type="bMarg"/>
+            </dgm:constrLst>
+            <dgm:ruleLst>
+              <dgm:rule type="primFontSz" val="5" fact="NaN" max="NaN"/>
+            </dgm:ruleLst>
+          </dgm:layoutNode>
+        </dgm:layoutNode>
+      </dgm:forEach>
+    </dgm:forEach>
+  </dgm:layoutNode>
+</dgm:layoutDef>
+</file>
+
+<file path=ppt/diagrams/quickStyle1.xml><?xml version="1.0" encoding="utf-8"?>
+<dgm:styleDef xmlns:dgm="http://schemas.openxmlformats.org/drawingml/2006/diagram" xmlns:a="http://schemas.openxmlformats.org/drawingml/2006/main" uniqueId="urn:microsoft.com/office/officeart/2005/8/quickstyle/simple1">
+  <dgm:title val=""/>
+  <dgm:desc val=""/>
+  <dgm:catLst>
+    <dgm:cat type="simple" pri="10100"/>
+  </dgm:catLst>
+  <dgm:scene3d>
+    <a:camera prst="orthographicFront"/>
+    <a:lightRig rig="threePt" dir="t"/>
+  </dgm:scene3d>
+  <dgm:styleLbl name="node0">
+    <dgm:scene3d>
+      <a:camera prst="orthographicFront"/>
+      <a:lightRig rig="threePt" dir="t"/>
+    </dgm:scene3d>
+    <dgm:sp3d/>
+    <dgm:txPr/>
+    <dgm:style>
+      <a:lnRef idx="2">
+        <a:scrgbClr r="0" g="0" b="0"/>
+      </a:lnRef>
+      <a:fillRef idx="1">
+        <a:scrgbClr r="0" g="0" b="0"/>
+      </a:fillRef>
+      <a:effectRef idx="0">
+        <a:scrgbClr r="0" g="0" b="0"/>
+      </a:effectRef>
+      <a:fontRef idx="minor">
+        <a:schemeClr val="lt1"/>
+      </a:fontRef>
+    </dgm:style>
+  </dgm:styleLbl>
+  <dgm:styleLbl name="lnNode1">
+    <dgm:scene3d>
+      <a:camera prst="orthographicFront"/>
+      <a:lightRig rig="threePt" dir="t"/>
+    </dgm:scene3d>
+    <dgm:sp3d/>
+    <dgm:txPr/>
+    <dgm:style>
+      <a:lnRef idx="2">
+        <a:scrgbClr r="0" g="0" b="0"/>
+      </a:lnRef>
+      <a:fillRef idx="1">
+        <a:scrgbClr r="0" g="0" b="0"/>
+      </a:fillRef>
+      <a:effectRef idx="0">
+        <a:scrgbClr r="0" g="0" b="0"/>
+      </a:effectRef>
+      <a:fontRef idx="minor">
+        <a:schemeClr val="lt1"/>
+      </a:fontRef>
+    </dgm:style>
+  </dgm:styleLbl>
+  <dgm:styleLbl name="vennNode1">
+    <dgm:scene3d>
+      <a:camera prst="orthographicFront"/>
+      <a:lightRig rig="threePt" dir="t"/>
+    </dgm:scene3d>
+    <dgm:sp3d/>
+    <dgm:txPr/>
+    <dgm:style>
+      <a:lnRef idx="2">
+        <a:scrgbClr r="0" g="0" b="0"/>
+      </a:lnRef>
+      <a:fillRef idx="1">
+        <a:scrgbClr r="0" g="0" b="0"/>
+      </a:fillRef>
+      <a:effectRef idx="0">
+        <a:scrgbClr r="0" g="0" b="0"/>
+      </a:effectRef>
+      <a:fontRef idx="minor">
+        <a:schemeClr val="tx1"/>
+      </a:fontRef>
+    </dgm:style>
+  </dgm:styleLbl>
+  <dgm:styleLbl name="alignNode1">
+    <dgm:scene3d>
+      <a:camera prst="orthographicFront"/>
+      <a:lightRig rig="threePt" dir="t"/>
+    </dgm:scene3d>
+    <dgm:sp3d/>
+    <dgm:txPr/>
+    <dgm:style>
+      <a:lnRef idx="2">
+        <a:scrgbClr r="0" g="0" b="0"/>
+      </a:lnRef>
+      <a:fillRef idx="1">
+        <a:scrgbClr r="0" g="0" b="0"/>
+      </a:fillRef>
+      <a:effectRef idx="0">
+        <a:scrgbClr r="0" g="0" b="0"/>
+      </a:effectRef>
+      <a:fontRef idx="minor">
+        <a:schemeClr val="lt1"/>
+      </a:fontRef>
+    </dgm:style>
+  </dgm:styleLbl>
+  <dgm:styleLbl name="node1">
+    <dgm:scene3d>
+      <a:camera prst="orthographicFront"/>
+      <a:lightRig rig="threePt" dir="t"/>
+    </dgm:scene3d>
+    <dgm:sp3d/>
+    <dgm:txPr/>
+    <dgm:style>
+      <a:lnRef idx="2">
+        <a:scrgbClr r="0" g="0" b="0"/>
+      </a:lnRef>
+      <a:fillRef idx="1">
+        <a:scrgbClr r="0" g="0" b="0"/>
+      </a:fillRef>
+      <a:effectRef idx="0">
+        <a:scrgbClr r="0" g="0" b="0"/>
+      </a:effectRef>
+      <a:fontRef idx="minor">
+        <a:schemeClr val="lt1"/>
+      </a:fontRef>
+    </dgm:style>
+  </dgm:styleLbl>
+  <dgm:styleLbl name="node2">
+    <dgm:scene3d>
+      <a:camera prst="orthographicFront"/>
+      <a:lightRig rig="threePt" dir="t"/>
+    </dgm:scene3d>
+    <dgm:sp3d/>
+    <dgm:txPr/>
+    <dgm:style>
+      <a:lnRef idx="2">
+        <a:scrgbClr r="0" g="0" b="0"/>
+      </a:lnRef>
+      <a:fillRef idx="1">
+        <a:scrgbClr r="0" g="0" b="0"/>
+      </a:fillRef>
+      <a:effectRef idx="0">
+        <a:scrgbClr r="0" g="0" b="0"/>
+      </a:effectRef>
+      <a:fontRef idx="minor">
+        <a:schemeClr val="lt1"/>
+      </a:fontRef>
+    </dgm:style>
+  </dgm:styleLbl>
+  <dgm:styleLbl name="node3">
+    <dgm:scene3d>
+      <a:camera prst="orthographicFront"/>
+      <a:lightRig rig="threePt" dir="t"/>
+    </dgm:scene3d>
+    <dgm:sp3d/>
+    <dgm:txPr/>
+    <dgm:style>
+      <a:lnRef idx="2">
+        <a:scrgbClr r="0" g="0" b="0"/>
+      </a:lnRef>
+      <a:fillRef idx="1">
+        <a:scrgbClr r="0" g="0" b="0"/>
+      </a:fillRef>
+      <a:effectRef idx="0">
+        <a:scrgbClr r="0" g="0" b="0"/>
+      </a:effectRef>
+      <a:fontRef idx="minor">
+        <a:schemeClr val="lt1"/>
+      </a:fontRef>
+    </dgm:style>
+  </dgm:styleLbl>
+  <dgm:styleLbl name="node4">
+    <dgm:scene3d>
+      <a:camera prst="orthographicFront"/>
+      <a:lightRig rig="threePt" dir="t"/>
+    </dgm:scene3d>
+    <dgm:sp3d/>
+    <dgm:txPr/>
+    <dgm:style>
+      <a:lnRef idx="2">
+        <a:scrgbClr r="0" g="0" b="0"/>
+      </a:lnRef>
+      <a:fillRef idx="1">
+        <a:scrgbClr r="0" g="0" b="0"/>
+      </a:fillRef>
+      <a:effectRef idx="0">
+        <a:scrgbClr r="0" g="0" b="0"/>
+      </a:effectRef>
+      <a:fontRef idx="minor">
+        <a:schemeClr val="lt1"/>
+      </a:fontRef>
+    </dgm:style>
+  </dgm:styleLbl>
+  <dgm:styleLbl name="fgImgPlace1">
+    <dgm:scene3d>
+      <a:camera prst="orthographicFront"/>
+      <a:lightRig rig="threePt" dir="t"/>
+    </dgm:scene3d>
+    <dgm:sp3d/>
+    <dgm:txPr/>
+    <dgm:style>
+      <a:lnRef idx="2">
+        <a:scrgbClr r="0" g="0" b="0"/>
+      </a:lnRef>
+      <a:fillRef idx="1">
+        <a:scrgbClr r="0" g="0" b="0"/>
+      </a:fillRef>
+      <a:effectRef idx="0">
+        <a:scrgbClr r="0" g="0" b="0"/>
+      </a:effectRef>
+      <a:fontRef idx="minor"/>
+    </dgm:style>
+  </dgm:styleLbl>
+  <dgm:styleLbl name="alignImgPlace1">
+    <dgm:scene3d>
+      <a:camera prst="orthographicFront"/>
+      <a:lightRig rig="threePt" dir="t"/>
+    </dgm:scene3d>
+    <dgm:sp3d/>
+    <dgm:txPr/>
+    <dgm:style>
+      <a:lnRef idx="2">
+        <a:scrgbClr r="0" g="0" b="0"/>
+      </a:lnRef>
+      <a:fillRef idx="1">
+        <a:scrgbClr r="0" g="0" b="0"/>
+      </a:fillRef>
+      <a:effectRef idx="0">
+        <a:scrgbClr r="0" g="0" b="0"/>
+      </a:effectRef>
+      <a:fontRef idx="minor"/>
+    </dgm:style>
+  </dgm:styleLbl>
+  <dgm:styleLbl name="bgImgPlace1">
+    <dgm:scene3d>
+      <a:camera prst="orthographicFront"/>
+      <a:lightRig rig="threePt" dir="t"/>
+    </dgm:scene3d>
+    <dgm:sp3d/>
+    <dgm:txPr/>
+    <dgm:style>
+      <a:lnRef idx="2">
+        <a:scrgbClr r="0" g="0" b="0"/>
+      </a:lnRef>
+      <a:fillRef idx="1">
+        <a:scrgbClr r="0" g="0" b="0"/>
+      </a:fillRef>
+      <a:effectRef idx="0">
+        <a:scrgbClr r="0" g="0" b="0"/>
+      </a:effectRef>
+      <a:fontRef idx="minor"/>
+    </dgm:style>
+  </dgm:styleLbl>
+  <dgm:styleLbl name="sibTrans2D1">
+    <dgm:scene3d>
+      <a:camera prst="orthographicFront"/>
+      <a:lightRig rig="threePt" dir="t"/>
+    </dgm:scene3d>
+    <dgm:sp3d/>
+    <dgm:txPr/>
+    <dgm:style>
+      <a:lnRef idx="0">
+        <a:scrgbClr r="0" g="0" b="0"/>
+      </a:lnRef>
+      <a:fillRef idx="1">
+        <a:scrgbClr r="0" g="0" b="0"/>
+      </a:fillRef>
+      <a:effectRef idx="0">
+        <a:scrgbClr r="0" g="0" b="0"/>
+      </a:effectRef>
+      <a:fontRef idx="minor">
+        <a:schemeClr val="lt1"/>
+      </a:fontRef>
+    </dgm:style>
+  </dgm:styleLbl>
+  <dgm:styleLbl name="fgSibTrans2D1">
+    <dgm:scene3d>
+      <a:camera prst="orthographicFront"/>
+      <a:lightRig rig="threePt" dir="t"/>
+    </dgm:scene3d>
+    <dgm:sp3d/>
+    <dgm:txPr/>
+    <dgm:style>
+      <a:lnRef idx="0">
+        <a:scrgbClr r="0" g="0" b="0"/>
+      </a:lnRef>
+      <a:fillRef idx="1">
+        <a:scrgbClr r="0" g="0" b="0"/>
+      </a:fillRef>
+      <a:effectRef idx="0">
+        <a:scrgbClr r="0" g="0" b="0"/>
+      </a:effectRef>
+      <a:fontRef idx="minor">
+        <a:schemeClr val="lt1"/>
+      </a:fontRef>
+    </dgm:style>
+  </dgm:styleLbl>
+  <dgm:styleLbl name="bgSibTrans2D1">
+    <dgm:scene3d>
+      <a:camera prst="orthographicFront"/>
+      <a:lightRig rig="threePt" dir="t"/>
+    </dgm:scene3d>
+    <dgm:sp3d/>
+    <dgm:txPr/>
+    <dgm:style>
+      <a:lnRef idx="0">
+        <a:scrgbClr r="0" g="0" b="0"/>
+      </a:lnRef>
+      <a:fillRef idx="1">
+        <a:scrgbClr r="0" g="0" b="0"/>
+      </a:fillRef>
+      <a:effectRef idx="0">
+        <a:scrgbClr r="0" g="0" b="0"/>
+      </a:effectRef>
+      <a:fontRef idx="minor">
+        <a:schemeClr val="lt1"/>
+      </a:fontRef>
+    </dgm:style>
+  </dgm:styleLbl>
+  <dgm:styleLbl name="sibTrans1D1">
+    <dgm:scene3d>
+      <a:camera prst="orthographicFront"/>
+      <a:lightRig rig="threePt" dir="t"/>
+    </dgm:scene3d>
+    <dgm:sp3d/>
+    <dgm:txPr/>
+    <dgm:style>
+      <a:lnRef idx="1">
+        <a:scrgbClr r="0" g="0" b="0"/>
+      </a:lnRef>
+      <a:fillRef idx="0">
+        <a:scrgbClr r="0" g="0" b="0"/>
+      </a:fillRef>
+      <a:effectRef idx="0">
+        <a:scrgbClr r="0" g="0" b="0"/>
+      </a:effectRef>
+      <a:fontRef idx="minor"/>
+    </dgm:style>
+  </dgm:styleLbl>
+  <dgm:styleLbl name="callout">
+    <dgm:scene3d>
+      <a:camera prst="orthographicFront"/>
+      <a:lightRig rig="threePt" dir="t"/>
+    </dgm:scene3d>
+    <dgm:sp3d/>
+    <dgm:txPr/>
+    <dgm:style>
+      <a:lnRef idx="2">
+        <a:scrgbClr r="0" g="0" b="0"/>
+      </a:lnRef>
+      <a:fillRef idx="1">
+        <a:scrgbClr r="0" g="0" b="0"/>
+      </a:fillRef>
+      <a:effectRef idx="0">
+        <a:scrgbClr r="0" g="0" b="0"/>
+      </a:effectRef>
+      <a:fontRef idx="minor"/>
+    </dgm:style>
+  </dgm:styleLbl>
+  <dgm:styleLbl name="asst0">
+    <dgm:scene3d>
+      <a:camera prst="orthographicFront"/>
+      <a:lightRig rig="threePt" dir="t"/>
+    </dgm:scene3d>
+    <dgm:sp3d/>
+    <dgm:txPr/>
+    <dgm:style>
+      <a:lnRef idx="2">
+        <a:scrgbClr r="0" g="0" b="0"/>
+      </a:lnRef>
+      <a:fillRef idx="1">
+        <a:scrgbClr r="0" g="0" b="0"/>
+      </a:fillRef>
+      <a:effectRef idx="0">
+        <a:scrgbClr r="0" g="0" b="0"/>
+      </a:effectRef>
+      <a:fontRef idx="minor">
+        <a:schemeClr val="lt1"/>
+      </a:fontRef>
+    </dgm:style>
+  </dgm:styleLbl>
+  <dgm:styleLbl name="asst1">
+    <dgm:scene3d>
+      <a:camera prst="orthographicFront"/>
+      <a:lightRig rig="threePt" dir="t"/>
+    </dgm:scene3d>
+    <dgm:sp3d/>
+    <dgm:txPr/>
+    <dgm:style>
+      <a:lnRef idx="2">
+        <a:scrgbClr r="0" g="0" b="0"/>
+      </a:lnRef>
+      <a:fillRef idx="1">
+        <a:scrgbClr r="0" g="0" b="0"/>
+      </a:fillRef>
+      <a:effectRef idx="0">
+        <a:scrgbClr r="0" g="0" b="0"/>
+      </a:effectRef>
+      <a:fontRef idx="minor">
+        <a:schemeClr val="lt1"/>
+      </a:fontRef>
+    </dgm:style>
+  </dgm:styleLbl>
+  <dgm:styleLbl name="asst2">
+    <dgm:scene3d>
+      <a:camera prst="orthographicFront"/>
+      <a:lightRig rig="threePt" dir="t"/>
+    </dgm:scene3d>
+    <dgm:sp3d/>
+    <dgm:txPr/>
+    <dgm:style>
+      <a:lnRef idx="2">
+        <a:scrgbClr r="0" g="0" b="0"/>
+      </a:lnRef>
+      <a:fillRef idx="1">
+        <a:scrgbClr r="0" g="0" b="0"/>
+      </a:fillRef>
+      <a:effectRef idx="0">
+        <a:scrgbClr r="0" g="0" b="0"/>
+      </a:effectRef>
+      <a:fontRef idx="minor">
+        <a:schemeClr val="lt1"/>
+      </a:fontRef>
+    </dgm:style>
+  </dgm:styleLbl>
+  <dgm:styleLbl name="asst3">
+    <dgm:scene3d>
+      <a:camera prst="orthographicFront"/>
+      <a:lightRig rig="threePt" dir="t"/>
+    </dgm:scene3d>
+    <dgm:sp3d/>
+    <dgm:txPr/>
+    <dgm:style>
+      <a:lnRef idx="2">
+        <a:scrgbClr r="0" g="0" b="0"/>
+      </a:lnRef>
+      <a:fillRef idx="1">
+        <a:scrgbClr r="0" g="0" b="0"/>
+      </a:fillRef>
+      <a:effectRef idx="0">
+        <a:scrgbClr r="0" g="0" b="0"/>
+      </a:effectRef>
+      <a:fontRef idx="minor">
+        <a:schemeClr val="lt1"/>
+      </a:fontRef>
+    </dgm:style>
+  </dgm:styleLbl>
+  <dgm:styleLbl name="asst4">
+    <dgm:scene3d>
+      <a:camera prst="orthographicFront"/>
+      <a:lightRig rig="threePt" dir="t"/>
+    </dgm:scene3d>
+    <dgm:sp3d/>
+    <dgm:txPr/>
+    <dgm:style>
+      <a:lnRef idx="2">
+        <a:scrgbClr r="0" g="0" b="0"/>
+      </a:lnRef>
+      <a:fillRef idx="1">
+        <a:scrgbClr r="0" g="0" b="0"/>
+      </a:fillRef>
+      <a:effectRef idx="0">
+        <a:scrgbClr r="0" g="0" b="0"/>
+      </a:effectRef>
+      <a:fontRef idx="minor">
+        <a:schemeClr val="lt1"/>
+      </a:fontRef>
+    </dgm:style>
+  </dgm:styleLbl>
+  <dgm:styleLbl name="parChTrans2D1">
+    <dgm:scene3d>
+      <a:camera prst="orthographicFront"/>
+      <a:lightRig rig="threePt" dir="t"/>
+    </dgm:scene3d>
+    <dgm:sp3d/>
+    <dgm:txPr/>
+    <dgm:style>
+      <a:lnRef idx="2">
+        <a:scrgbClr r="0" g="0" b="0"/>
+      </a:lnRef>
+      <a:fillRef idx="1">
+        <a:scrgbClr r="0" g="0" b="0"/>
+      </a:fillRef>
+      <a:effectRef idx="0">
+        <a:scrgbClr r="0" g="0" b="0"/>
+      </a:effectRef>
+      <a:fontRef idx="minor">
+        <a:schemeClr val="lt1"/>
+      </a:fontRef>
+    </dgm:style>
+  </dgm:styleLbl>
+  <dgm:styleLbl name="parChTrans2D2">
+    <dgm:scene3d>
+      <a:camera prst="orthographicFront"/>
+      <a:lightRig rig="threePt" dir="t"/>
+    </dgm:scene3d>
+    <dgm:sp3d/>
+    <dgm:txPr/>
+    <dgm:style>
+      <a:lnRef idx="2">
+        <a:scrgbClr r="0" g="0" b="0"/>
+      </a:lnRef>
+      <a:fillRef idx="1">
+        <a:scrgbClr r="0" g="0" b="0"/>
+      </a:fillRef>
+      <a:effectRef idx="0">
+        <a:scrgbClr r="0" g="0" b="0"/>
+      </a:effectRef>
+      <a:fontRef idx="minor">
+        <a:schemeClr val="lt1"/>
+      </a:fontRef>
+    </dgm:style>
+  </dgm:styleLbl>
+  <dgm:styleLbl name="parChTrans2D3">
+    <dgm:scene3d>
+      <a:camera prst="orthographicFront"/>
+      <a:lightRig rig="threePt" dir="t"/>
+    </dgm:scene3d>
+    <dgm:sp3d/>
+    <dgm:txPr/>
+    <dgm:style>
+      <a:lnRef idx="2">
+        <a:scrgbClr r="0" g="0" b="0"/>
+      </a:lnRef>
+      <a:fillRef idx="1">
+        <a:scrgbClr r="0" g="0" b="0"/>
+      </a:fillRef>
+      <a:effectRef idx="0">
+        <a:scrgbClr r="0" g="0" b="0"/>
+      </a:effectRef>
+      <a:fontRef idx="minor">
+        <a:schemeClr val="lt1"/>
+      </a:fontRef>
+    </dgm:style>
+  </dgm:styleLbl>
+  <dgm:styleLbl name="parChTrans2D4">
+    <dgm:scene3d>
+      <a:camera prst="orthographicFront"/>
+      <a:lightRig rig="threePt" dir="t"/>
+    </dgm:scene3d>
+    <dgm:sp3d/>
+    <dgm:txPr/>
+    <dgm:style>
+      <a:lnRef idx="2">
+        <a:scrgbClr r="0" g="0" b="0"/>
+      </a:lnRef>
+      <a:fillRef idx="1">
+        <a:scrgbClr r="0" g="0" b="0"/>
+      </a:fillRef>
+      <a:effectRef idx="0">
+        <a:scrgbClr r="0" g="0" b="0"/>
+      </a:effectRef>
+      <a:fontRef idx="minor">
+        <a:schemeClr val="lt1"/>
+      </a:fontRef>
+    </dgm:style>
+  </dgm:styleLbl>
+  <dgm:styleLbl name="parChTrans1D1">
+    <dgm:scene3d>
+      <a:camera prst="orthographicFront"/>
+      <a:lightRig rig="threePt" dir="t"/>
+    </dgm:scene3d>
+    <dgm:sp3d/>
+    <dgm:txPr/>
+    <dgm:style>
+      <a:lnRef idx="2">
+        <a:scrgbClr r="0" g="0" b="0"/>
+      </a:lnRef>
+      <a:fillRef idx="0">
+        <a:scrgbClr r="0" g="0" b="0"/>
+      </a:fillRef>
+      <a:effectRef idx="0">
+        <a:scrgbClr r="0" g="0" b="0"/>
+      </a:effectRef>
+      <a:fontRef idx="minor"/>
+    </dgm:style>
+  </dgm:styleLbl>
+  <dgm:styleLbl name="parChTrans1D2">
+    <dgm:scene3d>
+      <a:camera prst="orthographicFront"/>
+      <a:lightRig rig="threePt" dir="t"/>
+    </dgm:scene3d>
+    <dgm:sp3d/>
+    <dgm:txPr/>
+    <dgm:style>
+      <a:lnRef idx="2">
+        <a:scrgbClr r="0" g="0" b="0"/>
+      </a:lnRef>
+      <a:fillRef idx="0">
+        <a:scrgbClr r="0" g="0" b="0"/>
+      </a:fillRef>
+      <a:effectRef idx="0">
+        <a:scrgbClr r="0" g="0" b="0"/>
+      </a:effectRef>
+      <a:fontRef idx="minor"/>
+    </dgm:style>
+  </dgm:styleLbl>
+  <dgm:styleLbl name="parChTrans1D3">
+    <dgm:scene3d>
+      <a:camera prst="orthographicFront"/>
+      <a:lightRig rig="threePt" dir="t"/>
+    </dgm:scene3d>
+    <dgm:sp3d/>
+    <dgm:txPr/>
+    <dgm:style>
+      <a:lnRef idx="2">
+        <a:scrgbClr r="0" g="0" b="0"/>
+      </a:lnRef>
+      <a:fillRef idx="0">
+        <a:scrgbClr r="0" g="0" b="0"/>
+      </a:fillRef>
+      <a:effectRef idx="0">
+        <a:scrgbClr r="0" g="0" b="0"/>
+      </a:effectRef>
+      <a:fontRef idx="minor"/>
+    </dgm:style>
+  </dgm:styleLbl>
+  <dgm:styleLbl name="parChTrans1D4">
+    <dgm:scene3d>
+      <a:camera prst="orthographicFront"/>
+      <a:lightRig rig="threePt" dir="t"/>
+    </dgm:scene3d>
+    <dgm:sp3d/>
+    <dgm:txPr/>
+    <dgm:style>
+      <a:lnRef idx="2">
+        <a:scrgbClr r="0" g="0" b="0"/>
+      </a:lnRef>
+      <a:fillRef idx="0">
+        <a:scrgbClr r="0" g="0" b="0"/>
+      </a:fillRef>
+      <a:effectRef idx="0">
+        <a:scrgbClr r="0" g="0" b="0"/>
+      </a:effectRef>
+      <a:fontRef idx="minor"/>
+    </dgm:style>
+  </dgm:styleLbl>
+  <dgm:styleLbl name="fgAcc1">
+    <dgm:scene3d>
+      <a:camera prst="orthographicFront"/>
+      <a:lightRig rig="threePt" dir="t"/>
+    </dgm:scene3d>
+    <dgm:sp3d/>
+    <dgm:txPr/>
+    <dgm:style>
+      <a:lnRef idx="2">
+        <a:scrgbClr r="0" g="0" b="0"/>
+      </a:lnRef>
+      <a:fillRef idx="1">
+        <a:scrgbClr r="0" g="0" b="0"/>
+      </a:fillRef>
+      <a:effectRef idx="0">
+        <a:scrgbClr r="0" g="0" b="0"/>
+      </a:effectRef>
+      <a:fontRef idx="minor"/>
+    </dgm:style>
+  </dgm:styleLbl>
+  <dgm:styleLbl name="conFgAcc1">
+    <dgm:scene3d>
+      <a:camera prst="orthographicFront"/>
+      <a:lightRig rig="threePt" dir="t"/>
+    </dgm:scene3d>
+    <dgm:sp3d/>
+    <dgm:txPr/>
+    <dgm:style>
+      <a:lnRef idx="2">
+        <a:scrgbClr r="0" g="0" b="0"/>
+      </a:lnRef>
+      <a:fillRef idx="1">
+        <a:scrgbClr r="0" g="0" b="0"/>
+      </a:fillRef>
+      <a:effectRef idx="0">
+        <a:scrgbClr r="0" g="0" b="0"/>
+      </a:effectRef>
+      <a:fontRef idx="minor"/>
+    </dgm:style>
+  </dgm:styleLbl>
+  <dgm:styleLbl name="alignAcc1">
+    <dgm:scene3d>
+      <a:camera prst="orthographicFront"/>
+      <a:lightRig rig="threePt" dir="t"/>
+    </dgm:scene3d>
+    <dgm:sp3d/>
+    <dgm:txPr/>
+    <dgm:style>
+      <a:lnRef idx="2">
+        <a:scrgbClr r="0" g="0" b="0"/>
+      </a:lnRef>
+      <a:fillRef idx="1">
+        <a:scrgbClr r="0" g="0" b="0"/>
+      </a:fillRef>
+      <a:effectRef idx="0">
+        <a:scrgbClr r="0" g="0" b="0"/>
+      </a:effectRef>
+      <a:fontRef idx="minor"/>
+    </dgm:style>
+  </dgm:styleLbl>
+  <dgm:styleLbl name="trAlignAcc1">
+    <dgm:scene3d>
+      <a:camera prst="orthographicFront"/>
+      <a:lightRig rig="threePt" dir="t"/>
+    </dgm:scene3d>
+    <dgm:sp3d/>
+    <dgm:txPr/>
+    <dgm:style>
+      <a:lnRef idx="1">
+        <a:scrgbClr r="0" g="0" b="0"/>
+      </a:lnRef>
+      <a:fillRef idx="1">
+        <a:scrgbClr r="0" g="0" b="0"/>
+      </a:fillRef>
+      <a:effectRef idx="0">
+        <a:scrgbClr r="0" g="0" b="0"/>
+      </a:effectRef>
+      <a:fontRef idx="minor"/>
+    </dgm:style>
+  </dgm:styleLbl>
+  <dgm:styleLbl name="bgAcc1">
+    <dgm:scene3d>
+      <a:camera prst="orthographicFront"/>
+      <a:lightRig rig="threePt" dir="t"/>
+    </dgm:scene3d>
+    <dgm:sp3d/>
+    <dgm:txPr/>
+    <dgm:style>
+      <a:lnRef idx="2">
+        <a:scrgbClr r="0" g="0" b="0"/>
+      </a:lnRef>
+      <a:fillRef idx="1">
+        <a:scrgbClr r="0" g="0" b="0"/>
+      </a:fillRef>
+      <a:effectRef idx="0">
+        <a:scrgbClr r="0" g="0" b="0"/>
+      </a:effectRef>
+      <a:fontRef idx="minor"/>
+    </dgm:style>
+  </dgm:styleLbl>
+  <dgm:styleLbl name="solidFgAcc1">
+    <dgm:scene3d>
+      <a:camera prst="orthographicFront"/>
+      <a:lightRig rig="threePt" dir="t"/>
+    </dgm:scene3d>
+    <dgm:sp3d/>
+    <dgm:txPr/>
+    <dgm:style>
+      <a:lnRef idx="2">
+        <a:scrgbClr r="0" g="0" b="0"/>
+      </a:lnRef>
+      <a:fillRef idx="1">
+        <a:scrgbClr r="0" g="0" b="0"/>
+      </a:fillRef>
+      <a:effectRef idx="0">
+        <a:scrgbClr r="0" g="0" b="0"/>
+      </a:effectRef>
+      <a:fontRef idx="minor"/>
+    </dgm:style>
+  </dgm:styleLbl>
+  <dgm:styleLbl name="solidAlignAcc1">
+    <dgm:scene3d>
+      <a:camera prst="orthographicFront"/>
+      <a:lightRig rig="threePt" dir="t"/>
+    </dgm:scene3d>
+    <dgm:sp3d/>
+    <dgm:txPr/>
+    <dgm:style>
+      <a:lnRef idx="2">
+        <a:scrgbClr r="0" g="0" b="0"/>
+      </a:lnRef>
+      <a:fillRef idx="1">
+        <a:scrgbClr r="0" g="0" b="0"/>
+      </a:fillRef>
+      <a:effectRef idx="0">
+        <a:scrgbClr r="0" g="0" b="0"/>
+      </a:effectRef>
+      <a:fontRef idx="minor"/>
+    </dgm:style>
+  </dgm:styleLbl>
+  <dgm:styleLbl name="solidBgAcc1">
+    <dgm:scene3d>
+      <a:camera prst="orthographicFront"/>
+      <a:lightRig rig="threePt" dir="t"/>
+    </dgm:scene3d>
+    <dgm:sp3d/>
+    <dgm:txPr/>
+    <dgm:style>
+      <a:lnRef idx="2">
+        <a:scrgbClr r="0" g="0" b="0"/>
+      </a:lnRef>
+      <a:fillRef idx="1">
+        <a:scrgbClr r="0" g="0" b="0"/>
+      </a:fillRef>
+      <a:effectRef idx="0">
+        <a:scrgbClr r="0" g="0" b="0"/>
+      </a:effectRef>
+      <a:fontRef idx="minor"/>
+    </dgm:style>
+  </dgm:styleLbl>
+  <dgm:styleLbl name="fgAccFollowNode1">
+    <dgm:scene3d>
+      <a:camera prst="orthographicFront"/>
+      <a:lightRig rig="threePt" dir="t"/>
+    </dgm:scene3d>
+    <dgm:sp3d/>
+    <dgm:txPr/>
+    <dgm:style>
+      <a:lnRef idx="2">
+        <a:scrgbClr r="0" g="0" b="0"/>
+      </a:lnRef>
+      <a:fillRef idx="1">
+        <a:scrgbClr r="0" g="0" b="0"/>
+      </a:fillRef>
+      <a:effectRef idx="0">
+        <a:scrgbClr r="0" g="0" b="0"/>
+      </a:effectRef>
+      <a:fontRef idx="minor"/>
+    </dgm:style>
+  </dgm:styleLbl>
+  <dgm:styleLbl name="alignAccFollowNode1">
+    <dgm:scene3d>
+      <a:camera prst="orthographicFront"/>
+      <a:lightRig rig="threePt" dir="t"/>
+    </dgm:scene3d>
+    <dgm:sp3d/>
+    <dgm:txPr/>
+    <dgm:style>
+      <a:lnRef idx="2">
+        <a:scrgbClr r="0" g="0" b="0"/>
+      </a:lnRef>
+      <a:fillRef idx="1">
+        <a:scrgbClr r="0" g="0" b="0"/>
+      </a:fillRef>
+      <a:effectRef idx="0">
+        <a:scrgbClr r="0" g="0" b="0"/>
+      </a:effectRef>
+      <a:fontRef idx="minor"/>
+    </dgm:style>
+  </dgm:styleLbl>
+  <dgm:styleLbl name="bgAccFollowNode1">
+    <dgm:scene3d>
+      <a:camera prst="orthographicFront"/>
+      <a:lightRig rig="threePt" dir="t"/>
+    </dgm:scene3d>
+    <dgm:sp3d/>
+    <dgm:txPr/>
+    <dgm:style>
+      <a:lnRef idx="2">
+        <a:scrgbClr r="0" g="0" b="0"/>
+      </a:lnRef>
+      <a:fillRef idx="1">
+        <a:scrgbClr r="0" g="0" b="0"/>
+      </a:fillRef>
+      <a:effectRef idx="0">
+        <a:scrgbClr r="0" g="0" b="0"/>
+      </a:effectRef>
+      <a:fontRef idx="minor"/>
+    </dgm:style>
+  </dgm:styleLbl>
+  <dgm:styleLbl name="fgAcc0">
+    <dgm:scene3d>
+      <a:camera prst="orthographicFront"/>
+      <a:lightRig rig="threePt" dir="t"/>
+    </dgm:scene3d>
+    <dgm:sp3d/>
+    <dgm:txPr/>
+    <dgm:style>
+      <a:lnRef idx="2">
+        <a:scrgbClr r="0" g="0" b="0"/>
+      </a:lnRef>
+      <a:fillRef idx="1">
+        <a:scrgbClr r="0" g="0" b="0"/>
+      </a:fillRef>
+      <a:effectRef idx="0">
+        <a:scrgbClr r="0" g="0" b="0"/>
+      </a:effectRef>
+      <a:fontRef idx="minor"/>
+    </dgm:style>
+  </dgm:styleLbl>
+  <dgm:styleLbl name="fgAcc2">
+    <dgm:scene3d>
+      <a:camera prst="orthographicFront"/>
+      <a:lightRig rig="threePt" dir="t"/>
+    </dgm:scene3d>
+    <dgm:sp3d/>
+    <dgm:txPr/>
+    <dgm:style>
+      <a:lnRef idx="2">
+        <a:scrgbClr r="0" g="0" b="0"/>
+      </a:lnRef>
+      <a:fillRef idx="1">
+        <a:scrgbClr r="0" g="0" b="0"/>
+      </a:fillRef>
+      <a:effectRef idx="0">
+        <a:scrgbClr r="0" g="0" b="0"/>
+      </a:effectRef>
+      <a:fontRef idx="minor"/>
+    </dgm:style>
+  </dgm:styleLbl>
+  <dgm:styleLbl name="fgAcc3">
+    <dgm:scene3d>
+      <a:camera prst="orthographicFront"/>
+      <a:lightRig rig="threePt" dir="t"/>
+    </dgm:scene3d>
+    <dgm:sp3d/>
+    <dgm:txPr/>
+    <dgm:style>
+      <a:lnRef idx="2">
+        <a:scrgbClr r="0" g="0" b="0"/>
+      </a:lnRef>
+      <a:fillRef idx="1">
+        <a:scrgbClr r="0" g="0" b="0"/>
+      </a:fillRef>
+      <a:effectRef idx="0">
+        <a:scrgbClr r="0" g="0" b="0"/>
+      </a:effectRef>
+      <a:fontRef idx="minor"/>
+    </dgm:style>
+  </dgm:styleLbl>
+  <dgm:styleLbl name="fgAcc4">
+    <dgm:scene3d>
+      <a:camera prst="orthographicFront"/>
+      <a:lightRig rig="threePt" dir="t"/>
+    </dgm:scene3d>
+    <dgm:sp3d/>
+    <dgm:txPr/>
+    <dgm:style>
+      <a:lnRef idx="2">
+        <a:scrgbClr r="0" g="0" b="0"/>
+      </a:lnRef>
+      <a:fillRef idx="1">
+        <a:scrgbClr r="0" g="0" b="0"/>
+      </a:fillRef>
+      <a:effectRef idx="0">
+        <a:scrgbClr r="0" g="0" b="0"/>
+      </a:effectRef>
+      <a:fontRef idx="minor"/>
+    </dgm:style>
+  </dgm:styleLbl>
+  <dgm:styleLbl name="bgShp">
+    <dgm:scene3d>
+      <a:camera prst="orthographicFront"/>
+      <a:lightRig rig="threePt" dir="t"/>
+    </dgm:scene3d>
+    <dgm:sp3d/>
+    <dgm:txPr/>
+    <dgm:style>
+      <a:lnRef idx="0">
+        <a:scrgbClr r="0" g="0" b="0"/>
+      </a:lnRef>
+      <a:fillRef idx="1">
+        <a:scrgbClr r="0" g="0" b="0"/>
+      </a:fillRef>
+      <a:effectRef idx="0">
+        <a:scrgbClr r="0" g="0" b="0"/>
+      </a:effectRef>
+      <a:fontRef idx="minor"/>
+    </dgm:style>
+  </dgm:styleLbl>
+  <dgm:styleLbl name="dkBgShp">
+    <dgm:scene3d>
+      <a:camera prst="orthographicFront"/>
+      <a:lightRig rig="threePt" dir="t"/>
+    </dgm:scene3d>
+    <dgm:sp3d/>
+    <dgm:txPr/>
+    <dgm:style>
+      <a:lnRef idx="0">
+        <a:scrgbClr r="0" g="0" b="0"/>
+      </a:lnRef>
+      <a:fillRef idx="1">
+        <a:scrgbClr r="0" g="0" b="0"/>
+      </a:fillRef>
+      <a:effectRef idx="0">
+        <a:scrgbClr r="0" g="0" b="0"/>
+      </a:effectRef>
+      <a:fontRef idx="minor"/>
+    </dgm:style>
+  </dgm:styleLbl>
+  <dgm:styleLbl name="trBgShp">
+    <dgm:scene3d>
+      <a:camera prst="orthographicFront"/>
+      <a:lightRig rig="threePt" dir="t"/>
+    </dgm:scene3d>
+    <dgm:sp3d/>
+    <dgm:txPr/>
+    <dgm:style>
+      <a:lnRef idx="0">
+        <a:scrgbClr r="0" g="0" b="0"/>
+      </a:lnRef>
+      <a:fillRef idx="1">
+        <a:scrgbClr r="0" g="0" b="0"/>
+      </a:fillRef>
+      <a:effectRef idx="0">
+        <a:scrgbClr r="0" g="0" b="0"/>
+      </a:effectRef>
+      <a:fontRef idx="minor"/>
+    </dgm:style>
+  </dgm:styleLbl>
+  <dgm:styleLbl name="fgShp">
+    <dgm:scene3d>
+      <a:camera prst="orthographicFront"/>
+      <a:lightRig rig="threePt" dir="t"/>
+    </dgm:scene3d>
+    <dgm:sp3d/>
+    <dgm:txPr/>
+    <dgm:style>
+      <a:lnRef idx="2">
+        <a:scrgbClr r="0" g="0" b="0"/>
+      </a:lnRef>
+      <a:fillRef idx="1">
+        <a:scrgbClr r="0" g="0" b="0"/>
+      </a:fillRef>
+      <a:effectRef idx="0">
+        <a:scrgbClr r="0" g="0" b="0"/>
+      </a:effectRef>
+      <a:fontRef idx="minor"/>
+    </dgm:style>
+  </dgm:styleLbl>
+  <dgm:styleLbl name="revTx">
+    <dgm:scene3d>
+      <a:camera prst="orthographicFront"/>
+      <a:lightRig rig="threePt" dir="t"/>
+    </dgm:scene3d>
+    <dgm:sp3d/>
+    <dgm:txPr/>
+    <dgm:style>
+      <a:lnRef idx="0">
+        <a:scrgbClr r="0" g="0" b="0"/>
+      </a:lnRef>
+      <a:fillRef idx="0">
+        <a:scrgbClr r="0" g="0" b="0"/>
+      </a:fillRef>
+      <a:effectRef idx="0">
+        <a:scrgbClr r="0" g="0" b="0"/>
+      </a:effectRef>
+      <a:fontRef idx="minor"/>
+    </dgm:style>
+  </dgm:styleLbl>
+</dgm:styleDef>
+</file>
+
+<file path=ppt/diagrams/quickStyle2.xml><?xml version="1.0" encoding="utf-8"?>
+<dgm:styleDef xmlns:dgm="http://schemas.openxmlformats.org/drawingml/2006/diagram" xmlns:a="http://schemas.openxmlformats.org/drawingml/2006/main" uniqueId="urn:microsoft.com/office/officeart/2005/8/quickstyle/simple1">
+  <dgm:title val=""/>
+  <dgm:desc val=""/>
+  <dgm:catLst>
+    <dgm:cat type="simple" pri="10100"/>
+  </dgm:catLst>
+  <dgm:scene3d>
+    <a:camera prst="orthographicFront"/>
+    <a:lightRig rig="threePt" dir="t"/>
+  </dgm:scene3d>
+  <dgm:styleLbl name="node0">
+    <dgm:scene3d>
+      <a:camera prst="orthographicFront"/>
+      <a:lightRig rig="threePt" dir="t"/>
+    </dgm:scene3d>
+    <dgm:sp3d/>
+    <dgm:txPr/>
+    <dgm:style>
+      <a:lnRef idx="2">
+        <a:scrgbClr r="0" g="0" b="0"/>
+      </a:lnRef>
+      <a:fillRef idx="1">
+        <a:scrgbClr r="0" g="0" b="0"/>
+      </a:fillRef>
+      <a:effectRef idx="0">
+        <a:scrgbClr r="0" g="0" b="0"/>
+      </a:effectRef>
+      <a:fontRef idx="minor">
+        <a:schemeClr val="lt1"/>
+      </a:fontRef>
+    </dgm:style>
+  </dgm:styleLbl>
+  <dgm:styleLbl name="lnNode1">
+    <dgm:scene3d>
+      <a:camera prst="orthographicFront"/>
+      <a:lightRig rig="threePt" dir="t"/>
+    </dgm:scene3d>
+    <dgm:sp3d/>
+    <dgm:txPr/>
+    <dgm:style>
+      <a:lnRef idx="2">
+        <a:scrgbClr r="0" g="0" b="0"/>
+      </a:lnRef>
+      <a:fillRef idx="1">
+        <a:scrgbClr r="0" g="0" b="0"/>
+      </a:fillRef>
+      <a:effectRef idx="0">
+        <a:scrgbClr r="0" g="0" b="0"/>
+      </a:effectRef>
+      <a:fontRef idx="minor">
+        <a:schemeClr val="lt1"/>
+      </a:fontRef>
+    </dgm:style>
+  </dgm:styleLbl>
+  <dgm:styleLbl name="vennNode1">
+    <dgm:scene3d>
+      <a:camera prst="orthographicFront"/>
+      <a:lightRig rig="threePt" dir="t"/>
+    </dgm:scene3d>
+    <dgm:sp3d/>
+    <dgm:txPr/>
+    <dgm:style>
+      <a:lnRef idx="2">
+        <a:scrgbClr r="0" g="0" b="0"/>
+      </a:lnRef>
+      <a:fillRef idx="1">
+        <a:scrgbClr r="0" g="0" b="0"/>
+      </a:fillRef>
+      <a:effectRef idx="0">
+        <a:scrgbClr r="0" g="0" b="0"/>
+      </a:effectRef>
+      <a:fontRef idx="minor">
+        <a:schemeClr val="tx1"/>
+      </a:fontRef>
+    </dgm:style>
+  </dgm:styleLbl>
+  <dgm:styleLbl name="alignNode1">
+    <dgm:scene3d>
+      <a:camera prst="orthographicFront"/>
+      <a:lightRig rig="threePt" dir="t"/>
+    </dgm:scene3d>
+    <dgm:sp3d/>
+    <dgm:txPr/>
+    <dgm:style>
+      <a:lnRef idx="2">
+        <a:scrgbClr r="0" g="0" b="0"/>
+      </a:lnRef>
+      <a:fillRef idx="1">
+        <a:scrgbClr r="0" g="0" b="0"/>
+      </a:fillRef>
+      <a:effectRef idx="0">
+        <a:scrgbClr r="0" g="0" b="0"/>
+      </a:effectRef>
+      <a:fontRef idx="minor">
+        <a:schemeClr val="lt1"/>
+      </a:fontRef>
+    </dgm:style>
+  </dgm:styleLbl>
+  <dgm:styleLbl name="node1">
+    <dgm:scene3d>
+      <a:camera prst="orthographicFront"/>
+      <a:lightRig rig="threePt" dir="t"/>
+    </dgm:scene3d>
+    <dgm:sp3d/>
+    <dgm:txPr/>
+    <dgm:style>
+      <a:lnRef idx="2">
+        <a:scrgbClr r="0" g="0" b="0"/>
+      </a:lnRef>
+      <a:fillRef idx="1">
+        <a:scrgbClr r="0" g="0" b="0"/>
+      </a:fillRef>
+      <a:effectRef idx="0">
+        <a:scrgbClr r="0" g="0" b="0"/>
+      </a:effectRef>
+      <a:fontRef idx="minor">
+        <a:schemeClr val="lt1"/>
+      </a:fontRef>
+    </dgm:style>
+  </dgm:styleLbl>
+  <dgm:styleLbl name="node2">
+    <dgm:scene3d>
+      <a:camera prst="orthographicFront"/>
+      <a:lightRig rig="threePt" dir="t"/>
+    </dgm:scene3d>
+    <dgm:sp3d/>
+    <dgm:txPr/>
+    <dgm:style>
+      <a:lnRef idx="2">
+        <a:scrgbClr r="0" g="0" b="0"/>
+      </a:lnRef>
+      <a:fillRef idx="1">
+        <a:scrgbClr r="0" g="0" b="0"/>
+      </a:fillRef>
+      <a:effectRef idx="0">
+        <a:scrgbClr r="0" g="0" b="0"/>
+      </a:effectRef>
+      <a:fontRef idx="minor">
+        <a:schemeClr val="lt1"/>
+      </a:fontRef>
+    </dgm:style>
+  </dgm:styleLbl>
+  <dgm:styleLbl name="node3">
+    <dgm:scene3d>
+      <a:camera prst="orthographicFront"/>
+      <a:lightRig rig="threePt" dir="t"/>
+    </dgm:scene3d>
+    <dgm:sp3d/>
+    <dgm:txPr/>
+    <dgm:style>
+      <a:lnRef idx="2">
+        <a:scrgbClr r="0" g="0" b="0"/>
+      </a:lnRef>
+      <a:fillRef idx="1">
+        <a:scrgbClr r="0" g="0" b="0"/>
+      </a:fillRef>
+      <a:effectRef idx="0">
+        <a:scrgbClr r="0" g="0" b="0"/>
+      </a:effectRef>
+      <a:fontRef idx="minor">
+        <a:schemeClr val="lt1"/>
+      </a:fontRef>
+    </dgm:style>
+  </dgm:styleLbl>
+  <dgm:styleLbl name="node4">
+    <dgm:scene3d>
+      <a:camera prst="orthographicFront"/>
+      <a:lightRig rig="threePt" dir="t"/>
+    </dgm:scene3d>
+    <dgm:sp3d/>
+    <dgm:txPr/>
+    <dgm:style>
+      <a:lnRef idx="2">
+        <a:scrgbClr r="0" g="0" b="0"/>
+      </a:lnRef>
+      <a:fillRef idx="1">
+        <a:scrgbClr r="0" g="0" b="0"/>
+      </a:fillRef>
+      <a:effectRef idx="0">
+        <a:scrgbClr r="0" g="0" b="0"/>
+      </a:effectRef>
+      <a:fontRef idx="minor">
+        <a:schemeClr val="lt1"/>
+      </a:fontRef>
+    </dgm:style>
+  </dgm:styleLbl>
+  <dgm:styleLbl name="fgImgPlace1">
+    <dgm:scene3d>
+      <a:camera prst="orthographicFront"/>
+      <a:lightRig rig="threePt" dir="t"/>
+    </dgm:scene3d>
+    <dgm:sp3d/>
+    <dgm:txPr/>
+    <dgm:style>
+      <a:lnRef idx="2">
+        <a:scrgbClr r="0" g="0" b="0"/>
+      </a:lnRef>
+      <a:fillRef idx="1">
+        <a:scrgbClr r="0" g="0" b="0"/>
+      </a:fillRef>
+      <a:effectRef idx="0">
+        <a:scrgbClr r="0" g="0" b="0"/>
+      </a:effectRef>
+      <a:fontRef idx="minor"/>
+    </dgm:style>
+  </dgm:styleLbl>
+  <dgm:styleLbl name="alignImgPlace1">
+    <dgm:scene3d>
+      <a:camera prst="orthographicFront"/>
+      <a:lightRig rig="threePt" dir="t"/>
+    </dgm:scene3d>
+    <dgm:sp3d/>
+    <dgm:txPr/>
+    <dgm:style>
+      <a:lnRef idx="2">
+        <a:scrgbClr r="0" g="0" b="0"/>
+      </a:lnRef>
+      <a:fillRef idx="1">
+        <a:scrgbClr r="0" g="0" b="0"/>
+      </a:fillRef>
+      <a:effectRef idx="0">
+        <a:scrgbClr r="0" g="0" b="0"/>
+      </a:effectRef>
+      <a:fontRef idx="minor"/>
+    </dgm:style>
+  </dgm:styleLbl>
+  <dgm:styleLbl name="bgImgPlace1">
+    <dgm:scene3d>
+      <a:camera prst="orthographicFront"/>
+      <a:lightRig rig="threePt" dir="t"/>
+    </dgm:scene3d>
+    <dgm:sp3d/>
+    <dgm:txPr/>
+    <dgm:style>
+      <a:lnRef idx="2">
+        <a:scrgbClr r="0" g="0" b="0"/>
+      </a:lnRef>
+      <a:fillRef idx="1">
+        <a:scrgbClr r="0" g="0" b="0"/>
+      </a:fillRef>
+      <a:effectRef idx="0">
+        <a:scrgbClr r="0" g="0" b="0"/>
+      </a:effectRef>
+      <a:fontRef idx="minor"/>
+    </dgm:style>
+  </dgm:styleLbl>
+  <dgm:styleLbl name="sibTrans2D1">
+    <dgm:scene3d>
+      <a:camera prst="orthographicFront"/>
+      <a:lightRig rig="threePt" dir="t"/>
+    </dgm:scene3d>
+    <dgm:sp3d/>
+    <dgm:txPr/>
+    <dgm:style>
+      <a:lnRef idx="0">
+        <a:scrgbClr r="0" g="0" b="0"/>
+      </a:lnRef>
+      <a:fillRef idx="1">
+        <a:scrgbClr r="0" g="0" b="0"/>
+      </a:fillRef>
+      <a:effectRef idx="0">
+        <a:scrgbClr r="0" g="0" b="0"/>
+      </a:effectRef>
+      <a:fontRef idx="minor">
+        <a:schemeClr val="lt1"/>
+      </a:fontRef>
+    </dgm:style>
+  </dgm:styleLbl>
+  <dgm:styleLbl name="fgSibTrans2D1">
+    <dgm:scene3d>
+      <a:camera prst="orthographicFront"/>
+      <a:lightRig rig="threePt" dir="t"/>
+    </dgm:scene3d>
+    <dgm:sp3d/>
+    <dgm:txPr/>
+    <dgm:style>
+      <a:lnRef idx="0">
+        <a:scrgbClr r="0" g="0" b="0"/>
+      </a:lnRef>
+      <a:fillRef idx="1">
+        <a:scrgbClr r="0" g="0" b="0"/>
+      </a:fillRef>
+      <a:effectRef idx="0">
+        <a:scrgbClr r="0" g="0" b="0"/>
+      </a:effectRef>
+      <a:fontRef idx="minor">
+        <a:schemeClr val="lt1"/>
+      </a:fontRef>
+    </dgm:style>
+  </dgm:styleLbl>
+  <dgm:styleLbl name="bgSibTrans2D1">
+    <dgm:scene3d>
+      <a:camera prst="orthographicFront"/>
+      <a:lightRig rig="threePt" dir="t"/>
+    </dgm:scene3d>
+    <dgm:sp3d/>
+    <dgm:txPr/>
+    <dgm:style>
+      <a:lnRef idx="0">
+        <a:scrgbClr r="0" g="0" b="0"/>
+      </a:lnRef>
+      <a:fillRef idx="1">
+        <a:scrgbClr r="0" g="0" b="0"/>
+      </a:fillRef>
+      <a:effectRef idx="0">
+        <a:scrgbClr r="0" g="0" b="0"/>
+      </a:effectRef>
+      <a:fontRef idx="minor">
+        <a:schemeClr val="lt1"/>
+      </a:fontRef>
+    </dgm:style>
+  </dgm:styleLbl>
+  <dgm:styleLbl name="sibTrans1D1">
+    <dgm:scene3d>
+      <a:camera prst="orthographicFront"/>
+      <a:lightRig rig="threePt" dir="t"/>
+    </dgm:scene3d>
+    <dgm:sp3d/>
+    <dgm:txPr/>
+    <dgm:style>
+      <a:lnRef idx="1">
+        <a:scrgbClr r="0" g="0" b="0"/>
+      </a:lnRef>
+      <a:fillRef idx="0">
+        <a:scrgbClr r="0" g="0" b="0"/>
+      </a:fillRef>
+      <a:effectRef idx="0">
+        <a:scrgbClr r="0" g="0" b="0"/>
+      </a:effectRef>
+      <a:fontRef idx="minor"/>
+    </dgm:style>
+  </dgm:styleLbl>
+  <dgm:styleLbl name="callout">
+    <dgm:scene3d>
+      <a:camera prst="orthographicFront"/>
+      <a:lightRig rig="threePt" dir="t"/>
+    </dgm:scene3d>
+    <dgm:sp3d/>
+    <dgm:txPr/>
+    <dgm:style>
+      <a:lnRef idx="2">
+        <a:scrgbClr r="0" g="0" b="0"/>
+      </a:lnRef>
+      <a:fillRef idx="1">
+        <a:scrgbClr r="0" g="0" b="0"/>
+      </a:fillRef>
+      <a:effectRef idx="0">
+        <a:scrgbClr r="0" g="0" b="0"/>
+      </a:effectRef>
+      <a:fontRef idx="minor"/>
+    </dgm:style>
+  </dgm:styleLbl>
+  <dgm:styleLbl name="asst0">
+    <dgm:scene3d>
+      <a:camera prst="orthographicFront"/>
+      <a:lightRig rig="threePt" dir="t"/>
+    </dgm:scene3d>
+    <dgm:sp3d/>
+    <dgm:txPr/>
+    <dgm:style>
+      <a:lnRef idx="2">
+        <a:scrgbClr r="0" g="0" b="0"/>
+      </a:lnRef>
+      <a:fillRef idx="1">
+        <a:scrgbClr r="0" g="0" b="0"/>
+      </a:fillRef>
+      <a:effectRef idx="0">
+        <a:scrgbClr r="0" g="0" b="0"/>
+      </a:effectRef>
+      <a:fontRef idx="minor">
+        <a:schemeClr val="lt1"/>
+      </a:fontRef>
+    </dgm:style>
+  </dgm:styleLbl>
+  <dgm:styleLbl name="asst1">
+    <dgm:scene3d>
+      <a:camera prst="orthographicFront"/>
+      <a:lightRig rig="threePt" dir="t"/>
+    </dgm:scene3d>
+    <dgm:sp3d/>
+    <dgm:txPr/>
+    <dgm:style>
+      <a:lnRef idx="2">
+        <a:scrgbClr r="0" g="0" b="0"/>
+      </a:lnRef>
+      <a:fillRef idx="1">
+        <a:scrgbClr r="0" g="0" b="0"/>
+      </a:fillRef>
+      <a:effectRef idx="0">
+        <a:scrgbClr r="0" g="0" b="0"/>
+      </a:effectRef>
+      <a:fontRef idx="minor">
+        <a:schemeClr val="lt1"/>
+      </a:fontRef>
+    </dgm:style>
+  </dgm:styleLbl>
+  <dgm:styleLbl name="asst2">
+    <dgm:scene3d>
+      <a:camera prst="orthographicFront"/>
+      <a:lightRig rig="threePt" dir="t"/>
+    </dgm:scene3d>
+    <dgm:sp3d/>
+    <dgm:txPr/>
+    <dgm:style>
+      <a:lnRef idx="2">
+        <a:scrgbClr r="0" g="0" b="0"/>
+      </a:lnRef>
+      <a:fillRef idx="1">
+        <a:scrgbClr r="0" g="0" b="0"/>
+      </a:fillRef>
+      <a:effectRef idx="0">
+        <a:scrgbClr r="0" g="0" b="0"/>
+      </a:effectRef>
+      <a:fontRef idx="minor">
+        <a:schemeClr val="lt1"/>
+      </a:fontRef>
+    </dgm:style>
+  </dgm:styleLbl>
+  <dgm:styleLbl name="asst3">
+    <dgm:scene3d>
+      <a:camera prst="orthographicFront"/>
+      <a:lightRig rig="threePt" dir="t"/>
+    </dgm:scene3d>
+    <dgm:sp3d/>
+    <dgm:txPr/>
+    <dgm:style>
+      <a:lnRef idx="2">
+        <a:scrgbClr r="0" g="0" b="0"/>
+      </a:lnRef>
+      <a:fillRef idx="1">
+        <a:scrgbClr r="0" g="0" b="0"/>
+      </a:fillRef>
+      <a:effectRef idx="0">
+        <a:scrgbClr r="0" g="0" b="0"/>
+      </a:effectRef>
+      <a:fontRef idx="minor">
+        <a:schemeClr val="lt1"/>
+      </a:fontRef>
+    </dgm:style>
+  </dgm:styleLbl>
+  <dgm:styleLbl name="asst4">
+    <dgm:scene3d>
+      <a:camera prst="orthographicFront"/>
+      <a:lightRig rig="threePt" dir="t"/>
+    </dgm:scene3d>
+    <dgm:sp3d/>
+    <dgm:txPr/>
+    <dgm:style>
+      <a:lnRef idx="2">
+        <a:scrgbClr r="0" g="0" b="0"/>
+      </a:lnRef>
+      <a:fillRef idx="1">
+        <a:scrgbClr r="0" g="0" b="0"/>
+      </a:fillRef>
+      <a:effectRef idx="0">
+        <a:scrgbClr r="0" g="0" b="0"/>
+      </a:effectRef>
+      <a:fontRef idx="minor">
+        <a:schemeClr val="lt1"/>
+      </a:fontRef>
+    </dgm:style>
+  </dgm:styleLbl>
+  <dgm:styleLbl name="parChTrans2D1">
+    <dgm:scene3d>
+      <a:camera prst="orthographicFront"/>
+      <a:lightRig rig="threePt" dir="t"/>
+    </dgm:scene3d>
+    <dgm:sp3d/>
+    <dgm:txPr/>
+    <dgm:style>
+      <a:lnRef idx="2">
+        <a:scrgbClr r="0" g="0" b="0"/>
+      </a:lnRef>
+      <a:fillRef idx="1">
+        <a:scrgbClr r="0" g="0" b="0"/>
+      </a:fillRef>
+      <a:effectRef idx="0">
+        <a:scrgbClr r="0" g="0" b="0"/>
+      </a:effectRef>
+      <a:fontRef idx="minor">
+        <a:schemeClr val="lt1"/>
+      </a:fontRef>
+    </dgm:style>
+  </dgm:styleLbl>
+  <dgm:styleLbl name="parChTrans2D2">
+    <dgm:scene3d>
+      <a:camera prst="orthographicFront"/>
+      <a:lightRig rig="threePt" dir="t"/>
+    </dgm:scene3d>
+    <dgm:sp3d/>
+    <dgm:txPr/>
+    <dgm:style>
+      <a:lnRef idx="2">
+        <a:scrgbClr r="0" g="0" b="0"/>
+      </a:lnRef>
+      <a:fillRef idx="1">
+        <a:scrgbClr r="0" g="0" b="0"/>
+      </a:fillRef>
+      <a:effectRef idx="0">
+        <a:scrgbClr r="0" g="0" b="0"/>
+      </a:effectRef>
+      <a:fontRef idx="minor">
+        <a:schemeClr val="lt1"/>
+      </a:fontRef>
+    </dgm:style>
+  </dgm:styleLbl>
+  <dgm:styleLbl name="parChTrans2D3">
+    <dgm:scene3d>
+      <a:camera prst="orthographicFront"/>
+      <a:lightRig rig="threePt" dir="t"/>
+    </dgm:scene3d>
+    <dgm:sp3d/>
+    <dgm:txPr/>
+    <dgm:style>
+      <a:lnRef idx="2">
+        <a:scrgbClr r="0" g="0" b="0"/>
+      </a:lnRef>
+      <a:fillRef idx="1">
+        <a:scrgbClr r="0" g="0" b="0"/>
+      </a:fillRef>
+      <a:effectRef idx="0">
+        <a:scrgbClr r="0" g="0" b="0"/>
+      </a:effectRef>
+      <a:fontRef idx="minor">
+        <a:schemeClr val="lt1"/>
+      </a:fontRef>
+    </dgm:style>
+  </dgm:styleLbl>
+  <dgm:styleLbl name="parChTrans2D4">
+    <dgm:scene3d>
+      <a:camera prst="orthographicFront"/>
+      <a:lightRig rig="threePt" dir="t"/>
+    </dgm:scene3d>
+    <dgm:sp3d/>
+    <dgm:txPr/>
+    <dgm:style>
+      <a:lnRef idx="2">
+        <a:scrgbClr r="0" g="0" b="0"/>
+      </a:lnRef>
+      <a:fillRef idx="1">
+        <a:scrgbClr r="0" g="0" b="0"/>
+      </a:fillRef>
+      <a:effectRef idx="0">
+        <a:scrgbClr r="0" g="0" b="0"/>
+      </a:effectRef>
+      <a:fontRef idx="minor">
+        <a:schemeClr val="lt1"/>
+      </a:fontRef>
+    </dgm:style>
+  </dgm:styleLbl>
+  <dgm:styleLbl name="parChTrans1D1">
+    <dgm:scene3d>
+      <a:camera prst="orthographicFront"/>
+      <a:lightRig rig="threePt" dir="t"/>
+    </dgm:scene3d>
+    <dgm:sp3d/>
+    <dgm:txPr/>
+    <dgm:style>
+      <a:lnRef idx="2">
+        <a:scrgbClr r="0" g="0" b="0"/>
+      </a:lnRef>
+      <a:fillRef idx="0">
+        <a:scrgbClr r="0" g="0" b="0"/>
+      </a:fillRef>
+      <a:effectRef idx="0">
+        <a:scrgbClr r="0" g="0" b="0"/>
+      </a:effectRef>
+      <a:fontRef idx="minor"/>
+    </dgm:style>
+  </dgm:styleLbl>
+  <dgm:styleLbl name="parChTrans1D2">
+    <dgm:scene3d>
+      <a:camera prst="orthographicFront"/>
+      <a:lightRig rig="threePt" dir="t"/>
+    </dgm:scene3d>
+    <dgm:sp3d/>
+    <dgm:txPr/>
+    <dgm:style>
+      <a:lnRef idx="2">
+        <a:scrgbClr r="0" g="0" b="0"/>
+      </a:lnRef>
+      <a:fillRef idx="0">
+        <a:scrgbClr r="0" g="0" b="0"/>
+      </a:fillRef>
+      <a:effectRef idx="0">
+        <a:scrgbClr r="0" g="0" b="0"/>
+      </a:effectRef>
+      <a:fontRef idx="minor"/>
+    </dgm:style>
+  </dgm:styleLbl>
+  <dgm:styleLbl name="parChTrans1D3">
+    <dgm:scene3d>
+      <a:camera prst="orthographicFront"/>
+      <a:lightRig rig="threePt" dir="t"/>
+    </dgm:scene3d>
+    <dgm:sp3d/>
+    <dgm:txPr/>
+    <dgm:style>
+      <a:lnRef idx="2">
+        <a:scrgbClr r="0" g="0" b="0"/>
+      </a:lnRef>
+      <a:fillRef idx="0">
+        <a:scrgbClr r="0" g="0" b="0"/>
+      </a:fillRef>
+      <a:effectRef idx="0">
+        <a:scrgbClr r="0" g="0" b="0"/>
+      </a:effectRef>
+      <a:fontRef idx="minor"/>
+    </dgm:style>
+  </dgm:styleLbl>
+  <dgm:styleLbl name="parChTrans1D4">
+    <dgm:scene3d>
+      <a:camera prst="orthographicFront"/>
+      <a:lightRig rig="threePt" dir="t"/>
+    </dgm:scene3d>
+    <dgm:sp3d/>
+    <dgm:txPr/>
+    <dgm:style>
+      <a:lnRef idx="2">
+        <a:scrgbClr r="0" g="0" b="0"/>
+      </a:lnRef>
+      <a:fillRef idx="0">
+        <a:scrgbClr r="0" g="0" b="0"/>
+      </a:fillRef>
+      <a:effectRef idx="0">
+        <a:scrgbClr r="0" g="0" b="0"/>
+      </a:effectRef>
+      <a:fontRef idx="minor"/>
+    </dgm:style>
+  </dgm:styleLbl>
+  <dgm:styleLbl name="fgAcc1">
+    <dgm:scene3d>
+      <a:camera prst="orthographicFront"/>
+      <a:lightRig rig="threePt" dir="t"/>
+    </dgm:scene3d>
+    <dgm:sp3d/>
+    <dgm:txPr/>
+    <dgm:style>
+      <a:lnRef idx="2">
+        <a:scrgbClr r="0" g="0" b="0"/>
+      </a:lnRef>
+      <a:fillRef idx="1">
+        <a:scrgbClr r="0" g="0" b="0"/>
+      </a:fillRef>
+      <a:effectRef idx="0">
+        <a:scrgbClr r="0" g="0" b="0"/>
+      </a:effectRef>
+      <a:fontRef idx="minor"/>
+    </dgm:style>
+  </dgm:styleLbl>
+  <dgm:styleLbl name="conFgAcc1">
+    <dgm:scene3d>
+      <a:camera prst="orthographicFront"/>
+      <a:lightRig rig="threePt" dir="t"/>
+    </dgm:scene3d>
+    <dgm:sp3d/>
+    <dgm:txPr/>
+    <dgm:style>
+      <a:lnRef idx="2">
+        <a:scrgbClr r="0" g="0" b="0"/>
+      </a:lnRef>
+      <a:fillRef idx="1">
+        <a:scrgbClr r="0" g="0" b="0"/>
+      </a:fillRef>
+      <a:effectRef idx="0">
+        <a:scrgbClr r="0" g="0" b="0"/>
+      </a:effectRef>
+      <a:fontRef idx="minor"/>
+    </dgm:style>
+  </dgm:styleLbl>
+  <dgm:styleLbl name="alignAcc1">
+    <dgm:scene3d>
+      <a:camera prst="orthographicFront"/>
+      <a:lightRig rig="threePt" dir="t"/>
+    </dgm:scene3d>
+    <dgm:sp3d/>
+    <dgm:txPr/>
+    <dgm:style>
+      <a:lnRef idx="2">
+        <a:scrgbClr r="0" g="0" b="0"/>
+      </a:lnRef>
+      <a:fillRef idx="1">
+        <a:scrgbClr r="0" g="0" b="0"/>
+      </a:fillRef>
+      <a:effectRef idx="0">
+        <a:scrgbClr r="0" g="0" b="0"/>
+      </a:effectRef>
+      <a:fontRef idx="minor"/>
+    </dgm:style>
+  </dgm:styleLbl>
+  <dgm:styleLbl name="trAlignAcc1">
+    <dgm:scene3d>
+      <a:camera prst="orthographicFront"/>
+      <a:lightRig rig="threePt" dir="t"/>
+    </dgm:scene3d>
+    <dgm:sp3d/>
+    <dgm:txPr/>
+    <dgm:style>
+      <a:lnRef idx="1">
+        <a:scrgbClr r="0" g="0" b="0"/>
+      </a:lnRef>
+      <a:fillRef idx="1">
+        <a:scrgbClr r="0" g="0" b="0"/>
+      </a:fillRef>
+      <a:effectRef idx="0">
+        <a:scrgbClr r="0" g="0" b="0"/>
+      </a:effectRef>
+      <a:fontRef idx="minor"/>
+    </dgm:style>
+  </dgm:styleLbl>
+  <dgm:styleLbl name="bgAcc1">
+    <dgm:scene3d>
+      <a:camera prst="orthographicFront"/>
+      <a:lightRig rig="threePt" dir="t"/>
+    </dgm:scene3d>
+    <dgm:sp3d/>
+    <dgm:txPr/>
+    <dgm:style>
+      <a:lnRef idx="2">
+        <a:scrgbClr r="0" g="0" b="0"/>
+      </a:lnRef>
+      <a:fillRef idx="1">
+        <a:scrgbClr r="0" g="0" b="0"/>
+      </a:fillRef>
+      <a:effectRef idx="0">
+        <a:scrgbClr r="0" g="0" b="0"/>
+      </a:effectRef>
+      <a:fontRef idx="minor"/>
+    </dgm:style>
+  </dgm:styleLbl>
+  <dgm:styleLbl name="solidFgAcc1">
+    <dgm:scene3d>
+      <a:camera prst="orthographicFront"/>
+      <a:lightRig rig="threePt" dir="t"/>
+    </dgm:scene3d>
+    <dgm:sp3d/>
+    <dgm:txPr/>
+    <dgm:style>
+      <a:lnRef idx="2">
+        <a:scrgbClr r="0" g="0" b="0"/>
+      </a:lnRef>
+      <a:fillRef idx="1">
+        <a:scrgbClr r="0" g="0" b="0"/>
+      </a:fillRef>
+      <a:effectRef idx="0">
+        <a:scrgbClr r="0" g="0" b="0"/>
+      </a:effectRef>
+      <a:fontRef idx="minor"/>
+    </dgm:style>
+  </dgm:styleLbl>
+  <dgm:styleLbl name="solidAlignAcc1">
+    <dgm:scene3d>
+      <a:camera prst="orthographicFront"/>
+      <a:lightRig rig="threePt" dir="t"/>
+    </dgm:scene3d>
+    <dgm:sp3d/>
+    <dgm:txPr/>
+    <dgm:style>
+      <a:lnRef idx="2">
+        <a:scrgbClr r="0" g="0" b="0"/>
+      </a:lnRef>
+      <a:fillRef idx="1">
+        <a:scrgbClr r="0" g="0" b="0"/>
+      </a:fillRef>
+      <a:effectRef idx="0">
+        <a:scrgbClr r="0" g="0" b="0"/>
+      </a:effectRef>
+      <a:fontRef idx="minor"/>
+    </dgm:style>
+  </dgm:styleLbl>
+  <dgm:styleLbl name="solidBgAcc1">
+    <dgm:scene3d>
+      <a:camera prst="orthographicFront"/>
+      <a:lightRig rig="threePt" dir="t"/>
+    </dgm:scene3d>
+    <dgm:sp3d/>
+    <dgm:txPr/>
+    <dgm:style>
+      <a:lnRef idx="2">
+        <a:scrgbClr r="0" g="0" b="0"/>
+      </a:lnRef>
+      <a:fillRef idx="1">
+        <a:scrgbClr r="0" g="0" b="0"/>
+      </a:fillRef>
+      <a:effectRef idx="0">
+        <a:scrgbClr r="0" g="0" b="0"/>
+      </a:effectRef>
+      <a:fontRef idx="minor"/>
+    </dgm:style>
+  </dgm:styleLbl>
+  <dgm:styleLbl name="fgAccFollowNode1">
+    <dgm:scene3d>
+      <a:camera prst="orthographicFront"/>
+      <a:lightRig rig="threePt" dir="t"/>
+    </dgm:scene3d>
+    <dgm:sp3d/>
+    <dgm:txPr/>
+    <dgm:style>
+      <a:lnRef idx="2">
+        <a:scrgbClr r="0" g="0" b="0"/>
+      </a:lnRef>
+      <a:fillRef idx="1">
+        <a:scrgbClr r="0" g="0" b="0"/>
+      </a:fillRef>
+      <a:effectRef idx="0">
+        <a:scrgbClr r="0" g="0" b="0"/>
+      </a:effectRef>
+      <a:fontRef idx="minor"/>
+    </dgm:style>
+  </dgm:styleLbl>
+  <dgm:styleLbl name="alignAccFollowNode1">
+    <dgm:scene3d>
+      <a:camera prst="orthographicFront"/>
+      <a:lightRig rig="threePt" dir="t"/>
+    </dgm:scene3d>
+    <dgm:sp3d/>
+    <dgm:txPr/>
+    <dgm:style>
+      <a:lnRef idx="2">
+        <a:scrgbClr r="0" g="0" b="0"/>
+      </a:lnRef>
+      <a:fillRef idx="1">
+        <a:scrgbClr r="0" g="0" b="0"/>
+      </a:fillRef>
+      <a:effectRef idx="0">
+        <a:scrgbClr r="0" g="0" b="0"/>
+      </a:effectRef>
+      <a:fontRef idx="minor"/>
+    </dgm:style>
+  </dgm:styleLbl>
+  <dgm:styleLbl name="bgAccFollowNode1">
+    <dgm:scene3d>
+      <a:camera prst="orthographicFront"/>
+      <a:lightRig rig="threePt" dir="t"/>
+    </dgm:scene3d>
+    <dgm:sp3d/>
+    <dgm:txPr/>
+    <dgm:style>
+      <a:lnRef idx="2">
+        <a:scrgbClr r="0" g="0" b="0"/>
+      </a:lnRef>
+      <a:fillRef idx="1">
+        <a:scrgbClr r="0" g="0" b="0"/>
+      </a:fillRef>
+      <a:effectRef idx="0">
+        <a:scrgbClr r="0" g="0" b="0"/>
+      </a:effectRef>
+      <a:fontRef idx="minor"/>
+    </dgm:style>
+  </dgm:styleLbl>
+  <dgm:styleLbl name="fgAcc0">
+    <dgm:scene3d>
+      <a:camera prst="orthographicFront"/>
+      <a:lightRig rig="threePt" dir="t"/>
+    </dgm:scene3d>
+    <dgm:sp3d/>
+    <dgm:txPr/>
+    <dgm:style>
+      <a:lnRef idx="2">
+        <a:scrgbClr r="0" g="0" b="0"/>
+      </a:lnRef>
+      <a:fillRef idx="1">
+        <a:scrgbClr r="0" g="0" b="0"/>
+      </a:fillRef>
+      <a:effectRef idx="0">
+        <a:scrgbClr r="0" g="0" b="0"/>
+      </a:effectRef>
+      <a:fontRef idx="minor"/>
+    </dgm:style>
+  </dgm:styleLbl>
+  <dgm:styleLbl name="fgAcc2">
+    <dgm:scene3d>
+      <a:camera prst="orthographicFront"/>
+      <a:lightRig rig="threePt" dir="t"/>
+    </dgm:scene3d>
+    <dgm:sp3d/>
+    <dgm:txPr/>
+    <dgm:style>
+      <a:lnRef idx="2">
+        <a:scrgbClr r="0" g="0" b="0"/>
+      </a:lnRef>
+      <a:fillRef idx="1">
+        <a:scrgbClr r="0" g="0" b="0"/>
+      </a:fillRef>
+      <a:effectRef idx="0">
+        <a:scrgbClr r="0" g="0" b="0"/>
+      </a:effectRef>
+      <a:fontRef idx="minor"/>
+    </dgm:style>
+  </dgm:styleLbl>
+  <dgm:styleLbl name="fgAcc3">
+    <dgm:scene3d>
+      <a:camera prst="orthographicFront"/>
+      <a:lightRig rig="threePt" dir="t"/>
+    </dgm:scene3d>
+    <dgm:sp3d/>
+    <dgm:txPr/>
+    <dgm:style>
+      <a:lnRef idx="2">
+        <a:scrgbClr r="0" g="0" b="0"/>
+      </a:lnRef>
+      <a:fillRef idx="1">
+        <a:scrgbClr r="0" g="0" b="0"/>
+      </a:fillRef>
+      <a:effectRef idx="0">
+        <a:scrgbClr r="0" g="0" b="0"/>
+      </a:effectRef>
+      <a:fontRef idx="minor"/>
+    </dgm:style>
+  </dgm:styleLbl>
+  <dgm:styleLbl name="fgAcc4">
+    <dgm:scene3d>
+      <a:camera prst="orthographicFront"/>
+      <a:lightRig rig="threePt" dir="t"/>
+    </dgm:scene3d>
+    <dgm:sp3d/>
+    <dgm:txPr/>
+    <dgm:style>
+      <a:lnRef idx="2">
+        <a:scrgbClr r="0" g="0" b="0"/>
+      </a:lnRef>
+      <a:fillRef idx="1">
+        <a:scrgbClr r="0" g="0" b="0"/>
+      </a:fillRef>
+      <a:effectRef idx="0">
+        <a:scrgbClr r="0" g="0" b="0"/>
+      </a:effectRef>
+      <a:fontRef idx="minor"/>
+    </dgm:style>
+  </dgm:styleLbl>
+  <dgm:styleLbl name="bgShp">
+    <dgm:scene3d>
+      <a:camera prst="orthographicFront"/>
+      <a:lightRig rig="threePt" dir="t"/>
+    </dgm:scene3d>
+    <dgm:sp3d/>
+    <dgm:txPr/>
+    <dgm:style>
+      <a:lnRef idx="0">
+        <a:scrgbClr r="0" g="0" b="0"/>
+      </a:lnRef>
+      <a:fillRef idx="1">
+        <a:scrgbClr r="0" g="0" b="0"/>
+      </a:fillRef>
+      <a:effectRef idx="0">
+        <a:scrgbClr r="0" g="0" b="0"/>
+      </a:effectRef>
+      <a:fontRef idx="minor"/>
+    </dgm:style>
+  </dgm:styleLbl>
+  <dgm:styleLbl name="dkBgShp">
+    <dgm:scene3d>
+      <a:camera prst="orthographicFront"/>
+      <a:lightRig rig="threePt" dir="t"/>
+    </dgm:scene3d>
+    <dgm:sp3d/>
+    <dgm:txPr/>
+    <dgm:style>
+      <a:lnRef idx="0">
+        <a:scrgbClr r="0" g="0" b="0"/>
+      </a:lnRef>
+      <a:fillRef idx="1">
+        <a:scrgbClr r="0" g="0" b="0"/>
+      </a:fillRef>
+      <a:effectRef idx="0">
+        <a:scrgbClr r="0" g="0" b="0"/>
+      </a:effectRef>
+      <a:fontRef idx="minor"/>
+    </dgm:style>
+  </dgm:styleLbl>
+  <dgm:styleLbl name="trBgShp">
+    <dgm:scene3d>
+      <a:camera prst="orthographicFront"/>
+      <a:lightRig rig="threePt" dir="t"/>
+    </dgm:scene3d>
+    <dgm:sp3d/>
+    <dgm:txPr/>
+    <dgm:style>
+      <a:lnRef idx="0">
+        <a:scrgbClr r="0" g="0" b="0"/>
+      </a:lnRef>
+      <a:fillRef idx="1">
+        <a:scrgbClr r="0" g="0" b="0"/>
+      </a:fillRef>
+      <a:effectRef idx="0">
+        <a:scrgbClr r="0" g="0" b="0"/>
+      </a:effectRef>
+      <a:fontRef idx="minor"/>
+    </dgm:style>
+  </dgm:styleLbl>
+  <dgm:styleLbl name="fgShp">
+    <dgm:scene3d>
+      <a:camera prst="orthographicFront"/>
+      <a:lightRig rig="threePt" dir="t"/>
+    </dgm:scene3d>
+    <dgm:sp3d/>
+    <dgm:txPr/>
+    <dgm:style>
+      <a:lnRef idx="2">
+        <a:scrgbClr r="0" g="0" b="0"/>
+      </a:lnRef>
+      <a:fillRef idx="1">
+        <a:scrgbClr r="0" g="0" b="0"/>
+      </a:fillRef>
+      <a:effectRef idx="0">
+        <a:scrgbClr r="0" g="0" b="0"/>
+      </a:effectRef>
+      <a:fontRef idx="minor"/>
+    </dgm:style>
+  </dgm:styleLbl>
+  <dgm:styleLbl name="revTx">
+    <dgm:scene3d>
+      <a:camera prst="orthographicFront"/>
+      <a:lightRig rig="threePt" dir="t"/>
+    </dgm:scene3d>
+    <dgm:sp3d/>
+    <dgm:txPr/>
+    <dgm:style>
+      <a:lnRef idx="0">
+        <a:scrgbClr r="0" g="0" b="0"/>
+      </a:lnRef>
+      <a:fillRef idx="0">
+        <a:scrgbClr r="0" g="0" b="0"/>
+      </a:fillRef>
+      <a:effectRef idx="0">
+        <a:scrgbClr r="0" g="0" b="0"/>
+      </a:effectRef>
+      <a:fontRef idx="minor"/>
+    </dgm:style>
+  </dgm:styleLbl>
+</dgm:styleDef>
+</file>
+
+<file path=ppt/diagrams/quickStyle3.xml><?xml version="1.0" encoding="utf-8"?>
+<dgm:styleDef xmlns:dgm="http://schemas.openxmlformats.org/drawingml/2006/diagram" xmlns:a="http://schemas.openxmlformats.org/drawingml/2006/main" uniqueId="urn:microsoft.com/office/officeart/2005/8/quickstyle/simple1">
+  <dgm:title val=""/>
+  <dgm:desc val=""/>
+  <dgm:catLst>
+    <dgm:cat type="simple" pri="10100"/>
+  </dgm:catLst>
+  <dgm:scene3d>
+    <a:camera prst="orthographicFront"/>
+    <a:lightRig rig="threePt" dir="t"/>
+  </dgm:scene3d>
+  <dgm:styleLbl name="node0">
+    <dgm:scene3d>
+      <a:camera prst="orthographicFront"/>
+      <a:lightRig rig="threePt" dir="t"/>
+    </dgm:scene3d>
+    <dgm:sp3d/>
+    <dgm:txPr/>
+    <dgm:style>
+      <a:lnRef idx="2">
+        <a:scrgbClr r="0" g="0" b="0"/>
+      </a:lnRef>
+      <a:fillRef idx="1">
+        <a:scrgbClr r="0" g="0" b="0"/>
+      </a:fillRef>
+      <a:effectRef idx="0">
+        <a:scrgbClr r="0" g="0" b="0"/>
+      </a:effectRef>
+      <a:fontRef idx="minor">
+        <a:schemeClr val="lt1"/>
+      </a:fontRef>
+    </dgm:style>
+  </dgm:styleLbl>
+  <dgm:styleLbl name="lnNode1">
+    <dgm:scene3d>
+      <a:camera prst="orthographicFront"/>
+      <a:lightRig rig="threePt" dir="t"/>
+    </dgm:scene3d>
+    <dgm:sp3d/>
+    <dgm:txPr/>
+    <dgm:style>
+      <a:lnRef idx="2">
+        <a:scrgbClr r="0" g="0" b="0"/>
+      </a:lnRef>
+      <a:fillRef idx="1">
+        <a:scrgbClr r="0" g="0" b="0"/>
+      </a:fillRef>
+      <a:effectRef idx="0">
+        <a:scrgbClr r="0" g="0" b="0"/>
+      </a:effectRef>
+      <a:fontRef idx="minor">
+        <a:schemeClr val="lt1"/>
+      </a:fontRef>
+    </dgm:style>
+  </dgm:styleLbl>
+  <dgm:styleLbl name="vennNode1">
+    <dgm:scene3d>
+      <a:camera prst="orthographicFront"/>
+      <a:lightRig rig="threePt" dir="t"/>
+    </dgm:scene3d>
+    <dgm:sp3d/>
+    <dgm:txPr/>
+    <dgm:style>
+      <a:lnRef idx="2">
+        <a:scrgbClr r="0" g="0" b="0"/>
+      </a:lnRef>
+      <a:fillRef idx="1">
+        <a:scrgbClr r="0" g="0" b="0"/>
+      </a:fillRef>
+      <a:effectRef idx="0">
+        <a:scrgbClr r="0" g="0" b="0"/>
+      </a:effectRef>
+      <a:fontRef idx="minor">
+        <a:schemeClr val="tx1"/>
+      </a:fontRef>
+    </dgm:style>
+  </dgm:styleLbl>
+  <dgm:styleLbl name="alignNode1">
+    <dgm:scene3d>
+      <a:camera prst="orthographicFront"/>
+      <a:lightRig rig="threePt" dir="t"/>
+    </dgm:scene3d>
+    <dgm:sp3d/>
+    <dgm:txPr/>
+    <dgm:style>
+      <a:lnRef idx="2">
+        <a:scrgbClr r="0" g="0" b="0"/>
+      </a:lnRef>
+      <a:fillRef idx="1">
+        <a:scrgbClr r="0" g="0" b="0"/>
+      </a:fillRef>
+      <a:effectRef idx="0">
+        <a:scrgbClr r="0" g="0" b="0"/>
+      </a:effectRef>
+      <a:fontRef idx="minor">
+        <a:schemeClr val="lt1"/>
+      </a:fontRef>
+    </dgm:style>
+  </dgm:styleLbl>
+  <dgm:styleLbl name="node1">
+    <dgm:scene3d>
+      <a:camera prst="orthographicFront"/>
+      <a:lightRig rig="threePt" dir="t"/>
+    </dgm:scene3d>
+    <dgm:sp3d/>
+    <dgm:txPr/>
+    <dgm:style>
+      <a:lnRef idx="2">
+        <a:scrgbClr r="0" g="0" b="0"/>
+      </a:lnRef>
+      <a:fillRef idx="1">
+        <a:scrgbClr r="0" g="0" b="0"/>
+      </a:fillRef>
+      <a:effectRef idx="0">
+        <a:scrgbClr r="0" g="0" b="0"/>
+      </a:effectRef>
+      <a:fontRef idx="minor">
+        <a:schemeClr val="lt1"/>
+      </a:fontRef>
+    </dgm:style>
+  </dgm:styleLbl>
+  <dgm:styleLbl name="node2">
+    <dgm:scene3d>
+      <a:camera prst="orthographicFront"/>
+      <a:lightRig rig="threePt" dir="t"/>
+    </dgm:scene3d>
+    <dgm:sp3d/>
+    <dgm:txPr/>
+    <dgm:style>
+      <a:lnRef idx="2">
+        <a:scrgbClr r="0" g="0" b="0"/>
+      </a:lnRef>
+      <a:fillRef idx="1">
+        <a:scrgbClr r="0" g="0" b="0"/>
+      </a:fillRef>
+      <a:effectRef idx="0">
+        <a:scrgbClr r="0" g="0" b="0"/>
+      </a:effectRef>
+      <a:fontRef idx="minor">
+        <a:schemeClr val="lt1"/>
+      </a:fontRef>
+    </dgm:style>
+  </dgm:styleLbl>
+  <dgm:styleLbl name="node3">
+    <dgm:scene3d>
+      <a:camera prst="orthographicFront"/>
+      <a:lightRig rig="threePt" dir="t"/>
+    </dgm:scene3d>
+    <dgm:sp3d/>
+    <dgm:txPr/>
+    <dgm:style>
+      <a:lnRef idx="2">
+        <a:scrgbClr r="0" g="0" b="0"/>
+      </a:lnRef>
+      <a:fillRef idx="1">
+        <a:scrgbClr r="0" g="0" b="0"/>
+      </a:fillRef>
+      <a:effectRef idx="0">
+        <a:scrgbClr r="0" g="0" b="0"/>
+      </a:effectRef>
+      <a:fontRef idx="minor">
+        <a:schemeClr val="lt1"/>
+      </a:fontRef>
+    </dgm:style>
+  </dgm:styleLbl>
+  <dgm:styleLbl name="node4">
+    <dgm:scene3d>
+      <a:camera prst="orthographicFront"/>
+      <a:lightRig rig="threePt" dir="t"/>
+    </dgm:scene3d>
+    <dgm:sp3d/>
+    <dgm:txPr/>
+    <dgm:style>
+      <a:lnRef idx="2">
+        <a:scrgbClr r="0" g="0" b="0"/>
+      </a:lnRef>
+      <a:fillRef idx="1">
+        <a:scrgbClr r="0" g="0" b="0"/>
+      </a:fillRef>
+      <a:effectRef idx="0">
+        <a:scrgbClr r="0" g="0" b="0"/>
+      </a:effectRef>
+      <a:fontRef idx="minor">
+        <a:schemeClr val="lt1"/>
+      </a:fontRef>
+    </dgm:style>
+  </dgm:styleLbl>
+  <dgm:styleLbl name="fgImgPlace1">
+    <dgm:scene3d>
+      <a:camera prst="orthographicFront"/>
+      <a:lightRig rig="threePt" dir="t"/>
+    </dgm:scene3d>
+    <dgm:sp3d/>
+    <dgm:txPr/>
+    <dgm:style>
+      <a:lnRef idx="2">
+        <a:scrgbClr r="0" g="0" b="0"/>
+      </a:lnRef>
+      <a:fillRef idx="1">
+        <a:scrgbClr r="0" g="0" b="0"/>
+      </a:fillRef>
+      <a:effectRef idx="0">
+        <a:scrgbClr r="0" g="0" b="0"/>
+      </a:effectRef>
+      <a:fontRef idx="minor"/>
+    </dgm:style>
+  </dgm:styleLbl>
+  <dgm:styleLbl name="alignImgPlace1">
+    <dgm:scene3d>
+      <a:camera prst="orthographicFront"/>
+      <a:lightRig rig="threePt" dir="t"/>
+    </dgm:scene3d>
+    <dgm:sp3d/>
+    <dgm:txPr/>
+    <dgm:style>
+      <a:lnRef idx="2">
+        <a:scrgbClr r="0" g="0" b="0"/>
+      </a:lnRef>
+      <a:fillRef idx="1">
+        <a:scrgbClr r="0" g="0" b="0"/>
+      </a:fillRef>
+      <a:effectRef idx="0">
+        <a:scrgbClr r="0" g="0" b="0"/>
+      </a:effectRef>
+      <a:fontRef idx="minor"/>
+    </dgm:style>
+  </dgm:styleLbl>
+  <dgm:styleLbl name="bgImgPlace1">
+    <dgm:scene3d>
+      <a:camera prst="orthographicFront"/>
+      <a:lightRig rig="threePt" dir="t"/>
+    </dgm:scene3d>
+    <dgm:sp3d/>
+    <dgm:txPr/>
+    <dgm:style>
+      <a:lnRef idx="2">
+        <a:scrgbClr r="0" g="0" b="0"/>
+      </a:lnRef>
+      <a:fillRef idx="1">
+        <a:scrgbClr r="0" g="0" b="0"/>
+      </a:fillRef>
+      <a:effectRef idx="0">
+        <a:scrgbClr r="0" g="0" b="0"/>
+      </a:effectRef>
+      <a:fontRef idx="minor"/>
+    </dgm:style>
+  </dgm:styleLbl>
+  <dgm:styleLbl name="sibTrans2D1">
+    <dgm:scene3d>
+      <a:camera prst="orthographicFront"/>
+      <a:lightRig rig="threePt" dir="t"/>
+    </dgm:scene3d>
+    <dgm:sp3d/>
+    <dgm:txPr/>
+    <dgm:style>
+      <a:lnRef idx="0">
+        <a:scrgbClr r="0" g="0" b="0"/>
+      </a:lnRef>
+      <a:fillRef idx="1">
+        <a:scrgbClr r="0" g="0" b="0"/>
+      </a:fillRef>
+      <a:effectRef idx="0">
+        <a:scrgbClr r="0" g="0" b="0"/>
+      </a:effectRef>
+      <a:fontRef idx="minor">
+        <a:schemeClr val="lt1"/>
+      </a:fontRef>
+    </dgm:style>
+  </dgm:styleLbl>
+  <dgm:styleLbl name="fgSibTrans2D1">
+    <dgm:scene3d>
+      <a:camera prst="orthographicFront"/>
+      <a:lightRig rig="threePt" dir="t"/>
+    </dgm:scene3d>
+    <dgm:sp3d/>
+    <dgm:txPr/>
+    <dgm:style>
+      <a:lnRef idx="0">
+        <a:scrgbClr r="0" g="0" b="0"/>
+      </a:lnRef>
+      <a:fillRef idx="1">
+        <a:scrgbClr r="0" g="0" b="0"/>
+      </a:fillRef>
+      <a:effectRef idx="0">
+        <a:scrgbClr r="0" g="0" b="0"/>
+      </a:effectRef>
+      <a:fontRef idx="minor">
+        <a:schemeClr val="lt1"/>
+      </a:fontRef>
+    </dgm:style>
+  </dgm:styleLbl>
+  <dgm:styleLbl name="bgSibTrans2D1">
+    <dgm:scene3d>
+      <a:camera prst="orthographicFront"/>
+      <a:lightRig rig="threePt" dir="t"/>
+    </dgm:scene3d>
+    <dgm:sp3d/>
+    <dgm:txPr/>
+    <dgm:style>
+      <a:lnRef idx="0">
+        <a:scrgbClr r="0" g="0" b="0"/>
+      </a:lnRef>
+      <a:fillRef idx="1">
+        <a:scrgbClr r="0" g="0" b="0"/>
+      </a:fillRef>
+      <a:effectRef idx="0">
+        <a:scrgbClr r="0" g="0" b="0"/>
+      </a:effectRef>
+      <a:fontRef idx="minor">
+        <a:schemeClr val="lt1"/>
+      </a:fontRef>
+    </dgm:style>
+  </dgm:styleLbl>
+  <dgm:styleLbl name="sibTrans1D1">
+    <dgm:scene3d>
+      <a:camera prst="orthographicFront"/>
+      <a:lightRig rig="threePt" dir="t"/>
+    </dgm:scene3d>
+    <dgm:sp3d/>
+    <dgm:txPr/>
+    <dgm:style>
+      <a:lnRef idx="1">
+        <a:scrgbClr r="0" g="0" b="0"/>
+      </a:lnRef>
+      <a:fillRef idx="0">
+        <a:scrgbClr r="0" g="0" b="0"/>
+      </a:fillRef>
+      <a:effectRef idx="0">
+        <a:scrgbClr r="0" g="0" b="0"/>
+      </a:effectRef>
+      <a:fontRef idx="minor"/>
+    </dgm:style>
+  </dgm:styleLbl>
+  <dgm:styleLbl name="callout">
+    <dgm:scene3d>
+      <a:camera prst="orthographicFront"/>
+      <a:lightRig rig="threePt" dir="t"/>
+    </dgm:scene3d>
+    <dgm:sp3d/>
+    <dgm:txPr/>
+    <dgm:style>
+      <a:lnRef idx="2">
+        <a:scrgbClr r="0" g="0" b="0"/>
+      </a:lnRef>
+      <a:fillRef idx="1">
+        <a:scrgbClr r="0" g="0" b="0"/>
+      </a:fillRef>
+      <a:effectRef idx="0">
+        <a:scrgbClr r="0" g="0" b="0"/>
+      </a:effectRef>
+      <a:fontRef idx="minor"/>
+    </dgm:style>
+  </dgm:styleLbl>
+  <dgm:styleLbl name="asst0">
+    <dgm:scene3d>
+      <a:camera prst="orthographicFront"/>
+      <a:lightRig rig="threePt" dir="t"/>
+    </dgm:scene3d>
+    <dgm:sp3d/>
+    <dgm:txPr/>
+    <dgm:style>
+      <a:lnRef idx="2">
+        <a:scrgbClr r="0" g="0" b="0"/>
+      </a:lnRef>
+      <a:fillRef idx="1">
+        <a:scrgbClr r="0" g="0" b="0"/>
+      </a:fillRef>
+      <a:effectRef idx="0">
+        <a:scrgbClr r="0" g="0" b="0"/>
+      </a:effectRef>
+      <a:fontRef idx="minor">
+        <a:schemeClr val="lt1"/>
+      </a:fontRef>
+    </dgm:style>
+  </dgm:styleLbl>
+  <dgm:styleLbl name="asst1">
+    <dgm:scene3d>
+      <a:camera prst="orthographicFront"/>
+      <a:lightRig rig="threePt" dir="t"/>
+    </dgm:scene3d>
+    <dgm:sp3d/>
+    <dgm:txPr/>
+    <dgm:style>
+      <a:lnRef idx="2">
+        <a:scrgbClr r="0" g="0" b="0"/>
+      </a:lnRef>
+      <a:fillRef idx="1">
+        <a:scrgbClr r="0" g="0" b="0"/>
+      </a:fillRef>
+      <a:effectRef idx="0">
+        <a:scrgbClr r="0" g="0" b="0"/>
+      </a:effectRef>
+      <a:fontRef idx="minor">
+        <a:schemeClr val="lt1"/>
+      </a:fontRef>
+    </dgm:style>
+  </dgm:styleLbl>
+  <dgm:styleLbl name="asst2">
+    <dgm:scene3d>
+      <a:camera prst="orthographicFront"/>
+      <a:lightRig rig="threePt" dir="t"/>
+    </dgm:scene3d>
+    <dgm:sp3d/>
+    <dgm:txPr/>
+    <dgm:style>
+      <a:lnRef idx="2">
+        <a:scrgbClr r="0" g="0" b="0"/>
+      </a:lnRef>
+      <a:fillRef idx="1">
+        <a:scrgbClr r="0" g="0" b="0"/>
+      </a:fillRef>
+      <a:effectRef idx="0">
+        <a:scrgbClr r="0" g="0" b="0"/>
+      </a:effectRef>
+      <a:fontRef idx="minor">
+        <a:schemeClr val="lt1"/>
+      </a:fontRef>
+    </dgm:style>
+  </dgm:styleLbl>
+  <dgm:styleLbl name="asst3">
+    <dgm:scene3d>
+      <a:camera prst="orthographicFront"/>
+      <a:lightRig rig="threePt" dir="t"/>
+    </dgm:scene3d>
+    <dgm:sp3d/>
+    <dgm:txPr/>
+    <dgm:style>
+      <a:lnRef idx="2">
+        <a:scrgbClr r="0" g="0" b="0"/>
+      </a:lnRef>
+      <a:fillRef idx="1">
+        <a:scrgbClr r="0" g="0" b="0"/>
+      </a:fillRef>
+      <a:effectRef idx="0">
+        <a:scrgbClr r="0" g="0" b="0"/>
+      </a:effectRef>
+      <a:fontRef idx="minor">
+        <a:schemeClr val="lt1"/>
+      </a:fontRef>
+    </dgm:style>
+  </dgm:styleLbl>
+  <dgm:styleLbl name="asst4">
+    <dgm:scene3d>
+      <a:camera prst="orthographicFront"/>
+      <a:lightRig rig="threePt" dir="t"/>
+    </dgm:scene3d>
+    <dgm:sp3d/>
+    <dgm:txPr/>
+    <dgm:style>
+      <a:lnRef idx="2">
+        <a:scrgbClr r="0" g="0" b="0"/>
+      </a:lnRef>
+      <a:fillRef idx="1">
+        <a:scrgbClr r="0" g="0" b="0"/>
+      </a:fillRef>
+      <a:effectRef idx="0">
+        <a:scrgbClr r="0" g="0" b="0"/>
+      </a:effectRef>
+      <a:fontRef idx="minor">
+        <a:schemeClr val="lt1"/>
+      </a:fontRef>
+    </dgm:style>
+  </dgm:styleLbl>
+  <dgm:styleLbl name="parChTrans2D1">
+    <dgm:scene3d>
+      <a:camera prst="orthographicFront"/>
+      <a:lightRig rig="threePt" dir="t"/>
+    </dgm:scene3d>
+    <dgm:sp3d/>
+    <dgm:txPr/>
+    <dgm:style>
+      <a:lnRef idx="2">
+        <a:scrgbClr r="0" g="0" b="0"/>
+      </a:lnRef>
+      <a:fillRef idx="1">
+        <a:scrgbClr r="0" g="0" b="0"/>
+      </a:fillRef>
+      <a:effectRef idx="0">
+        <a:scrgbClr r="0" g="0" b="0"/>
+      </a:effectRef>
+      <a:fontRef idx="minor">
+        <a:schemeClr val="lt1"/>
+      </a:fontRef>
+    </dgm:style>
+  </dgm:styleLbl>
+  <dgm:styleLbl name="parChTrans2D2">
+    <dgm:scene3d>
+      <a:camera prst="orthographicFront"/>
+      <a:lightRig rig="threePt" dir="t"/>
+    </dgm:scene3d>
+    <dgm:sp3d/>
+    <dgm:txPr/>
+    <dgm:style>
+      <a:lnRef idx="2">
+        <a:scrgbClr r="0" g="0" b="0"/>
+      </a:lnRef>
+      <a:fillRef idx="1">
+        <a:scrgbClr r="0" g="0" b="0"/>
+      </a:fillRef>
+      <a:effectRef idx="0">
+        <a:scrgbClr r="0" g="0" b="0"/>
+      </a:effectRef>
+      <a:fontRef idx="minor">
+        <a:schemeClr val="lt1"/>
+      </a:fontRef>
+    </dgm:style>
+  </dgm:styleLbl>
+  <dgm:styleLbl name="parChTrans2D3">
+    <dgm:scene3d>
+      <a:camera prst="orthographicFront"/>
+      <a:lightRig rig="threePt" dir="t"/>
+    </dgm:scene3d>
+    <dgm:sp3d/>
+    <dgm:txPr/>
+    <dgm:style>
+      <a:lnRef idx="2">
+        <a:scrgbClr r="0" g="0" b="0"/>
+      </a:lnRef>
+      <a:fillRef idx="1">
+        <a:scrgbClr r="0" g="0" b="0"/>
+      </a:fillRef>
+      <a:effectRef idx="0">
+        <a:scrgbClr r="0" g="0" b="0"/>
+      </a:effectRef>
+      <a:fontRef idx="minor">
+        <a:schemeClr val="lt1"/>
+      </a:fontRef>
+    </dgm:style>
+  </dgm:styleLbl>
+  <dgm:styleLbl name="parChTrans2D4">
+    <dgm:scene3d>
+      <a:camera prst="orthographicFront"/>
+      <a:lightRig rig="threePt" dir="t"/>
+    </dgm:scene3d>
+    <dgm:sp3d/>
+    <dgm:txPr/>
+    <dgm:style>
+      <a:lnRef idx="2">
+        <a:scrgbClr r="0" g="0" b="0"/>
+      </a:lnRef>
+      <a:fillRef idx="1">
+        <a:scrgbClr r="0" g="0" b="0"/>
+      </a:fillRef>
+      <a:effectRef idx="0">
+        <a:scrgbClr r="0" g="0" b="0"/>
+      </a:effectRef>
+      <a:fontRef idx="minor">
+        <a:schemeClr val="lt1"/>
+      </a:fontRef>
+    </dgm:style>
+  </dgm:styleLbl>
+  <dgm:styleLbl name="parChTrans1D1">
+    <dgm:scene3d>
+      <a:camera prst="orthographicFront"/>
+      <a:lightRig rig="threePt" dir="t"/>
+    </dgm:scene3d>
+    <dgm:sp3d/>
+    <dgm:txPr/>
+    <dgm:style>
+      <a:lnRef idx="2">
+        <a:scrgbClr r="0" g="0" b="0"/>
+      </a:lnRef>
+      <a:fillRef idx="0">
+        <a:scrgbClr r="0" g="0" b="0"/>
+      </a:fillRef>
+      <a:effectRef idx="0">
+        <a:scrgbClr r="0" g="0" b="0"/>
+      </a:effectRef>
+      <a:fontRef idx="minor"/>
+    </dgm:style>
+  </dgm:styleLbl>
+  <dgm:styleLbl name="parChTrans1D2">
+    <dgm:scene3d>
+      <a:camera prst="orthographicFront"/>
+      <a:lightRig rig="threePt" dir="t"/>
+    </dgm:scene3d>
+    <dgm:sp3d/>
+    <dgm:txPr/>
+    <dgm:style>
+      <a:lnRef idx="2">
+        <a:scrgbClr r="0" g="0" b="0"/>
+      </a:lnRef>
+      <a:fillRef idx="0">
+        <a:scrgbClr r="0" g="0" b="0"/>
+      </a:fillRef>
+      <a:effectRef idx="0">
+        <a:scrgbClr r="0" g="0" b="0"/>
+      </a:effectRef>
+      <a:fontRef idx="minor"/>
+    </dgm:style>
+  </dgm:styleLbl>
+  <dgm:styleLbl name="parChTrans1D3">
+    <dgm:scene3d>
+      <a:camera prst="orthographicFront"/>
+      <a:lightRig rig="threePt" dir="t"/>
+    </dgm:scene3d>
+    <dgm:sp3d/>
+    <dgm:txPr/>
+    <dgm:style>
+      <a:lnRef idx="2">
+        <a:scrgbClr r="0" g="0" b="0"/>
+      </a:lnRef>
+      <a:fillRef idx="0">
+        <a:scrgbClr r="0" g="0" b="0"/>
+      </a:fillRef>
+      <a:effectRef idx="0">
+        <a:scrgbClr r="0" g="0" b="0"/>
+      </a:effectRef>
+      <a:fontRef idx="minor"/>
+    </dgm:style>
+  </dgm:styleLbl>
+  <dgm:styleLbl name="parChTrans1D4">
+    <dgm:scene3d>
+      <a:camera prst="orthographicFront"/>
+      <a:lightRig rig="threePt" dir="t"/>
+    </dgm:scene3d>
+    <dgm:sp3d/>
+    <dgm:txPr/>
+    <dgm:style>
+      <a:lnRef idx="2">
+        <a:scrgbClr r="0" g="0" b="0"/>
+      </a:lnRef>
+      <a:fillRef idx="0">
+        <a:scrgbClr r="0" g="0" b="0"/>
+      </a:fillRef>
+      <a:effectRef idx="0">
+        <a:scrgbClr r="0" g="0" b="0"/>
+      </a:effectRef>
+      <a:fontRef idx="minor"/>
+    </dgm:style>
+  </dgm:styleLbl>
+  <dgm:styleLbl name="fgAcc1">
+    <dgm:scene3d>
+      <a:camera prst="orthographicFront"/>
+      <a:lightRig rig="threePt" dir="t"/>
+    </dgm:scene3d>
+    <dgm:sp3d/>
+    <dgm:txPr/>
+    <dgm:style>
+      <a:lnRef idx="2">
+        <a:scrgbClr r="0" g="0" b="0"/>
+      </a:lnRef>
+      <a:fillRef idx="1">
+        <a:scrgbClr r="0" g="0" b="0"/>
+      </a:fillRef>
+      <a:effectRef idx="0">
+        <a:scrgbClr r="0" g="0" b="0"/>
+      </a:effectRef>
+      <a:fontRef idx="minor"/>
+    </dgm:style>
+  </dgm:styleLbl>
+  <dgm:styleLbl name="conFgAcc1">
+    <dgm:scene3d>
+      <a:camera prst="orthographicFront"/>
+      <a:lightRig rig="threePt" dir="t"/>
+    </dgm:scene3d>
+    <dgm:sp3d/>
+    <dgm:txPr/>
+    <dgm:style>
+      <a:lnRef idx="2">
+        <a:scrgbClr r="0" g="0" b="0"/>
+      </a:lnRef>
+      <a:fillRef idx="1">
+        <a:scrgbClr r="0" g="0" b="0"/>
+      </a:fillRef>
+      <a:effectRef idx="0">
+        <a:scrgbClr r="0" g="0" b="0"/>
+      </a:effectRef>
+      <a:fontRef idx="minor"/>
+    </dgm:style>
+  </dgm:styleLbl>
+  <dgm:styleLbl name="alignAcc1">
+    <dgm:scene3d>
+      <a:camera prst="orthographicFront"/>
+      <a:lightRig rig="threePt" dir="t"/>
+    </dgm:scene3d>
+    <dgm:sp3d/>
+    <dgm:txPr/>
+    <dgm:style>
+      <a:lnRef idx="2">
+        <a:scrgbClr r="0" g="0" b="0"/>
+      </a:lnRef>
+      <a:fillRef idx="1">
+        <a:scrgbClr r="0" g="0" b="0"/>
+      </a:fillRef>
+      <a:effectRef idx="0">
+        <a:scrgbClr r="0" g="0" b="0"/>
+      </a:effectRef>
+      <a:fontRef idx="minor"/>
+    </dgm:style>
+  </dgm:styleLbl>
+  <dgm:styleLbl name="trAlignAcc1">
+    <dgm:scene3d>
+      <a:camera prst="orthographicFront"/>
+      <a:lightRig rig="threePt" dir="t"/>
+    </dgm:scene3d>
+    <dgm:sp3d/>
+    <dgm:txPr/>
+    <dgm:style>
+      <a:lnRef idx="1">
+        <a:scrgbClr r="0" g="0" b="0"/>
+      </a:lnRef>
+      <a:fillRef idx="1">
+        <a:scrgbClr r="0" g="0" b="0"/>
+      </a:fillRef>
+      <a:effectRef idx="0">
+        <a:scrgbClr r="0" g="0" b="0"/>
+      </a:effectRef>
+      <a:fontRef idx="minor"/>
+    </dgm:style>
+  </dgm:styleLbl>
+  <dgm:styleLbl name="bgAcc1">
+    <dgm:scene3d>
+      <a:camera prst="orthographicFront"/>
+      <a:lightRig rig="threePt" dir="t"/>
+    </dgm:scene3d>
+    <dgm:sp3d/>
+    <dgm:txPr/>
+    <dgm:style>
+      <a:lnRef idx="2">
+        <a:scrgbClr r="0" g="0" b="0"/>
+      </a:lnRef>
+      <a:fillRef idx="1">
+        <a:scrgbClr r="0" g="0" b="0"/>
+      </a:fillRef>
+      <a:effectRef idx="0">
+        <a:scrgbClr r="0" g="0" b="0"/>
+      </a:effectRef>
+      <a:fontRef idx="minor"/>
+    </dgm:style>
+  </dgm:styleLbl>
+  <dgm:styleLbl name="solidFgAcc1">
+    <dgm:scene3d>
+      <a:camera prst="orthographicFront"/>
+      <a:lightRig rig="threePt" dir="t"/>
+    </dgm:scene3d>
+    <dgm:sp3d/>
+    <dgm:txPr/>
+    <dgm:style>
+      <a:lnRef idx="2">
+        <a:scrgbClr r="0" g="0" b="0"/>
+      </a:lnRef>
+      <a:fillRef idx="1">
+        <a:scrgbClr r="0" g="0" b="0"/>
+      </a:fillRef>
+      <a:effectRef idx="0">
+        <a:scrgbClr r="0" g="0" b="0"/>
+      </a:effectRef>
+      <a:fontRef idx="minor"/>
+    </dgm:style>
+  </dgm:styleLbl>
+  <dgm:styleLbl name="solidAlignAcc1">
+    <dgm:scene3d>
+      <a:camera prst="orthographicFront"/>
+      <a:lightRig rig="threePt" dir="t"/>
+    </dgm:scene3d>
+    <dgm:sp3d/>
+    <dgm:txPr/>
+    <dgm:style>
+      <a:lnRef idx="2">
+        <a:scrgbClr r="0" g="0" b="0"/>
+      </a:lnRef>
+      <a:fillRef idx="1">
+        <a:scrgbClr r="0" g="0" b="0"/>
+      </a:fillRef>
+      <a:effectRef idx="0">
+        <a:scrgbClr r="0" g="0" b="0"/>
+      </a:effectRef>
+      <a:fontRef idx="minor"/>
+    </dgm:style>
+  </dgm:styleLbl>
+  <dgm:styleLbl name="solidBgAcc1">
+    <dgm:scene3d>
+      <a:camera prst="orthographicFront"/>
+      <a:lightRig rig="threePt" dir="t"/>
+    </dgm:scene3d>
+    <dgm:sp3d/>
+    <dgm:txPr/>
+    <dgm:style>
+      <a:lnRef idx="2">
+        <a:scrgbClr r="0" g="0" b="0"/>
+      </a:lnRef>
+      <a:fillRef idx="1">
+        <a:scrgbClr r="0" g="0" b="0"/>
+      </a:fillRef>
+      <a:effectRef idx="0">
+        <a:scrgbClr r="0" g="0" b="0"/>
+      </a:effectRef>
+      <a:fontRef idx="minor"/>
+    </dgm:style>
+  </dgm:styleLbl>
+  <dgm:styleLbl name="fgAccFollowNode1">
+    <dgm:scene3d>
+      <a:camera prst="orthographicFront"/>
+      <a:lightRig rig="threePt" dir="t"/>
+    </dgm:scene3d>
+    <dgm:sp3d/>
+    <dgm:txPr/>
+    <dgm:style>
+      <a:lnRef idx="2">
+        <a:scrgbClr r="0" g="0" b="0"/>
+      </a:lnRef>
+      <a:fillRef idx="1">
+        <a:scrgbClr r="0" g="0" b="0"/>
+      </a:fillRef>
+      <a:effectRef idx="0">
+        <a:scrgbClr r="0" g="0" b="0"/>
+      </a:effectRef>
+      <a:fontRef idx="minor"/>
+    </dgm:style>
+  </dgm:styleLbl>
+  <dgm:styleLbl name="alignAccFollowNode1">
+    <dgm:scene3d>
+      <a:camera prst="orthographicFront"/>
+      <a:lightRig rig="threePt" dir="t"/>
+    </dgm:scene3d>
+    <dgm:sp3d/>
+    <dgm:txPr/>
+    <dgm:style>
+      <a:lnRef idx="2">
+        <a:scrgbClr r="0" g="0" b="0"/>
+      </a:lnRef>
+      <a:fillRef idx="1">
+        <a:scrgbClr r="0" g="0" b="0"/>
+      </a:fillRef>
+      <a:effectRef idx="0">
+        <a:scrgbClr r="0" g="0" b="0"/>
+      </a:effectRef>
+      <a:fontRef idx="minor"/>
+    </dgm:style>
+  </dgm:styleLbl>
+  <dgm:styleLbl name="bgAccFollowNode1">
+    <dgm:scene3d>
+      <a:camera prst="orthographicFront"/>
+      <a:lightRig rig="threePt" dir="t"/>
+    </dgm:scene3d>
+    <dgm:sp3d/>
+    <dgm:txPr/>
+    <dgm:style>
+      <a:lnRef idx="2">
+        <a:scrgbClr r="0" g="0" b="0"/>
+      </a:lnRef>
+      <a:fillRef idx="1">
+        <a:scrgbClr r="0" g="0" b="0"/>
+      </a:fillRef>
+      <a:effectRef idx="0">
+        <a:scrgbClr r="0" g="0" b="0"/>
+      </a:effectRef>
+      <a:fontRef idx="minor"/>
+    </dgm:style>
+  </dgm:styleLbl>
+  <dgm:styleLbl name="fgAcc0">
+    <dgm:scene3d>
+      <a:camera prst="orthographicFront"/>
+      <a:lightRig rig="threePt" dir="t"/>
+    </dgm:scene3d>
+    <dgm:sp3d/>
+    <dgm:txPr/>
+    <dgm:style>
+      <a:lnRef idx="2">
+        <a:scrgbClr r="0" g="0" b="0"/>
+      </a:lnRef>
+      <a:fillRef idx="1">
+        <a:scrgbClr r="0" g="0" b="0"/>
+      </a:fillRef>
+      <a:effectRef idx="0">
+        <a:scrgbClr r="0" g="0" b="0"/>
+      </a:effectRef>
+      <a:fontRef idx="minor"/>
+    </dgm:style>
+  </dgm:styleLbl>
+  <dgm:styleLbl name="fgAcc2">
+    <dgm:scene3d>
+      <a:camera prst="orthographicFront"/>
+      <a:lightRig rig="threePt" dir="t"/>
+    </dgm:scene3d>
+    <dgm:sp3d/>
+    <dgm:txPr/>
+    <dgm:style>
+      <a:lnRef idx="2">
+        <a:scrgbClr r="0" g="0" b="0"/>
+      </a:lnRef>
+      <a:fillRef idx="1">
+        <a:scrgbClr r="0" g="0" b="0"/>
+      </a:fillRef>
+      <a:effectRef idx="0">
+        <a:scrgbClr r="0" g="0" b="0"/>
+      </a:effectRef>
+      <a:fontRef idx="minor"/>
+    </dgm:style>
+  </dgm:styleLbl>
+  <dgm:styleLbl name="fgAcc3">
+    <dgm:scene3d>
+      <a:camera prst="orthographicFront"/>
+      <a:lightRig rig="threePt" dir="t"/>
+    </dgm:scene3d>
+    <dgm:sp3d/>
+    <dgm:txPr/>
+    <dgm:style>
+      <a:lnRef idx="2">
+        <a:scrgbClr r="0" g="0" b="0"/>
+      </a:lnRef>
+      <a:fillRef idx="1">
+        <a:scrgbClr r="0" g="0" b="0"/>
+      </a:fillRef>
+      <a:effectRef idx="0">
+        <a:scrgbClr r="0" g="0" b="0"/>
+      </a:effectRef>
+      <a:fontRef idx="minor"/>
+    </dgm:style>
+  </dgm:styleLbl>
+  <dgm:styleLbl name="fgAcc4">
+    <dgm:scene3d>
+      <a:camera prst="orthographicFront"/>
+      <a:lightRig rig="threePt" dir="t"/>
+    </dgm:scene3d>
+    <dgm:sp3d/>
+    <dgm:txPr/>
+    <dgm:style>
+      <a:lnRef idx="2">
+        <a:scrgbClr r="0" g="0" b="0"/>
+      </a:lnRef>
+      <a:fillRef idx="1">
+        <a:scrgbClr r="0" g="0" b="0"/>
+      </a:fillRef>
+      <a:effectRef idx="0">
+        <a:scrgbClr r="0" g="0" b="0"/>
+      </a:effectRef>
+      <a:fontRef idx="minor"/>
+    </dgm:style>
+  </dgm:styleLbl>
+  <dgm:styleLbl name="bgShp">
+    <dgm:scene3d>
+      <a:camera prst="orthographicFront"/>
+      <a:lightRig rig="threePt" dir="t"/>
+    </dgm:scene3d>
+    <dgm:sp3d/>
+    <dgm:txPr/>
+    <dgm:style>
+      <a:lnRef idx="0">
+        <a:scrgbClr r="0" g="0" b="0"/>
+      </a:lnRef>
+      <a:fillRef idx="1">
+        <a:scrgbClr r="0" g="0" b="0"/>
+      </a:fillRef>
+      <a:effectRef idx="0">
+        <a:scrgbClr r="0" g="0" b="0"/>
+      </a:effectRef>
+      <a:fontRef idx="minor"/>
+    </dgm:style>
+  </dgm:styleLbl>
+  <dgm:styleLbl name="dkBgShp">
+    <dgm:scene3d>
+      <a:camera prst="orthographicFront"/>
+      <a:lightRig rig="threePt" dir="t"/>
+    </dgm:scene3d>
+    <dgm:sp3d/>
+    <dgm:txPr/>
+    <dgm:style>
+      <a:lnRef idx="0">
+        <a:scrgbClr r="0" g="0" b="0"/>
+      </a:lnRef>
+      <a:fillRef idx="1">
+        <a:scrgbClr r="0" g="0" b="0"/>
+      </a:fillRef>
+      <a:effectRef idx="0">
+        <a:scrgbClr r="0" g="0" b="0"/>
+      </a:effectRef>
+      <a:fontRef idx="minor"/>
+    </dgm:style>
+  </dgm:styleLbl>
+  <dgm:styleLbl name="trBgShp">
+    <dgm:scene3d>
+      <a:camera prst="orthographicFront"/>
+      <a:lightRig rig="threePt" dir="t"/>
+    </dgm:scene3d>
+    <dgm:sp3d/>
+    <dgm:txPr/>
+    <dgm:style>
+      <a:lnRef idx="0">
+        <a:scrgbClr r="0" g="0" b="0"/>
+      </a:lnRef>
+      <a:fillRef idx="1">
+        <a:scrgbClr r="0" g="0" b="0"/>
+      </a:fillRef>
+      <a:effectRef idx="0">
+        <a:scrgbClr r="0" g="0" b="0"/>
+      </a:effectRef>
+      <a:fontRef idx="minor"/>
+    </dgm:style>
+  </dgm:styleLbl>
+  <dgm:styleLbl name="fgShp">
+    <dgm:scene3d>
+      <a:camera prst="orthographicFront"/>
+      <a:lightRig rig="threePt" dir="t"/>
+    </dgm:scene3d>
+    <dgm:sp3d/>
+    <dgm:txPr/>
+    <dgm:style>
+      <a:lnRef idx="2">
+        <a:scrgbClr r="0" g="0" b="0"/>
+      </a:lnRef>
+      <a:fillRef idx="1">
+        <a:scrgbClr r="0" g="0" b="0"/>
+      </a:fillRef>
+      <a:effectRef idx="0">
+        <a:scrgbClr r="0" g="0" b="0"/>
+      </a:effectRef>
+      <a:fontRef idx="minor"/>
+    </dgm:style>
+  </dgm:styleLbl>
+  <dgm:styleLbl name="revTx">
+    <dgm:scene3d>
+      <a:camera prst="orthographicFront"/>
+      <a:lightRig rig="threePt" dir="t"/>
+    </dgm:scene3d>
+    <dgm:sp3d/>
+    <dgm:txPr/>
+    <dgm:style>
+      <a:lnRef idx="0">
+        <a:scrgbClr r="0" g="0" b="0"/>
+      </a:lnRef>
+      <a:fillRef idx="0">
+        <a:scrgbClr r="0" g="0" b="0"/>
+      </a:fillRef>
+      <a:effectRef idx="0">
+        <a:scrgbClr r="0" g="0" b="0"/>
+      </a:effectRef>
+      <a:fontRef idx="minor"/>
+    </dgm:style>
+  </dgm:styleLbl>
+</dgm:styleDef>
+</file>
+
 <file path=ppt/notesMasters/notesMaster1.xml><?xml version="1.0" encoding="utf-8"?>
 <p:notesMaster xmlns:a="http://schemas.openxmlformats.org/drawingml/2006/main" xmlns:r="http://schemas.openxmlformats.org/officeDocument/2006/relationships" xmlns:p="http://schemas.openxmlformats.org/presentationml/2006/main">
   <p:cSld>
@@ -213,7 +7359,7 @@
           <a:p>
             <a:fld id="{E51947FD-A716-4211-B699-A6B086DF38C3}" type="datetimeFigureOut">
               <a:rPr lang="ru-RU" smtClean="0"/>
-              <a:t>26.05.2026</a:t>
+              <a:t>05.06.2026</a:t>
             </a:fld>
             <a:endParaRPr lang="ru-RU"/>
           </a:p>
@@ -958,7 +8104,7 @@
           <a:p>
             <a:fld id="{5888CCF1-2E77-4A64-BE02-C09C5E2EF7D6}" type="datetime1">
               <a:rPr lang="ru-RU" smtClean="0"/>
-              <a:t>26.05.2026</a:t>
+              <a:t>05.06.2026</a:t>
             </a:fld>
             <a:endParaRPr lang="ru-RU"/>
           </a:p>
@@ -1166,7 +8312,7 @@
           <a:p>
             <a:fld id="{DFB2E66F-F12B-4C89-AC80-BE33EC31B25F}" type="datetime1">
               <a:rPr lang="ru-RU" smtClean="0"/>
-              <a:t>26.05.2026</a:t>
+              <a:t>05.06.2026</a:t>
             </a:fld>
             <a:endParaRPr lang="ru-RU"/>
           </a:p>
@@ -1422,7 +8568,7 @@
           <a:p>
             <a:fld id="{8B8344DE-D35A-4CDF-86CF-34C99E2DD5D4}" type="datetime1">
               <a:rPr lang="ru-RU" smtClean="0"/>
-              <a:t>26.05.2026</a:t>
+              <a:t>05.06.2026</a:t>
             </a:fld>
             <a:endParaRPr lang="ru-RU"/>
           </a:p>
@@ -1596,7 +8742,7 @@
           <a:p>
             <a:fld id="{5E532B67-2CD8-4589-92DA-D7A9F79848EC}" type="datetime1">
               <a:rPr lang="ru-RU" smtClean="0"/>
-              <a:t>26.05.2026</a:t>
+              <a:t>05.06.2026</a:t>
             </a:fld>
             <a:endParaRPr lang="ru-RU"/>
           </a:p>
@@ -1944,7 +9090,7 @@
           <a:p>
             <a:fld id="{EF32369D-8065-4D88-B6A2-4381169300B4}" type="datetime1">
               <a:rPr lang="ru-RU" smtClean="0"/>
-              <a:t>26.05.2026</a:t>
+              <a:t>05.06.2026</a:t>
             </a:fld>
             <a:endParaRPr lang="ru-RU"/>
           </a:p>
@@ -2224,7 +9370,7 @@
           <a:p>
             <a:fld id="{3DD98903-934B-48B1-B309-7133B8C2317F}" type="datetime1">
               <a:rPr lang="ru-RU" smtClean="0"/>
-              <a:t>26.05.2026</a:t>
+              <a:t>05.06.2026</a:t>
             </a:fld>
             <a:endParaRPr lang="ru-RU"/>
           </a:p>
@@ -2608,7 +9754,7 @@
           <a:p>
             <a:fld id="{63A0CEC3-8E6A-4101-BD09-1EDEBE0AD976}" type="datetime1">
               <a:rPr lang="ru-RU" smtClean="0"/>
-              <a:t>26.05.2026</a:t>
+              <a:t>05.06.2026</a:t>
             </a:fld>
             <a:endParaRPr lang="ru-RU"/>
           </a:p>
@@ -2726,7 +9872,7 @@
           <a:p>
             <a:fld id="{5677ECA8-7729-43DA-9049-C18FF7AF25A0}" type="datetime1">
               <a:rPr lang="ru-RU" smtClean="0"/>
-              <a:t>26.05.2026</a:t>
+              <a:t>05.06.2026</a:t>
             </a:fld>
             <a:endParaRPr lang="ru-RU"/>
           </a:p>
@@ -2897,7 +10043,7 @@
           <a:p>
             <a:fld id="{30D20CC8-A20C-4249-A4FF-9317780A4016}" type="datetime1">
               <a:rPr lang="ru-RU" smtClean="0"/>
-              <a:t>26.05.2026</a:t>
+              <a:t>05.06.2026</a:t>
             </a:fld>
             <a:endParaRPr lang="ru-RU"/>
           </a:p>
@@ -3251,7 +10397,7 @@
           <a:p>
             <a:fld id="{03F4CBAE-B1F8-40CB-AD59-6F3058F975C3}" type="datetime1">
               <a:rPr lang="ru-RU" smtClean="0"/>
-              <a:t>26.05.2026</a:t>
+              <a:t>05.06.2026</a:t>
             </a:fld>
             <a:endParaRPr lang="ru-RU"/>
           </a:p>
@@ -3633,7 +10779,7 @@
           <a:p>
             <a:fld id="{52391FD1-542C-4091-A7C0-C725AC3A2669}" type="datetime1">
               <a:rPr lang="ru-RU" smtClean="0"/>
-              <a:t>26.05.2026</a:t>
+              <a:t>05.06.2026</a:t>
             </a:fld>
             <a:endParaRPr lang="ru-RU"/>
           </a:p>
@@ -3920,7 +11066,7 @@
           <a:p>
             <a:fld id="{EC59E107-6F98-4091-AB69-2D0030021222}" type="datetime1">
               <a:rPr lang="ru-RU" smtClean="0"/>
-              <a:t>26.05.2026</a:t>
+              <a:t>05.06.2026</a:t>
             </a:fld>
             <a:endParaRPr lang="ru-RU"/>
           </a:p>
@@ -4818,7 +11964,7 @@
                 </a:solidFill>
                 <a:latin typeface="+mj-lt"/>
               </a:rPr>
-              <a:t>2026</a:t>
+              <a:t>г. Владимир, 2026</a:t>
             </a:r>
             <a:endParaRPr lang="ru-RU" cap="all" spc="200" dirty="0">
               <a:solidFill>
@@ -5591,7 +12737,12 @@
             <p:ph type="title"/>
           </p:nvPr>
         </p:nvSpPr>
-        <p:spPr/>
+        <p:spPr>
+          <a:xfrm>
+            <a:off x="376520" y="286603"/>
+            <a:ext cx="7397454" cy="1450757"/>
+          </a:xfrm>
+        </p:spPr>
         <p:txBody>
           <a:bodyPr/>
           <a:lstStyle/>
@@ -5621,8 +12772,8 @@
         </p:nvSpPr>
         <p:spPr>
           <a:xfrm>
-            <a:off x="1097280" y="1845734"/>
-            <a:ext cx="10058400" cy="4402666"/>
+            <a:off x="376519" y="1818043"/>
+            <a:ext cx="7112822" cy="4402666"/>
           </a:xfrm>
         </p:spPr>
         <p:txBody>
@@ -5631,23 +12782,37 @@
           </a:bodyPr>
           <a:lstStyle/>
           <a:p>
-            <a:pPr marL="355600" lvl="0" indent="-355600">
-              <a:buFont typeface="Calibri" panose="020F0502020204030204" pitchFamily="34" charset="0"/>
-              <a:buChar char="―"/>
+            <a:pPr marL="342900" indent="-342900">
+              <a:spcBef>
+                <a:spcPts val="600"/>
+              </a:spcBef>
+              <a:buFont typeface="+mj-lt"/>
+              <a:buAutoNum type="arabicPeriod"/>
             </a:pPr>
             <a:r>
               <a:rPr lang="ru-RU" sz="1800" dirty="0"/>
-              <a:t>Подключение к MySQL и загрузка одобренных работ, категорий, лайков и комментариев.</a:t>
-            </a:r>
-          </a:p>
-          <a:p>
-            <a:pPr marL="355600" lvl="0" indent="-355600">
-              <a:buFont typeface="Calibri" panose="020F0502020204030204" pitchFamily="34" charset="0"/>
-              <a:buChar char="―"/>
+              <a:t>Подключение к MySQL, загрузка данных о работах, категориях, лайках и комментариях.</a:t>
+            </a:r>
+          </a:p>
+          <a:p>
+            <a:pPr marL="342900" indent="-342900">
+              <a:spcBef>
+                <a:spcPts val="600"/>
+              </a:spcBef>
+              <a:buFont typeface="+mj-lt"/>
+              <a:buAutoNum type="arabicPeriod"/>
             </a:pPr>
             <a:r>
               <a:rPr lang="ru-RU" sz="1800" dirty="0"/>
-              <a:t>Формирование </a:t>
+              <a:t>Создание </a:t>
+            </a:r>
+            <a:r>
+              <a:rPr lang="ru-RU" sz="1800" dirty="0" err="1"/>
+              <a:t>датафрейма</a:t>
+            </a:r>
+            <a:r>
+              <a:rPr lang="ru-RU" sz="1800" dirty="0"/>
+              <a:t> </a:t>
             </a:r>
             <a:r>
               <a:rPr lang="ru-RU" sz="1800" dirty="0" err="1"/>
@@ -5655,14 +12820,6 @@
             </a:r>
             <a:r>
               <a:rPr lang="ru-RU" sz="1800" dirty="0"/>
-              <a:t> – </a:t>
-            </a:r>
-            <a:r>
-              <a:rPr lang="ru-RU" sz="1800" dirty="0" err="1"/>
-              <a:t>датафрейма</a:t>
-            </a:r>
-            <a:r>
-              <a:rPr lang="ru-RU" sz="1800" dirty="0"/>
               <a:t> с колонками </a:t>
             </a:r>
             <a:r>
@@ -5691,23 +12848,29 @@
             </a:r>
           </a:p>
           <a:p>
-            <a:pPr marL="355600" lvl="0" indent="-355600">
-              <a:buFont typeface="Calibri" panose="020F0502020204030204" pitchFamily="34" charset="0"/>
-              <a:buChar char="―"/>
+            <a:pPr marL="342900" indent="-342900">
+              <a:spcBef>
+                <a:spcPts val="600"/>
+              </a:spcBef>
+              <a:buFont typeface="+mj-lt"/>
+              <a:buAutoNum type="arabicPeriod"/>
             </a:pPr>
             <a:r>
               <a:rPr lang="ru-RU" sz="1800" dirty="0"/>
-              <a:t>Разделение набора взаимодействий на обучающую (75%) и тестовую (25%) выборки.</a:t>
-            </a:r>
-          </a:p>
-          <a:p>
-            <a:pPr marL="355600" lvl="0" indent="-355600">
-              <a:buFont typeface="Calibri" panose="020F0502020204030204" pitchFamily="34" charset="0"/>
-              <a:buChar char="―"/>
+              <a:t>Разделение данных на обучающую (75%) и тестовую (25%) выборки.</a:t>
+            </a:r>
+          </a:p>
+          <a:p>
+            <a:pPr marL="342900" indent="-342900">
+              <a:spcBef>
+                <a:spcPts val="600"/>
+              </a:spcBef>
+              <a:buFont typeface="+mj-lt"/>
+              <a:buAutoNum type="arabicPeriod"/>
             </a:pPr>
             <a:r>
               <a:rPr lang="ru-RU" sz="1800" dirty="0"/>
-              <a:t>Построение TF‑IDF матрицы для текстовых строк «автор + категории» и вычисление матрицы косинусного сходства </a:t>
+              <a:t>Построение TF-IDF матрицы для текстовых строк «автор + категории», вычисление матрицы косинусного сходства </a:t>
             </a:r>
             <a:r>
               <a:rPr lang="ru-RU" sz="1800" dirty="0" err="1"/>
@@ -5719,13 +12882,16 @@
             </a:r>
           </a:p>
           <a:p>
-            <a:pPr marL="355600" lvl="0" indent="-355600">
-              <a:buFont typeface="Calibri" panose="020F0502020204030204" pitchFamily="34" charset="0"/>
-              <a:buChar char="―"/>
+            <a:pPr marL="342900" indent="-342900">
+              <a:spcBef>
+                <a:spcPts val="600"/>
+              </a:spcBef>
+              <a:buFont typeface="+mj-lt"/>
+              <a:buAutoNum type="arabicPeriod"/>
             </a:pPr>
             <a:r>
               <a:rPr lang="ru-RU" sz="1800" dirty="0"/>
-              <a:t>Обучение SVD с помощью класса </a:t>
+              <a:t>Обучение SVD на обучающей выборке с помощью </a:t>
             </a:r>
             <a:r>
               <a:rPr lang="ru-RU" sz="1800" dirty="0" err="1"/>
@@ -5733,17 +12899,20 @@
             </a:r>
             <a:r>
               <a:rPr lang="ru-RU" sz="1800" dirty="0"/>
-              <a:t> (собственная реализация) на обучающей выборке.</a:t>
-            </a:r>
-          </a:p>
-          <a:p>
-            <a:pPr marL="355600" lvl="0" indent="-355600">
-              <a:buFont typeface="Calibri" panose="020F0502020204030204" pitchFamily="34" charset="0"/>
-              <a:buChar char="―"/>
+              <a:t>.</a:t>
+            </a:r>
+          </a:p>
+          <a:p>
+            <a:pPr marL="342900" indent="-342900">
+              <a:spcBef>
+                <a:spcPts val="600"/>
+              </a:spcBef>
+              <a:buFont typeface="+mj-lt"/>
+              <a:buAutoNum type="arabicPeriod"/>
             </a:pPr>
             <a:r>
               <a:rPr lang="ru-RU" sz="1800" dirty="0"/>
-              <a:t>Оценка качества на тестовой выборке с вычислением Precision@5, Recall@5, </a:t>
+              <a:t>Оценка качества на тестовой выборке по метрикам Precision@5, Recall@5, </a:t>
             </a:r>
             <a:r>
               <a:rPr lang="ru-RU" sz="1800" dirty="0" err="1"/>
@@ -5755,13 +12924,16 @@
             </a:r>
           </a:p>
           <a:p>
-            <a:pPr marL="355600" lvl="0" indent="-355600">
-              <a:buFont typeface="Calibri" panose="020F0502020204030204" pitchFamily="34" charset="0"/>
-              <a:buChar char="―"/>
+            <a:pPr marL="342900" indent="-342900">
+              <a:spcBef>
+                <a:spcPts val="600"/>
+              </a:spcBef>
+              <a:buFont typeface="+mj-lt"/>
+              <a:buAutoNum type="arabicPeriod"/>
             </a:pPr>
             <a:r>
               <a:rPr lang="ru-RU" sz="1800" dirty="0"/>
-              <a:t>Сериализация обученной модели (объекты SVD, </a:t>
+              <a:t>Сериализация модели (SVD, </a:t>
             </a:r>
             <a:r>
               <a:rPr lang="ru-RU" sz="1800" dirty="0" err="1"/>
@@ -5785,7 +12957,7 @@
             </a:r>
             <a:r>
               <a:rPr lang="ru-RU" sz="1800" dirty="0"/>
-              <a:t>) в файл </a:t>
+              <a:t>) в </a:t>
             </a:r>
             <a:r>
               <a:rPr lang="ru-RU" sz="1800" dirty="0" err="1"/>
@@ -5793,25 +12965,20 @@
             </a:r>
             <a:r>
               <a:rPr lang="ru-RU" sz="1800" dirty="0"/>
-              <a:t> с использованием библиотеки </a:t>
-            </a:r>
-            <a:r>
-              <a:rPr lang="ru-RU" sz="1800" dirty="0" err="1"/>
-              <a:t>pickle</a:t>
-            </a:r>
+              <a:t>.</a:t>
+            </a:r>
+          </a:p>
+          <a:p>
+            <a:pPr marL="342900" indent="-342900">
+              <a:spcBef>
+                <a:spcPts val="600"/>
+              </a:spcBef>
+              <a:buFont typeface="+mj-lt"/>
+              <a:buAutoNum type="arabicPeriod"/>
+            </a:pPr>
             <a:r>
               <a:rPr lang="ru-RU" sz="1800" dirty="0"/>
-              <a:t>.</a:t>
-            </a:r>
-          </a:p>
-          <a:p>
-            <a:pPr marL="355600" lvl="0" indent="-355600">
-              <a:buFont typeface="Calibri" panose="020F0502020204030204" pitchFamily="34" charset="0"/>
-              <a:buChar char="―"/>
-            </a:pPr>
-            <a:r>
-              <a:rPr lang="ru-RU" sz="1800" dirty="0"/>
-              <a:t>Сохранение метаданных (время обучения, значения метрик, параметры) в </a:t>
+              <a:t>Сохранение метаданных (время обучения, метрики, параметры) в </a:t>
             </a:r>
             <a:r>
               <a:rPr lang="ru-RU" sz="1800" dirty="0" err="1"/>
@@ -5854,6 +13021,88 @@
           </a:p>
         </p:txBody>
       </p:sp>
+      <p:sp>
+        <p:nvSpPr>
+          <p:cNvPr id="9" name="Прямоугольник 8">
+            <a:extLst>
+              <a:ext uri="{FF2B5EF4-FFF2-40B4-BE49-F238E27FC236}">
+                <a16:creationId xmlns:a16="http://schemas.microsoft.com/office/drawing/2014/main" id="{3BB34557-04FC-8DD6-C7E3-6B0BB6610C1A}"/>
+              </a:ext>
+            </a:extLst>
+          </p:cNvPr>
+          <p:cNvSpPr/>
+          <p:nvPr/>
+        </p:nvSpPr>
+        <p:spPr>
+          <a:xfrm>
+            <a:off x="7489341" y="1646257"/>
+            <a:ext cx="3914775" cy="262890"/>
+          </a:xfrm>
+          <a:prstGeom prst="rect">
+            <a:avLst/>
+          </a:prstGeom>
+          <a:solidFill>
+            <a:schemeClr val="bg1"/>
+          </a:solidFill>
+          <a:ln>
+            <a:noFill/>
+          </a:ln>
+        </p:spPr>
+        <p:style>
+          <a:lnRef idx="2">
+            <a:schemeClr val="accent1">
+              <a:shade val="15000"/>
+            </a:schemeClr>
+          </a:lnRef>
+          <a:fillRef idx="1">
+            <a:schemeClr val="accent1"/>
+          </a:fillRef>
+          <a:effectRef idx="0">
+            <a:schemeClr val="accent1"/>
+          </a:effectRef>
+          <a:fontRef idx="minor">
+            <a:schemeClr val="lt1"/>
+          </a:fontRef>
+        </p:style>
+        <p:txBody>
+          <a:bodyPr rtlCol="0" anchor="ctr"/>
+          <a:lstStyle/>
+          <a:p>
+            <a:pPr algn="ctr"/>
+            <a:endParaRPr lang="ru-RU"/>
+          </a:p>
+        </p:txBody>
+      </p:sp>
+      <p:pic>
+        <p:nvPicPr>
+          <p:cNvPr id="8" name="Рисунок 7">
+            <a:extLst>
+              <a:ext uri="{FF2B5EF4-FFF2-40B4-BE49-F238E27FC236}">
+                <a16:creationId xmlns:a16="http://schemas.microsoft.com/office/drawing/2014/main" id="{B3EBD257-908C-51FF-CAB6-11B220D0E05B}"/>
+              </a:ext>
+            </a:extLst>
+          </p:cNvPr>
+          <p:cNvPicPr>
+            <a:picLocks noChangeAspect="1"/>
+          </p:cNvPicPr>
+          <p:nvPr/>
+        </p:nvPicPr>
+        <p:blipFill>
+          <a:blip r:embed="rId2"/>
+          <a:stretch>
+            <a:fillRect/>
+          </a:stretch>
+        </p:blipFill>
+        <p:spPr>
+          <a:xfrm>
+            <a:off x="7773973" y="770894"/>
+            <a:ext cx="4252970" cy="5316212"/>
+          </a:xfrm>
+          <a:prstGeom prst="rect">
+            <a:avLst/>
+          </a:prstGeom>
+        </p:spPr>
+      </p:pic>
     </p:spTree>
     <p:extLst>
       <p:ext uri="{BB962C8B-B14F-4D97-AF65-F5344CB8AC3E}">
@@ -5985,15 +13234,20 @@
           <p:nvPr/>
         </p:nvPicPr>
         <p:blipFill>
-          <a:blip r:embed="rId2"/>
-          <a:stretch>
-            <a:fillRect/>
-          </a:stretch>
+          <a:blip r:embed="rId2">
+            <a:extLst>
+              <a:ext uri="{28A0092B-C50C-407E-A947-70E740481C1C}">
+                <a14:useLocalDpi xmlns:a14="http://schemas.microsoft.com/office/drawing/2010/main" val="0"/>
+              </a:ext>
+            </a:extLst>
+          </a:blip>
+          <a:srcRect/>
+          <a:stretch/>
         </p:blipFill>
         <p:spPr>
           <a:xfrm>
-            <a:off x="5419819" y="157479"/>
-            <a:ext cx="5589463" cy="3144324"/>
+            <a:off x="5419819" y="157605"/>
+            <a:ext cx="5589463" cy="3144072"/>
           </a:xfrm>
           <a:prstGeom prst="rect">
             <a:avLst/>
@@ -6015,15 +13269,20 @@
           <p:nvPr/>
         </p:nvPicPr>
         <p:blipFill>
-          <a:blip r:embed="rId3"/>
-          <a:stretch>
-            <a:fillRect/>
-          </a:stretch>
+          <a:blip r:embed="rId3">
+            <a:extLst>
+              <a:ext uri="{28A0092B-C50C-407E-A947-70E740481C1C}">
+                <a14:useLocalDpi xmlns:a14="http://schemas.microsoft.com/office/drawing/2010/main" val="0"/>
+              </a:ext>
+            </a:extLst>
+          </a:blip>
+          <a:srcRect/>
+          <a:stretch/>
         </p:blipFill>
         <p:spPr>
           <a:xfrm>
-            <a:off x="5419819" y="3316098"/>
-            <a:ext cx="5589463" cy="3143687"/>
+            <a:off x="5420162" y="3316098"/>
+            <a:ext cx="5588776" cy="3143687"/>
           </a:xfrm>
           <a:prstGeom prst="rect">
             <a:avLst/>
@@ -7301,1690 +14560,44 @@
             <p:ph sz="half" idx="1"/>
           </p:nvPr>
         </p:nvSpPr>
-        <p:spPr/>
+        <p:spPr>
+          <a:xfrm>
+            <a:off x="1188720" y="2201438"/>
+            <a:ext cx="4937760" cy="3192431"/>
+          </a:xfrm>
+        </p:spPr>
         <p:txBody>
           <a:bodyPr/>
           <a:lstStyle/>
           <a:p>
             <a:r>
               <a:rPr lang="ru-RU" dirty="0"/>
-              <a:t>В главе информационного менеджмента разработаны:</a:t>
-            </a:r>
-          </a:p>
-          <a:p>
-            <a:pPr marL="355600" indent="-355600">
-              <a:buFont typeface="Calibri" panose="020F0502020204030204" pitchFamily="34" charset="0"/>
-              <a:buChar char="―"/>
-            </a:pPr>
+              <a:t>Примерная стоимость разработки: 140 тыс. руб.</a:t>
+            </a:r>
+          </a:p>
+          <a:p>
             <a:r>
               <a:rPr lang="ru-RU" dirty="0"/>
-              <a:t>Устав проекта,</a:t>
-            </a:r>
-          </a:p>
-          <a:p>
-            <a:pPr marL="355600" indent="-355600">
-              <a:buFont typeface="Calibri" panose="020F0502020204030204" pitchFamily="34" charset="0"/>
-              <a:buChar char="―"/>
-            </a:pPr>
+              <a:t>Примерная стоимость содержания системы с модулем рекомендаций (за 6 месяцев): 60 тыс. руб.</a:t>
+            </a:r>
+          </a:p>
+          <a:p>
             <a:r>
               <a:rPr lang="ru-RU" dirty="0"/>
-              <a:t>Иерархическая структура работ (ИСР),</a:t>
-            </a:r>
-          </a:p>
-          <a:p>
-            <a:pPr marL="355600" indent="-355600">
-              <a:buFont typeface="Calibri" panose="020F0502020204030204" pitchFamily="34" charset="0"/>
-              <a:buChar char="―"/>
-            </a:pPr>
+              <a:t>Время разработки: 6 месяцев</a:t>
+            </a:r>
+          </a:p>
+          <a:p>
             <a:r>
               <a:rPr lang="ru-RU" dirty="0"/>
-              <a:t>Календарный план, </a:t>
-            </a:r>
-          </a:p>
-          <a:p>
-            <a:pPr marL="355600" indent="-355600">
-              <a:buFont typeface="Calibri" panose="020F0502020204030204" pitchFamily="34" charset="0"/>
-              <a:buChar char="―"/>
-            </a:pPr>
-            <a:r>
-              <a:rPr lang="ru-RU" dirty="0"/>
-              <a:t>Матрица RACI,</a:t>
-            </a:r>
-          </a:p>
-          <a:p>
-            <a:pPr marL="355600" indent="-355600">
-              <a:buFont typeface="Calibri" panose="020F0502020204030204" pitchFamily="34" charset="0"/>
-              <a:buChar char="―"/>
-            </a:pPr>
-            <a:r>
-              <a:rPr lang="ru-RU" dirty="0"/>
-              <a:t>Реестр рисков и план управления изменениями.</a:t>
-            </a:r>
-          </a:p>
-          <a:p>
-            <a:pPr marL="88900" indent="0">
-              <a:buNone/>
-            </a:pPr>
-            <a:r>
-              <a:rPr lang="ru-RU" dirty="0"/>
-              <a:t>Бюджет проекта (без учёта оплаты разработчиков) – около 60 тыс. рублей.</a:t>
-            </a:r>
+              <a:t>Организационные документы: устав, ИСР, календарный план, матрица RACI, реестр рисков, план изменений</a:t>
+            </a:r>
+          </a:p>
+          <a:p>
+            <a:endParaRPr lang="ru-RU" dirty="0"/>
           </a:p>
         </p:txBody>
       </p:sp>
-      <p:graphicFrame>
-        <p:nvGraphicFramePr>
-          <p:cNvPr id="6" name="Объект 5">
-            <a:extLst>
-              <a:ext uri="{FF2B5EF4-FFF2-40B4-BE49-F238E27FC236}">
-                <a16:creationId xmlns:a16="http://schemas.microsoft.com/office/drawing/2014/main" id="{BDD15A00-970A-5ABF-9BA1-DBE7AADFC44C}"/>
-              </a:ext>
-            </a:extLst>
-          </p:cNvPr>
-          <p:cNvGraphicFramePr>
-            <a:graphicFrameLocks noGrp="1"/>
-          </p:cNvGraphicFramePr>
-          <p:nvPr>
-            <p:ph sz="half" idx="2"/>
-            <p:extLst>
-              <p:ext uri="{D42A27DB-BD31-4B8C-83A1-F6EECF244321}">
-                <p14:modId xmlns:p14="http://schemas.microsoft.com/office/powerpoint/2010/main" val="3533403469"/>
-              </p:ext>
-            </p:extLst>
-          </p:nvPr>
-        </p:nvGraphicFramePr>
-        <p:xfrm>
-          <a:off x="6218555" y="1845734"/>
-          <a:ext cx="4937125" cy="4358640"/>
-        </p:xfrm>
-        <a:graphic>
-          <a:graphicData uri="http://schemas.openxmlformats.org/drawingml/2006/table">
-            <a:tbl>
-              <a:tblPr firstRow="1" firstCol="1" lastRow="1" lastCol="1" bandRow="1" bandCol="1">
-                <a:tableStyleId>{5C22544A-7EE6-4342-B048-85BDC9FD1C3A}</a:tableStyleId>
-              </a:tblPr>
-              <a:tblGrid>
-                <a:gridCol w="2001386">
-                  <a:extLst>
-                    <a:ext uri="{9D8B030D-6E8A-4147-A177-3AD203B41FA5}">
-                      <a16:colId xmlns:a16="http://schemas.microsoft.com/office/drawing/2014/main" val="1686752078"/>
-                    </a:ext>
-                  </a:extLst>
-                </a:gridCol>
-                <a:gridCol w="935878">
-                  <a:extLst>
-                    <a:ext uri="{9D8B030D-6E8A-4147-A177-3AD203B41FA5}">
-                      <a16:colId xmlns:a16="http://schemas.microsoft.com/office/drawing/2014/main" val="3256132388"/>
-                    </a:ext>
-                  </a:extLst>
-                </a:gridCol>
-                <a:gridCol w="1071608">
-                  <a:extLst>
-                    <a:ext uri="{9D8B030D-6E8A-4147-A177-3AD203B41FA5}">
-                      <a16:colId xmlns:a16="http://schemas.microsoft.com/office/drawing/2014/main" val="734199257"/>
-                    </a:ext>
-                  </a:extLst>
-                </a:gridCol>
-                <a:gridCol w="928253">
-                  <a:extLst>
-                    <a:ext uri="{9D8B030D-6E8A-4147-A177-3AD203B41FA5}">
-                      <a16:colId xmlns:a16="http://schemas.microsoft.com/office/drawing/2014/main" val="4068769053"/>
-                    </a:ext>
-                  </a:extLst>
-                </a:gridCol>
-              </a:tblGrid>
-              <a:tr h="146406">
-                <a:tc gridSpan="4">
-                  <a:txBody>
-                    <a:bodyPr/>
-                    <a:lstStyle/>
-                    <a:p>
-                      <a:pPr marL="39370" marR="25400">
-                        <a:buNone/>
-                      </a:pPr>
-                      <a:r>
-                        <a:rPr lang="ru-RU" sz="1100">
-                          <a:effectLst/>
-                        </a:rPr>
-                        <a:t>Стоимость работ:</a:t>
-                      </a:r>
-                      <a:endParaRPr lang="ru-RU" sz="1100">
-                        <a:effectLst/>
-                        <a:latin typeface="Times New Roman" panose="02020603050405020304" pitchFamily="18" charset="0"/>
-                        <a:ea typeface="Times New Roman" panose="02020603050405020304" pitchFamily="18" charset="0"/>
-                      </a:endParaRPr>
-                    </a:p>
-                  </a:txBody>
-                  <a:tcPr marL="0" marR="0" marT="0" marB="0" anchor="ctr"/>
-                </a:tc>
-                <a:tc hMerge="1">
-                  <a:txBody>
-                    <a:bodyPr/>
-                    <a:lstStyle/>
-                    <a:p>
-                      <a:endParaRPr lang="ru-RU"/>
-                    </a:p>
-                  </a:txBody>
-                  <a:tcPr/>
-                </a:tc>
-                <a:tc hMerge="1">
-                  <a:txBody>
-                    <a:bodyPr/>
-                    <a:lstStyle/>
-                    <a:p>
-                      <a:endParaRPr lang="ru-RU"/>
-                    </a:p>
-                  </a:txBody>
-                  <a:tcPr/>
-                </a:tc>
-                <a:tc hMerge="1">
-                  <a:txBody>
-                    <a:bodyPr/>
-                    <a:lstStyle/>
-                    <a:p>
-                      <a:endParaRPr lang="ru-RU"/>
-                    </a:p>
-                  </a:txBody>
-                  <a:tcPr/>
-                </a:tc>
-                <a:extLst>
-                  <a:ext uri="{0D108BD9-81ED-4DB2-BD59-A6C34878D82A}">
-                    <a16:rowId xmlns:a16="http://schemas.microsoft.com/office/drawing/2014/main" val="1302771142"/>
-                  </a:ext>
-                </a:extLst>
-              </a:tr>
-              <a:tr h="292811">
-                <a:tc>
-                  <a:txBody>
-                    <a:bodyPr/>
-                    <a:lstStyle/>
-                    <a:p>
-                      <a:pPr marL="65405" marR="25400" algn="ctr">
-                        <a:buNone/>
-                      </a:pPr>
-                      <a:r>
-                        <a:rPr lang="ru-RU" sz="1100">
-                          <a:effectLst/>
-                        </a:rPr>
-                        <a:t>Категория специалиста</a:t>
-                      </a:r>
-                      <a:endParaRPr lang="ru-RU" sz="1050">
-                        <a:effectLst/>
-                        <a:latin typeface="Times New Roman" panose="02020603050405020304" pitchFamily="18" charset="0"/>
-                        <a:ea typeface="Times New Roman" panose="02020603050405020304" pitchFamily="18" charset="0"/>
-                      </a:endParaRPr>
-                    </a:p>
-                  </a:txBody>
-                  <a:tcPr marL="0" marR="0" marT="0" marB="0" anchor="ctr"/>
-                </a:tc>
-                <a:tc>
-                  <a:txBody>
-                    <a:bodyPr/>
-                    <a:lstStyle/>
-                    <a:p>
-                      <a:pPr marL="39370" marR="25400" algn="ctr">
-                        <a:buNone/>
-                      </a:pPr>
-                      <a:r>
-                        <a:rPr lang="ru-RU" sz="1100">
-                          <a:effectLst/>
-                        </a:rPr>
-                        <a:t>Трудозатраты, час</a:t>
-                      </a:r>
-                      <a:endParaRPr lang="ru-RU" sz="1050">
-                        <a:effectLst/>
-                        <a:latin typeface="Times New Roman" panose="02020603050405020304" pitchFamily="18" charset="0"/>
-                        <a:ea typeface="Times New Roman" panose="02020603050405020304" pitchFamily="18" charset="0"/>
-                      </a:endParaRPr>
-                    </a:p>
-                  </a:txBody>
-                  <a:tcPr marL="0" marR="0" marT="0" marB="0" anchor="ctr"/>
-                </a:tc>
-                <a:tc>
-                  <a:txBody>
-                    <a:bodyPr/>
-                    <a:lstStyle/>
-                    <a:p>
-                      <a:pPr marL="39370" marR="25400" algn="ctr">
-                        <a:buNone/>
-                      </a:pPr>
-                      <a:r>
-                        <a:rPr lang="ru-RU" sz="1100">
-                          <a:effectLst/>
-                        </a:rPr>
-                        <a:t>Ставка, руб/час</a:t>
-                      </a:r>
-                      <a:endParaRPr lang="ru-RU" sz="1050">
-                        <a:effectLst/>
-                        <a:latin typeface="Times New Roman" panose="02020603050405020304" pitchFamily="18" charset="0"/>
-                        <a:ea typeface="Times New Roman" panose="02020603050405020304" pitchFamily="18" charset="0"/>
-                      </a:endParaRPr>
-                    </a:p>
-                  </a:txBody>
-                  <a:tcPr marL="0" marR="0" marT="0" marB="0" anchor="ctr"/>
-                </a:tc>
-                <a:tc>
-                  <a:txBody>
-                    <a:bodyPr/>
-                    <a:lstStyle/>
-                    <a:p>
-                      <a:pPr marL="39370" marR="25400" algn="ctr">
-                        <a:buNone/>
-                      </a:pPr>
-                      <a:r>
-                        <a:rPr lang="ru-RU" sz="1100">
-                          <a:effectLst/>
-                        </a:rPr>
-                        <a:t>Итого</a:t>
-                      </a:r>
-                      <a:endParaRPr lang="ru-RU" sz="1050">
-                        <a:effectLst/>
-                        <a:latin typeface="Times New Roman" panose="02020603050405020304" pitchFamily="18" charset="0"/>
-                        <a:ea typeface="Times New Roman" panose="02020603050405020304" pitchFamily="18" charset="0"/>
-                      </a:endParaRPr>
-                    </a:p>
-                  </a:txBody>
-                  <a:tcPr marL="0" marR="0" marT="0" marB="0" anchor="ctr"/>
-                </a:tc>
-                <a:extLst>
-                  <a:ext uri="{0D108BD9-81ED-4DB2-BD59-A6C34878D82A}">
-                    <a16:rowId xmlns:a16="http://schemas.microsoft.com/office/drawing/2014/main" val="2667098538"/>
-                  </a:ext>
-                </a:extLst>
-              </a:tr>
-              <a:tr h="292811">
-                <a:tc>
-                  <a:txBody>
-                    <a:bodyPr/>
-                    <a:lstStyle/>
-                    <a:p>
-                      <a:pPr marL="65405" marR="25400">
-                        <a:buNone/>
-                      </a:pPr>
-                      <a:r>
-                        <a:rPr lang="ru-RU" sz="1100">
-                          <a:effectLst/>
-                        </a:rPr>
-                        <a:t>Руководитель проекта/ML-инженер (Шутова Т.Е.)</a:t>
-                      </a:r>
-                      <a:endParaRPr lang="ru-RU" sz="1050">
-                        <a:effectLst/>
-                        <a:latin typeface="Times New Roman" panose="02020603050405020304" pitchFamily="18" charset="0"/>
-                        <a:ea typeface="Times New Roman" panose="02020603050405020304" pitchFamily="18" charset="0"/>
-                      </a:endParaRPr>
-                    </a:p>
-                  </a:txBody>
-                  <a:tcPr marL="0" marR="0" marT="0" marB="0" anchor="ctr"/>
-                </a:tc>
-                <a:tc>
-                  <a:txBody>
-                    <a:bodyPr/>
-                    <a:lstStyle/>
-                    <a:p>
-                      <a:pPr marL="39370" marR="25400">
-                        <a:buNone/>
-                      </a:pPr>
-                      <a:r>
-                        <a:rPr lang="ru-RU" sz="1100">
-                          <a:effectLst/>
-                        </a:rPr>
-                        <a:t>140</a:t>
-                      </a:r>
-                      <a:endParaRPr lang="ru-RU" sz="1100">
-                        <a:effectLst/>
-                        <a:latin typeface="Times New Roman" panose="02020603050405020304" pitchFamily="18" charset="0"/>
-                        <a:ea typeface="Times New Roman" panose="02020603050405020304" pitchFamily="18" charset="0"/>
-                      </a:endParaRPr>
-                    </a:p>
-                  </a:txBody>
-                  <a:tcPr marL="0" marR="0" marT="0" marB="0" anchor="ctr"/>
-                </a:tc>
-                <a:tc>
-                  <a:txBody>
-                    <a:bodyPr/>
-                    <a:lstStyle/>
-                    <a:p>
-                      <a:pPr marL="39370" marR="25400">
-                        <a:buNone/>
-                      </a:pPr>
-                      <a:r>
-                        <a:rPr lang="ru-RU" sz="1100">
-                          <a:effectLst/>
-                        </a:rPr>
-                        <a:t>350</a:t>
-                      </a:r>
-                      <a:endParaRPr lang="ru-RU" sz="1050">
-                        <a:effectLst/>
-                        <a:latin typeface="Times New Roman" panose="02020603050405020304" pitchFamily="18" charset="0"/>
-                        <a:ea typeface="Times New Roman" panose="02020603050405020304" pitchFamily="18" charset="0"/>
-                      </a:endParaRPr>
-                    </a:p>
-                  </a:txBody>
-                  <a:tcPr marL="0" marR="0" marT="0" marB="0" anchor="ctr"/>
-                </a:tc>
-                <a:tc>
-                  <a:txBody>
-                    <a:bodyPr/>
-                    <a:lstStyle/>
-                    <a:p>
-                      <a:pPr marL="39370" marR="25400">
-                        <a:buNone/>
-                      </a:pPr>
-                      <a:r>
-                        <a:rPr lang="ru-RU" sz="1100">
-                          <a:effectLst/>
-                        </a:rPr>
-                        <a:t>49 000</a:t>
-                      </a:r>
-                      <a:endParaRPr lang="ru-RU" sz="1050">
-                        <a:effectLst/>
-                        <a:latin typeface="Times New Roman" panose="02020603050405020304" pitchFamily="18" charset="0"/>
-                        <a:ea typeface="Times New Roman" panose="02020603050405020304" pitchFamily="18" charset="0"/>
-                      </a:endParaRPr>
-                    </a:p>
-                  </a:txBody>
-                  <a:tcPr marL="0" marR="0" marT="0" marB="0" anchor="ctr"/>
-                </a:tc>
-                <a:extLst>
-                  <a:ext uri="{0D108BD9-81ED-4DB2-BD59-A6C34878D82A}">
-                    <a16:rowId xmlns:a16="http://schemas.microsoft.com/office/drawing/2014/main" val="25689286"/>
-                  </a:ext>
-                </a:extLst>
-              </a:tr>
-              <a:tr h="292811">
-                <a:tc>
-                  <a:txBody>
-                    <a:bodyPr/>
-                    <a:lstStyle/>
-                    <a:p>
-                      <a:pPr marL="80010" marR="25400" indent="-58420">
-                        <a:buNone/>
-                      </a:pPr>
-                      <a:r>
-                        <a:rPr lang="ru-RU" sz="1100">
-                          <a:effectLst/>
-                        </a:rPr>
-                        <a:t> Бэкенд-разработчик (Жминьковская  М.А.)</a:t>
-                      </a:r>
-                      <a:endParaRPr lang="ru-RU" sz="1050">
-                        <a:effectLst/>
-                        <a:latin typeface="Times New Roman" panose="02020603050405020304" pitchFamily="18" charset="0"/>
-                        <a:ea typeface="Times New Roman" panose="02020603050405020304" pitchFamily="18" charset="0"/>
-                      </a:endParaRPr>
-                    </a:p>
-                  </a:txBody>
-                  <a:tcPr marL="0" marR="0" marT="0" marB="0" anchor="ctr"/>
-                </a:tc>
-                <a:tc>
-                  <a:txBody>
-                    <a:bodyPr/>
-                    <a:lstStyle/>
-                    <a:p>
-                      <a:pPr marL="39370" marR="25400">
-                        <a:buNone/>
-                      </a:pPr>
-                      <a:r>
-                        <a:rPr lang="ru-RU" sz="1100">
-                          <a:effectLst/>
-                        </a:rPr>
-                        <a:t>100</a:t>
-                      </a:r>
-                      <a:endParaRPr lang="ru-RU" sz="1100">
-                        <a:effectLst/>
-                        <a:latin typeface="Times New Roman" panose="02020603050405020304" pitchFamily="18" charset="0"/>
-                        <a:ea typeface="Times New Roman" panose="02020603050405020304" pitchFamily="18" charset="0"/>
-                      </a:endParaRPr>
-                    </a:p>
-                  </a:txBody>
-                  <a:tcPr marL="0" marR="0" marT="0" marB="0" anchor="ctr"/>
-                </a:tc>
-                <a:tc>
-                  <a:txBody>
-                    <a:bodyPr/>
-                    <a:lstStyle/>
-                    <a:p>
-                      <a:pPr marL="39370" marR="25400">
-                        <a:buNone/>
-                      </a:pPr>
-                      <a:r>
-                        <a:rPr lang="ru-RU" sz="1100">
-                          <a:effectLst/>
-                        </a:rPr>
-                        <a:t>300</a:t>
-                      </a:r>
-                      <a:endParaRPr lang="ru-RU" sz="1100">
-                        <a:effectLst/>
-                        <a:latin typeface="Times New Roman" panose="02020603050405020304" pitchFamily="18" charset="0"/>
-                        <a:ea typeface="Times New Roman" panose="02020603050405020304" pitchFamily="18" charset="0"/>
-                      </a:endParaRPr>
-                    </a:p>
-                  </a:txBody>
-                  <a:tcPr marL="0" marR="0" marT="0" marB="0" anchor="ctr"/>
-                </a:tc>
-                <a:tc>
-                  <a:txBody>
-                    <a:bodyPr/>
-                    <a:lstStyle/>
-                    <a:p>
-                      <a:pPr marL="39370" marR="25400">
-                        <a:buNone/>
-                      </a:pPr>
-                      <a:r>
-                        <a:rPr lang="ru-RU" sz="1100">
-                          <a:effectLst/>
-                        </a:rPr>
-                        <a:t>30 000</a:t>
-                      </a:r>
-                      <a:endParaRPr lang="ru-RU" sz="1100">
-                        <a:effectLst/>
-                        <a:latin typeface="Times New Roman" panose="02020603050405020304" pitchFamily="18" charset="0"/>
-                        <a:ea typeface="Times New Roman" panose="02020603050405020304" pitchFamily="18" charset="0"/>
-                      </a:endParaRPr>
-                    </a:p>
-                  </a:txBody>
-                  <a:tcPr marL="0" marR="0" marT="0" marB="0" anchor="ctr"/>
-                </a:tc>
-                <a:extLst>
-                  <a:ext uri="{0D108BD9-81ED-4DB2-BD59-A6C34878D82A}">
-                    <a16:rowId xmlns:a16="http://schemas.microsoft.com/office/drawing/2014/main" val="1630029245"/>
-                  </a:ext>
-                </a:extLst>
-              </a:tr>
-              <a:tr h="146406">
-                <a:tc>
-                  <a:txBody>
-                    <a:bodyPr/>
-                    <a:lstStyle/>
-                    <a:p>
-                      <a:pPr marL="65405" marR="25400">
-                        <a:buNone/>
-                      </a:pPr>
-                      <a:r>
-                        <a:rPr lang="ru-RU" sz="1100">
-                          <a:effectLst/>
-                        </a:rPr>
-                        <a:t>Тестировщик (совмещенная роль)</a:t>
-                      </a:r>
-                      <a:endParaRPr lang="ru-RU" sz="1050">
-                        <a:effectLst/>
-                        <a:latin typeface="Times New Roman" panose="02020603050405020304" pitchFamily="18" charset="0"/>
-                        <a:ea typeface="Times New Roman" panose="02020603050405020304" pitchFamily="18" charset="0"/>
-                      </a:endParaRPr>
-                    </a:p>
-                  </a:txBody>
-                  <a:tcPr marL="0" marR="0" marT="0" marB="0" anchor="ctr"/>
-                </a:tc>
-                <a:tc>
-                  <a:txBody>
-                    <a:bodyPr/>
-                    <a:lstStyle/>
-                    <a:p>
-                      <a:pPr marL="39370" marR="25400">
-                        <a:buNone/>
-                      </a:pPr>
-                      <a:r>
-                        <a:rPr lang="ru-RU" sz="1100">
-                          <a:effectLst/>
-                        </a:rPr>
-                        <a:t>20</a:t>
-                      </a:r>
-                      <a:endParaRPr lang="ru-RU" sz="1100">
-                        <a:effectLst/>
-                        <a:latin typeface="Times New Roman" panose="02020603050405020304" pitchFamily="18" charset="0"/>
-                        <a:ea typeface="Times New Roman" panose="02020603050405020304" pitchFamily="18" charset="0"/>
-                      </a:endParaRPr>
-                    </a:p>
-                  </a:txBody>
-                  <a:tcPr marL="0" marR="0" marT="0" marB="0" anchor="ctr"/>
-                </a:tc>
-                <a:tc>
-                  <a:txBody>
-                    <a:bodyPr/>
-                    <a:lstStyle/>
-                    <a:p>
-                      <a:pPr marL="39370" marR="25400">
-                        <a:buNone/>
-                      </a:pPr>
-                      <a:r>
-                        <a:rPr lang="ru-RU" sz="1100">
-                          <a:effectLst/>
-                        </a:rPr>
-                        <a:t>200</a:t>
-                      </a:r>
-                      <a:endParaRPr lang="ru-RU" sz="1050">
-                        <a:effectLst/>
-                        <a:latin typeface="Times New Roman" panose="02020603050405020304" pitchFamily="18" charset="0"/>
-                        <a:ea typeface="Times New Roman" panose="02020603050405020304" pitchFamily="18" charset="0"/>
-                      </a:endParaRPr>
-                    </a:p>
-                  </a:txBody>
-                  <a:tcPr marL="0" marR="0" marT="0" marB="0" anchor="ctr"/>
-                </a:tc>
-                <a:tc>
-                  <a:txBody>
-                    <a:bodyPr/>
-                    <a:lstStyle/>
-                    <a:p>
-                      <a:pPr marL="39370" marR="25400">
-                        <a:buNone/>
-                      </a:pPr>
-                      <a:r>
-                        <a:rPr lang="ru-RU" sz="1100">
-                          <a:effectLst/>
-                        </a:rPr>
-                        <a:t>4 000</a:t>
-                      </a:r>
-                      <a:endParaRPr lang="ru-RU" sz="1050">
-                        <a:effectLst/>
-                        <a:latin typeface="Times New Roman" panose="02020603050405020304" pitchFamily="18" charset="0"/>
-                        <a:ea typeface="Times New Roman" panose="02020603050405020304" pitchFamily="18" charset="0"/>
-                      </a:endParaRPr>
-                    </a:p>
-                  </a:txBody>
-                  <a:tcPr marL="0" marR="0" marT="0" marB="0" anchor="ctr"/>
-                </a:tc>
-                <a:extLst>
-                  <a:ext uri="{0D108BD9-81ED-4DB2-BD59-A6C34878D82A}">
-                    <a16:rowId xmlns:a16="http://schemas.microsoft.com/office/drawing/2014/main" val="1214882526"/>
-                  </a:ext>
-                </a:extLst>
-              </a:tr>
-              <a:tr h="146914">
-                <a:tc>
-                  <a:txBody>
-                    <a:bodyPr/>
-                    <a:lstStyle/>
-                    <a:p>
-                      <a:pPr marL="65405" marR="25400">
-                        <a:buNone/>
-                      </a:pPr>
-                      <a:r>
-                        <a:rPr lang="ru-RU" sz="1100">
-                          <a:effectLst/>
-                        </a:rPr>
-                        <a:t>Итого</a:t>
-                      </a:r>
-                      <a:endParaRPr lang="ru-RU" sz="1050">
-                        <a:effectLst/>
-                        <a:latin typeface="Times New Roman" panose="02020603050405020304" pitchFamily="18" charset="0"/>
-                        <a:ea typeface="Times New Roman" panose="02020603050405020304" pitchFamily="18" charset="0"/>
-                      </a:endParaRPr>
-                    </a:p>
-                  </a:txBody>
-                  <a:tcPr marL="0" marR="0" marT="0" marB="0" anchor="ctr"/>
-                </a:tc>
-                <a:tc>
-                  <a:txBody>
-                    <a:bodyPr/>
-                    <a:lstStyle/>
-                    <a:p>
-                      <a:pPr marL="39370" marR="25400">
-                        <a:buNone/>
-                      </a:pPr>
-                      <a:r>
-                        <a:rPr lang="ru-RU" sz="1100">
-                          <a:effectLst/>
-                        </a:rPr>
-                        <a:t>260</a:t>
-                      </a:r>
-                      <a:endParaRPr lang="ru-RU" sz="1100">
-                        <a:effectLst/>
-                        <a:latin typeface="Times New Roman" panose="02020603050405020304" pitchFamily="18" charset="0"/>
-                        <a:ea typeface="Times New Roman" panose="02020603050405020304" pitchFamily="18" charset="0"/>
-                      </a:endParaRPr>
-                    </a:p>
-                  </a:txBody>
-                  <a:tcPr marL="0" marR="0" marT="0" marB="0" anchor="ctr"/>
-                </a:tc>
-                <a:tc>
-                  <a:txBody>
-                    <a:bodyPr/>
-                    <a:lstStyle/>
-                    <a:p>
-                      <a:pPr marL="39370" marR="25400">
-                        <a:buNone/>
-                      </a:pPr>
-                      <a:r>
-                        <a:rPr lang="ru-RU" sz="1100">
-                          <a:effectLst/>
-                        </a:rPr>
-                        <a:t> </a:t>
-                      </a:r>
-                      <a:endParaRPr lang="ru-RU" sz="1100">
-                        <a:effectLst/>
-                        <a:latin typeface="Times New Roman" panose="02020603050405020304" pitchFamily="18" charset="0"/>
-                        <a:ea typeface="Times New Roman" panose="02020603050405020304" pitchFamily="18" charset="0"/>
-                      </a:endParaRPr>
-                    </a:p>
-                  </a:txBody>
-                  <a:tcPr marL="0" marR="0" marT="0" marB="0" anchor="ctr"/>
-                </a:tc>
-                <a:tc>
-                  <a:txBody>
-                    <a:bodyPr/>
-                    <a:lstStyle/>
-                    <a:p>
-                      <a:pPr marL="39370" marR="25400">
-                        <a:buNone/>
-                      </a:pPr>
-                      <a:r>
-                        <a:rPr lang="ru-RU" sz="1100">
-                          <a:effectLst/>
-                        </a:rPr>
-                        <a:t>83 000</a:t>
-                      </a:r>
-                      <a:endParaRPr lang="ru-RU" sz="1100">
-                        <a:effectLst/>
-                        <a:latin typeface="Times New Roman" panose="02020603050405020304" pitchFamily="18" charset="0"/>
-                        <a:ea typeface="Times New Roman" panose="02020603050405020304" pitchFamily="18" charset="0"/>
-                      </a:endParaRPr>
-                    </a:p>
-                  </a:txBody>
-                  <a:tcPr marL="0" marR="0" marT="0" marB="0" anchor="ctr"/>
-                </a:tc>
-                <a:extLst>
-                  <a:ext uri="{0D108BD9-81ED-4DB2-BD59-A6C34878D82A}">
-                    <a16:rowId xmlns:a16="http://schemas.microsoft.com/office/drawing/2014/main" val="3264046495"/>
-                  </a:ext>
-                </a:extLst>
-              </a:tr>
-              <a:tr h="146406">
-                <a:tc gridSpan="4">
-                  <a:txBody>
-                    <a:bodyPr/>
-                    <a:lstStyle/>
-                    <a:p>
-                      <a:pPr marL="39370" marR="25400">
-                        <a:buNone/>
-                      </a:pPr>
-                      <a:r>
-                        <a:rPr lang="ru-RU" sz="1100">
-                          <a:effectLst/>
-                        </a:rPr>
-                        <a:t>Стоимость оборудования:</a:t>
-                      </a:r>
-                      <a:endParaRPr lang="ru-RU" sz="1100">
-                        <a:effectLst/>
-                        <a:latin typeface="Times New Roman" panose="02020603050405020304" pitchFamily="18" charset="0"/>
-                        <a:ea typeface="Times New Roman" panose="02020603050405020304" pitchFamily="18" charset="0"/>
-                      </a:endParaRPr>
-                    </a:p>
-                  </a:txBody>
-                  <a:tcPr marL="0" marR="0" marT="0" marB="0" anchor="ctr"/>
-                </a:tc>
-                <a:tc hMerge="1">
-                  <a:txBody>
-                    <a:bodyPr/>
-                    <a:lstStyle/>
-                    <a:p>
-                      <a:endParaRPr lang="ru-RU"/>
-                    </a:p>
-                  </a:txBody>
-                  <a:tcPr/>
-                </a:tc>
-                <a:tc hMerge="1">
-                  <a:txBody>
-                    <a:bodyPr/>
-                    <a:lstStyle/>
-                    <a:p>
-                      <a:endParaRPr lang="ru-RU"/>
-                    </a:p>
-                  </a:txBody>
-                  <a:tcPr/>
-                </a:tc>
-                <a:tc hMerge="1">
-                  <a:txBody>
-                    <a:bodyPr/>
-                    <a:lstStyle/>
-                    <a:p>
-                      <a:endParaRPr lang="ru-RU"/>
-                    </a:p>
-                  </a:txBody>
-                  <a:tcPr/>
-                </a:tc>
-                <a:extLst>
-                  <a:ext uri="{0D108BD9-81ED-4DB2-BD59-A6C34878D82A}">
-                    <a16:rowId xmlns:a16="http://schemas.microsoft.com/office/drawing/2014/main" val="60523163"/>
-                  </a:ext>
-                </a:extLst>
-              </a:tr>
-              <a:tr h="292811">
-                <a:tc>
-                  <a:txBody>
-                    <a:bodyPr/>
-                    <a:lstStyle/>
-                    <a:p>
-                      <a:pPr marL="65405" marR="25400" algn="ctr">
-                        <a:buNone/>
-                      </a:pPr>
-                      <a:r>
-                        <a:rPr lang="ru-RU" sz="1100">
-                          <a:effectLst/>
-                        </a:rPr>
-                        <a:t>Категория расходов</a:t>
-                      </a:r>
-                      <a:endParaRPr lang="ru-RU" sz="1050">
-                        <a:effectLst/>
-                        <a:latin typeface="Times New Roman" panose="02020603050405020304" pitchFamily="18" charset="0"/>
-                        <a:ea typeface="Times New Roman" panose="02020603050405020304" pitchFamily="18" charset="0"/>
-                      </a:endParaRPr>
-                    </a:p>
-                  </a:txBody>
-                  <a:tcPr marL="0" marR="0" marT="0" marB="0" anchor="ctr"/>
-                </a:tc>
-                <a:tc>
-                  <a:txBody>
-                    <a:bodyPr/>
-                    <a:lstStyle/>
-                    <a:p>
-                      <a:pPr marL="39370" marR="25400" algn="ctr">
-                        <a:buNone/>
-                      </a:pPr>
-                      <a:r>
-                        <a:rPr lang="ru-RU" sz="1100">
-                          <a:effectLst/>
-                        </a:rPr>
-                        <a:t>Количество</a:t>
-                      </a:r>
-                      <a:endParaRPr lang="ru-RU" sz="1050">
-                        <a:effectLst/>
-                        <a:latin typeface="Times New Roman" panose="02020603050405020304" pitchFamily="18" charset="0"/>
-                        <a:ea typeface="Times New Roman" panose="02020603050405020304" pitchFamily="18" charset="0"/>
-                      </a:endParaRPr>
-                    </a:p>
-                  </a:txBody>
-                  <a:tcPr marL="0" marR="0" marT="0" marB="0" anchor="ctr"/>
-                </a:tc>
-                <a:tc>
-                  <a:txBody>
-                    <a:bodyPr/>
-                    <a:lstStyle/>
-                    <a:p>
-                      <a:pPr marL="39370" marR="25400" algn="ctr">
-                        <a:buNone/>
-                      </a:pPr>
-                      <a:r>
-                        <a:rPr lang="ru-RU" sz="1100">
-                          <a:effectLst/>
-                        </a:rPr>
-                        <a:t>Стоимость за единицу, руб</a:t>
-                      </a:r>
-                      <a:endParaRPr lang="ru-RU" sz="1050">
-                        <a:effectLst/>
-                        <a:latin typeface="Times New Roman" panose="02020603050405020304" pitchFamily="18" charset="0"/>
-                        <a:ea typeface="Times New Roman" panose="02020603050405020304" pitchFamily="18" charset="0"/>
-                      </a:endParaRPr>
-                    </a:p>
-                  </a:txBody>
-                  <a:tcPr marL="0" marR="0" marT="0" marB="0" anchor="ctr"/>
-                </a:tc>
-                <a:tc>
-                  <a:txBody>
-                    <a:bodyPr/>
-                    <a:lstStyle/>
-                    <a:p>
-                      <a:pPr marL="39370" marR="25400" algn="ctr">
-                        <a:buNone/>
-                      </a:pPr>
-                      <a:r>
-                        <a:rPr lang="ru-RU" sz="1100">
-                          <a:effectLst/>
-                        </a:rPr>
-                        <a:t>Итого</a:t>
-                      </a:r>
-                      <a:endParaRPr lang="ru-RU" sz="1050">
-                        <a:effectLst/>
-                        <a:latin typeface="Times New Roman" panose="02020603050405020304" pitchFamily="18" charset="0"/>
-                        <a:ea typeface="Times New Roman" panose="02020603050405020304" pitchFamily="18" charset="0"/>
-                      </a:endParaRPr>
-                    </a:p>
-                  </a:txBody>
-                  <a:tcPr marL="0" marR="0" marT="0" marB="0" anchor="ctr"/>
-                </a:tc>
-                <a:extLst>
-                  <a:ext uri="{0D108BD9-81ED-4DB2-BD59-A6C34878D82A}">
-                    <a16:rowId xmlns:a16="http://schemas.microsoft.com/office/drawing/2014/main" val="4234593085"/>
-                  </a:ext>
-                </a:extLst>
-              </a:tr>
-              <a:tr h="146406">
-                <a:tc>
-                  <a:txBody>
-                    <a:bodyPr/>
-                    <a:lstStyle/>
-                    <a:p>
-                      <a:pPr marL="65405" marR="25400">
-                        <a:buNone/>
-                      </a:pPr>
-                      <a:r>
-                        <a:rPr lang="ru-RU" sz="1100">
-                          <a:effectLst/>
-                        </a:rPr>
-                        <a:t>Аренда облачного сервера с GPU</a:t>
-                      </a:r>
-                      <a:endParaRPr lang="ru-RU" sz="1100">
-                        <a:effectLst/>
-                        <a:latin typeface="Times New Roman" panose="02020603050405020304" pitchFamily="18" charset="0"/>
-                        <a:ea typeface="Times New Roman" panose="02020603050405020304" pitchFamily="18" charset="0"/>
-                      </a:endParaRPr>
-                    </a:p>
-                  </a:txBody>
-                  <a:tcPr marL="0" marR="0" marT="0" marB="0" anchor="ctr"/>
-                </a:tc>
-                <a:tc>
-                  <a:txBody>
-                    <a:bodyPr/>
-                    <a:lstStyle/>
-                    <a:p>
-                      <a:pPr marL="39370" marR="25400">
-                        <a:buNone/>
-                      </a:pPr>
-                      <a:r>
-                        <a:rPr lang="ru-RU" sz="1100">
-                          <a:effectLst/>
-                        </a:rPr>
-                        <a:t>4 месяца</a:t>
-                      </a:r>
-                      <a:endParaRPr lang="ru-RU" sz="1100">
-                        <a:effectLst/>
-                        <a:latin typeface="Times New Roman" panose="02020603050405020304" pitchFamily="18" charset="0"/>
-                        <a:ea typeface="Times New Roman" panose="02020603050405020304" pitchFamily="18" charset="0"/>
-                      </a:endParaRPr>
-                    </a:p>
-                  </a:txBody>
-                  <a:tcPr marL="0" marR="0" marT="0" marB="0" anchor="ctr"/>
-                </a:tc>
-                <a:tc>
-                  <a:txBody>
-                    <a:bodyPr/>
-                    <a:lstStyle/>
-                    <a:p>
-                      <a:pPr marL="39370" marR="25400">
-                        <a:buNone/>
-                      </a:pPr>
-                      <a:r>
-                        <a:rPr lang="ru-RU" sz="1100">
-                          <a:effectLst/>
-                        </a:rPr>
-                        <a:t>5 000</a:t>
-                      </a:r>
-                      <a:endParaRPr lang="ru-RU" sz="1100">
-                        <a:effectLst/>
-                        <a:latin typeface="Times New Roman" panose="02020603050405020304" pitchFamily="18" charset="0"/>
-                        <a:ea typeface="Times New Roman" panose="02020603050405020304" pitchFamily="18" charset="0"/>
-                      </a:endParaRPr>
-                    </a:p>
-                  </a:txBody>
-                  <a:tcPr marL="0" marR="0" marT="0" marB="0" anchor="ctr"/>
-                </a:tc>
-                <a:tc>
-                  <a:txBody>
-                    <a:bodyPr/>
-                    <a:lstStyle/>
-                    <a:p>
-                      <a:pPr marL="39370" marR="25400">
-                        <a:buNone/>
-                      </a:pPr>
-                      <a:r>
-                        <a:rPr lang="ru-RU" sz="1100">
-                          <a:effectLst/>
-                        </a:rPr>
-                        <a:t>20 000</a:t>
-                      </a:r>
-                      <a:endParaRPr lang="ru-RU" sz="1100">
-                        <a:effectLst/>
-                        <a:latin typeface="Times New Roman" panose="02020603050405020304" pitchFamily="18" charset="0"/>
-                        <a:ea typeface="Times New Roman" panose="02020603050405020304" pitchFamily="18" charset="0"/>
-                      </a:endParaRPr>
-                    </a:p>
-                  </a:txBody>
-                  <a:tcPr marL="0" marR="0" marT="0" marB="0" anchor="ctr"/>
-                </a:tc>
-                <a:extLst>
-                  <a:ext uri="{0D108BD9-81ED-4DB2-BD59-A6C34878D82A}">
-                    <a16:rowId xmlns:a16="http://schemas.microsoft.com/office/drawing/2014/main" val="1097812015"/>
-                  </a:ext>
-                </a:extLst>
-              </a:tr>
-              <a:tr h="146406">
-                <a:tc gridSpan="4">
-                  <a:txBody>
-                    <a:bodyPr/>
-                    <a:lstStyle/>
-                    <a:p>
-                      <a:pPr marL="39370" marR="25400">
-                        <a:buNone/>
-                      </a:pPr>
-                      <a:r>
-                        <a:rPr lang="ru-RU" sz="1100">
-                          <a:effectLst/>
-                        </a:rPr>
-                        <a:t>Инфраструктурные расходы:</a:t>
-                      </a:r>
-                      <a:endParaRPr lang="ru-RU" sz="1100">
-                        <a:effectLst/>
-                        <a:latin typeface="Times New Roman" panose="02020603050405020304" pitchFamily="18" charset="0"/>
-                        <a:ea typeface="Times New Roman" panose="02020603050405020304" pitchFamily="18" charset="0"/>
-                      </a:endParaRPr>
-                    </a:p>
-                  </a:txBody>
-                  <a:tcPr marL="0" marR="0" marT="0" marB="0" anchor="ctr"/>
-                </a:tc>
-                <a:tc hMerge="1">
-                  <a:txBody>
-                    <a:bodyPr/>
-                    <a:lstStyle/>
-                    <a:p>
-                      <a:endParaRPr lang="ru-RU"/>
-                    </a:p>
-                  </a:txBody>
-                  <a:tcPr/>
-                </a:tc>
-                <a:tc hMerge="1">
-                  <a:txBody>
-                    <a:bodyPr/>
-                    <a:lstStyle/>
-                    <a:p>
-                      <a:endParaRPr lang="ru-RU"/>
-                    </a:p>
-                  </a:txBody>
-                  <a:tcPr/>
-                </a:tc>
-                <a:tc hMerge="1">
-                  <a:txBody>
-                    <a:bodyPr/>
-                    <a:lstStyle/>
-                    <a:p>
-                      <a:endParaRPr lang="ru-RU"/>
-                    </a:p>
-                  </a:txBody>
-                  <a:tcPr/>
-                </a:tc>
-                <a:extLst>
-                  <a:ext uri="{0D108BD9-81ED-4DB2-BD59-A6C34878D82A}">
-                    <a16:rowId xmlns:a16="http://schemas.microsoft.com/office/drawing/2014/main" val="1119810425"/>
-                  </a:ext>
-                </a:extLst>
-              </a:tr>
-              <a:tr h="292811">
-                <a:tc>
-                  <a:txBody>
-                    <a:bodyPr/>
-                    <a:lstStyle/>
-                    <a:p>
-                      <a:pPr marL="65405" marR="25400" algn="ctr">
-                        <a:buNone/>
-                      </a:pPr>
-                      <a:r>
-                        <a:rPr lang="ru-RU" sz="1100">
-                          <a:effectLst/>
-                        </a:rPr>
-                        <a:t>Категория расходов</a:t>
-                      </a:r>
-                      <a:endParaRPr lang="ru-RU" sz="1050">
-                        <a:effectLst/>
-                        <a:latin typeface="Times New Roman" panose="02020603050405020304" pitchFamily="18" charset="0"/>
-                        <a:ea typeface="Times New Roman" panose="02020603050405020304" pitchFamily="18" charset="0"/>
-                      </a:endParaRPr>
-                    </a:p>
-                  </a:txBody>
-                  <a:tcPr marL="0" marR="0" marT="0" marB="0" anchor="ctr"/>
-                </a:tc>
-                <a:tc>
-                  <a:txBody>
-                    <a:bodyPr/>
-                    <a:lstStyle/>
-                    <a:p>
-                      <a:pPr marL="39370" marR="25400" algn="ctr">
-                        <a:buNone/>
-                      </a:pPr>
-                      <a:r>
-                        <a:rPr lang="ru-RU" sz="1100">
-                          <a:effectLst/>
-                        </a:rPr>
-                        <a:t>Количество</a:t>
-                      </a:r>
-                      <a:endParaRPr lang="ru-RU" sz="1050">
-                        <a:effectLst/>
-                        <a:latin typeface="Times New Roman" panose="02020603050405020304" pitchFamily="18" charset="0"/>
-                        <a:ea typeface="Times New Roman" panose="02020603050405020304" pitchFamily="18" charset="0"/>
-                      </a:endParaRPr>
-                    </a:p>
-                  </a:txBody>
-                  <a:tcPr marL="0" marR="0" marT="0" marB="0" anchor="ctr"/>
-                </a:tc>
-                <a:tc>
-                  <a:txBody>
-                    <a:bodyPr/>
-                    <a:lstStyle/>
-                    <a:p>
-                      <a:pPr marL="39370" marR="25400" algn="ctr">
-                        <a:buNone/>
-                      </a:pPr>
-                      <a:r>
-                        <a:rPr lang="ru-RU" sz="1100">
-                          <a:effectLst/>
-                        </a:rPr>
-                        <a:t>Стоимость за единицу, руб</a:t>
-                      </a:r>
-                      <a:endParaRPr lang="ru-RU" sz="1050">
-                        <a:effectLst/>
-                        <a:latin typeface="Times New Roman" panose="02020603050405020304" pitchFamily="18" charset="0"/>
-                        <a:ea typeface="Times New Roman" panose="02020603050405020304" pitchFamily="18" charset="0"/>
-                      </a:endParaRPr>
-                    </a:p>
-                  </a:txBody>
-                  <a:tcPr marL="0" marR="0" marT="0" marB="0" anchor="ctr"/>
-                </a:tc>
-                <a:tc>
-                  <a:txBody>
-                    <a:bodyPr/>
-                    <a:lstStyle/>
-                    <a:p>
-                      <a:pPr marL="39370" marR="25400" algn="ctr">
-                        <a:buNone/>
-                      </a:pPr>
-                      <a:r>
-                        <a:rPr lang="ru-RU" sz="1100">
-                          <a:effectLst/>
-                        </a:rPr>
-                        <a:t>Итого</a:t>
-                      </a:r>
-                      <a:endParaRPr lang="ru-RU" sz="1050">
-                        <a:effectLst/>
-                        <a:latin typeface="Times New Roman" panose="02020603050405020304" pitchFamily="18" charset="0"/>
-                        <a:ea typeface="Times New Roman" panose="02020603050405020304" pitchFamily="18" charset="0"/>
-                      </a:endParaRPr>
-                    </a:p>
-                  </a:txBody>
-                  <a:tcPr marL="0" marR="0" marT="0" marB="0" anchor="ctr"/>
-                </a:tc>
-                <a:extLst>
-                  <a:ext uri="{0D108BD9-81ED-4DB2-BD59-A6C34878D82A}">
-                    <a16:rowId xmlns:a16="http://schemas.microsoft.com/office/drawing/2014/main" val="783980897"/>
-                  </a:ext>
-                </a:extLst>
-              </a:tr>
-              <a:tr h="292811">
-                <a:tc>
-                  <a:txBody>
-                    <a:bodyPr/>
-                    <a:lstStyle/>
-                    <a:p>
-                      <a:pPr marL="65405" marR="25400">
-                        <a:buNone/>
-                      </a:pPr>
-                      <a:r>
-                        <a:rPr lang="ru-RU" sz="1100">
-                          <a:effectLst/>
-                        </a:rPr>
-                        <a:t>Хостинг и дополнительное дисковое пространство</a:t>
-                      </a:r>
-                      <a:endParaRPr lang="ru-RU" sz="1100">
-                        <a:effectLst/>
-                        <a:latin typeface="Times New Roman" panose="02020603050405020304" pitchFamily="18" charset="0"/>
-                        <a:ea typeface="Times New Roman" panose="02020603050405020304" pitchFamily="18" charset="0"/>
-                      </a:endParaRPr>
-                    </a:p>
-                  </a:txBody>
-                  <a:tcPr marL="0" marR="0" marT="0" marB="0" anchor="ctr"/>
-                </a:tc>
-                <a:tc>
-                  <a:txBody>
-                    <a:bodyPr/>
-                    <a:lstStyle/>
-                    <a:p>
-                      <a:pPr marL="39370" marR="25400">
-                        <a:buNone/>
-                      </a:pPr>
-                      <a:r>
-                        <a:rPr lang="ru-RU" sz="1100">
-                          <a:effectLst/>
-                        </a:rPr>
-                        <a:t>6 месяцев</a:t>
-                      </a:r>
-                      <a:endParaRPr lang="ru-RU" sz="1100">
-                        <a:effectLst/>
-                        <a:latin typeface="Times New Roman" panose="02020603050405020304" pitchFamily="18" charset="0"/>
-                        <a:ea typeface="Times New Roman" panose="02020603050405020304" pitchFamily="18" charset="0"/>
-                      </a:endParaRPr>
-                    </a:p>
-                  </a:txBody>
-                  <a:tcPr marL="0" marR="0" marT="0" marB="0" anchor="ctr"/>
-                </a:tc>
-                <a:tc>
-                  <a:txBody>
-                    <a:bodyPr/>
-                    <a:lstStyle/>
-                    <a:p>
-                      <a:pPr marL="39370" marR="25400">
-                        <a:buNone/>
-                      </a:pPr>
-                      <a:r>
-                        <a:rPr lang="ru-RU" sz="1100">
-                          <a:effectLst/>
-                        </a:rPr>
-                        <a:t>3 333</a:t>
-                      </a:r>
-                      <a:endParaRPr lang="ru-RU" sz="1100">
-                        <a:effectLst/>
-                        <a:latin typeface="Times New Roman" panose="02020603050405020304" pitchFamily="18" charset="0"/>
-                        <a:ea typeface="Times New Roman" panose="02020603050405020304" pitchFamily="18" charset="0"/>
-                      </a:endParaRPr>
-                    </a:p>
-                  </a:txBody>
-                  <a:tcPr marL="0" marR="0" marT="0" marB="0" anchor="ctr"/>
-                </a:tc>
-                <a:tc>
-                  <a:txBody>
-                    <a:bodyPr/>
-                    <a:lstStyle/>
-                    <a:p>
-                      <a:pPr marL="39370" marR="25400">
-                        <a:buNone/>
-                      </a:pPr>
-                      <a:r>
-                        <a:rPr lang="ru-RU" sz="1100">
-                          <a:effectLst/>
-                        </a:rPr>
-                        <a:t>19 998</a:t>
-                      </a:r>
-                      <a:endParaRPr lang="ru-RU" sz="1100">
-                        <a:effectLst/>
-                        <a:latin typeface="Times New Roman" panose="02020603050405020304" pitchFamily="18" charset="0"/>
-                        <a:ea typeface="Times New Roman" panose="02020603050405020304" pitchFamily="18" charset="0"/>
-                      </a:endParaRPr>
-                    </a:p>
-                  </a:txBody>
-                  <a:tcPr marL="0" marR="0" marT="0" marB="0" anchor="ctr"/>
-                </a:tc>
-                <a:extLst>
-                  <a:ext uri="{0D108BD9-81ED-4DB2-BD59-A6C34878D82A}">
-                    <a16:rowId xmlns:a16="http://schemas.microsoft.com/office/drawing/2014/main" val="133031913"/>
-                  </a:ext>
-                </a:extLst>
-              </a:tr>
-              <a:tr h="146406">
-                <a:tc>
-                  <a:txBody>
-                    <a:bodyPr/>
-                    <a:lstStyle/>
-                    <a:p>
-                      <a:pPr marL="65405" marR="25400">
-                        <a:buNone/>
-                      </a:pPr>
-                      <a:r>
-                        <a:rPr lang="ru-RU" sz="1100">
-                          <a:effectLst/>
-                        </a:rPr>
-                        <a:t>Интернет</a:t>
-                      </a:r>
-                      <a:endParaRPr lang="ru-RU" sz="1100">
-                        <a:effectLst/>
-                        <a:latin typeface="Times New Roman" panose="02020603050405020304" pitchFamily="18" charset="0"/>
-                        <a:ea typeface="Times New Roman" panose="02020603050405020304" pitchFamily="18" charset="0"/>
-                      </a:endParaRPr>
-                    </a:p>
-                  </a:txBody>
-                  <a:tcPr marL="0" marR="0" marT="0" marB="0" anchor="ctr"/>
-                </a:tc>
-                <a:tc>
-                  <a:txBody>
-                    <a:bodyPr/>
-                    <a:lstStyle/>
-                    <a:p>
-                      <a:pPr marL="39370" marR="25400">
-                        <a:buNone/>
-                      </a:pPr>
-                      <a:r>
-                        <a:rPr lang="ru-RU" sz="1100">
-                          <a:effectLst/>
-                        </a:rPr>
-                        <a:t>6 месяцев</a:t>
-                      </a:r>
-                      <a:endParaRPr lang="ru-RU" sz="1100">
-                        <a:effectLst/>
-                        <a:latin typeface="Times New Roman" panose="02020603050405020304" pitchFamily="18" charset="0"/>
-                        <a:ea typeface="Times New Roman" panose="02020603050405020304" pitchFamily="18" charset="0"/>
-                      </a:endParaRPr>
-                    </a:p>
-                  </a:txBody>
-                  <a:tcPr marL="0" marR="0" marT="0" marB="0" anchor="ctr"/>
-                </a:tc>
-                <a:tc>
-                  <a:txBody>
-                    <a:bodyPr/>
-                    <a:lstStyle/>
-                    <a:p>
-                      <a:pPr marL="39370" marR="25400">
-                        <a:buNone/>
-                      </a:pPr>
-                      <a:r>
-                        <a:rPr lang="ru-RU" sz="1100">
-                          <a:effectLst/>
-                        </a:rPr>
-                        <a:t>1 650</a:t>
-                      </a:r>
-                      <a:endParaRPr lang="ru-RU" sz="1100">
-                        <a:effectLst/>
-                        <a:latin typeface="Times New Roman" panose="02020603050405020304" pitchFamily="18" charset="0"/>
-                        <a:ea typeface="Times New Roman" panose="02020603050405020304" pitchFamily="18" charset="0"/>
-                      </a:endParaRPr>
-                    </a:p>
-                  </a:txBody>
-                  <a:tcPr marL="0" marR="0" marT="0" marB="0" anchor="ctr"/>
-                </a:tc>
-                <a:tc>
-                  <a:txBody>
-                    <a:bodyPr/>
-                    <a:lstStyle/>
-                    <a:p>
-                      <a:pPr marL="39370" marR="25400">
-                        <a:buNone/>
-                      </a:pPr>
-                      <a:r>
-                        <a:rPr lang="ru-RU" sz="1100">
-                          <a:effectLst/>
-                        </a:rPr>
-                        <a:t>9 900</a:t>
-                      </a:r>
-                      <a:endParaRPr lang="ru-RU" sz="1100">
-                        <a:effectLst/>
-                        <a:latin typeface="Times New Roman" panose="02020603050405020304" pitchFamily="18" charset="0"/>
-                        <a:ea typeface="Times New Roman" panose="02020603050405020304" pitchFamily="18" charset="0"/>
-                      </a:endParaRPr>
-                    </a:p>
-                  </a:txBody>
-                  <a:tcPr marL="0" marR="0" marT="0" marB="0" anchor="ctr"/>
-                </a:tc>
-                <a:extLst>
-                  <a:ext uri="{0D108BD9-81ED-4DB2-BD59-A6C34878D82A}">
-                    <a16:rowId xmlns:a16="http://schemas.microsoft.com/office/drawing/2014/main" val="1103749546"/>
-                  </a:ext>
-                </a:extLst>
-              </a:tr>
-              <a:tr h="146406">
-                <a:tc gridSpan="3">
-                  <a:txBody>
-                    <a:bodyPr/>
-                    <a:lstStyle/>
-                    <a:p>
-                      <a:pPr marL="39370" marR="25400">
-                        <a:buNone/>
-                      </a:pPr>
-                      <a:r>
-                        <a:rPr lang="ru-RU" sz="1100">
-                          <a:effectLst/>
-                        </a:rPr>
-                        <a:t>Итого</a:t>
-                      </a:r>
-                      <a:endParaRPr lang="ru-RU" sz="1100">
-                        <a:effectLst/>
-                        <a:latin typeface="Times New Roman" panose="02020603050405020304" pitchFamily="18" charset="0"/>
-                        <a:ea typeface="Times New Roman" panose="02020603050405020304" pitchFamily="18" charset="0"/>
-                      </a:endParaRPr>
-                    </a:p>
-                  </a:txBody>
-                  <a:tcPr marL="0" marR="0" marT="0" marB="0" anchor="ctr"/>
-                </a:tc>
-                <a:tc hMerge="1">
-                  <a:txBody>
-                    <a:bodyPr/>
-                    <a:lstStyle/>
-                    <a:p>
-                      <a:endParaRPr lang="ru-RU"/>
-                    </a:p>
-                  </a:txBody>
-                  <a:tcPr/>
-                </a:tc>
-                <a:tc hMerge="1">
-                  <a:txBody>
-                    <a:bodyPr/>
-                    <a:lstStyle/>
-                    <a:p>
-                      <a:endParaRPr lang="ru-RU"/>
-                    </a:p>
-                  </a:txBody>
-                  <a:tcPr/>
-                </a:tc>
-                <a:tc>
-                  <a:txBody>
-                    <a:bodyPr/>
-                    <a:lstStyle/>
-                    <a:p>
-                      <a:pPr marL="39370" marR="25400">
-                        <a:buNone/>
-                      </a:pPr>
-                      <a:r>
-                        <a:rPr lang="ru-RU" sz="1100">
-                          <a:effectLst/>
-                        </a:rPr>
-                        <a:t>29 898</a:t>
-                      </a:r>
-                      <a:endParaRPr lang="ru-RU" sz="1100">
-                        <a:effectLst/>
-                        <a:latin typeface="Times New Roman" panose="02020603050405020304" pitchFamily="18" charset="0"/>
-                        <a:ea typeface="Times New Roman" panose="02020603050405020304" pitchFamily="18" charset="0"/>
-                      </a:endParaRPr>
-                    </a:p>
-                  </a:txBody>
-                  <a:tcPr marL="0" marR="0" marT="0" marB="0" anchor="ctr"/>
-                </a:tc>
-                <a:extLst>
-                  <a:ext uri="{0D108BD9-81ED-4DB2-BD59-A6C34878D82A}">
-                    <a16:rowId xmlns:a16="http://schemas.microsoft.com/office/drawing/2014/main" val="622956102"/>
-                  </a:ext>
-                </a:extLst>
-              </a:tr>
-              <a:tr h="146406">
-                <a:tc gridSpan="4">
-                  <a:txBody>
-                    <a:bodyPr/>
-                    <a:lstStyle/>
-                    <a:p>
-                      <a:pPr marL="39370" marR="25400">
-                        <a:buNone/>
-                      </a:pPr>
-                      <a:r>
-                        <a:rPr lang="ru-RU" sz="1100">
-                          <a:effectLst/>
-                        </a:rPr>
-                        <a:t>Резерв:</a:t>
-                      </a:r>
-                      <a:endParaRPr lang="ru-RU" sz="1100">
-                        <a:effectLst/>
-                        <a:latin typeface="Times New Roman" panose="02020603050405020304" pitchFamily="18" charset="0"/>
-                        <a:ea typeface="Times New Roman" panose="02020603050405020304" pitchFamily="18" charset="0"/>
-                      </a:endParaRPr>
-                    </a:p>
-                  </a:txBody>
-                  <a:tcPr marL="0" marR="0" marT="0" marB="0" anchor="ctr"/>
-                </a:tc>
-                <a:tc hMerge="1">
-                  <a:txBody>
-                    <a:bodyPr/>
-                    <a:lstStyle/>
-                    <a:p>
-                      <a:endParaRPr lang="ru-RU"/>
-                    </a:p>
-                  </a:txBody>
-                  <a:tcPr/>
-                </a:tc>
-                <a:tc hMerge="1">
-                  <a:txBody>
-                    <a:bodyPr/>
-                    <a:lstStyle/>
-                    <a:p>
-                      <a:endParaRPr lang="ru-RU"/>
-                    </a:p>
-                  </a:txBody>
-                  <a:tcPr/>
-                </a:tc>
-                <a:tc hMerge="1">
-                  <a:txBody>
-                    <a:bodyPr/>
-                    <a:lstStyle/>
-                    <a:p>
-                      <a:endParaRPr lang="ru-RU"/>
-                    </a:p>
-                  </a:txBody>
-                  <a:tcPr/>
-                </a:tc>
-                <a:extLst>
-                  <a:ext uri="{0D108BD9-81ED-4DB2-BD59-A6C34878D82A}">
-                    <a16:rowId xmlns:a16="http://schemas.microsoft.com/office/drawing/2014/main" val="3398912668"/>
-                  </a:ext>
-                </a:extLst>
-              </a:tr>
-              <a:tr h="146406">
-                <a:tc>
-                  <a:txBody>
-                    <a:bodyPr/>
-                    <a:lstStyle/>
-                    <a:p>
-                      <a:pPr marL="65405" marR="25400">
-                        <a:buNone/>
-                      </a:pPr>
-                      <a:r>
-                        <a:rPr lang="ru-RU" sz="1100">
-                          <a:effectLst/>
-                        </a:rPr>
-                        <a:t>Непредвиденные расходы</a:t>
-                      </a:r>
-                      <a:endParaRPr lang="ru-RU" sz="1100">
-                        <a:effectLst/>
-                        <a:latin typeface="Times New Roman" panose="02020603050405020304" pitchFamily="18" charset="0"/>
-                        <a:ea typeface="Times New Roman" panose="02020603050405020304" pitchFamily="18" charset="0"/>
-                      </a:endParaRPr>
-                    </a:p>
-                  </a:txBody>
-                  <a:tcPr marL="0" marR="0" marT="0" marB="0" anchor="ctr"/>
-                </a:tc>
-                <a:tc>
-                  <a:txBody>
-                    <a:bodyPr/>
-                    <a:lstStyle/>
-                    <a:p>
-                      <a:pPr marL="39370" marR="25400">
-                        <a:buNone/>
-                      </a:pPr>
-                      <a:r>
-                        <a:rPr lang="ru-RU" sz="1100">
-                          <a:effectLst/>
-                        </a:rPr>
-                        <a:t> </a:t>
-                      </a:r>
-                      <a:endParaRPr lang="ru-RU" sz="1100">
-                        <a:effectLst/>
-                        <a:latin typeface="Times New Roman" panose="02020603050405020304" pitchFamily="18" charset="0"/>
-                        <a:ea typeface="Times New Roman" panose="02020603050405020304" pitchFamily="18" charset="0"/>
-                      </a:endParaRPr>
-                    </a:p>
-                  </a:txBody>
-                  <a:tcPr marL="0" marR="0" marT="0" marB="0" anchor="ctr"/>
-                </a:tc>
-                <a:tc>
-                  <a:txBody>
-                    <a:bodyPr/>
-                    <a:lstStyle/>
-                    <a:p>
-                      <a:pPr marL="39370" marR="25400">
-                        <a:buNone/>
-                      </a:pPr>
-                      <a:r>
-                        <a:rPr lang="ru-RU" sz="1100">
-                          <a:effectLst/>
-                        </a:rPr>
-                        <a:t> </a:t>
-                      </a:r>
-                      <a:endParaRPr lang="ru-RU" sz="1100">
-                        <a:effectLst/>
-                        <a:latin typeface="Times New Roman" panose="02020603050405020304" pitchFamily="18" charset="0"/>
-                        <a:ea typeface="Times New Roman" panose="02020603050405020304" pitchFamily="18" charset="0"/>
-                      </a:endParaRPr>
-                    </a:p>
-                  </a:txBody>
-                  <a:tcPr marL="0" marR="0" marT="0" marB="0" anchor="ctr"/>
-                </a:tc>
-                <a:tc>
-                  <a:txBody>
-                    <a:bodyPr/>
-                    <a:lstStyle/>
-                    <a:p>
-                      <a:pPr marL="39370" marR="25400">
-                        <a:buNone/>
-                      </a:pPr>
-                      <a:r>
-                        <a:rPr lang="ru-RU" sz="1100">
-                          <a:effectLst/>
-                        </a:rPr>
-                        <a:t>10 000</a:t>
-                      </a:r>
-                      <a:endParaRPr lang="ru-RU" sz="1100">
-                        <a:effectLst/>
-                        <a:latin typeface="Times New Roman" panose="02020603050405020304" pitchFamily="18" charset="0"/>
-                        <a:ea typeface="Times New Roman" panose="02020603050405020304" pitchFamily="18" charset="0"/>
-                      </a:endParaRPr>
-                    </a:p>
-                  </a:txBody>
-                  <a:tcPr marL="0" marR="0" marT="0" marB="0" anchor="ctr"/>
-                </a:tc>
-                <a:extLst>
-                  <a:ext uri="{0D108BD9-81ED-4DB2-BD59-A6C34878D82A}">
-                    <a16:rowId xmlns:a16="http://schemas.microsoft.com/office/drawing/2014/main" val="3383301428"/>
-                  </a:ext>
-                </a:extLst>
-              </a:tr>
-              <a:tr h="146406">
-                <a:tc gridSpan="3">
-                  <a:txBody>
-                    <a:bodyPr/>
-                    <a:lstStyle/>
-                    <a:p>
-                      <a:pPr marL="39370" marR="25400">
-                        <a:buNone/>
-                      </a:pPr>
-                      <a:r>
-                        <a:rPr lang="ru-RU" sz="1100">
-                          <a:effectLst/>
-                        </a:rPr>
-                        <a:t>Итого</a:t>
-                      </a:r>
-                      <a:endParaRPr lang="ru-RU" sz="1100">
-                        <a:effectLst/>
-                        <a:latin typeface="Times New Roman" panose="02020603050405020304" pitchFamily="18" charset="0"/>
-                        <a:ea typeface="Times New Roman" panose="02020603050405020304" pitchFamily="18" charset="0"/>
-                      </a:endParaRPr>
-                    </a:p>
-                  </a:txBody>
-                  <a:tcPr marL="0" marR="0" marT="0" marB="0" anchor="ctr"/>
-                </a:tc>
-                <a:tc hMerge="1">
-                  <a:txBody>
-                    <a:bodyPr/>
-                    <a:lstStyle/>
-                    <a:p>
-                      <a:endParaRPr lang="ru-RU"/>
-                    </a:p>
-                  </a:txBody>
-                  <a:tcPr/>
-                </a:tc>
-                <a:tc hMerge="1">
-                  <a:txBody>
-                    <a:bodyPr/>
-                    <a:lstStyle/>
-                    <a:p>
-                      <a:endParaRPr lang="ru-RU"/>
-                    </a:p>
-                  </a:txBody>
-                  <a:tcPr/>
-                </a:tc>
-                <a:tc>
-                  <a:txBody>
-                    <a:bodyPr/>
-                    <a:lstStyle/>
-                    <a:p>
-                      <a:pPr marL="39370" marR="25400">
-                        <a:buNone/>
-                      </a:pPr>
-                      <a:r>
-                        <a:rPr lang="ru-RU" sz="1100">
-                          <a:effectLst/>
-                        </a:rPr>
-                        <a:t>142 898</a:t>
-                      </a:r>
-                      <a:endParaRPr lang="ru-RU" sz="1100">
-                        <a:effectLst/>
-                        <a:latin typeface="Times New Roman" panose="02020603050405020304" pitchFamily="18" charset="0"/>
-                        <a:ea typeface="Times New Roman" panose="02020603050405020304" pitchFamily="18" charset="0"/>
-                      </a:endParaRPr>
-                    </a:p>
-                  </a:txBody>
-                  <a:tcPr marL="0" marR="0" marT="0" marB="0" anchor="ctr"/>
-                </a:tc>
-                <a:extLst>
-                  <a:ext uri="{0D108BD9-81ED-4DB2-BD59-A6C34878D82A}">
-                    <a16:rowId xmlns:a16="http://schemas.microsoft.com/office/drawing/2014/main" val="3341584369"/>
-                  </a:ext>
-                </a:extLst>
-              </a:tr>
-              <a:tr h="146406">
-                <a:tc gridSpan="3">
-                  <a:txBody>
-                    <a:bodyPr/>
-                    <a:lstStyle/>
-                    <a:p>
-                      <a:pPr marL="39370" marR="25400">
-                        <a:buNone/>
-                      </a:pPr>
-                      <a:r>
-                        <a:rPr lang="ru-RU" sz="1100">
-                          <a:effectLst/>
-                        </a:rPr>
-                        <a:t>Итого без оплаты специалистов</a:t>
-                      </a:r>
-                      <a:endParaRPr lang="ru-RU" sz="1100">
-                        <a:effectLst/>
-                        <a:latin typeface="Times New Roman" panose="02020603050405020304" pitchFamily="18" charset="0"/>
-                        <a:ea typeface="Times New Roman" panose="02020603050405020304" pitchFamily="18" charset="0"/>
-                      </a:endParaRPr>
-                    </a:p>
-                  </a:txBody>
-                  <a:tcPr marL="0" marR="0" marT="0" marB="0" anchor="ctr"/>
-                </a:tc>
-                <a:tc hMerge="1">
-                  <a:txBody>
-                    <a:bodyPr/>
-                    <a:lstStyle/>
-                    <a:p>
-                      <a:endParaRPr lang="ru-RU"/>
-                    </a:p>
-                  </a:txBody>
-                  <a:tcPr/>
-                </a:tc>
-                <a:tc hMerge="1">
-                  <a:txBody>
-                    <a:bodyPr/>
-                    <a:lstStyle/>
-                    <a:p>
-                      <a:endParaRPr lang="ru-RU"/>
-                    </a:p>
-                  </a:txBody>
-                  <a:tcPr/>
-                </a:tc>
-                <a:tc>
-                  <a:txBody>
-                    <a:bodyPr/>
-                    <a:lstStyle/>
-                    <a:p>
-                      <a:pPr marL="39370" marR="25400">
-                        <a:buNone/>
-                      </a:pPr>
-                      <a:r>
-                        <a:rPr lang="ru-RU" sz="1100" dirty="0">
-                          <a:effectLst/>
-                        </a:rPr>
-                        <a:t>59 898</a:t>
-                      </a:r>
-                      <a:endParaRPr lang="ru-RU" sz="1100" dirty="0">
-                        <a:effectLst/>
-                        <a:latin typeface="Times New Roman" panose="02020603050405020304" pitchFamily="18" charset="0"/>
-                        <a:ea typeface="Times New Roman" panose="02020603050405020304" pitchFamily="18" charset="0"/>
-                      </a:endParaRPr>
-                    </a:p>
-                  </a:txBody>
-                  <a:tcPr marL="0" marR="0" marT="0" marB="0" anchor="ctr"/>
-                </a:tc>
-                <a:extLst>
-                  <a:ext uri="{0D108BD9-81ED-4DB2-BD59-A6C34878D82A}">
-                    <a16:rowId xmlns:a16="http://schemas.microsoft.com/office/drawing/2014/main" val="3782180244"/>
-                  </a:ext>
-                </a:extLst>
-              </a:tr>
-            </a:tbl>
-          </a:graphicData>
-        </a:graphic>
-      </p:graphicFrame>
       <p:sp>
         <p:nvSpPr>
           <p:cNvPr id="5" name="Номер слайда 4">
@@ -9012,6 +14625,167 @@
               <a:t>16</a:t>
             </a:fld>
             <a:endParaRPr lang="ru-RU" dirty="0"/>
+          </a:p>
+        </p:txBody>
+      </p:sp>
+      <p:graphicFrame>
+        <p:nvGraphicFramePr>
+          <p:cNvPr id="8" name="Объект 7">
+            <a:extLst>
+              <a:ext uri="{FF2B5EF4-FFF2-40B4-BE49-F238E27FC236}">
+                <a16:creationId xmlns:a16="http://schemas.microsoft.com/office/drawing/2014/main" id="{1CD45BCA-FD8E-03C7-3DE3-77E38F5BB03A}"/>
+              </a:ext>
+            </a:extLst>
+          </p:cNvPr>
+          <p:cNvGraphicFramePr>
+            <a:graphicFrameLocks noGrp="1"/>
+          </p:cNvGraphicFramePr>
+          <p:nvPr>
+            <p:ph sz="half" idx="2"/>
+            <p:extLst>
+              <p:ext uri="{D42A27DB-BD31-4B8C-83A1-F6EECF244321}">
+                <p14:modId xmlns:p14="http://schemas.microsoft.com/office/powerpoint/2010/main" val="153752714"/>
+              </p:ext>
+            </p:extLst>
+          </p:nvPr>
+        </p:nvGraphicFramePr>
+        <p:xfrm>
+          <a:off x="6885211" y="1799973"/>
+          <a:ext cx="4270469" cy="1254863"/>
+        </p:xfrm>
+        <a:graphic>
+          <a:graphicData uri="http://schemas.openxmlformats.org/drawingml/2006/diagram">
+            <dgm:relIds xmlns:dgm="http://schemas.openxmlformats.org/drawingml/2006/diagram" xmlns:r="http://schemas.openxmlformats.org/officeDocument/2006/relationships" r:dm="rId2" r:lo="rId3" r:qs="rId4" r:cs="rId5"/>
+          </a:graphicData>
+        </a:graphic>
+      </p:graphicFrame>
+      <p:graphicFrame>
+        <p:nvGraphicFramePr>
+          <p:cNvPr id="12" name="Объект 7">
+            <a:extLst>
+              <a:ext uri="{FF2B5EF4-FFF2-40B4-BE49-F238E27FC236}">
+                <a16:creationId xmlns:a16="http://schemas.microsoft.com/office/drawing/2014/main" id="{6C24B255-2A45-9341-DCFD-9BAD4ED46992}"/>
+              </a:ext>
+            </a:extLst>
+          </p:cNvPr>
+          <p:cNvGraphicFramePr>
+            <a:graphicFrameLocks/>
+          </p:cNvGraphicFramePr>
+          <p:nvPr>
+            <p:extLst>
+              <p:ext uri="{D42A27DB-BD31-4B8C-83A1-F6EECF244321}">
+                <p14:modId xmlns:p14="http://schemas.microsoft.com/office/powerpoint/2010/main" val="2641377121"/>
+              </p:ext>
+            </p:extLst>
+          </p:nvPr>
+        </p:nvGraphicFramePr>
+        <p:xfrm>
+          <a:off x="6885208" y="4360907"/>
+          <a:ext cx="4270469" cy="1254863"/>
+        </p:xfrm>
+        <a:graphic>
+          <a:graphicData uri="http://schemas.openxmlformats.org/drawingml/2006/diagram">
+            <dgm:relIds xmlns:dgm="http://schemas.openxmlformats.org/drawingml/2006/diagram" xmlns:r="http://schemas.openxmlformats.org/officeDocument/2006/relationships" r:dm="rId7" r:lo="rId8" r:qs="rId9" r:cs="rId10"/>
+          </a:graphicData>
+        </a:graphic>
+      </p:graphicFrame>
+      <p:graphicFrame>
+        <p:nvGraphicFramePr>
+          <p:cNvPr id="13" name="Объект 7">
+            <a:extLst>
+              <a:ext uri="{FF2B5EF4-FFF2-40B4-BE49-F238E27FC236}">
+                <a16:creationId xmlns:a16="http://schemas.microsoft.com/office/drawing/2014/main" id="{F4B443A0-B596-17B5-7688-E40DD6BF78BD}"/>
+              </a:ext>
+            </a:extLst>
+          </p:cNvPr>
+          <p:cNvGraphicFramePr>
+            <a:graphicFrameLocks/>
+          </p:cNvGraphicFramePr>
+          <p:nvPr>
+            <p:extLst>
+              <p:ext uri="{D42A27DB-BD31-4B8C-83A1-F6EECF244321}">
+                <p14:modId xmlns:p14="http://schemas.microsoft.com/office/powerpoint/2010/main" val="2183857467"/>
+              </p:ext>
+            </p:extLst>
+          </p:nvPr>
+        </p:nvGraphicFramePr>
+        <p:xfrm>
+          <a:off x="6885207" y="3043431"/>
+          <a:ext cx="4270469" cy="1254863"/>
+        </p:xfrm>
+        <a:graphic>
+          <a:graphicData uri="http://schemas.openxmlformats.org/drawingml/2006/diagram">
+            <dgm:relIds xmlns:dgm="http://schemas.openxmlformats.org/drawingml/2006/diagram" xmlns:r="http://schemas.openxmlformats.org/officeDocument/2006/relationships" r:dm="rId12" r:lo="rId13" r:qs="rId14" r:cs="rId15"/>
+          </a:graphicData>
+        </a:graphic>
+      </p:graphicFrame>
+      <p:sp>
+        <p:nvSpPr>
+          <p:cNvPr id="19" name="TextBox 18">
+            <a:extLst>
+              <a:ext uri="{FF2B5EF4-FFF2-40B4-BE49-F238E27FC236}">
+                <a16:creationId xmlns:a16="http://schemas.microsoft.com/office/drawing/2014/main" id="{9150A9C4-BD35-75CD-2681-987DB0104716}"/>
+              </a:ext>
+            </a:extLst>
+          </p:cNvPr>
+          <p:cNvSpPr txBox="1"/>
+          <p:nvPr/>
+        </p:nvSpPr>
+        <p:spPr>
+          <a:xfrm>
+            <a:off x="6885209" y="5657286"/>
+            <a:ext cx="4270469" cy="369332"/>
+          </a:xfrm>
+          <a:prstGeom prst="rect">
+            <a:avLst/>
+          </a:prstGeom>
+          <a:noFill/>
+        </p:spPr>
+        <p:txBody>
+          <a:bodyPr wrap="square">
+            <a:spAutoFit/>
+          </a:bodyPr>
+          <a:lstStyle/>
+          <a:p>
+            <a:pPr marL="91440" marR="0" lvl="0" indent="-91440" algn="ctr" defTabSz="914400" rtl="0" eaLnBrk="1" fontAlgn="auto" latinLnBrk="0" hangingPunct="1">
+              <a:lnSpc>
+                <a:spcPct val="90000"/>
+              </a:lnSpc>
+              <a:spcBef>
+                <a:spcPts val="1200"/>
+              </a:spcBef>
+              <a:spcAft>
+                <a:spcPts val="200"/>
+              </a:spcAft>
+              <a:buClr>
+                <a:srgbClr val="92278F"/>
+              </a:buClr>
+              <a:buSzPct val="100000"/>
+              <a:buFont typeface="Calibri" panose="020F0502020204030204" pitchFamily="34" charset="0"/>
+              <a:buChar char=" "/>
+              <a:tabLst/>
+              <a:defRPr/>
+            </a:pPr>
+            <a:r>
+              <a:rPr kumimoji="0" lang="ru-RU" sz="2000" b="0" i="0" u="none" strike="noStrike" kern="1200" cap="none" spc="0" normalizeH="0" baseline="0" noProof="0" dirty="0">
+                <a:ln>
+                  <a:noFill/>
+                </a:ln>
+                <a:solidFill>
+                  <a:prstClr val="black">
+                    <a:lumMod val="75000"/>
+                    <a:lumOff val="25000"/>
+                  </a:prstClr>
+                </a:solidFill>
+                <a:effectLst/>
+                <a:uLnTx/>
+                <a:uFillTx/>
+                <a:latin typeface="Calibri" panose="020F0502020204030204"/>
+                <a:ea typeface="+mn-ea"/>
+                <a:cs typeface="+mn-cs"/>
+              </a:rPr>
+              <a:t>Риски и их решения</a:t>
+            </a:r>
           </a:p>
         </p:txBody>
       </p:sp>
@@ -9089,51 +14863,110 @@
             <p:ph idx="1"/>
           </p:nvPr>
         </p:nvSpPr>
-        <p:spPr/>
+        <p:spPr>
+          <a:xfrm>
+            <a:off x="1224091" y="1863664"/>
+            <a:ext cx="6575204" cy="4402666"/>
+          </a:xfrm>
+        </p:spPr>
         <p:txBody>
           <a:bodyPr>
-            <a:normAutofit fontScale="92500"/>
+            <a:noAutofit/>
           </a:bodyPr>
           <a:lstStyle/>
           <a:p>
-            <a:r>
-              <a:rPr lang="ru-RU" sz="2400" dirty="0"/>
-              <a:t>В выпускной квалификационной работе разработан и внедрён модуль персонализированных рекомендаций и поиска визуально похожих произведений для информационной системы «Арт-галерея». Модуль повышает вовлечённость пользователей за счёт адаптации контента под их предпочтения.</a:t>
-            </a:r>
-          </a:p>
-          <a:p>
-            <a:r>
-              <a:rPr lang="ru-RU" sz="2400" dirty="0"/>
+            <a:pPr>
+              <a:spcBef>
+                <a:spcPts val="600"/>
+              </a:spcBef>
+            </a:pPr>
+            <a:r>
+              <a:rPr lang="ru-RU" sz="1600" dirty="0"/>
               <a:t>Практическая ценность: готовый продукт для арт-пространств и образовательных учреждений. Гибридный подход и </a:t>
             </a:r>
             <a:r>
-              <a:rPr lang="ru-RU" sz="2400" dirty="0" err="1"/>
+              <a:rPr lang="ru-RU" sz="1600" dirty="0" err="1"/>
               <a:t>OpenCLIP</a:t>
             </a:r>
             <a:r>
-              <a:rPr lang="ru-RU" sz="2400" dirty="0"/>
+              <a:rPr lang="ru-RU" sz="1600" dirty="0"/>
               <a:t> применимы в смежных проектах.</a:t>
             </a:r>
-            <a:endParaRPr lang="en-US" sz="2400" dirty="0"/>
-          </a:p>
-          <a:p>
-            <a:r>
-              <a:rPr lang="ru-RU" sz="2400" dirty="0"/>
+            <a:endParaRPr lang="en-US" sz="1600" dirty="0"/>
+          </a:p>
+          <a:p>
+            <a:pPr>
+              <a:spcBef>
+                <a:spcPts val="600"/>
+              </a:spcBef>
+            </a:pPr>
+            <a:r>
+              <a:rPr lang="ru-RU" sz="1600" dirty="0"/>
               <a:t>Направления развития: переход к постоянно работающему Python-серверу, кэширование, расширение меток для </a:t>
             </a:r>
             <a:r>
-              <a:rPr lang="ru-RU" sz="2400" dirty="0" err="1"/>
+              <a:rPr lang="ru-RU" sz="1600" dirty="0" err="1"/>
               <a:t>OpenCLIP</a:t>
             </a:r>
             <a:r>
-              <a:rPr lang="ru-RU" sz="2400" dirty="0"/>
+              <a:rPr lang="ru-RU" sz="1600" dirty="0"/>
               <a:t>, улучшение метрик, внедрение A/B-тестирования.</a:t>
             </a:r>
           </a:p>
           <a:p>
-            <a:r>
-              <a:rPr lang="ru-RU" sz="2400" dirty="0"/>
+            <a:pPr>
+              <a:spcBef>
+                <a:spcPts val="600"/>
+              </a:spcBef>
+            </a:pPr>
+            <a:r>
+              <a:rPr lang="ru-RU" sz="1600" dirty="0"/>
               <a:t>Система работоспособна и имеет потенциал для дальнейшего развития.</a:t>
+            </a:r>
+          </a:p>
+          <a:p>
+            <a:pPr>
+              <a:spcBef>
+                <a:spcPts val="600"/>
+              </a:spcBef>
+            </a:pPr>
+            <a:r>
+              <a:rPr lang="ru-RU" sz="1600" dirty="0"/>
+              <a:t>Статьи: </a:t>
+            </a:r>
+          </a:p>
+          <a:p>
+            <a:pPr marL="457200" indent="-457200">
+              <a:spcBef>
+                <a:spcPts val="600"/>
+              </a:spcBef>
+              <a:buFont typeface="+mj-lt"/>
+              <a:buAutoNum type="arabicPeriod"/>
+            </a:pPr>
+            <a:r>
+              <a:rPr lang="ru-RU" sz="1600" dirty="0"/>
+              <a:t>Шутова, Т. Е. Разработка рекомендательных систем с применением методов машинного обучения на примере информационной системы арт-галереи / Т.Е. Шутова, В.В. Вершинин // Сборник материалов научно-практических конференций </a:t>
+            </a:r>
+            <a:r>
+              <a:rPr lang="ru-RU" sz="1600" dirty="0" err="1"/>
+              <a:t>ВлГУ</a:t>
+            </a:r>
+            <a:r>
+              <a:rPr lang="ru-RU" sz="1600" dirty="0"/>
+              <a:t>. — 2026. (Принято к публикации)</a:t>
+            </a:r>
+          </a:p>
+          <a:p>
+            <a:pPr marL="457200" indent="-457200">
+              <a:spcBef>
+                <a:spcPts val="600"/>
+              </a:spcBef>
+              <a:buFont typeface="+mj-lt"/>
+              <a:buAutoNum type="arabicPeriod"/>
+            </a:pPr>
+            <a:r>
+              <a:rPr lang="ru-RU" sz="1600" dirty="0"/>
+              <a:t>Шутова, Т. Е. Интеграция модуля машинного обучения на основе коллаборативной и контентной фильтрации в веб-приложение / Т.Е. Шутова, М.И. Озерова // Сборник материалов III Международного форума «ИТ. НАУКА. КРЕАТИВ». — 2026. (Принято к публикации)</a:t>
             </a:r>
           </a:p>
         </p:txBody>
@@ -9168,6 +15001,42 @@
           </a:p>
         </p:txBody>
       </p:sp>
+      <p:pic>
+        <p:nvPicPr>
+          <p:cNvPr id="6" name="Рисунок 5">
+            <a:extLst>
+              <a:ext uri="{FF2B5EF4-FFF2-40B4-BE49-F238E27FC236}">
+                <a16:creationId xmlns:a16="http://schemas.microsoft.com/office/drawing/2014/main" id="{BE99E426-1A45-B414-B00B-9BA13779529D}"/>
+              </a:ext>
+            </a:extLst>
+          </p:cNvPr>
+          <p:cNvPicPr>
+            <a:picLocks noChangeAspect="1"/>
+          </p:cNvPicPr>
+          <p:nvPr/>
+        </p:nvPicPr>
+        <p:blipFill>
+          <a:blip r:embed="rId2">
+            <a:extLst>
+              <a:ext uri="{28A0092B-C50C-407E-A947-70E740481C1C}">
+                <a14:useLocalDpi xmlns:a14="http://schemas.microsoft.com/office/drawing/2010/main" val="0"/>
+              </a:ext>
+            </a:extLst>
+          </a:blip>
+          <a:stretch>
+            <a:fillRect/>
+          </a:stretch>
+        </p:blipFill>
+        <p:spPr>
+          <a:xfrm>
+            <a:off x="8194977" y="1863664"/>
+            <a:ext cx="2960703" cy="4187280"/>
+          </a:xfrm>
+          <a:prstGeom prst="rect">
+            <a:avLst/>
+          </a:prstGeom>
+        </p:spPr>
+      </p:pic>
     </p:spTree>
     <p:extLst>
       <p:ext uri="{BB962C8B-B14F-4D97-AF65-F5344CB8AC3E}">
@@ -9245,31 +15114,31 @@
         <p:spPr/>
         <p:txBody>
           <a:bodyPr>
-            <a:normAutofit fontScale="92500" lnSpcReduction="20000"/>
+            <a:normAutofit/>
           </a:bodyPr>
           <a:lstStyle/>
           <a:p>
             <a:r>
-              <a:rPr lang="ru-RU" sz="2400" dirty="0"/>
-              <a:t>В рамках выпускной квалификационной работы разработана информационная система для цифровой арт-галереи. ВКР включает анализ предметной области, проектирование архитектуры и реализацию серверной части с модулем интеллектуальных рекомендаций. </a:t>
-            </a:r>
-          </a:p>
-          <a:p>
-            <a:r>
-              <a:rPr lang="ru-RU" sz="2400" dirty="0"/>
-              <a:t>Система обеспечивает публикацию и каталогизацию произведений искусства, управление профилями и выставками, а также персонализированные рекомендации на основе гибридного алгоритма машинного обучения (коллаборативная фильтрация SVD и контентная фильтрация TF-IDF) и сервиса поиска визуально похожих изображений. </a:t>
-            </a:r>
-          </a:p>
-          <a:p>
-            <a:r>
-              <a:rPr lang="ru-RU" sz="2400" dirty="0"/>
-              <a:t>Модуль интегрирован в Java-приложение через Python-скрипты. Особое внимание уделено оптимизации серверных компонентов для высокой производительности и безопасности. </a:t>
-            </a:r>
-          </a:p>
-          <a:p>
-            <a:r>
-              <a:rPr lang="ru-RU" sz="2400" dirty="0"/>
-              <a:t>Результат — готовое решение для арт-пространств, расширяющее аудиторию и улучшающее представление произведений в цифровой среде.</a:t>
+              <a:rPr lang="ru-RU" dirty="0"/>
+              <a:t>Арт-галереи нуждаются в онлайн-платформе, учитывающей специфику художественного контента и предлагающей персонализированный подход. </a:t>
+            </a:r>
+          </a:p>
+          <a:p>
+            <a:r>
+              <a:rPr lang="ru-RU" dirty="0"/>
+              <a:t>Для повышения вовлечённости требуется модуль рекомендаций на основе данных о взаимодействиях с произведениями искусства. </a:t>
+            </a:r>
+          </a:p>
+          <a:p>
+            <a:r>
+              <a:rPr lang="ru-RU" dirty="0"/>
+              <a:t>Проект важен для цифровизации культуры, автоматизируя управление контентом и пользователями через интеллектуальные рекомендации на основе машинного обучения. Это увеличивает вовлеченность и время пребывания посетителей. </a:t>
+            </a:r>
+          </a:p>
+          <a:p>
+            <a:r>
+              <a:rPr lang="ru-RU" dirty="0"/>
+              <a:t>С технической стороны проект включает интеграцию гибридного алгоритма на основе машинного обучения с высоконагруженной серверной части на Java Spring MVC, предлагая воспроизводимые архитектурные решения.</a:t>
             </a:r>
           </a:p>
         </p:txBody>
@@ -11907,7 +17776,7 @@
           </p:nvPr>
         </p:nvPicPr>
         <p:blipFill>
-          <a:blip r:embed="rId3" cstate="print">
+          <a:blip r:embed="rId3">
             <a:extLst>
               <a:ext uri="{28A0092B-C50C-407E-A947-70E740481C1C}">
                 <a14:useLocalDpi xmlns:a14="http://schemas.microsoft.com/office/drawing/2010/main" val="0"/>
@@ -11915,9 +17784,7 @@
             </a:extLst>
           </a:blip>
           <a:srcRect/>
-          <a:stretch>
-            <a:fillRect/>
-          </a:stretch>
+          <a:stretch/>
         </p:blipFill>
         <p:spPr bwMode="auto">
           <a:xfrm>
@@ -12014,7 +17881,7 @@
           <a:p>
             <a:r>
               <a:rPr lang="ru-RU" dirty="0"/>
-              <a:t>Новые действия:</a:t>
+              <a:t>Действия, связанные с модулем:</a:t>
             </a:r>
           </a:p>
           <a:p>

--- a/Документы/ШутоваТЕ_ВКР_Презентация.pptx
+++ b/Документы/ШутоваТЕ_ВКР_Презентация.pptx
@@ -7359,7 +7359,7 @@
           <a:p>
             <a:fld id="{E51947FD-A716-4211-B699-A6B086DF38C3}" type="datetimeFigureOut">
               <a:rPr lang="ru-RU" smtClean="0"/>
-              <a:t>05.06.2026</a:t>
+              <a:t>21.06.2026</a:t>
             </a:fld>
             <a:endParaRPr lang="ru-RU"/>
           </a:p>
@@ -8104,7 +8104,7 @@
           <a:p>
             <a:fld id="{5888CCF1-2E77-4A64-BE02-C09C5E2EF7D6}" type="datetime1">
               <a:rPr lang="ru-RU" smtClean="0"/>
-              <a:t>05.06.2026</a:t>
+              <a:t>21.06.2026</a:t>
             </a:fld>
             <a:endParaRPr lang="ru-RU"/>
           </a:p>
@@ -8312,7 +8312,7 @@
           <a:p>
             <a:fld id="{DFB2E66F-F12B-4C89-AC80-BE33EC31B25F}" type="datetime1">
               <a:rPr lang="ru-RU" smtClean="0"/>
-              <a:t>05.06.2026</a:t>
+              <a:t>21.06.2026</a:t>
             </a:fld>
             <a:endParaRPr lang="ru-RU"/>
           </a:p>
@@ -8568,7 +8568,7 @@
           <a:p>
             <a:fld id="{8B8344DE-D35A-4CDF-86CF-34C99E2DD5D4}" type="datetime1">
               <a:rPr lang="ru-RU" smtClean="0"/>
-              <a:t>05.06.2026</a:t>
+              <a:t>21.06.2026</a:t>
             </a:fld>
             <a:endParaRPr lang="ru-RU"/>
           </a:p>
@@ -8742,7 +8742,7 @@
           <a:p>
             <a:fld id="{5E532B67-2CD8-4589-92DA-D7A9F79848EC}" type="datetime1">
               <a:rPr lang="ru-RU" smtClean="0"/>
-              <a:t>05.06.2026</a:t>
+              <a:t>21.06.2026</a:t>
             </a:fld>
             <a:endParaRPr lang="ru-RU"/>
           </a:p>
@@ -9090,7 +9090,7 @@
           <a:p>
             <a:fld id="{EF32369D-8065-4D88-B6A2-4381169300B4}" type="datetime1">
               <a:rPr lang="ru-RU" smtClean="0"/>
-              <a:t>05.06.2026</a:t>
+              <a:t>21.06.2026</a:t>
             </a:fld>
             <a:endParaRPr lang="ru-RU"/>
           </a:p>
@@ -9370,7 +9370,7 @@
           <a:p>
             <a:fld id="{3DD98903-934B-48B1-B309-7133B8C2317F}" type="datetime1">
               <a:rPr lang="ru-RU" smtClean="0"/>
-              <a:t>05.06.2026</a:t>
+              <a:t>21.06.2026</a:t>
             </a:fld>
             <a:endParaRPr lang="ru-RU"/>
           </a:p>
@@ -9754,7 +9754,7 @@
           <a:p>
             <a:fld id="{63A0CEC3-8E6A-4101-BD09-1EDEBE0AD976}" type="datetime1">
               <a:rPr lang="ru-RU" smtClean="0"/>
-              <a:t>05.06.2026</a:t>
+              <a:t>21.06.2026</a:t>
             </a:fld>
             <a:endParaRPr lang="ru-RU"/>
           </a:p>
@@ -9872,7 +9872,7 @@
           <a:p>
             <a:fld id="{5677ECA8-7729-43DA-9049-C18FF7AF25A0}" type="datetime1">
               <a:rPr lang="ru-RU" smtClean="0"/>
-              <a:t>05.06.2026</a:t>
+              <a:t>21.06.2026</a:t>
             </a:fld>
             <a:endParaRPr lang="ru-RU"/>
           </a:p>
@@ -10043,7 +10043,7 @@
           <a:p>
             <a:fld id="{30D20CC8-A20C-4249-A4FF-9317780A4016}" type="datetime1">
               <a:rPr lang="ru-RU" smtClean="0"/>
-              <a:t>05.06.2026</a:t>
+              <a:t>21.06.2026</a:t>
             </a:fld>
             <a:endParaRPr lang="ru-RU"/>
           </a:p>
@@ -10397,7 +10397,7 @@
           <a:p>
             <a:fld id="{03F4CBAE-B1F8-40CB-AD59-6F3058F975C3}" type="datetime1">
               <a:rPr lang="ru-RU" smtClean="0"/>
-              <a:t>05.06.2026</a:t>
+              <a:t>21.06.2026</a:t>
             </a:fld>
             <a:endParaRPr lang="ru-RU"/>
           </a:p>
@@ -10779,7 +10779,7 @@
           <a:p>
             <a:fld id="{52391FD1-542C-4091-A7C0-C725AC3A2669}" type="datetime1">
               <a:rPr lang="ru-RU" smtClean="0"/>
-              <a:t>05.06.2026</a:t>
+              <a:t>21.06.2026</a:t>
             </a:fld>
             <a:endParaRPr lang="ru-RU"/>
           </a:p>
@@ -11066,7 +11066,7 @@
           <a:p>
             <a:fld id="{EC59E107-6F98-4091-AB69-2D0030021222}" type="datetime1">
               <a:rPr lang="ru-RU" smtClean="0"/>
-              <a:t>05.06.2026</a:t>
+              <a:t>21.06.2026</a:t>
             </a:fld>
             <a:endParaRPr lang="ru-RU"/>
           </a:p>
@@ -12023,18 +12023,20 @@
         </p:nvSpPr>
         <p:spPr/>
         <p:txBody>
-          <a:bodyPr/>
+          <a:bodyPr>
+            <a:normAutofit/>
+          </a:bodyPr>
           <a:lstStyle/>
           <a:p>
             <a:r>
-              <a:rPr lang="ru-RU" dirty="0"/>
-              <a:t>Математическая модель персонализированных рекомендаций</a:t>
+              <a:rPr lang="ru-RU" sz="4400" dirty="0"/>
+              <a:t>Математическая модель рекомендаций</a:t>
             </a:r>
           </a:p>
         </p:txBody>
       </p:sp>
-      <mc:AlternateContent xmlns:mc="http://schemas.openxmlformats.org/markup-compatibility/2006" xmlns:a14="http://schemas.microsoft.com/office/drawing/2010/main">
-        <mc:Choice Requires="a14">
+      <mc:AlternateContent xmlns:mc="http://schemas.openxmlformats.org/markup-compatibility/2006">
+        <mc:Choice xmlns:a14="http://schemas.microsoft.com/office/drawing/2010/main" Requires="a14">
           <p:sp>
             <p:nvSpPr>
               <p:cNvPr id="7" name="Объект 6">
@@ -12048,72 +12050,62 @@
                 <a:spLocks noGrp="1"/>
               </p:cNvSpPr>
               <p:nvPr>
-                <p:ph idx="1"/>
+                <p:ph sz="half" idx="1"/>
               </p:nvPr>
             </p:nvSpPr>
-            <p:spPr/>
+            <p:spPr>
+              <a:xfrm>
+                <a:off x="717176" y="1845734"/>
+                <a:ext cx="5317863" cy="4023360"/>
+              </a:xfrm>
+            </p:spPr>
             <p:txBody>
               <a:bodyPr>
-                <a:normAutofit/>
+                <a:noAutofit/>
               </a:bodyPr>
               <a:lstStyle/>
               <a:p>
-                <a:pPr marL="1346200" indent="-1346200"/>
-                <a:endParaRPr lang="ru-RU" sz="2400" i="1" dirty="0"/>
+                <a:pPr marL="179388" indent="-179388"/>
+                <a:r>
+                  <a:rPr lang="ru-RU" dirty="0">
+                    <a:solidFill>
+                      <a:schemeClr val="tx1">
+                        <a:lumMod val="85000"/>
+                        <a:lumOff val="15000"/>
+                      </a:schemeClr>
+                    </a:solidFill>
+                  </a:rPr>
+                  <a:t>Формула гибридных рекомендаций:</a:t>
+                </a:r>
               </a:p>
               <a:p>
-                <a:pPr marL="1346200" indent="-1346200"/>
+                <a:pPr marL="179388" indent="-179388">
+                  <a:lnSpc>
+                    <a:spcPct val="100000"/>
+                  </a:lnSpc>
+                </a:pPr>
                 <a14:m>
                   <m:oMath xmlns:m="http://schemas.openxmlformats.org/officeDocument/2006/math">
                     <m:r>
-                      <a:rPr lang="ru-RU" sz="2400" i="1">
-                        <a:latin typeface="Cambria Math" panose="02040503050406030204" pitchFamily="18" charset="0"/>
-                      </a:rPr>
-                      <m:t>𝑠𝑐𝑜𝑟𝑒</m:t>
-                    </m:r>
-                    <m:d>
-                      <m:dPr>
-                        <m:ctrlPr>
-                          <a:rPr lang="ru-RU" sz="2400" i="1">
-                            <a:latin typeface="Cambria Math" panose="02040503050406030204" pitchFamily="18" charset="0"/>
-                          </a:rPr>
-                        </m:ctrlPr>
-                      </m:dPr>
-                      <m:e>
-                        <m:r>
-                          <a:rPr lang="ru-RU" sz="2400" i="1">
-                            <a:latin typeface="Cambria Math" panose="02040503050406030204" pitchFamily="18" charset="0"/>
-                          </a:rPr>
-                          <m:t>𝑢</m:t>
-                        </m:r>
-                        <m:r>
-                          <a:rPr lang="ru-RU" sz="2400">
-                            <a:latin typeface="Cambria Math" panose="02040503050406030204" pitchFamily="18" charset="0"/>
-                          </a:rPr>
-                          <m:t>, </m:t>
-                        </m:r>
-                        <m:r>
-                          <a:rPr lang="ru-RU" sz="2400" i="1">
-                            <a:latin typeface="Cambria Math" panose="02040503050406030204" pitchFamily="18" charset="0"/>
-                          </a:rPr>
-                          <m:t>𝑖</m:t>
-                        </m:r>
-                      </m:e>
-                    </m:d>
-                    <m:r>
-                      <a:rPr lang="ru-RU" sz="2400">
-                        <a:latin typeface="Cambria Math" panose="02040503050406030204" pitchFamily="18" charset="0"/>
-                      </a:rPr>
-                      <m:t>= </m:t>
-                    </m:r>
-                    <m:r>
-                      <a:rPr lang="ru-RU" sz="2400" i="1">
+                      <a:rPr lang="ru-RU" i="1">
+                        <a:solidFill>
+                          <a:schemeClr val="tx1">
+                            <a:lumMod val="85000"/>
+                            <a:lumOff val="15000"/>
+                          </a:schemeClr>
+                        </a:solidFill>
                         <a:latin typeface="Cambria Math" panose="02040503050406030204" pitchFamily="18" charset="0"/>
                       </a:rPr>
                       <m:t>𝛼</m:t>
                     </m:r>
                     <m:r>
-                      <a:rPr lang="ru-RU" sz="2400">
+                      <a:rPr lang="ru-RU">
+                        <a:solidFill>
+                          <a:schemeClr val="tx1">
+                            <a:lumMod val="85000"/>
+                            <a:lumOff val="15000"/>
+                          </a:schemeClr>
+                        </a:solidFill>
                         <a:latin typeface="Cambria Math" panose="02040503050406030204" pitchFamily="18" charset="0"/>
                       </a:rPr>
                       <m:t>∗ </m:t>
@@ -12121,7 +12113,13 @@
                     <m:f>
                       <m:fPr>
                         <m:ctrlPr>
-                          <a:rPr lang="ru-RU" sz="2400" i="1">
+                          <a:rPr lang="ru-RU" i="1">
+                            <a:solidFill>
+                              <a:schemeClr val="tx1">
+                                <a:lumMod val="85000"/>
+                                <a:lumOff val="15000"/>
+                              </a:schemeClr>
+                            </a:solidFill>
                             <a:latin typeface="Cambria Math" panose="02040503050406030204" pitchFamily="18" charset="0"/>
                           </a:rPr>
                         </m:ctrlPr>
@@ -12130,14 +12128,26 @@
                         <m:sSub>
                           <m:sSubPr>
                             <m:ctrlPr>
-                              <a:rPr lang="ru-RU" sz="2400" i="1">
+                              <a:rPr lang="ru-RU" i="1">
+                                <a:solidFill>
+                                  <a:schemeClr val="tx1">
+                                    <a:lumMod val="85000"/>
+                                    <a:lumOff val="15000"/>
+                                  </a:schemeClr>
+                                </a:solidFill>
                                 <a:latin typeface="Cambria Math" panose="02040503050406030204" pitchFamily="18" charset="0"/>
                               </a:rPr>
                             </m:ctrlPr>
                           </m:sSubPr>
                           <m:e>
                             <m:r>
-                              <a:rPr lang="ru-RU" sz="2400" i="1">
+                              <a:rPr lang="ru-RU" i="1">
+                                <a:solidFill>
+                                  <a:schemeClr val="tx1">
+                                    <a:lumMod val="85000"/>
+                                    <a:lumOff val="15000"/>
+                                  </a:schemeClr>
+                                </a:solidFill>
                                 <a:latin typeface="Cambria Math" panose="02040503050406030204" pitchFamily="18" charset="0"/>
                               </a:rPr>
                               <m:t>𝑟</m:t>
@@ -12145,7 +12155,13 @@
                           </m:e>
                           <m:sub>
                             <m:r>
-                              <a:rPr lang="ru-RU" sz="2400" i="1">
+                              <a:rPr lang="ru-RU" i="1">
+                                <a:solidFill>
+                                  <a:schemeClr val="tx1">
+                                    <a:lumMod val="85000"/>
+                                    <a:lumOff val="15000"/>
+                                  </a:schemeClr>
+                                </a:solidFill>
                                 <a:latin typeface="Cambria Math" panose="02040503050406030204" pitchFamily="18" charset="0"/>
                               </a:rPr>
                               <m:t>𝑢𝑖</m:t>
@@ -12157,14 +12173,26 @@
                         <m:sSub>
                           <m:sSubPr>
                             <m:ctrlPr>
-                              <a:rPr lang="ru-RU" sz="2400" i="1">
+                              <a:rPr lang="ru-RU" i="1">
+                                <a:solidFill>
+                                  <a:schemeClr val="tx1">
+                                    <a:lumMod val="85000"/>
+                                    <a:lumOff val="15000"/>
+                                  </a:schemeClr>
+                                </a:solidFill>
                                 <a:latin typeface="Cambria Math" panose="02040503050406030204" pitchFamily="18" charset="0"/>
                               </a:rPr>
                             </m:ctrlPr>
                           </m:sSubPr>
                           <m:e>
                             <m:r>
-                              <a:rPr lang="ru-RU" sz="2400" i="1">
+                              <a:rPr lang="ru-RU" i="1">
+                                <a:solidFill>
+                                  <a:schemeClr val="tx1">
+                                    <a:lumMod val="85000"/>
+                                    <a:lumOff val="15000"/>
+                                  </a:schemeClr>
+                                </a:solidFill>
                                 <a:latin typeface="Cambria Math" panose="02040503050406030204" pitchFamily="18" charset="0"/>
                               </a:rPr>
                               <m:t>𝑚𝑎𝑥</m:t>
@@ -12172,7 +12200,13 @@
                           </m:e>
                           <m:sub>
                             <m:r>
-                              <a:rPr lang="ru-RU" sz="2400" i="1">
+                              <a:rPr lang="ru-RU" i="1">
+                                <a:solidFill>
+                                  <a:schemeClr val="tx1">
+                                    <a:lumMod val="85000"/>
+                                    <a:lumOff val="15000"/>
+                                  </a:schemeClr>
+                                </a:solidFill>
                                 <a:latin typeface="Cambria Math" panose="02040503050406030204" pitchFamily="18" charset="0"/>
                               </a:rPr>
                               <m:t>𝑗</m:t>
@@ -12182,14 +12216,26 @@
                         <m:sSub>
                           <m:sSubPr>
                             <m:ctrlPr>
-                              <a:rPr lang="ru-RU" sz="2400" i="1">
+                              <a:rPr lang="ru-RU" i="1">
+                                <a:solidFill>
+                                  <a:schemeClr val="tx1">
+                                    <a:lumMod val="85000"/>
+                                    <a:lumOff val="15000"/>
+                                  </a:schemeClr>
+                                </a:solidFill>
                                 <a:latin typeface="Cambria Math" panose="02040503050406030204" pitchFamily="18" charset="0"/>
                               </a:rPr>
                             </m:ctrlPr>
                           </m:sSubPr>
                           <m:e>
                             <m:r>
-                              <a:rPr lang="ru-RU" sz="2400" i="1">
+                              <a:rPr lang="ru-RU" i="1">
+                                <a:solidFill>
+                                  <a:schemeClr val="tx1">
+                                    <a:lumMod val="85000"/>
+                                    <a:lumOff val="15000"/>
+                                  </a:schemeClr>
+                                </a:solidFill>
                                 <a:latin typeface="Cambria Math" panose="02040503050406030204" pitchFamily="18" charset="0"/>
                               </a:rPr>
                               <m:t>𝑟</m:t>
@@ -12197,7 +12243,13 @@
                           </m:e>
                           <m:sub>
                             <m:r>
-                              <a:rPr lang="ru-RU" sz="2400" i="1">
+                              <a:rPr lang="ru-RU" i="1">
+                                <a:solidFill>
+                                  <a:schemeClr val="tx1">
+                                    <a:lumMod val="85000"/>
+                                    <a:lumOff val="15000"/>
+                                  </a:schemeClr>
+                                </a:solidFill>
                                 <a:latin typeface="Cambria Math" panose="02040503050406030204" pitchFamily="18" charset="0"/>
                               </a:rPr>
                               <m:t>𝑢𝑗</m:t>
@@ -12207,7 +12259,13 @@
                       </m:den>
                     </m:f>
                     <m:r>
-                      <a:rPr lang="ru-RU" sz="2400">
+                      <a:rPr lang="ru-RU">
+                        <a:solidFill>
+                          <a:schemeClr val="tx1">
+                            <a:lumMod val="85000"/>
+                            <a:lumOff val="15000"/>
+                          </a:schemeClr>
+                        </a:solidFill>
                         <a:latin typeface="Cambria Math" panose="02040503050406030204" pitchFamily="18" charset="0"/>
                       </a:rPr>
                       <m:t>+</m:t>
@@ -12215,20 +12273,38 @@
                     <m:d>
                       <m:dPr>
                         <m:ctrlPr>
-                          <a:rPr lang="ru-RU" sz="2400">
+                          <a:rPr lang="ru-RU">
+                            <a:solidFill>
+                              <a:schemeClr val="tx1">
+                                <a:lumMod val="85000"/>
+                                <a:lumOff val="15000"/>
+                              </a:schemeClr>
+                            </a:solidFill>
                             <a:latin typeface="Cambria Math" panose="02040503050406030204" pitchFamily="18" charset="0"/>
                           </a:rPr>
                         </m:ctrlPr>
                       </m:dPr>
                       <m:e>
                         <m:r>
-                          <a:rPr lang="ru-RU" sz="2400">
+                          <a:rPr lang="ru-RU">
+                            <a:solidFill>
+                              <a:schemeClr val="tx1">
+                                <a:lumMod val="85000"/>
+                                <a:lumOff val="15000"/>
+                              </a:schemeClr>
+                            </a:solidFill>
                             <a:latin typeface="Cambria Math" panose="02040503050406030204" pitchFamily="18" charset="0"/>
                           </a:rPr>
                           <m:t>1− </m:t>
                         </m:r>
                         <m:r>
-                          <a:rPr lang="ru-RU" sz="2400" i="1">
+                          <a:rPr lang="ru-RU" i="1">
+                            <a:solidFill>
+                              <a:schemeClr val="tx1">
+                                <a:lumMod val="85000"/>
+                                <a:lumOff val="15000"/>
+                              </a:schemeClr>
+                            </a:solidFill>
                             <a:latin typeface="Cambria Math" panose="02040503050406030204" pitchFamily="18" charset="0"/>
                           </a:rPr>
                           <m:t>𝛼</m:t>
@@ -12236,7 +12312,13 @@
                       </m:e>
                     </m:d>
                     <m:r>
-                      <a:rPr lang="ru-RU" sz="2400">
+                      <a:rPr lang="ru-RU">
+                        <a:solidFill>
+                          <a:schemeClr val="tx1">
+                            <a:lumMod val="85000"/>
+                            <a:lumOff val="15000"/>
+                          </a:schemeClr>
+                        </a:solidFill>
                         <a:latin typeface="Cambria Math" panose="02040503050406030204" pitchFamily="18" charset="0"/>
                       </a:rPr>
                       <m:t>∗ </m:t>
@@ -12244,7 +12326,13 @@
                     <m:f>
                       <m:fPr>
                         <m:ctrlPr>
-                          <a:rPr lang="ru-RU" sz="2400" i="1">
+                          <a:rPr lang="ru-RU" i="1">
+                            <a:solidFill>
+                              <a:schemeClr val="tx1">
+                                <a:lumMod val="85000"/>
+                                <a:lumOff val="15000"/>
+                              </a:schemeClr>
+                            </a:solidFill>
                             <a:latin typeface="Cambria Math" panose="02040503050406030204" pitchFamily="18" charset="0"/>
                           </a:rPr>
                         </m:ctrlPr>
@@ -12253,14 +12341,26 @@
                         <m:sSub>
                           <m:sSubPr>
                             <m:ctrlPr>
-                              <a:rPr lang="ru-RU" sz="2400" i="1">
+                              <a:rPr lang="ru-RU" i="1">
+                                <a:solidFill>
+                                  <a:schemeClr val="tx1">
+                                    <a:lumMod val="85000"/>
+                                    <a:lumOff val="15000"/>
+                                  </a:schemeClr>
+                                </a:solidFill>
                                 <a:latin typeface="Cambria Math" panose="02040503050406030204" pitchFamily="18" charset="0"/>
                               </a:rPr>
                             </m:ctrlPr>
                           </m:sSubPr>
                           <m:e>
                             <m:r>
-                              <a:rPr lang="ru-RU" sz="2400" i="1">
+                              <a:rPr lang="ru-RU" i="1">
+                                <a:solidFill>
+                                  <a:schemeClr val="tx1">
+                                    <a:lumMod val="85000"/>
+                                    <a:lumOff val="15000"/>
+                                  </a:schemeClr>
+                                </a:solidFill>
                                 <a:latin typeface="Cambria Math" panose="02040503050406030204" pitchFamily="18" charset="0"/>
                               </a:rPr>
                               <m:t>𝑠𝑖𝑚</m:t>
@@ -12268,7 +12368,13 @@
                           </m:e>
                           <m:sub>
                             <m:r>
-                              <a:rPr lang="ru-RU" sz="2400" i="1">
+                              <a:rPr lang="ru-RU" i="1">
+                                <a:solidFill>
+                                  <a:schemeClr val="tx1">
+                                    <a:lumMod val="85000"/>
+                                    <a:lumOff val="15000"/>
+                                  </a:schemeClr>
+                                </a:solidFill>
                                 <a:latin typeface="Cambria Math" panose="02040503050406030204" pitchFamily="18" charset="0"/>
                               </a:rPr>
                               <m:t>𝑐𝑜𝑛𝑡𝑒𝑛𝑡</m:t>
@@ -12276,11 +12382,1120 @@
                           </m:sub>
                         </m:sSub>
                         <m:r>
-                          <a:rPr lang="ru-RU" sz="2400">
+                          <a:rPr lang="ru-RU">
+                            <a:solidFill>
+                              <a:schemeClr val="tx1">
+                                <a:lumMod val="85000"/>
+                                <a:lumOff val="15000"/>
+                              </a:schemeClr>
+                            </a:solidFill>
                             <a:latin typeface="Cambria Math" panose="02040503050406030204" pitchFamily="18" charset="0"/>
                           </a:rPr>
                           <m:t>​</m:t>
                         </m:r>
+                        <m:d>
+                          <m:dPr>
+                            <m:ctrlPr>
+                              <a:rPr lang="ru-RU" i="1">
+                                <a:solidFill>
+                                  <a:schemeClr val="tx1">
+                                    <a:lumMod val="85000"/>
+                                    <a:lumOff val="15000"/>
+                                  </a:schemeClr>
+                                </a:solidFill>
+                                <a:latin typeface="Cambria Math" panose="02040503050406030204" pitchFamily="18" charset="0"/>
+                              </a:rPr>
+                            </m:ctrlPr>
+                          </m:dPr>
+                          <m:e>
+                            <m:r>
+                              <a:rPr lang="ru-RU" i="1">
+                                <a:solidFill>
+                                  <a:schemeClr val="tx1">
+                                    <a:lumMod val="85000"/>
+                                    <a:lumOff val="15000"/>
+                                  </a:schemeClr>
+                                </a:solidFill>
+                                <a:latin typeface="Cambria Math" panose="02040503050406030204" pitchFamily="18" charset="0"/>
+                              </a:rPr>
+                              <m:t>𝑖</m:t>
+                            </m:r>
+                            <m:r>
+                              <a:rPr lang="ru-RU">
+                                <a:solidFill>
+                                  <a:schemeClr val="tx1">
+                                    <a:lumMod val="85000"/>
+                                    <a:lumOff val="15000"/>
+                                  </a:schemeClr>
+                                </a:solidFill>
+                                <a:latin typeface="Cambria Math" panose="02040503050406030204" pitchFamily="18" charset="0"/>
+                              </a:rPr>
+                              <m:t>,</m:t>
+                            </m:r>
+                            <m:sSub>
+                              <m:sSubPr>
+                                <m:ctrlPr>
+                                  <a:rPr lang="ru-RU" i="1">
+                                    <a:solidFill>
+                                      <a:schemeClr val="tx1">
+                                        <a:lumMod val="85000"/>
+                                        <a:lumOff val="15000"/>
+                                      </a:schemeClr>
+                                    </a:solidFill>
+                                    <a:latin typeface="Cambria Math" panose="02040503050406030204" pitchFamily="18" charset="0"/>
+                                  </a:rPr>
+                                </m:ctrlPr>
+                              </m:sSubPr>
+                              <m:e>
+                                <m:r>
+                                  <a:rPr lang="ru-RU" i="1">
+                                    <a:solidFill>
+                                      <a:schemeClr val="tx1">
+                                        <a:lumMod val="85000"/>
+                                        <a:lumOff val="15000"/>
+                                      </a:schemeClr>
+                                    </a:solidFill>
+                                    <a:latin typeface="Cambria Math" panose="02040503050406030204" pitchFamily="18" charset="0"/>
+                                  </a:rPr>
+                                  <m:t>𝐿</m:t>
+                                </m:r>
+                              </m:e>
+                              <m:sub>
+                                <m:r>
+                                  <a:rPr lang="ru-RU" i="1">
+                                    <a:solidFill>
+                                      <a:schemeClr val="tx1">
+                                        <a:lumMod val="85000"/>
+                                        <a:lumOff val="15000"/>
+                                      </a:schemeClr>
+                                    </a:solidFill>
+                                    <a:latin typeface="Cambria Math" panose="02040503050406030204" pitchFamily="18" charset="0"/>
+                                  </a:rPr>
+                                  <m:t>𝑢</m:t>
+                                </m:r>
+                              </m:sub>
+                            </m:sSub>
+                            <m:r>
+                              <a:rPr lang="ru-RU">
+                                <a:solidFill>
+                                  <a:schemeClr val="tx1">
+                                    <a:lumMod val="85000"/>
+                                    <a:lumOff val="15000"/>
+                                  </a:schemeClr>
+                                </a:solidFill>
+                                <a:latin typeface="Cambria Math" panose="02040503050406030204" pitchFamily="18" charset="0"/>
+                              </a:rPr>
+                              <m:t>​</m:t>
+                            </m:r>
+                          </m:e>
+                        </m:d>
+                      </m:num>
+                      <m:den>
+                        <m:sSub>
+                          <m:sSubPr>
+                            <m:ctrlPr>
+                              <a:rPr lang="ru-RU" i="1">
+                                <a:solidFill>
+                                  <a:schemeClr val="tx1">
+                                    <a:lumMod val="85000"/>
+                                    <a:lumOff val="15000"/>
+                                  </a:schemeClr>
+                                </a:solidFill>
+                                <a:latin typeface="Cambria Math" panose="02040503050406030204" pitchFamily="18" charset="0"/>
+                              </a:rPr>
+                            </m:ctrlPr>
+                          </m:sSubPr>
+                          <m:e>
+                            <m:r>
+                              <a:rPr lang="ru-RU" i="1">
+                                <a:solidFill>
+                                  <a:schemeClr val="tx1">
+                                    <a:lumMod val="85000"/>
+                                    <a:lumOff val="15000"/>
+                                  </a:schemeClr>
+                                </a:solidFill>
+                                <a:latin typeface="Cambria Math" panose="02040503050406030204" pitchFamily="18" charset="0"/>
+                              </a:rPr>
+                              <m:t>𝑚𝑎𝑥</m:t>
+                            </m:r>
+                          </m:e>
+                          <m:sub>
+                            <m:r>
+                              <a:rPr lang="ru-RU" i="1">
+                                <a:solidFill>
+                                  <a:schemeClr val="tx1">
+                                    <a:lumMod val="85000"/>
+                                    <a:lumOff val="15000"/>
+                                  </a:schemeClr>
+                                </a:solidFill>
+                                <a:latin typeface="Cambria Math" panose="02040503050406030204" pitchFamily="18" charset="0"/>
+                              </a:rPr>
+                              <m:t>𝑗</m:t>
+                            </m:r>
+                          </m:sub>
+                        </m:sSub>
+                        <m:sSub>
+                          <m:sSubPr>
+                            <m:ctrlPr>
+                              <a:rPr lang="ru-RU" i="1">
+                                <a:solidFill>
+                                  <a:schemeClr val="tx1">
+                                    <a:lumMod val="85000"/>
+                                    <a:lumOff val="15000"/>
+                                  </a:schemeClr>
+                                </a:solidFill>
+                                <a:latin typeface="Cambria Math" panose="02040503050406030204" pitchFamily="18" charset="0"/>
+                              </a:rPr>
+                            </m:ctrlPr>
+                          </m:sSubPr>
+                          <m:e>
+                            <m:r>
+                              <a:rPr lang="ru-RU" i="1">
+                                <a:solidFill>
+                                  <a:schemeClr val="tx1">
+                                    <a:lumMod val="85000"/>
+                                    <a:lumOff val="15000"/>
+                                  </a:schemeClr>
+                                </a:solidFill>
+                                <a:latin typeface="Cambria Math" panose="02040503050406030204" pitchFamily="18" charset="0"/>
+                              </a:rPr>
+                              <m:t>𝑠𝑖𝑚</m:t>
+                            </m:r>
+                          </m:e>
+                          <m:sub>
+                            <m:r>
+                              <a:rPr lang="ru-RU" i="1">
+                                <a:solidFill>
+                                  <a:schemeClr val="tx1">
+                                    <a:lumMod val="85000"/>
+                                    <a:lumOff val="15000"/>
+                                  </a:schemeClr>
+                                </a:solidFill>
+                                <a:latin typeface="Cambria Math" panose="02040503050406030204" pitchFamily="18" charset="0"/>
+                              </a:rPr>
+                              <m:t>𝑐𝑜𝑛𝑡𝑒𝑛𝑡</m:t>
+                            </m:r>
+                          </m:sub>
+                        </m:sSub>
+                        <m:r>
+                          <a:rPr lang="ru-RU">
+                            <a:solidFill>
+                              <a:schemeClr val="tx1">
+                                <a:lumMod val="85000"/>
+                                <a:lumOff val="15000"/>
+                              </a:schemeClr>
+                            </a:solidFill>
+                            <a:latin typeface="Cambria Math" panose="02040503050406030204" pitchFamily="18" charset="0"/>
+                          </a:rPr>
+                          <m:t>​</m:t>
+                        </m:r>
+                        <m:d>
+                          <m:dPr>
+                            <m:ctrlPr>
+                              <a:rPr lang="ru-RU" i="1">
+                                <a:solidFill>
+                                  <a:schemeClr val="tx1">
+                                    <a:lumMod val="85000"/>
+                                    <a:lumOff val="15000"/>
+                                  </a:schemeClr>
+                                </a:solidFill>
+                                <a:latin typeface="Cambria Math" panose="02040503050406030204" pitchFamily="18" charset="0"/>
+                              </a:rPr>
+                            </m:ctrlPr>
+                          </m:dPr>
+                          <m:e>
+                            <m:r>
+                              <a:rPr lang="ru-RU" i="1">
+                                <a:solidFill>
+                                  <a:schemeClr val="tx1">
+                                    <a:lumMod val="85000"/>
+                                    <a:lumOff val="15000"/>
+                                  </a:schemeClr>
+                                </a:solidFill>
+                                <a:latin typeface="Cambria Math" panose="02040503050406030204" pitchFamily="18" charset="0"/>
+                              </a:rPr>
+                              <m:t>𝑗</m:t>
+                            </m:r>
+                            <m:r>
+                              <a:rPr lang="ru-RU">
+                                <a:solidFill>
+                                  <a:schemeClr val="tx1">
+                                    <a:lumMod val="85000"/>
+                                    <a:lumOff val="15000"/>
+                                  </a:schemeClr>
+                                </a:solidFill>
+                                <a:latin typeface="Cambria Math" panose="02040503050406030204" pitchFamily="18" charset="0"/>
+                              </a:rPr>
+                              <m:t>,</m:t>
+                            </m:r>
+                            <m:sSub>
+                              <m:sSubPr>
+                                <m:ctrlPr>
+                                  <a:rPr lang="ru-RU" i="1">
+                                    <a:solidFill>
+                                      <a:schemeClr val="tx1">
+                                        <a:lumMod val="85000"/>
+                                        <a:lumOff val="15000"/>
+                                      </a:schemeClr>
+                                    </a:solidFill>
+                                    <a:latin typeface="Cambria Math" panose="02040503050406030204" pitchFamily="18" charset="0"/>
+                                  </a:rPr>
+                                </m:ctrlPr>
+                              </m:sSubPr>
+                              <m:e>
+                                <m:r>
+                                  <a:rPr lang="ru-RU" i="1">
+                                    <a:solidFill>
+                                      <a:schemeClr val="tx1">
+                                        <a:lumMod val="85000"/>
+                                        <a:lumOff val="15000"/>
+                                      </a:schemeClr>
+                                    </a:solidFill>
+                                    <a:latin typeface="Cambria Math" panose="02040503050406030204" pitchFamily="18" charset="0"/>
+                                  </a:rPr>
+                                  <m:t>𝐿</m:t>
+                                </m:r>
+                              </m:e>
+                              <m:sub>
+                                <m:r>
+                                  <a:rPr lang="ru-RU" i="1">
+                                    <a:solidFill>
+                                      <a:schemeClr val="tx1">
+                                        <a:lumMod val="85000"/>
+                                        <a:lumOff val="15000"/>
+                                      </a:schemeClr>
+                                    </a:solidFill>
+                                    <a:latin typeface="Cambria Math" panose="02040503050406030204" pitchFamily="18" charset="0"/>
+                                  </a:rPr>
+                                  <m:t>𝑢</m:t>
+                                </m:r>
+                              </m:sub>
+                            </m:sSub>
+                            <m:r>
+                              <a:rPr lang="ru-RU">
+                                <a:solidFill>
+                                  <a:schemeClr val="tx1">
+                                    <a:lumMod val="85000"/>
+                                    <a:lumOff val="15000"/>
+                                  </a:schemeClr>
+                                </a:solidFill>
+                                <a:latin typeface="Cambria Math" panose="02040503050406030204" pitchFamily="18" charset="0"/>
+                              </a:rPr>
+                              <m:t>​</m:t>
+                            </m:r>
+                          </m:e>
+                        </m:d>
+                      </m:den>
+                    </m:f>
+                    <m:r>
+                      <a:rPr lang="ru-RU">
+                        <a:solidFill>
+                          <a:schemeClr val="tx1">
+                            <a:lumMod val="85000"/>
+                            <a:lumOff val="15000"/>
+                          </a:schemeClr>
+                        </a:solidFill>
+                        <a:latin typeface="Cambria Math" panose="02040503050406030204" pitchFamily="18" charset="0"/>
+                      </a:rPr>
+                      <m:t> ,</m:t>
+                    </m:r>
+                  </m:oMath>
+                </a14:m>
+                <a:endParaRPr lang="ru-RU" dirty="0">
+                  <a:solidFill>
+                    <a:schemeClr val="tx1">
+                      <a:lumMod val="85000"/>
+                      <a:lumOff val="15000"/>
+                    </a:schemeClr>
+                  </a:solidFill>
+                </a:endParaRPr>
+              </a:p>
+              <a:p>
+                <a:r>
+                  <a:rPr lang="ru-RU" dirty="0"/>
+                  <a:t>где </a:t>
+                </a:r>
+                <a:r>
+                  <a:rPr lang="en-US" i="1" dirty="0"/>
+                  <a:t>α </a:t>
+                </a:r>
+                <a:r>
+                  <a:rPr lang="ru-RU" dirty="0"/>
+                  <a:t>= 0,6 – коэффициент, определяющий вклад коллаборативной составляющей; </a:t>
+                </a:r>
+              </a:p>
+              <a:p>
+                <a:r>
+                  <a:rPr lang="ru-RU" dirty="0" err="1"/>
+                  <a:t>r</a:t>
+                </a:r>
+                <a:r>
+                  <a:rPr lang="ru-RU" baseline="-25000" dirty="0" err="1"/>
+                  <a:t>ui</a:t>
+                </a:r>
+                <a:r>
+                  <a:rPr lang="ru-RU" baseline="-25000" dirty="0"/>
+                  <a:t> </a:t>
+                </a:r>
+                <a:r>
+                  <a:rPr lang="ru-RU" dirty="0"/>
+                  <a:t>– предсказанный </a:t>
+                </a:r>
+                <a:r>
+                  <a:rPr lang="en-US" dirty="0"/>
+                  <a:t>SVD</a:t>
+                </a:r>
+                <a:r>
+                  <a:rPr lang="ru-RU" dirty="0"/>
+                  <a:t>-рейтинг;</a:t>
+                </a:r>
+                <a:r>
+                  <a:rPr lang="ru-RU" baseline="-25000" dirty="0"/>
+                  <a:t> </a:t>
+                </a:r>
+                <a:endParaRPr lang="ru-RU" dirty="0"/>
+              </a:p>
+              <a:p>
+                <a:r>
+                  <a:rPr lang="en-US" baseline="-25000" dirty="0"/>
+                  <a:t>­</a:t>
+                </a:r>
+                <a:r>
+                  <a:rPr lang="en-US" dirty="0" err="1"/>
+                  <a:t>sim</a:t>
+                </a:r>
+                <a:r>
+                  <a:rPr lang="en-US" baseline="-25000" dirty="0" err="1"/>
+                  <a:t>content</a:t>
+                </a:r>
+                <a:r>
+                  <a:rPr lang="en-US" dirty="0"/>
+                  <a:t>(</a:t>
+                </a:r>
+                <a:r>
+                  <a:rPr lang="en-US" dirty="0" err="1"/>
+                  <a:t>i</a:t>
+                </a:r>
+                <a:r>
+                  <a:rPr lang="en-US" dirty="0"/>
+                  <a:t>, L</a:t>
+                </a:r>
+                <a:r>
+                  <a:rPr lang="en-US" baseline="-25000" dirty="0"/>
+                  <a:t>u</a:t>
+                </a:r>
+                <a:r>
+                  <a:rPr lang="en-US" dirty="0"/>
+                  <a:t>) – </a:t>
+                </a:r>
+                <a:r>
+                  <a:rPr lang="en-US" dirty="0" err="1"/>
+                  <a:t>максимальное</a:t>
+                </a:r>
+                <a:r>
+                  <a:rPr lang="en-US" dirty="0"/>
+                  <a:t> </a:t>
+                </a:r>
+                <a:r>
+                  <a:rPr lang="en-US" dirty="0" err="1"/>
+                  <a:t>косинусное</a:t>
+                </a:r>
+                <a:r>
+                  <a:rPr lang="en-US" dirty="0"/>
+                  <a:t> </a:t>
+                </a:r>
+                <a:r>
+                  <a:rPr lang="en-US" dirty="0" err="1"/>
+                  <a:t>сходство</a:t>
+                </a:r>
+                <a:r>
+                  <a:rPr lang="en-US" dirty="0"/>
+                  <a:t> </a:t>
+                </a:r>
+                <a:r>
+                  <a:rPr lang="en-US" dirty="0" err="1"/>
+                  <a:t>работы</a:t>
+                </a:r>
+                <a:r>
+                  <a:rPr lang="en-US" dirty="0"/>
+                  <a:t> </a:t>
+                </a:r>
+                <a:r>
+                  <a:rPr lang="en-US" dirty="0" err="1"/>
+                  <a:t>i</a:t>
+                </a:r>
+                <a:r>
+                  <a:rPr lang="en-US" dirty="0"/>
+                  <a:t> с </a:t>
+                </a:r>
+                <a:r>
+                  <a:rPr lang="en-US" dirty="0" err="1"/>
+                  <a:t>работами</a:t>
+                </a:r>
+                <a:r>
+                  <a:rPr lang="en-US" dirty="0"/>
+                  <a:t>, </a:t>
+                </a:r>
+                <a:r>
+                  <a:rPr lang="en-US" dirty="0" err="1"/>
+                  <a:t>которые</a:t>
+                </a:r>
+                <a:r>
+                  <a:rPr lang="en-US" dirty="0"/>
+                  <a:t> </a:t>
+                </a:r>
+                <a:r>
+                  <a:rPr lang="en-US" dirty="0" err="1"/>
+                  <a:t>пользователь</a:t>
+                </a:r>
+                <a:r>
+                  <a:rPr lang="en-US" dirty="0"/>
+                  <a:t> </a:t>
+                </a:r>
+                <a:r>
+                  <a:rPr lang="en-US" dirty="0" err="1"/>
+                  <a:t>ранее</a:t>
+                </a:r>
+                <a:r>
+                  <a:rPr lang="en-US" dirty="0"/>
+                  <a:t> </a:t>
+                </a:r>
+                <a:r>
+                  <a:rPr lang="en-US" dirty="0" err="1"/>
+                  <a:t>лайкнул</a:t>
+                </a:r>
+                <a:r>
+                  <a:rPr lang="en-US" dirty="0"/>
+                  <a:t> (</a:t>
+                </a:r>
+                <a:r>
+                  <a:rPr lang="en-US" dirty="0" err="1"/>
+                  <a:t>множество</a:t>
+                </a:r>
+                <a:r>
+                  <a:rPr lang="en-US" dirty="0"/>
+                  <a:t> L</a:t>
+                </a:r>
+                <a:r>
+                  <a:rPr lang="en-US" baseline="-25000" dirty="0"/>
+                  <a:t>u</a:t>
+                </a:r>
+                <a:r>
+                  <a:rPr lang="en-US" dirty="0"/>
+                  <a:t>). </a:t>
+                </a:r>
+                <a:endParaRPr lang="ru-RU" dirty="0">
+                  <a:solidFill>
+                    <a:schemeClr val="tx1">
+                      <a:lumMod val="85000"/>
+                      <a:lumOff val="15000"/>
+                    </a:schemeClr>
+                  </a:solidFill>
+                </a:endParaRPr>
+              </a:p>
+            </p:txBody>
+          </p:sp>
+        </mc:Choice>
+        <mc:Fallback>
+          <p:sp>
+            <p:nvSpPr>
+              <p:cNvPr id="7" name="Объект 6">
+                <a:extLst>
+                  <a:ext uri="{FF2B5EF4-FFF2-40B4-BE49-F238E27FC236}">
+                    <a16:creationId xmlns:a16="http://schemas.microsoft.com/office/drawing/2014/main" id="{F5AF4E61-ADA4-794C-D135-81A04610AD07}"/>
+                  </a:ext>
+                </a:extLst>
+              </p:cNvPr>
+              <p:cNvSpPr>
+                <a:spLocks noGrp="1" noRot="1" noChangeAspect="1" noMove="1" noResize="1" noEditPoints="1" noAdjustHandles="1" noChangeArrowheads="1" noChangeShapeType="1" noTextEdit="1"/>
+              </p:cNvSpPr>
+              <p:nvPr>
+                <p:ph sz="half" idx="1"/>
+              </p:nvPr>
+            </p:nvSpPr>
+            <p:spPr>
+              <a:xfrm>
+                <a:off x="717176" y="1845734"/>
+                <a:ext cx="5317863" cy="4023360"/>
+              </a:xfrm>
+              <a:blipFill>
+                <a:blip r:embed="rId2"/>
+                <a:stretch>
+                  <a:fillRect l="-1261" t="-1667"/>
+                </a:stretch>
+              </a:blipFill>
+            </p:spPr>
+            <p:txBody>
+              <a:bodyPr/>
+              <a:lstStyle/>
+              <a:p>
+                <a:r>
+                  <a:rPr lang="ru-RU">
+                    <a:noFill/>
+                  </a:rPr>
+                  <a:t> </a:t>
+                </a:r>
+              </a:p>
+            </p:txBody>
+          </p:sp>
+        </mc:Fallback>
+      </mc:AlternateContent>
+      <mc:AlternateContent xmlns:mc="http://schemas.openxmlformats.org/markup-compatibility/2006">
+        <mc:Choice xmlns:a14="http://schemas.microsoft.com/office/drawing/2010/main" Requires="a14">
+          <p:sp>
+            <p:nvSpPr>
+              <p:cNvPr id="2" name="Объект 1">
+                <a:extLst>
+                  <a:ext uri="{FF2B5EF4-FFF2-40B4-BE49-F238E27FC236}">
+                    <a16:creationId xmlns:a16="http://schemas.microsoft.com/office/drawing/2014/main" id="{6EEF907E-E10F-DC36-625A-BEEFF3AD39F0}"/>
+                  </a:ext>
+                </a:extLst>
+              </p:cNvPr>
+              <p:cNvSpPr>
+                <a:spLocks noGrp="1"/>
+              </p:cNvSpPr>
+              <p:nvPr>
+                <p:ph sz="half" idx="2"/>
+              </p:nvPr>
+            </p:nvSpPr>
+            <p:spPr>
+              <a:xfrm>
+                <a:off x="6217920" y="1845735"/>
+                <a:ext cx="5445162" cy="4023360"/>
+              </a:xfrm>
+            </p:spPr>
+            <p:txBody>
+              <a:bodyPr>
+                <a:normAutofit fontScale="85000" lnSpcReduction="20000"/>
+              </a:bodyPr>
+              <a:lstStyle/>
+              <a:p>
+                <a:pPr marL="179388" indent="-179388"/>
+                <a:r>
+                  <a:rPr lang="ru-RU" sz="2400" dirty="0">
+                    <a:solidFill>
+                      <a:schemeClr val="tx1">
+                        <a:lumMod val="85000"/>
+                        <a:lumOff val="15000"/>
+                      </a:schemeClr>
+                    </a:solidFill>
+                  </a:rPr>
+                  <a:t>Оценка визуального сходства:</a:t>
+                </a:r>
+              </a:p>
+              <a:p>
+                <a:pPr marL="0" indent="0"/>
+                <a14:m>
+                  <m:oMath xmlns:m="http://schemas.openxmlformats.org/officeDocument/2006/math">
+                    <m:sSub>
+                      <m:sSubPr>
+                        <m:ctrlPr>
+                          <a:rPr lang="ru-RU" sz="1900" i="1">
+                            <a:solidFill>
+                              <a:schemeClr val="tx1">
+                                <a:lumMod val="85000"/>
+                                <a:lumOff val="15000"/>
+                              </a:schemeClr>
+                            </a:solidFill>
+                            <a:latin typeface="Cambria Math" panose="02040503050406030204" pitchFamily="18" charset="0"/>
+                          </a:rPr>
+                        </m:ctrlPr>
+                      </m:sSubPr>
+                      <m:e>
+                        <m:r>
+                          <a:rPr lang="ru-RU" sz="1900" i="1">
+                            <a:solidFill>
+                              <a:schemeClr val="tx1">
+                                <a:lumMod val="85000"/>
+                                <a:lumOff val="15000"/>
+                              </a:schemeClr>
+                            </a:solidFill>
+                            <a:latin typeface="Cambria Math" panose="02040503050406030204" pitchFamily="18" charset="0"/>
+                          </a:rPr>
+                          <m:t>𝑤</m:t>
+                        </m:r>
+                      </m:e>
+                      <m:sub>
+                        <m:r>
+                          <a:rPr lang="ru-RU" sz="1900" i="1">
+                            <a:solidFill>
+                              <a:schemeClr val="tx1">
+                                <a:lumMod val="85000"/>
+                                <a:lumOff val="15000"/>
+                              </a:schemeClr>
+                            </a:solidFill>
+                            <a:latin typeface="Cambria Math" panose="02040503050406030204" pitchFamily="18" charset="0"/>
+                          </a:rPr>
+                          <m:t>𝑖</m:t>
+                        </m:r>
+                      </m:sub>
+                    </m:sSub>
+                    <m:r>
+                      <a:rPr lang="ru-RU" sz="1900">
+                        <a:solidFill>
+                          <a:schemeClr val="tx1">
+                            <a:lumMod val="85000"/>
+                            <a:lumOff val="15000"/>
+                          </a:schemeClr>
+                        </a:solidFill>
+                        <a:latin typeface="Cambria Math" panose="02040503050406030204" pitchFamily="18" charset="0"/>
+                      </a:rPr>
+                      <m:t>∗</m:t>
+                    </m:r>
+                    <m:func>
+                      <m:funcPr>
+                        <m:ctrlPr>
+                          <a:rPr lang="ru-RU" sz="1900">
+                            <a:solidFill>
+                              <a:schemeClr val="tx1">
+                                <a:lumMod val="85000"/>
+                                <a:lumOff val="15000"/>
+                              </a:schemeClr>
+                            </a:solidFill>
+                            <a:latin typeface="Cambria Math" panose="02040503050406030204" pitchFamily="18" charset="0"/>
+                          </a:rPr>
+                        </m:ctrlPr>
+                      </m:funcPr>
+                      <m:fName>
+                        <m:r>
+                          <m:rPr>
+                            <m:sty m:val="p"/>
+                          </m:rPr>
+                          <a:rPr lang="ru-RU" sz="1900">
+                            <a:solidFill>
+                              <a:schemeClr val="tx1">
+                                <a:lumMod val="85000"/>
+                                <a:lumOff val="15000"/>
+                              </a:schemeClr>
+                            </a:solidFill>
+                            <a:latin typeface="Cambria Math" panose="02040503050406030204" pitchFamily="18" charset="0"/>
+                          </a:rPr>
+                          <m:t>cos</m:t>
+                        </m:r>
+                      </m:fName>
+                      <m:e>
+                        <m:d>
+                          <m:dPr>
+                            <m:ctrlPr>
+                              <a:rPr lang="ru-RU" sz="1900" i="1">
+                                <a:solidFill>
+                                  <a:schemeClr val="tx1">
+                                    <a:lumMod val="85000"/>
+                                    <a:lumOff val="15000"/>
+                                  </a:schemeClr>
+                                </a:solidFill>
+                                <a:latin typeface="Cambria Math" panose="02040503050406030204" pitchFamily="18" charset="0"/>
+                              </a:rPr>
+                            </m:ctrlPr>
+                          </m:dPr>
+                          <m:e>
+                            <m:sSub>
+                              <m:sSubPr>
+                                <m:ctrlPr>
+                                  <a:rPr lang="ru-RU" sz="1900" i="1">
+                                    <a:solidFill>
+                                      <a:schemeClr val="tx1">
+                                        <a:lumMod val="85000"/>
+                                        <a:lumOff val="15000"/>
+                                      </a:schemeClr>
+                                    </a:solidFill>
+                                    <a:latin typeface="Cambria Math" panose="02040503050406030204" pitchFamily="18" charset="0"/>
+                                  </a:rPr>
+                                </m:ctrlPr>
+                              </m:sSubPr>
+                              <m:e>
+                                <m:r>
+                                  <a:rPr lang="ru-RU" sz="1900" i="1">
+                                    <a:solidFill>
+                                      <a:schemeClr val="tx1">
+                                        <a:lumMod val="85000"/>
+                                        <a:lumOff val="15000"/>
+                                      </a:schemeClr>
+                                    </a:solidFill>
+                                    <a:latin typeface="Cambria Math" panose="02040503050406030204" pitchFamily="18" charset="0"/>
+                                  </a:rPr>
+                                  <m:t>ℎ</m:t>
+                                </m:r>
+                              </m:e>
+                              <m:sub>
+                                <m:r>
+                                  <a:rPr lang="ru-RU" sz="1900" i="1">
+                                    <a:solidFill>
+                                      <a:schemeClr val="tx1">
+                                        <a:lumMod val="85000"/>
+                                        <a:lumOff val="15000"/>
+                                      </a:schemeClr>
+                                    </a:solidFill>
+                                    <a:latin typeface="Cambria Math" panose="02040503050406030204" pitchFamily="18" charset="0"/>
+                                  </a:rPr>
+                                  <m:t>𝑖</m:t>
+                                </m:r>
+                              </m:sub>
+                            </m:sSub>
+                            <m:r>
+                              <a:rPr lang="ru-RU" sz="1900">
+                                <a:solidFill>
+                                  <a:schemeClr val="tx1">
+                                    <a:lumMod val="85000"/>
+                                    <a:lumOff val="15000"/>
+                                  </a:schemeClr>
+                                </a:solidFill>
+                                <a:latin typeface="Cambria Math" panose="02040503050406030204" pitchFamily="18" charset="0"/>
+                              </a:rPr>
+                              <m:t>,</m:t>
+                            </m:r>
+                            <m:sSub>
+                              <m:sSubPr>
+                                <m:ctrlPr>
+                                  <a:rPr lang="ru-RU" sz="1900" i="1">
+                                    <a:solidFill>
+                                      <a:schemeClr val="tx1">
+                                        <a:lumMod val="85000"/>
+                                        <a:lumOff val="15000"/>
+                                      </a:schemeClr>
+                                    </a:solidFill>
+                                    <a:latin typeface="Cambria Math" panose="02040503050406030204" pitchFamily="18" charset="0"/>
+                                  </a:rPr>
+                                </m:ctrlPr>
+                              </m:sSubPr>
+                              <m:e>
+                                <m:r>
+                                  <a:rPr lang="ru-RU" sz="1900" i="1">
+                                    <a:solidFill>
+                                      <a:schemeClr val="tx1">
+                                        <a:lumMod val="85000"/>
+                                        <a:lumOff val="15000"/>
+                                      </a:schemeClr>
+                                    </a:solidFill>
+                                    <a:latin typeface="Cambria Math" panose="02040503050406030204" pitchFamily="18" charset="0"/>
+                                  </a:rPr>
+                                  <m:t>ℎ</m:t>
+                                </m:r>
+                              </m:e>
+                              <m:sub>
+                                <m:r>
+                                  <a:rPr lang="ru-RU" sz="1900" i="1">
+                                    <a:solidFill>
+                                      <a:schemeClr val="tx1">
+                                        <a:lumMod val="85000"/>
+                                        <a:lumOff val="15000"/>
+                                      </a:schemeClr>
+                                    </a:solidFill>
+                                    <a:latin typeface="Cambria Math" panose="02040503050406030204" pitchFamily="18" charset="0"/>
+                                  </a:rPr>
+                                  <m:t>𝑗</m:t>
+                                </m:r>
+                              </m:sub>
+                            </m:sSub>
+                          </m:e>
+                        </m:d>
+                      </m:e>
+                    </m:func>
+                    <m:r>
+                      <a:rPr lang="ru-RU" sz="1900">
+                        <a:solidFill>
+                          <a:schemeClr val="tx1">
+                            <a:lumMod val="85000"/>
+                            <a:lumOff val="15000"/>
+                          </a:schemeClr>
+                        </a:solidFill>
+                        <a:latin typeface="Cambria Math" panose="02040503050406030204" pitchFamily="18" charset="0"/>
+                      </a:rPr>
+                      <m:t>+</m:t>
+                    </m:r>
+                    <m:sSub>
+                      <m:sSubPr>
+                        <m:ctrlPr>
+                          <a:rPr lang="ru-RU" sz="1900" i="1">
+                            <a:solidFill>
+                              <a:schemeClr val="tx1">
+                                <a:lumMod val="85000"/>
+                                <a:lumOff val="15000"/>
+                              </a:schemeClr>
+                            </a:solidFill>
+                            <a:latin typeface="Cambria Math" panose="02040503050406030204" pitchFamily="18" charset="0"/>
+                          </a:rPr>
+                        </m:ctrlPr>
+                      </m:sSubPr>
+                      <m:e>
+                        <m:r>
+                          <a:rPr lang="ru-RU" sz="1900" i="1">
+                            <a:solidFill>
+                              <a:schemeClr val="tx1">
+                                <a:lumMod val="85000"/>
+                                <a:lumOff val="15000"/>
+                              </a:schemeClr>
+                            </a:solidFill>
+                            <a:latin typeface="Cambria Math" panose="02040503050406030204" pitchFamily="18" charset="0"/>
+                          </a:rPr>
+                          <m:t>𝑤</m:t>
+                        </m:r>
+                      </m:e>
+                      <m:sub>
+                        <m:r>
+                          <a:rPr lang="ru-RU" sz="1900">
+                            <a:solidFill>
+                              <a:schemeClr val="tx1">
+                                <a:lumMod val="85000"/>
+                                <a:lumOff val="15000"/>
+                              </a:schemeClr>
+                            </a:solidFill>
+                            <a:latin typeface="Cambria Math" panose="02040503050406030204" pitchFamily="18" charset="0"/>
+                          </a:rPr>
+                          <m:t>2</m:t>
+                        </m:r>
+                      </m:sub>
+                    </m:sSub>
+                    <m:r>
+                      <a:rPr lang="ru-RU" sz="1900">
+                        <a:solidFill>
+                          <a:schemeClr val="tx1">
+                            <a:lumMod val="85000"/>
+                            <a:lumOff val="15000"/>
+                          </a:schemeClr>
+                        </a:solidFill>
+                        <a:latin typeface="Cambria Math" panose="02040503050406030204" pitchFamily="18" charset="0"/>
+                      </a:rPr>
+                      <m:t>∗</m:t>
+                    </m:r>
+                    <m:r>
+                      <a:rPr lang="ru-RU" sz="1900" i="1">
+                        <a:solidFill>
+                          <a:schemeClr val="tx1">
+                            <a:lumMod val="85000"/>
+                            <a:lumOff val="15000"/>
+                          </a:schemeClr>
+                        </a:solidFill>
+                        <a:latin typeface="Cambria Math" panose="02040503050406030204" pitchFamily="18" charset="0"/>
+                      </a:rPr>
+                      <m:t>𝑡𝑎𝑔𝑜𝑣𝑒𝑟𝑙𝑎𝑝</m:t>
+                    </m:r>
+                    <m:d>
+                      <m:dPr>
+                        <m:ctrlPr>
+                          <a:rPr lang="ru-RU" sz="1900" i="1">
+                            <a:solidFill>
+                              <a:schemeClr val="tx1">
+                                <a:lumMod val="85000"/>
+                                <a:lumOff val="15000"/>
+                              </a:schemeClr>
+                            </a:solidFill>
+                            <a:latin typeface="Cambria Math" panose="02040503050406030204" pitchFamily="18" charset="0"/>
+                          </a:rPr>
+                        </m:ctrlPr>
+                      </m:dPr>
+                      <m:e>
+                        <m:r>
+                          <a:rPr lang="ru-RU" sz="1900" i="1">
+                            <a:solidFill>
+                              <a:schemeClr val="tx1">
+                                <a:lumMod val="85000"/>
+                                <a:lumOff val="15000"/>
+                              </a:schemeClr>
+                            </a:solidFill>
+                            <a:latin typeface="Cambria Math" panose="02040503050406030204" pitchFamily="18" charset="0"/>
+                          </a:rPr>
+                          <m:t>𝑖</m:t>
+                        </m:r>
+                        <m:r>
+                          <a:rPr lang="ru-RU" sz="1900">
+                            <a:solidFill>
+                              <a:schemeClr val="tx1">
+                                <a:lumMod val="85000"/>
+                                <a:lumOff val="15000"/>
+                              </a:schemeClr>
+                            </a:solidFill>
+                            <a:latin typeface="Cambria Math" panose="02040503050406030204" pitchFamily="18" charset="0"/>
+                          </a:rPr>
+                          <m:t>,</m:t>
+                        </m:r>
+                        <m:r>
+                          <a:rPr lang="ru-RU" sz="1900" i="1">
+                            <a:solidFill>
+                              <a:schemeClr val="tx1">
+                                <a:lumMod val="85000"/>
+                                <a:lumOff val="15000"/>
+                              </a:schemeClr>
+                            </a:solidFill>
+                            <a:latin typeface="Cambria Math" panose="02040503050406030204" pitchFamily="18" charset="0"/>
+                          </a:rPr>
+                          <m:t>𝑗</m:t>
+                        </m:r>
+                      </m:e>
+                    </m:d>
+                    <m:r>
+                      <a:rPr lang="ru-RU" sz="1900">
+                        <a:solidFill>
+                          <a:schemeClr val="tx1">
+                            <a:lumMod val="85000"/>
+                            <a:lumOff val="15000"/>
+                          </a:schemeClr>
+                        </a:solidFill>
+                        <a:latin typeface="Cambria Math" panose="02040503050406030204" pitchFamily="18" charset="0"/>
+                      </a:rPr>
+                      <m:t>+</m:t>
+                    </m:r>
+                    <m:sSub>
+                      <m:sSubPr>
+                        <m:ctrlPr>
+                          <a:rPr lang="ru-RU" sz="1900" i="1">
+                            <a:solidFill>
+                              <a:schemeClr val="tx1">
+                                <a:lumMod val="85000"/>
+                                <a:lumOff val="15000"/>
+                              </a:schemeClr>
+                            </a:solidFill>
+                            <a:latin typeface="Cambria Math" panose="02040503050406030204" pitchFamily="18" charset="0"/>
+                          </a:rPr>
+                        </m:ctrlPr>
+                      </m:sSubPr>
+                      <m:e>
+                        <m:r>
+                          <a:rPr lang="ru-RU" sz="1900" i="1">
+                            <a:solidFill>
+                              <a:schemeClr val="tx1">
+                                <a:lumMod val="85000"/>
+                                <a:lumOff val="15000"/>
+                              </a:schemeClr>
+                            </a:solidFill>
+                            <a:latin typeface="Cambria Math" panose="02040503050406030204" pitchFamily="18" charset="0"/>
+                          </a:rPr>
+                          <m:t>𝑤</m:t>
+                        </m:r>
+                      </m:e>
+                      <m:sub>
+                        <m:r>
+                          <a:rPr lang="ru-RU" sz="1900">
+                            <a:solidFill>
+                              <a:schemeClr val="tx1">
+                                <a:lumMod val="85000"/>
+                                <a:lumOff val="15000"/>
+                              </a:schemeClr>
+                            </a:solidFill>
+                            <a:latin typeface="Cambria Math" panose="02040503050406030204" pitchFamily="18" charset="0"/>
+                          </a:rPr>
+                          <m:t>3</m:t>
+                        </m:r>
+                      </m:sub>
+                    </m:sSub>
+                    <m:r>
+                      <a:rPr lang="ru-RU" sz="1900">
+                        <a:solidFill>
+                          <a:schemeClr val="tx1">
+                            <a:lumMod val="85000"/>
+                            <a:lumOff val="15000"/>
+                          </a:schemeClr>
+                        </a:solidFill>
+                        <a:latin typeface="Cambria Math" panose="02040503050406030204" pitchFamily="18" charset="0"/>
+                      </a:rPr>
+                      <m:t>∗</m:t>
+                    </m:r>
+                    <m:r>
+                      <a:rPr lang="ru-RU" sz="1900" i="1">
+                        <a:solidFill>
+                          <a:schemeClr val="tx1">
+                            <a:lumMod val="85000"/>
+                            <a:lumOff val="15000"/>
+                          </a:schemeClr>
+                        </a:solidFill>
+                        <a:latin typeface="Cambria Math" panose="02040503050406030204" pitchFamily="18" charset="0"/>
+                      </a:rPr>
+                      <m:t>𝑐𝑜𝑙𝑜𝑟𝑠𝑖𝑚</m:t>
+                    </m:r>
+                    <m:d>
+                      <m:dPr>
+                        <m:ctrlPr>
+                          <a:rPr lang="ru-RU" sz="1900" i="1">
+                            <a:solidFill>
+                              <a:schemeClr val="tx1">
+                                <a:lumMod val="85000"/>
+                                <a:lumOff val="15000"/>
+                              </a:schemeClr>
+                            </a:solidFill>
+                            <a:latin typeface="Cambria Math" panose="02040503050406030204" pitchFamily="18" charset="0"/>
+                          </a:rPr>
+                        </m:ctrlPr>
+                      </m:dPr>
+                      <m:e>
+                        <m:r>
+                          <a:rPr lang="ru-RU" sz="1900" i="1">
+                            <a:solidFill>
+                              <a:schemeClr val="tx1">
+                                <a:lumMod val="85000"/>
+                                <a:lumOff val="15000"/>
+                              </a:schemeClr>
+                            </a:solidFill>
+                            <a:latin typeface="Cambria Math" panose="02040503050406030204" pitchFamily="18" charset="0"/>
+                          </a:rPr>
+                          <m:t>𝑖</m:t>
+                        </m:r>
+                        <m:r>
+                          <a:rPr lang="ru-RU" sz="1900">
+                            <a:solidFill>
+                              <a:schemeClr val="tx1">
+                                <a:lumMod val="85000"/>
+                                <a:lumOff val="15000"/>
+                              </a:schemeClr>
+                            </a:solidFill>
+                            <a:latin typeface="Cambria Math" panose="02040503050406030204" pitchFamily="18" charset="0"/>
+                          </a:rPr>
+                          <m:t>,</m:t>
+                        </m:r>
+                        <m:r>
+                          <a:rPr lang="ru-RU" sz="1900" i="1">
+                            <a:solidFill>
+                              <a:schemeClr val="tx1">
+                                <a:lumMod val="85000"/>
+                                <a:lumOff val="15000"/>
+                              </a:schemeClr>
+                            </a:solidFill>
+                            <a:latin typeface="Cambria Math" panose="02040503050406030204" pitchFamily="18" charset="0"/>
+                          </a:rPr>
+                          <m:t>𝑗</m:t>
+                        </m:r>
+                      </m:e>
+                    </m:d>
+                  </m:oMath>
+                </a14:m>
+                <a:r>
+                  <a:rPr lang="ru-RU" sz="1900" dirty="0">
+                    <a:solidFill>
+                      <a:schemeClr val="tx1">
+                        <a:lumMod val="85000"/>
+                        <a:lumOff val="15000"/>
+                      </a:schemeClr>
+                    </a:solidFill>
+                  </a:rPr>
+                  <a:t> ,</a:t>
+                </a:r>
+              </a:p>
+              <a:p>
+                <a:r>
+                  <a:rPr lang="ru-RU" sz="2400" dirty="0"/>
+                  <a:t>где </a:t>
+                </a:r>
+                <a14:m>
+                  <m:oMath xmlns:m="http://schemas.openxmlformats.org/officeDocument/2006/math">
+                    <m:func>
+                      <m:funcPr>
+                        <m:ctrlPr>
+                          <a:rPr lang="ru-RU" sz="2400">
+                            <a:latin typeface="Cambria Math" panose="02040503050406030204" pitchFamily="18" charset="0"/>
+                          </a:rPr>
+                        </m:ctrlPr>
+                      </m:funcPr>
+                      <m:fName>
+                        <m:r>
+                          <m:rPr>
+                            <m:sty m:val="p"/>
+                          </m:rPr>
+                          <a:rPr lang="ru-RU" sz="2400">
+                            <a:latin typeface="Cambria Math" panose="02040503050406030204" pitchFamily="18" charset="0"/>
+                          </a:rPr>
+                          <m:t>cos</m:t>
+                        </m:r>
+                      </m:fName>
+                      <m:e>
                         <m:d>
                           <m:dPr>
                             <m:ctrlPr>
@@ -12290,14 +13505,33 @@
                             </m:ctrlPr>
                           </m:dPr>
                           <m:e>
+                            <m:sSub>
+                              <m:sSubPr>
+                                <m:ctrlPr>
+                                  <a:rPr lang="ru-RU" sz="2400" i="1">
+                                    <a:latin typeface="Cambria Math" panose="02040503050406030204" pitchFamily="18" charset="0"/>
+                                  </a:rPr>
+                                </m:ctrlPr>
+                              </m:sSubPr>
+                              <m:e>
+                                <m:r>
+                                  <a:rPr lang="ru-RU" sz="2400" i="1">
+                                    <a:latin typeface="Cambria Math" panose="02040503050406030204" pitchFamily="18" charset="0"/>
+                                  </a:rPr>
+                                  <m:t>ℎ</m:t>
+                                </m:r>
+                              </m:e>
+                              <m:sub>
+                                <m:r>
+                                  <a:rPr lang="ru-RU" sz="2400" i="1">
+                                    <a:latin typeface="Cambria Math" panose="02040503050406030204" pitchFamily="18" charset="0"/>
+                                  </a:rPr>
+                                  <m:t>𝑖</m:t>
+                                </m:r>
+                              </m:sub>
+                            </m:sSub>
                             <m:r>
                               <a:rPr lang="ru-RU" sz="2400" i="1">
-                                <a:latin typeface="Cambria Math" panose="02040503050406030204" pitchFamily="18" charset="0"/>
-                              </a:rPr>
-                              <m:t>𝑖</m:t>
-                            </m:r>
-                            <m:r>
-                              <a:rPr lang="ru-RU" sz="2400">
                                 <a:latin typeface="Cambria Math" panose="02040503050406030204" pitchFamily="18" charset="0"/>
                               </a:rPr>
                               <m:t>,</m:t>
@@ -12315,7 +13549,7 @@
                                   <a:rPr lang="ru-RU" sz="2400" i="1">
                                     <a:latin typeface="Cambria Math" panose="02040503050406030204" pitchFamily="18" charset="0"/>
                                   </a:rPr>
-                                  <m:t>𝐿</m:t>
+                                  <m:t>ℎ</m:t>
                                 </m:r>
                               </m:e>
                               <m:sub>
@@ -12323,7 +13557,107 @@
                                   <a:rPr lang="ru-RU" sz="2400" i="1">
                                     <a:latin typeface="Cambria Math" panose="02040503050406030204" pitchFamily="18" charset="0"/>
                                   </a:rPr>
-                                  <m:t>𝑢</m:t>
+                                  <m:t>𝑗</m:t>
+                                </m:r>
+                              </m:sub>
+                            </m:sSub>
+                          </m:e>
+                        </m:d>
+                      </m:e>
+                    </m:func>
+                  </m:oMath>
+                </a14:m>
+                <a:r>
+                  <a:rPr lang="ru-RU" sz="2400" dirty="0"/>
+                  <a:t> – косинусное сходство нормализованных гистограмм;</a:t>
+                </a:r>
+              </a:p>
+              <a:p>
+                <a14:m>
+                  <m:oMath xmlns:m="http://schemas.openxmlformats.org/officeDocument/2006/math">
+                    <m:r>
+                      <a:rPr lang="ru-RU" sz="2400" i="1">
+                        <a:latin typeface="Cambria Math" panose="02040503050406030204" pitchFamily="18" charset="0"/>
+                      </a:rPr>
+                      <m:t>𝑡𝑎𝑔𝑜𝑣𝑒𝑟𝑙𝑎𝑝</m:t>
+                    </m:r>
+                    <m:d>
+                      <m:dPr>
+                        <m:ctrlPr>
+                          <a:rPr lang="ru-RU" sz="2400" i="1">
+                            <a:latin typeface="Cambria Math" panose="02040503050406030204" pitchFamily="18" charset="0"/>
+                          </a:rPr>
+                        </m:ctrlPr>
+                      </m:dPr>
+                      <m:e>
+                        <m:r>
+                          <a:rPr lang="ru-RU" sz="2400" i="1">
+                            <a:latin typeface="Cambria Math" panose="02040503050406030204" pitchFamily="18" charset="0"/>
+                          </a:rPr>
+                          <m:t>𝑖</m:t>
+                        </m:r>
+                        <m:r>
+                          <a:rPr lang="ru-RU" sz="2400">
+                            <a:latin typeface="Cambria Math" panose="02040503050406030204" pitchFamily="18" charset="0"/>
+                          </a:rPr>
+                          <m:t>,</m:t>
+                        </m:r>
+                        <m:r>
+                          <a:rPr lang="ru-RU" sz="2400" i="1">
+                            <a:latin typeface="Cambria Math" panose="02040503050406030204" pitchFamily="18" charset="0"/>
+                          </a:rPr>
+                          <m:t>𝑗</m:t>
+                        </m:r>
+                      </m:e>
+                    </m:d>
+                    <m:r>
+                      <a:rPr lang="ru-RU" sz="2400">
+                        <a:latin typeface="Cambria Math" panose="02040503050406030204" pitchFamily="18" charset="0"/>
+                      </a:rPr>
+                      <m:t>=</m:t>
+                    </m:r>
+                    <m:f>
+                      <m:fPr>
+                        <m:ctrlPr>
+                          <a:rPr lang="ru-RU" sz="2400" i="1">
+                            <a:latin typeface="Cambria Math" panose="02040503050406030204" pitchFamily="18" charset="0"/>
+                          </a:rPr>
+                        </m:ctrlPr>
+                      </m:fPr>
+                      <m:num>
+                        <m:d>
+                          <m:dPr>
+                            <m:begChr m:val="|"/>
+                            <m:endChr m:val="|"/>
+                            <m:ctrlPr>
+                              <a:rPr lang="ru-RU" sz="2400" i="1">
+                                <a:latin typeface="Cambria Math" panose="02040503050406030204" pitchFamily="18" charset="0"/>
+                              </a:rPr>
+                            </m:ctrlPr>
+                          </m:dPr>
+                          <m:e>
+                            <m:sSub>
+                              <m:sSubPr>
+                                <m:ctrlPr>
+                                  <a:rPr lang="ru-RU" sz="2400" i="1">
+                                    <a:latin typeface="Cambria Math" panose="02040503050406030204" pitchFamily="18" charset="0"/>
+                                  </a:rPr>
+                                </m:ctrlPr>
+                              </m:sSubPr>
+                              <m:e>
+                                <m:r>
+                                  <a:rPr lang="ru-RU" sz="2400" i="1">
+                                    <a:latin typeface="Cambria Math" panose="02040503050406030204" pitchFamily="18" charset="0"/>
+                                  </a:rPr>
+                                  <m:t>𝑇</m:t>
+                                </m:r>
+                              </m:e>
+                              <m:sub>
+                                <m:r>
+                                  <a:rPr lang="ru-RU" sz="2400" i="1">
+                                    <a:latin typeface="Cambria Math" panose="02040503050406030204" pitchFamily="18" charset="0"/>
+                                  </a:rPr>
+                                  <m:t>𝑖</m:t>
                                 </m:r>
                               </m:sub>
                             </m:sSub>
@@ -12331,88 +13665,7 @@
                               <a:rPr lang="ru-RU" sz="2400">
                                 <a:latin typeface="Cambria Math" panose="02040503050406030204" pitchFamily="18" charset="0"/>
                               </a:rPr>
-                              <m:t>​</m:t>
-                            </m:r>
-                          </m:e>
-                        </m:d>
-                      </m:num>
-                      <m:den>
-                        <m:sSub>
-                          <m:sSubPr>
-                            <m:ctrlPr>
-                              <a:rPr lang="ru-RU" sz="2400" i="1">
-                                <a:latin typeface="Cambria Math" panose="02040503050406030204" pitchFamily="18" charset="0"/>
-                              </a:rPr>
-                            </m:ctrlPr>
-                          </m:sSubPr>
-                          <m:e>
-                            <m:r>
-                              <a:rPr lang="ru-RU" sz="2400" i="1">
-                                <a:latin typeface="Cambria Math" panose="02040503050406030204" pitchFamily="18" charset="0"/>
-                              </a:rPr>
-                              <m:t>𝑚𝑎𝑥</m:t>
-                            </m:r>
-                          </m:e>
-                          <m:sub>
-                            <m:r>
-                              <a:rPr lang="ru-RU" sz="2400" i="1">
-                                <a:latin typeface="Cambria Math" panose="02040503050406030204" pitchFamily="18" charset="0"/>
-                              </a:rPr>
-                              <m:t>𝑗</m:t>
-                            </m:r>
-                          </m:sub>
-                        </m:sSub>
-                        <m:sSub>
-                          <m:sSubPr>
-                            <m:ctrlPr>
-                              <a:rPr lang="ru-RU" sz="2400" i="1">
-                                <a:latin typeface="Cambria Math" panose="02040503050406030204" pitchFamily="18" charset="0"/>
-                              </a:rPr>
-                            </m:ctrlPr>
-                          </m:sSubPr>
-                          <m:e>
-                            <m:r>
-                              <a:rPr lang="ru-RU" sz="2400" i="1">
-                                <a:latin typeface="Cambria Math" panose="02040503050406030204" pitchFamily="18" charset="0"/>
-                              </a:rPr>
-                              <m:t>𝑠𝑖𝑚</m:t>
-                            </m:r>
-                          </m:e>
-                          <m:sub>
-                            <m:r>
-                              <a:rPr lang="ru-RU" sz="2400" i="1">
-                                <a:latin typeface="Cambria Math" panose="02040503050406030204" pitchFamily="18" charset="0"/>
-                              </a:rPr>
-                              <m:t>𝑐𝑜𝑛𝑡𝑒𝑛𝑡</m:t>
-                            </m:r>
-                          </m:sub>
-                        </m:sSub>
-                        <m:r>
-                          <a:rPr lang="ru-RU" sz="2400">
-                            <a:latin typeface="Cambria Math" panose="02040503050406030204" pitchFamily="18" charset="0"/>
-                          </a:rPr>
-                          <m:t>​</m:t>
-                        </m:r>
-                        <m:d>
-                          <m:dPr>
-                            <m:ctrlPr>
-                              <a:rPr lang="ru-RU" sz="2400" i="1">
-                                <a:latin typeface="Cambria Math" panose="02040503050406030204" pitchFamily="18" charset="0"/>
-                              </a:rPr>
-                            </m:ctrlPr>
-                          </m:dPr>
-                          <m:e>
-                            <m:r>
-                              <a:rPr lang="ru-RU" sz="2400" i="1">
-                                <a:latin typeface="Cambria Math" panose="02040503050406030204" pitchFamily="18" charset="0"/>
-                              </a:rPr>
-                              <m:t>𝑗</m:t>
-                            </m:r>
-                            <m:r>
-                              <a:rPr lang="ru-RU" sz="2400">
-                                <a:latin typeface="Cambria Math" panose="02040503050406030204" pitchFamily="18" charset="0"/>
-                              </a:rPr>
-                              <m:t>,</m:t>
+                              <m:t>∩</m:t>
                             </m:r>
                             <m:sSub>
                               <m:sSubPr>
@@ -12427,7 +13680,7 @@
                                   <a:rPr lang="ru-RU" sz="2400" i="1">
                                     <a:latin typeface="Cambria Math" panose="02040503050406030204" pitchFamily="18" charset="0"/>
                                   </a:rPr>
-                                  <m:t>𝐿</m:t>
+                                  <m:t>𝑇</m:t>
                                 </m:r>
                               </m:e>
                               <m:sub>
@@ -12435,7 +13688,47 @@
                                   <a:rPr lang="ru-RU" sz="2400" i="1">
                                     <a:latin typeface="Cambria Math" panose="02040503050406030204" pitchFamily="18" charset="0"/>
                                   </a:rPr>
-                                  <m:t>𝑢</m:t>
+                                  <m:t>𝑗</m:t>
+                                </m:r>
+                              </m:sub>
+                            </m:sSub>
+                          </m:e>
+                        </m:d>
+                      </m:num>
+                      <m:den>
+                        <m:d>
+                          <m:dPr>
+                            <m:begChr m:val="|"/>
+                            <m:endChr m:val="|"/>
+                            <m:ctrlPr>
+                              <a:rPr lang="ru-RU" sz="2400" i="1">
+                                <a:latin typeface="Cambria Math" panose="02040503050406030204" pitchFamily="18" charset="0"/>
+                              </a:rPr>
+                            </m:ctrlPr>
+                          </m:dPr>
+                          <m:e>
+                            <m:sSub>
+                              <m:sSubPr>
+                                <m:ctrlPr>
+                                  <a:rPr lang="ru-RU" sz="2400" i="1">
+                                    <a:latin typeface="Cambria Math" panose="02040503050406030204" pitchFamily="18" charset="0"/>
+                                  </a:rPr>
+                                </m:ctrlPr>
+                              </m:sSubPr>
+                              <m:e>
+                                <m:r>
+                                  <a:rPr lang="ru-RU" sz="2400" i="1">
+                                    <a:latin typeface="Cambria Math" panose="02040503050406030204" pitchFamily="18" charset="0"/>
+                                  </a:rPr>
+                                  <m:t>𝑇</m:t>
+                                </m:r>
+                              </m:e>
+                              <m:sub>
+                                <m:r>
+                                  <a:rPr lang="ru-RU" sz="2400" i="1">
+                                    <a:latin typeface="Cambria Math" panose="02040503050406030204" pitchFamily="18" charset="0"/>
+                                  </a:rPr>
+                                  <m:t>𝑖</m:t>
                                 </m:r>
                               </m:sub>
                             </m:sSub>
@@ -12443,8 +13736,33 @@
                               <a:rPr lang="ru-RU" sz="2400">
                                 <a:latin typeface="Cambria Math" panose="02040503050406030204" pitchFamily="18" charset="0"/>
                               </a:rPr>
-                              <m:t>​</m:t>
+                              <m:t>∪</m:t>
                             </m:r>
+                            <m:sSub>
+                              <m:sSubPr>
+                                <m:ctrlPr>
+                                  <a:rPr lang="ru-RU" sz="2400" i="1">
+                                    <a:latin typeface="Cambria Math" panose="02040503050406030204" pitchFamily="18" charset="0"/>
+                                  </a:rPr>
+                                </m:ctrlPr>
+                              </m:sSubPr>
+                              <m:e>
+                                <m:r>
+                                  <a:rPr lang="ru-RU" sz="2400" i="1">
+                                    <a:latin typeface="Cambria Math" panose="02040503050406030204" pitchFamily="18" charset="0"/>
+                                  </a:rPr>
+                                  <m:t>𝑇</m:t>
+                                </m:r>
+                              </m:e>
+                              <m:sub>
+                                <m:r>
+                                  <a:rPr lang="ru-RU" sz="2400" i="1">
+                                    <a:latin typeface="Cambria Math" panose="02040503050406030204" pitchFamily="18" charset="0"/>
+                                  </a:rPr>
+                                  <m:t>𝑗</m:t>
+                                </m:r>
+                              </m:sub>
+                            </m:sSub>
                           </m:e>
                         </m:d>
                       </m:den>
@@ -12453,85 +13771,316 @@
                       <a:rPr lang="ru-RU" sz="2400">
                         <a:latin typeface="Cambria Math" panose="02040503050406030204" pitchFamily="18" charset="0"/>
                       </a:rPr>
-                      <m:t> ,</m:t>
+                      <m:t> </m:t>
                     </m:r>
                   </m:oMath>
                 </a14:m>
-                <a:endParaRPr lang="ru-RU" sz="2400" dirty="0"/>
-              </a:p>
-              <a:p>
                 <a:r>
                   <a:rPr lang="ru-RU" sz="2400" dirty="0"/>
-                  <a:t>где </a:t>
+                  <a:t>– коэффициент </a:t>
                 </a:r>
                 <a:r>
-                  <a:rPr lang="en-US" sz="2400" i="1" dirty="0"/>
-                  <a:t>α </a:t>
+                  <a:rPr lang="ru-RU" sz="2400" dirty="0" err="1"/>
+                  <a:t>Жаккара</a:t>
                 </a:r>
                 <a:r>
                   <a:rPr lang="ru-RU" sz="2400" dirty="0"/>
-                  <a:t>= 0.6 – коэффициент, определяющий вклад коллаборативной составляющей; </a:t>
+                  <a:t> для множества обнаруженных объектов;</a:t>
+                </a:r>
+              </a:p>
+              <a:p>
+                <a14:m>
+                  <m:oMath xmlns:m="http://schemas.openxmlformats.org/officeDocument/2006/math">
+                    <m:r>
+                      <a:rPr lang="ru-RU" sz="2400" i="1">
+                        <a:latin typeface="Cambria Math" panose="02040503050406030204" pitchFamily="18" charset="0"/>
+                      </a:rPr>
+                      <m:t>𝑐𝑜𝑙𝑜𝑟𝑠𝑖𝑚</m:t>
+                    </m:r>
+                    <m:d>
+                      <m:dPr>
+                        <m:ctrlPr>
+                          <a:rPr lang="ru-RU" sz="2400" i="1">
+                            <a:latin typeface="Cambria Math" panose="02040503050406030204" pitchFamily="18" charset="0"/>
+                          </a:rPr>
+                        </m:ctrlPr>
+                      </m:dPr>
+                      <m:e>
+                        <m:r>
+                          <a:rPr lang="ru-RU" sz="2400" i="1">
+                            <a:latin typeface="Cambria Math" panose="02040503050406030204" pitchFamily="18" charset="0"/>
+                          </a:rPr>
+                          <m:t>𝑖</m:t>
+                        </m:r>
+                        <m:r>
+                          <a:rPr lang="ru-RU" sz="2400">
+                            <a:latin typeface="Cambria Math" panose="02040503050406030204" pitchFamily="18" charset="0"/>
+                          </a:rPr>
+                          <m:t>,</m:t>
+                        </m:r>
+                        <m:r>
+                          <a:rPr lang="ru-RU" sz="2400" i="1">
+                            <a:latin typeface="Cambria Math" panose="02040503050406030204" pitchFamily="18" charset="0"/>
+                          </a:rPr>
+                          <m:t>𝑗</m:t>
+                        </m:r>
+                      </m:e>
+                    </m:d>
+                    <m:r>
+                      <a:rPr lang="ru-RU" sz="2400">
+                        <a:latin typeface="Cambria Math" panose="02040503050406030204" pitchFamily="18" charset="0"/>
+                      </a:rPr>
+                      <m:t>=1−</m:t>
+                    </m:r>
+                    <m:f>
+                      <m:fPr>
+                        <m:ctrlPr>
+                          <a:rPr lang="ru-RU" sz="2400" i="1">
+                            <a:latin typeface="Cambria Math" panose="02040503050406030204" pitchFamily="18" charset="0"/>
+                          </a:rPr>
+                        </m:ctrlPr>
+                      </m:fPr>
+                      <m:num>
+                        <m:d>
+                          <m:dPr>
+                            <m:begChr m:val="|"/>
+                            <m:endChr m:val="|"/>
+                            <m:ctrlPr>
+                              <a:rPr lang="ru-RU" sz="2400" i="1">
+                                <a:latin typeface="Cambria Math" panose="02040503050406030204" pitchFamily="18" charset="0"/>
+                              </a:rPr>
+                            </m:ctrlPr>
+                          </m:dPr>
+                          <m:e>
+                            <m:sSub>
+                              <m:sSubPr>
+                                <m:ctrlPr>
+                                  <a:rPr lang="ru-RU" sz="2400">
+                                    <a:latin typeface="Cambria Math" panose="02040503050406030204" pitchFamily="18" charset="0"/>
+                                  </a:rPr>
+                                </m:ctrlPr>
+                              </m:sSubPr>
+                              <m:e>
+                                <m:r>
+                                  <a:rPr lang="ru-RU" sz="2400">
+                                    <a:latin typeface="Cambria Math" panose="02040503050406030204" pitchFamily="18" charset="0"/>
+                                  </a:rPr>
+                                  <m:t>ℛ</m:t>
+                                </m:r>
+                              </m:e>
+                              <m:sub>
+                                <m:r>
+                                  <a:rPr lang="ru-RU" sz="2400" i="1">
+                                    <a:latin typeface="Cambria Math" panose="02040503050406030204" pitchFamily="18" charset="0"/>
+                                  </a:rPr>
+                                  <m:t>𝑖</m:t>
+                                </m:r>
+                              </m:sub>
+                            </m:sSub>
+                            <m:sSub>
+                              <m:sSubPr>
+                                <m:ctrlPr>
+                                  <a:rPr lang="ru-RU" sz="2400">
+                                    <a:latin typeface="Cambria Math" panose="02040503050406030204" pitchFamily="18" charset="0"/>
+                                  </a:rPr>
+                                </m:ctrlPr>
+                              </m:sSubPr>
+                              <m:e>
+                                <m:r>
+                                  <a:rPr lang="ru-RU" sz="2400">
+                                    <a:latin typeface="Cambria Math" panose="02040503050406030204" pitchFamily="18" charset="0"/>
+                                  </a:rPr>
+                                  <m:t>−</m:t>
+                                </m:r>
+                                <m:r>
+                                  <a:rPr lang="ru-RU" sz="2400">
+                                    <a:latin typeface="Cambria Math" panose="02040503050406030204" pitchFamily="18" charset="0"/>
+                                  </a:rPr>
+                                  <m:t>ℛ</m:t>
+                                </m:r>
+                              </m:e>
+                              <m:sub>
+                                <m:r>
+                                  <a:rPr lang="ru-RU" sz="2400" i="1">
+                                    <a:latin typeface="Cambria Math" panose="02040503050406030204" pitchFamily="18" charset="0"/>
+                                  </a:rPr>
+                                  <m:t>𝑗</m:t>
+                                </m:r>
+                              </m:sub>
+                            </m:sSub>
+                          </m:e>
+                        </m:d>
+                        <m:r>
+                          <a:rPr lang="ru-RU" sz="2400">
+                            <a:latin typeface="Cambria Math" panose="02040503050406030204" pitchFamily="18" charset="0"/>
+                          </a:rPr>
+                          <m:t>+</m:t>
+                        </m:r>
+                        <m:d>
+                          <m:dPr>
+                            <m:begChr m:val="|"/>
+                            <m:endChr m:val="|"/>
+                            <m:ctrlPr>
+                              <a:rPr lang="ru-RU" sz="2400" i="1">
+                                <a:latin typeface="Cambria Math" panose="02040503050406030204" pitchFamily="18" charset="0"/>
+                              </a:rPr>
+                            </m:ctrlPr>
+                          </m:dPr>
+                          <m:e>
+                            <m:sSub>
+                              <m:sSubPr>
+                                <m:ctrlPr>
+                                  <a:rPr lang="ru-RU" sz="2400">
+                                    <a:latin typeface="Cambria Math" panose="02040503050406030204" pitchFamily="18" charset="0"/>
+                                  </a:rPr>
+                                </m:ctrlPr>
+                              </m:sSubPr>
+                              <m:e>
+                                <m:r>
+                                  <a:rPr lang="ru-RU" sz="2400">
+                                    <a:latin typeface="Cambria Math" panose="02040503050406030204" pitchFamily="18" charset="0"/>
+                                  </a:rPr>
+                                  <m:t>𝒢</m:t>
+                                </m:r>
+                              </m:e>
+                              <m:sub>
+                                <m:r>
+                                  <a:rPr lang="ru-RU" sz="2400" i="1">
+                                    <a:latin typeface="Cambria Math" panose="02040503050406030204" pitchFamily="18" charset="0"/>
+                                  </a:rPr>
+                                  <m:t>𝑖</m:t>
+                                </m:r>
+                              </m:sub>
+                            </m:sSub>
+                            <m:sSub>
+                              <m:sSubPr>
+                                <m:ctrlPr>
+                                  <a:rPr lang="ru-RU" sz="2400">
+                                    <a:latin typeface="Cambria Math" panose="02040503050406030204" pitchFamily="18" charset="0"/>
+                                  </a:rPr>
+                                </m:ctrlPr>
+                              </m:sSubPr>
+                              <m:e>
+                                <m:r>
+                                  <a:rPr lang="ru-RU" sz="2400">
+                                    <a:latin typeface="Cambria Math" panose="02040503050406030204" pitchFamily="18" charset="0"/>
+                                  </a:rPr>
+                                  <m:t>−</m:t>
+                                </m:r>
+                                <m:r>
+                                  <a:rPr lang="ru-RU" sz="2400">
+                                    <a:latin typeface="Cambria Math" panose="02040503050406030204" pitchFamily="18" charset="0"/>
+                                  </a:rPr>
+                                  <m:t>𝒢</m:t>
+                                </m:r>
+                              </m:e>
+                              <m:sub>
+                                <m:r>
+                                  <a:rPr lang="ru-RU" sz="2400" i="1">
+                                    <a:latin typeface="Cambria Math" panose="02040503050406030204" pitchFamily="18" charset="0"/>
+                                  </a:rPr>
+                                  <m:t>𝑗</m:t>
+                                </m:r>
+                              </m:sub>
+                            </m:sSub>
+                          </m:e>
+                        </m:d>
+                        <m:r>
+                          <a:rPr lang="ru-RU" sz="2400">
+                            <a:latin typeface="Cambria Math" panose="02040503050406030204" pitchFamily="18" charset="0"/>
+                          </a:rPr>
+                          <m:t>+ </m:t>
+                        </m:r>
+                        <m:d>
+                          <m:dPr>
+                            <m:begChr m:val="|"/>
+                            <m:endChr m:val="|"/>
+                            <m:ctrlPr>
+                              <a:rPr lang="ru-RU" sz="2400" i="1">
+                                <a:latin typeface="Cambria Math" panose="02040503050406030204" pitchFamily="18" charset="0"/>
+                              </a:rPr>
+                            </m:ctrlPr>
+                          </m:dPr>
+                          <m:e>
+                            <m:sSub>
+                              <m:sSubPr>
+                                <m:ctrlPr>
+                                  <a:rPr lang="ru-RU" sz="2400">
+                                    <a:latin typeface="Cambria Math" panose="02040503050406030204" pitchFamily="18" charset="0"/>
+                                  </a:rPr>
+                                </m:ctrlPr>
+                              </m:sSubPr>
+                              <m:e>
+                                <m:r>
+                                  <a:rPr lang="ru-RU" sz="2400">
+                                    <a:latin typeface="Cambria Math" panose="02040503050406030204" pitchFamily="18" charset="0"/>
+                                  </a:rPr>
+                                  <m:t>ℬ</m:t>
+                                </m:r>
+                              </m:e>
+                              <m:sub>
+                                <m:r>
+                                  <a:rPr lang="ru-RU" sz="2400" i="1">
+                                    <a:latin typeface="Cambria Math" panose="02040503050406030204" pitchFamily="18" charset="0"/>
+                                  </a:rPr>
+                                  <m:t>𝑖</m:t>
+                                </m:r>
+                              </m:sub>
+                            </m:sSub>
+                            <m:sSub>
+                              <m:sSubPr>
+                                <m:ctrlPr>
+                                  <a:rPr lang="ru-RU" sz="2400">
+                                    <a:latin typeface="Cambria Math" panose="02040503050406030204" pitchFamily="18" charset="0"/>
+                                  </a:rPr>
+                                </m:ctrlPr>
+                              </m:sSubPr>
+                              <m:e>
+                                <m:r>
+                                  <a:rPr lang="ru-RU" sz="2400">
+                                    <a:latin typeface="Cambria Math" panose="02040503050406030204" pitchFamily="18" charset="0"/>
+                                  </a:rPr>
+                                  <m:t>−</m:t>
+                                </m:r>
+                                <m:r>
+                                  <a:rPr lang="ru-RU" sz="2400">
+                                    <a:latin typeface="Cambria Math" panose="02040503050406030204" pitchFamily="18" charset="0"/>
+                                  </a:rPr>
+                                  <m:t>ℬ</m:t>
+                                </m:r>
+                              </m:e>
+                              <m:sub>
+                                <m:r>
+                                  <a:rPr lang="ru-RU" sz="2400" i="1">
+                                    <a:latin typeface="Cambria Math" panose="02040503050406030204" pitchFamily="18" charset="0"/>
+                                  </a:rPr>
+                                  <m:t>𝑗</m:t>
+                                </m:r>
+                              </m:sub>
+                            </m:sSub>
+                          </m:e>
+                        </m:d>
+                      </m:num>
+                      <m:den>
+                        <m:r>
+                          <a:rPr lang="ru-RU" sz="2400">
+                            <a:latin typeface="Cambria Math" panose="02040503050406030204" pitchFamily="18" charset="0"/>
+                          </a:rPr>
+                          <m:t>3∗255</m:t>
+                        </m:r>
+                      </m:den>
+                    </m:f>
+                  </m:oMath>
+                </a14:m>
+                <a:r>
+                  <a:rPr lang="ru-RU" sz="2400" dirty="0"/>
+                  <a:t> – нормализованное сходство средних цветов.</a:t>
                 </a:r>
               </a:p>
               <a:p>
                 <a:r>
-                  <a:rPr lang="ru-RU" sz="2400" dirty="0" err="1"/>
-                  <a:t>r</a:t>
-                </a:r>
-                <a:r>
-                  <a:rPr lang="ru-RU" sz="2400" baseline="-25000" dirty="0" err="1"/>
-                  <a:t>ui</a:t>
-                </a:r>
-                <a:r>
-                  <a:rPr lang="ru-RU" sz="2400" baseline="-25000" dirty="0"/>
-                  <a:t> </a:t>
-                </a:r>
-                <a:r>
-                  <a:rPr lang="ru-RU" sz="2400" dirty="0"/>
-                  <a:t>– предсказанный </a:t>
-                </a:r>
-                <a:r>
-                  <a:rPr lang="en-US" sz="2400" dirty="0"/>
-                  <a:t>SVD</a:t>
-                </a:r>
-                <a:r>
-                  <a:rPr lang="ru-RU" sz="2400" dirty="0"/>
-                  <a:t>-рейтинг;</a:t>
-                </a:r>
-                <a:r>
-                  <a:rPr lang="ru-RU" sz="2400" baseline="-25000" dirty="0"/>
-                  <a:t> </a:t>
-                </a:r>
-                <a:endParaRPr lang="ru-RU" sz="2400" dirty="0"/>
-              </a:p>
-              <a:p>
-                <a:r>
-                  <a:rPr lang="en-US" sz="2400" baseline="-25000" dirty="0"/>
-                  <a:t>­</a:t>
-                </a:r>
-                <a:r>
                   <a:rPr lang="en-US" sz="2400" dirty="0" err="1"/>
-                  <a:t>sim</a:t>
-                </a:r>
-                <a:r>
-                  <a:rPr lang="en-US" sz="2400" baseline="-25000" dirty="0" err="1"/>
-                  <a:t>content</a:t>
-                </a:r>
-                <a:r>
-                  <a:rPr lang="en-US" sz="2400" dirty="0"/>
-                  <a:t>(</a:t>
-                </a:r>
-                <a:r>
-                  <a:rPr lang="en-US" sz="2400" dirty="0" err="1"/>
-                  <a:t>i</a:t>
-                </a:r>
-                <a:r>
-                  <a:rPr lang="en-US" sz="2400" dirty="0"/>
-                  <a:t>, L) – </a:t>
-                </a:r>
-                <a:r>
-                  <a:rPr lang="en-US" sz="2400" dirty="0" err="1"/>
-                  <a:t>максимальное</a:t>
+                  <a:t>Весовые</a:t>
                 </a:r>
                 <a:r>
                   <a:rPr lang="en-US" sz="2400" dirty="0"/>
@@ -12539,7 +14088,7 @@
                 </a:r>
                 <a:r>
                   <a:rPr lang="en-US" sz="2400" dirty="0" err="1"/>
-                  <a:t>косинусное</a:t>
+                  <a:t>коэффициенты</a:t>
                 </a:r>
                 <a:r>
                   <a:rPr lang="en-US" sz="2400" dirty="0"/>
@@ -12547,7 +14096,7 @@
                 </a:r>
                 <a:r>
                   <a:rPr lang="en-US" sz="2400" dirty="0" err="1"/>
-                  <a:t>сходство</a:t>
+                  <a:t>подобраны</a:t>
                 </a:r>
                 <a:r>
                   <a:rPr lang="en-US" sz="2400" dirty="0"/>
@@ -12555,80 +14104,82 @@
                 </a:r>
                 <a:r>
                   <a:rPr lang="en-US" sz="2400" dirty="0" err="1"/>
-                  <a:t>работы</a:t>
+                  <a:t>экспертно</a:t>
                 </a:r>
                 <a:r>
                   <a:rPr lang="en-US" sz="2400" dirty="0"/>
-                  <a:t> I с </a:t>
+                  <a:t>: w</a:t>
                 </a:r>
                 <a:r>
-                  <a:rPr lang="en-US" sz="2400" dirty="0" err="1"/>
-                  <a:t>работами</a:t>
+                  <a:rPr lang="en-US" sz="2400" baseline="-25000" dirty="0"/>
+                  <a:t>1</a:t>
                 </a:r>
                 <a:r>
                   <a:rPr lang="en-US" sz="2400" dirty="0"/>
-                  <a:t>, </a:t>
+                  <a:t> = 0</a:t>
                 </a:r>
                 <a:r>
-                  <a:rPr lang="en-US" sz="2400" dirty="0" err="1"/>
-                  <a:t>которые</a:t>
+                  <a:rPr lang="ru-RU" sz="2400" dirty="0"/>
+                  <a:t>,</a:t>
                 </a:r>
                 <a:r>
                   <a:rPr lang="en-US" sz="2400" dirty="0"/>
-                  <a:t> </a:t>
+                  <a:t>5, w</a:t>
                 </a:r>
                 <a:r>
-                  <a:rPr lang="en-US" sz="2400" dirty="0" err="1"/>
-                  <a:t>пользователь</a:t>
+                  <a:rPr lang="en-US" sz="2400" baseline="-25000" dirty="0"/>
+                  <a:t>2</a:t>
                 </a:r>
                 <a:r>
                   <a:rPr lang="en-US" sz="2400" dirty="0"/>
-                  <a:t> </a:t>
+                  <a:t> = 0</a:t>
                 </a:r>
                 <a:r>
-                  <a:rPr lang="en-US" sz="2400" dirty="0" err="1"/>
-                  <a:t>ранее</a:t>
+                  <a:rPr lang="ru-RU" sz="2400" dirty="0"/>
+                  <a:t>,</a:t>
                 </a:r>
                 <a:r>
                   <a:rPr lang="en-US" sz="2400" dirty="0"/>
-                  <a:t> </a:t>
+                  <a:t>3, w</a:t>
                 </a:r>
                 <a:r>
-                  <a:rPr lang="en-US" sz="2400" dirty="0" err="1"/>
-                  <a:t>лайкнул</a:t>
+                  <a:rPr lang="en-US" sz="2400" baseline="-25000" dirty="0"/>
+                  <a:t>3</a:t>
                 </a:r>
                 <a:r>
                   <a:rPr lang="en-US" sz="2400" dirty="0"/>
-                  <a:t> (</a:t>
+                  <a:t> = 0</a:t>
                 </a:r>
                 <a:r>
-                  <a:rPr lang="en-US" sz="2400" dirty="0" err="1"/>
-                  <a:t>множество</a:t>
+                  <a:rPr lang="ru-RU" sz="2400" dirty="0"/>
+                  <a:t>,</a:t>
                 </a:r>
                 <a:r>
                   <a:rPr lang="en-US" sz="2400" dirty="0"/>
-                  <a:t> L</a:t>
+                  <a:t>2.</a:t>
                 </a:r>
-                <a:r>
-                  <a:rPr lang="en-US" sz="2400" baseline="-25000" dirty="0"/>
-                  <a:t>u</a:t>
-                </a:r>
-                <a:r>
-                  <a:rPr lang="en-US" sz="2400" dirty="0"/>
-                  <a:t>).</a:t>
-                </a:r>
-                <a:endParaRPr lang="ru-RU" sz="2400" dirty="0"/>
+                <a:endParaRPr lang="ru-RU" sz="2400" dirty="0">
+                  <a:solidFill>
+                    <a:schemeClr val="tx1">
+                      <a:lumMod val="85000"/>
+                      <a:lumOff val="15000"/>
+                    </a:schemeClr>
+                  </a:solidFill>
+                </a:endParaRPr>
+              </a:p>
+              <a:p>
+                <a:endParaRPr lang="ru-RU" dirty="0"/>
               </a:p>
             </p:txBody>
           </p:sp>
         </mc:Choice>
-        <mc:Fallback xmlns="">
+        <mc:Fallback>
           <p:sp>
             <p:nvSpPr>
-              <p:cNvPr id="7" name="Объект 6">
+              <p:cNvPr id="2" name="Объект 1">
                 <a:extLst>
                   <a:ext uri="{FF2B5EF4-FFF2-40B4-BE49-F238E27FC236}">
-                    <a16:creationId xmlns:a16="http://schemas.microsoft.com/office/drawing/2014/main" id="{F5AF4E61-ADA4-794C-D135-81A04610AD07}"/>
+                    <a16:creationId xmlns:a16="http://schemas.microsoft.com/office/drawing/2014/main" id="{6EEF907E-E10F-DC36-625A-BEEFF3AD39F0}"/>
                   </a:ext>
                 </a:extLst>
               </p:cNvPr>
@@ -12636,14 +14187,18 @@
                 <a:spLocks noGrp="1" noRot="1" noChangeAspect="1" noMove="1" noResize="1" noEditPoints="1" noAdjustHandles="1" noChangeArrowheads="1" noChangeShapeType="1" noTextEdit="1"/>
               </p:cNvSpPr>
               <p:nvPr>
-                <p:ph idx="1"/>
+                <p:ph sz="half" idx="2"/>
               </p:nvPr>
             </p:nvSpPr>
             <p:spPr>
+              <a:xfrm>
+                <a:off x="6217920" y="1845735"/>
+                <a:ext cx="5445162" cy="4023360"/>
+              </a:xfrm>
               <a:blipFill>
-                <a:blip r:embed="rId2"/>
+                <a:blip r:embed="rId3"/>
                 <a:stretch>
-                  <a:fillRect l="-909"/>
+                  <a:fillRect l="-1120" t="-2879" r="-1232"/>
                 </a:stretch>
               </a:blipFill>
             </p:spPr>
@@ -15388,7 +16943,7 @@
                 <a:ea typeface="+mn-ea"/>
                 <a:cs typeface="+mn-cs"/>
               </a:rPr>
-              <a:t>Разработать алгоритм гибридных рекомендаций, </a:t>
+              <a:t>Разработать алгоритм гибридных рекомендаций. </a:t>
             </a:r>
           </a:p>
           <a:p>
